--- a/Switching Function - Reduced CMV PWM/Access-paper/dvdt.2.pptx
+++ b/Switching Function - Reduced CMV PWM/Access-paper/dvdt.2.pptx
@@ -5,7 +5,7 @@
     <p:sldMasterId id="2147483648" r:id="rId1"/>
   </p:sldMasterIdLst>
   <p:notesMasterIdLst>
-    <p:notesMasterId r:id="rId22"/>
+    <p:notesMasterId r:id="rId28"/>
   </p:notesMasterIdLst>
   <p:sldIdLst>
     <p:sldId id="256" r:id="rId2"/>
@@ -14,20 +14,26 @@
     <p:sldId id="257" r:id="rId5"/>
     <p:sldId id="274" r:id="rId6"/>
     <p:sldId id="277" r:id="rId7"/>
-    <p:sldId id="262" r:id="rId8"/>
-    <p:sldId id="260" r:id="rId9"/>
-    <p:sldId id="275" r:id="rId10"/>
-    <p:sldId id="276" r:id="rId11"/>
-    <p:sldId id="259" r:id="rId12"/>
-    <p:sldId id="263" r:id="rId13"/>
-    <p:sldId id="279" r:id="rId14"/>
-    <p:sldId id="264" r:id="rId15"/>
-    <p:sldId id="265" r:id="rId16"/>
-    <p:sldId id="267" r:id="rId17"/>
-    <p:sldId id="269" r:id="rId18"/>
-    <p:sldId id="270" r:id="rId19"/>
-    <p:sldId id="271" r:id="rId20"/>
-    <p:sldId id="272" r:id="rId21"/>
+    <p:sldId id="282" r:id="rId8"/>
+    <p:sldId id="262" r:id="rId9"/>
+    <p:sldId id="260" r:id="rId10"/>
+    <p:sldId id="275" r:id="rId11"/>
+    <p:sldId id="276" r:id="rId12"/>
+    <p:sldId id="283" r:id="rId13"/>
+    <p:sldId id="259" r:id="rId14"/>
+    <p:sldId id="263" r:id="rId15"/>
+    <p:sldId id="279" r:id="rId16"/>
+    <p:sldId id="284" r:id="rId17"/>
+    <p:sldId id="280" r:id="rId18"/>
+    <p:sldId id="281" r:id="rId19"/>
+    <p:sldId id="264" r:id="rId20"/>
+    <p:sldId id="265" r:id="rId21"/>
+    <p:sldId id="267" r:id="rId22"/>
+    <p:sldId id="269" r:id="rId23"/>
+    <p:sldId id="285" r:id="rId24"/>
+    <p:sldId id="270" r:id="rId25"/>
+    <p:sldId id="271" r:id="rId26"/>
+    <p:sldId id="272" r:id="rId27"/>
   </p:sldIdLst>
   <p:sldSz cx="12192000" cy="6858000"/>
   <p:notesSz cx="6858000" cy="9144000"/>
@@ -216,7 +222,7 @@
           <a:p>
             <a:fld id="{C51242EF-9523-44CC-A9D6-8A54B75E8B6F}" type="datetimeFigureOut">
               <a:rPr lang="sv-SE" smtClean="0"/>
-              <a:t>2024-10-01</a:t>
+              <a:t>2024-10-02</a:t>
             </a:fld>
             <a:endParaRPr lang="sv-SE"/>
           </a:p>
@@ -568,6 +574,90 @@
 </p:notes>
 </file>
 
+<file path=ppt/notesSlides/notesSlide10.xml><?xml version="1.0" encoding="utf-8"?>
+<p:notes xmlns:a="http://schemas.openxmlformats.org/drawingml/2006/main" xmlns:r="http://schemas.openxmlformats.org/officeDocument/2006/relationships" xmlns:p="http://schemas.openxmlformats.org/presentationml/2006/main">
+  <p:cSld>
+    <p:spTree>
+      <p:nvGrpSpPr>
+        <p:cNvPr id="1" name=""/>
+        <p:cNvGrpSpPr/>
+        <p:nvPr/>
+      </p:nvGrpSpPr>
+      <p:grpSpPr>
+        <a:xfrm>
+          <a:off x="0" y="0"/>
+          <a:ext cx="0" cy="0"/>
+          <a:chOff x="0" y="0"/>
+          <a:chExt cx="0" cy="0"/>
+        </a:xfrm>
+      </p:grpSpPr>
+      <p:sp>
+        <p:nvSpPr>
+          <p:cNvPr id="2" name="Slide Image Placeholder 1"/>
+          <p:cNvSpPr>
+            <a:spLocks noGrp="1" noRot="1" noChangeAspect="1"/>
+          </p:cNvSpPr>
+          <p:nvPr>
+            <p:ph type="sldImg"/>
+          </p:nvPr>
+        </p:nvSpPr>
+        <p:spPr/>
+      </p:sp>
+      <p:sp>
+        <p:nvSpPr>
+          <p:cNvPr id="3" name="Notes Placeholder 2"/>
+          <p:cNvSpPr>
+            <a:spLocks noGrp="1"/>
+          </p:cNvSpPr>
+          <p:nvPr>
+            <p:ph type="body" idx="1"/>
+          </p:nvPr>
+        </p:nvSpPr>
+        <p:spPr/>
+        <p:txBody>
+          <a:bodyPr/>
+          <a:lstStyle/>
+          <a:p>
+            <a:endParaRPr lang="sv-SE" dirty="0"/>
+          </a:p>
+        </p:txBody>
+      </p:sp>
+      <p:sp>
+        <p:nvSpPr>
+          <p:cNvPr id="4" name="Slide Number Placeholder 3"/>
+          <p:cNvSpPr>
+            <a:spLocks noGrp="1"/>
+          </p:cNvSpPr>
+          <p:nvPr>
+            <p:ph type="sldNum" sz="quarter" idx="10"/>
+          </p:nvPr>
+        </p:nvSpPr>
+        <p:spPr/>
+        <p:txBody>
+          <a:bodyPr/>
+          <a:lstStyle/>
+          <a:p>
+            <a:fld id="{A07A3E73-AB6F-473D-8A0C-3F8FACBF84DC}" type="slidenum">
+              <a:rPr lang="sv-SE" smtClean="0"/>
+              <a:t>26</a:t>
+            </a:fld>
+            <a:endParaRPr lang="sv-SE"/>
+          </a:p>
+        </p:txBody>
+      </p:sp>
+    </p:spTree>
+    <p:extLst>
+      <p:ext uri="{BB962C8B-B14F-4D97-AF65-F5344CB8AC3E}">
+        <p14:creationId xmlns:p14="http://schemas.microsoft.com/office/powerpoint/2010/main" val="2741041232"/>
+      </p:ext>
+    </p:extLst>
+  </p:cSld>
+  <p:clrMapOvr>
+    <a:masterClrMapping/>
+  </p:clrMapOvr>
+</p:notes>
+</file>
+
 <file path=ppt/notesSlides/notesSlide2.xml><?xml version="1.0" encoding="utf-8"?>
 <p:notes xmlns:a="http://schemas.openxmlformats.org/drawingml/2006/main" xmlns:r="http://schemas.openxmlformats.org/officeDocument/2006/relationships" xmlns:p="http://schemas.openxmlformats.org/presentationml/2006/main">
   <p:cSld>
@@ -717,7 +807,7 @@
           <a:p>
             <a:fld id="{A07A3E73-AB6F-473D-8A0C-3F8FACBF84DC}" type="slidenum">
               <a:rPr lang="sv-SE" smtClean="0"/>
-              <a:t>11</a:t>
+              <a:t>13</a:t>
             </a:fld>
             <a:endParaRPr lang="sv-SE"/>
           </a:p>
@@ -801,7 +891,7 @@
           <a:p>
             <a:fld id="{A07A3E73-AB6F-473D-8A0C-3F8FACBF84DC}" type="slidenum">
               <a:rPr lang="sv-SE" smtClean="0"/>
-              <a:t>12</a:t>
+              <a:t>14</a:t>
             </a:fld>
             <a:endParaRPr lang="sv-SE"/>
           </a:p>
@@ -885,7 +975,7 @@
           <a:p>
             <a:fld id="{A07A3E73-AB6F-473D-8A0C-3F8FACBF84DC}" type="slidenum">
               <a:rPr lang="sv-SE" smtClean="0"/>
-              <a:t>13</a:t>
+              <a:t>15</a:t>
             </a:fld>
             <a:endParaRPr lang="sv-SE"/>
           </a:p>
@@ -969,7 +1059,7 @@
           <a:p>
             <a:fld id="{A07A3E73-AB6F-473D-8A0C-3F8FACBF84DC}" type="slidenum">
               <a:rPr lang="sv-SE" smtClean="0"/>
-              <a:t>15</a:t>
+              <a:t>16</a:t>
             </a:fld>
             <a:endParaRPr lang="sv-SE"/>
           </a:p>
@@ -978,7 +1068,7 @@
     </p:spTree>
     <p:extLst>
       <p:ext uri="{BB962C8B-B14F-4D97-AF65-F5344CB8AC3E}">
-        <p14:creationId xmlns:p14="http://schemas.microsoft.com/office/powerpoint/2010/main" val="1217811430"/>
+        <p14:creationId xmlns:p14="http://schemas.microsoft.com/office/powerpoint/2010/main" val="3639428143"/>
       </p:ext>
     </p:extLst>
   </p:cSld>
@@ -1053,7 +1143,7 @@
           <a:p>
             <a:fld id="{A07A3E73-AB6F-473D-8A0C-3F8FACBF84DC}" type="slidenum">
               <a:rPr lang="sv-SE" smtClean="0"/>
-              <a:t>20</a:t>
+              <a:t>17</a:t>
             </a:fld>
             <a:endParaRPr lang="sv-SE"/>
           </a:p>
@@ -1062,7 +1152,175 @@
     </p:spTree>
     <p:extLst>
       <p:ext uri="{BB962C8B-B14F-4D97-AF65-F5344CB8AC3E}">
-        <p14:creationId xmlns:p14="http://schemas.microsoft.com/office/powerpoint/2010/main" val="2741041232"/>
+        <p14:creationId xmlns:p14="http://schemas.microsoft.com/office/powerpoint/2010/main" val="3012612983"/>
+      </p:ext>
+    </p:extLst>
+  </p:cSld>
+  <p:clrMapOvr>
+    <a:masterClrMapping/>
+  </p:clrMapOvr>
+</p:notes>
+</file>
+
+<file path=ppt/notesSlides/notesSlide8.xml><?xml version="1.0" encoding="utf-8"?>
+<p:notes xmlns:a="http://schemas.openxmlformats.org/drawingml/2006/main" xmlns:r="http://schemas.openxmlformats.org/officeDocument/2006/relationships" xmlns:p="http://schemas.openxmlformats.org/presentationml/2006/main">
+  <p:cSld>
+    <p:spTree>
+      <p:nvGrpSpPr>
+        <p:cNvPr id="1" name=""/>
+        <p:cNvGrpSpPr/>
+        <p:nvPr/>
+      </p:nvGrpSpPr>
+      <p:grpSpPr>
+        <a:xfrm>
+          <a:off x="0" y="0"/>
+          <a:ext cx="0" cy="0"/>
+          <a:chOff x="0" y="0"/>
+          <a:chExt cx="0" cy="0"/>
+        </a:xfrm>
+      </p:grpSpPr>
+      <p:sp>
+        <p:nvSpPr>
+          <p:cNvPr id="2" name="Slide Image Placeholder 1"/>
+          <p:cNvSpPr>
+            <a:spLocks noGrp="1" noRot="1" noChangeAspect="1"/>
+          </p:cNvSpPr>
+          <p:nvPr>
+            <p:ph type="sldImg"/>
+          </p:nvPr>
+        </p:nvSpPr>
+        <p:spPr/>
+      </p:sp>
+      <p:sp>
+        <p:nvSpPr>
+          <p:cNvPr id="3" name="Notes Placeholder 2"/>
+          <p:cNvSpPr>
+            <a:spLocks noGrp="1"/>
+          </p:cNvSpPr>
+          <p:nvPr>
+            <p:ph type="body" idx="1"/>
+          </p:nvPr>
+        </p:nvSpPr>
+        <p:spPr/>
+        <p:txBody>
+          <a:bodyPr/>
+          <a:lstStyle/>
+          <a:p>
+            <a:endParaRPr lang="sv-SE" dirty="0"/>
+          </a:p>
+        </p:txBody>
+      </p:sp>
+      <p:sp>
+        <p:nvSpPr>
+          <p:cNvPr id="4" name="Slide Number Placeholder 3"/>
+          <p:cNvSpPr>
+            <a:spLocks noGrp="1"/>
+          </p:cNvSpPr>
+          <p:nvPr>
+            <p:ph type="sldNum" sz="quarter" idx="10"/>
+          </p:nvPr>
+        </p:nvSpPr>
+        <p:spPr/>
+        <p:txBody>
+          <a:bodyPr/>
+          <a:lstStyle/>
+          <a:p>
+            <a:fld id="{A07A3E73-AB6F-473D-8A0C-3F8FACBF84DC}" type="slidenum">
+              <a:rPr lang="sv-SE" smtClean="0"/>
+              <a:t>18</a:t>
+            </a:fld>
+            <a:endParaRPr lang="sv-SE"/>
+          </a:p>
+        </p:txBody>
+      </p:sp>
+    </p:spTree>
+    <p:extLst>
+      <p:ext uri="{BB962C8B-B14F-4D97-AF65-F5344CB8AC3E}">
+        <p14:creationId xmlns:p14="http://schemas.microsoft.com/office/powerpoint/2010/main" val="958955456"/>
+      </p:ext>
+    </p:extLst>
+  </p:cSld>
+  <p:clrMapOvr>
+    <a:masterClrMapping/>
+  </p:clrMapOvr>
+</p:notes>
+</file>
+
+<file path=ppt/notesSlides/notesSlide9.xml><?xml version="1.0" encoding="utf-8"?>
+<p:notes xmlns:a="http://schemas.openxmlformats.org/drawingml/2006/main" xmlns:r="http://schemas.openxmlformats.org/officeDocument/2006/relationships" xmlns:p="http://schemas.openxmlformats.org/presentationml/2006/main">
+  <p:cSld>
+    <p:spTree>
+      <p:nvGrpSpPr>
+        <p:cNvPr id="1" name=""/>
+        <p:cNvGrpSpPr/>
+        <p:nvPr/>
+      </p:nvGrpSpPr>
+      <p:grpSpPr>
+        <a:xfrm>
+          <a:off x="0" y="0"/>
+          <a:ext cx="0" cy="0"/>
+          <a:chOff x="0" y="0"/>
+          <a:chExt cx="0" cy="0"/>
+        </a:xfrm>
+      </p:grpSpPr>
+      <p:sp>
+        <p:nvSpPr>
+          <p:cNvPr id="2" name="Slide Image Placeholder 1"/>
+          <p:cNvSpPr>
+            <a:spLocks noGrp="1" noRot="1" noChangeAspect="1"/>
+          </p:cNvSpPr>
+          <p:nvPr>
+            <p:ph type="sldImg"/>
+          </p:nvPr>
+        </p:nvSpPr>
+        <p:spPr/>
+      </p:sp>
+      <p:sp>
+        <p:nvSpPr>
+          <p:cNvPr id="3" name="Notes Placeholder 2"/>
+          <p:cNvSpPr>
+            <a:spLocks noGrp="1"/>
+          </p:cNvSpPr>
+          <p:nvPr>
+            <p:ph type="body" idx="1"/>
+          </p:nvPr>
+        </p:nvSpPr>
+        <p:spPr/>
+        <p:txBody>
+          <a:bodyPr/>
+          <a:lstStyle/>
+          <a:p>
+            <a:endParaRPr lang="sv-SE" dirty="0"/>
+          </a:p>
+        </p:txBody>
+      </p:sp>
+      <p:sp>
+        <p:nvSpPr>
+          <p:cNvPr id="4" name="Slide Number Placeholder 3"/>
+          <p:cNvSpPr>
+            <a:spLocks noGrp="1"/>
+          </p:cNvSpPr>
+          <p:nvPr>
+            <p:ph type="sldNum" sz="quarter" idx="10"/>
+          </p:nvPr>
+        </p:nvSpPr>
+        <p:spPr/>
+        <p:txBody>
+          <a:bodyPr/>
+          <a:lstStyle/>
+          <a:p>
+            <a:fld id="{A07A3E73-AB6F-473D-8A0C-3F8FACBF84DC}" type="slidenum">
+              <a:rPr lang="sv-SE" smtClean="0"/>
+              <a:t>20</a:t>
+            </a:fld>
+            <a:endParaRPr lang="sv-SE"/>
+          </a:p>
+        </p:txBody>
+      </p:sp>
+    </p:spTree>
+    <p:extLst>
+      <p:ext uri="{BB962C8B-B14F-4D97-AF65-F5344CB8AC3E}">
+        <p14:creationId xmlns:p14="http://schemas.microsoft.com/office/powerpoint/2010/main" val="1217811430"/>
       </p:ext>
     </p:extLst>
   </p:cSld>
@@ -1203,7 +1461,7 @@
           <a:p>
             <a:fld id="{DCB46C5C-7B3C-46DF-B479-A650EF2753E0}" type="datetimeFigureOut">
               <a:rPr lang="sv-SE" smtClean="0"/>
-              <a:t>2024-10-01</a:t>
+              <a:t>2024-10-02</a:t>
             </a:fld>
             <a:endParaRPr lang="sv-SE"/>
           </a:p>
@@ -1373,7 +1631,7 @@
           <a:p>
             <a:fld id="{DCB46C5C-7B3C-46DF-B479-A650EF2753E0}" type="datetimeFigureOut">
               <a:rPr lang="sv-SE" smtClean="0"/>
-              <a:t>2024-10-01</a:t>
+              <a:t>2024-10-02</a:t>
             </a:fld>
             <a:endParaRPr lang="sv-SE"/>
           </a:p>
@@ -1553,7 +1811,7 @@
           <a:p>
             <a:fld id="{DCB46C5C-7B3C-46DF-B479-A650EF2753E0}" type="datetimeFigureOut">
               <a:rPr lang="sv-SE" smtClean="0"/>
-              <a:t>2024-10-01</a:t>
+              <a:t>2024-10-02</a:t>
             </a:fld>
             <a:endParaRPr lang="sv-SE"/>
           </a:p>
@@ -1723,7 +1981,7 @@
           <a:p>
             <a:fld id="{DCB46C5C-7B3C-46DF-B479-A650EF2753E0}" type="datetimeFigureOut">
               <a:rPr lang="sv-SE" smtClean="0"/>
-              <a:t>2024-10-01</a:t>
+              <a:t>2024-10-02</a:t>
             </a:fld>
             <a:endParaRPr lang="sv-SE"/>
           </a:p>
@@ -1969,7 +2227,7 @@
           <a:p>
             <a:fld id="{DCB46C5C-7B3C-46DF-B479-A650EF2753E0}" type="datetimeFigureOut">
               <a:rPr lang="sv-SE" smtClean="0"/>
-              <a:t>2024-10-01</a:t>
+              <a:t>2024-10-02</a:t>
             </a:fld>
             <a:endParaRPr lang="sv-SE"/>
           </a:p>
@@ -2201,7 +2459,7 @@
           <a:p>
             <a:fld id="{DCB46C5C-7B3C-46DF-B479-A650EF2753E0}" type="datetimeFigureOut">
               <a:rPr lang="sv-SE" smtClean="0"/>
-              <a:t>2024-10-01</a:t>
+              <a:t>2024-10-02</a:t>
             </a:fld>
             <a:endParaRPr lang="sv-SE"/>
           </a:p>
@@ -2568,7 +2826,7 @@
           <a:p>
             <a:fld id="{DCB46C5C-7B3C-46DF-B479-A650EF2753E0}" type="datetimeFigureOut">
               <a:rPr lang="sv-SE" smtClean="0"/>
-              <a:t>2024-10-01</a:t>
+              <a:t>2024-10-02</a:t>
             </a:fld>
             <a:endParaRPr lang="sv-SE"/>
           </a:p>
@@ -2686,7 +2944,7 @@
           <a:p>
             <a:fld id="{DCB46C5C-7B3C-46DF-B479-A650EF2753E0}" type="datetimeFigureOut">
               <a:rPr lang="sv-SE" smtClean="0"/>
-              <a:t>2024-10-01</a:t>
+              <a:t>2024-10-02</a:t>
             </a:fld>
             <a:endParaRPr lang="sv-SE"/>
           </a:p>
@@ -2781,7 +3039,7 @@
           <a:p>
             <a:fld id="{DCB46C5C-7B3C-46DF-B479-A650EF2753E0}" type="datetimeFigureOut">
               <a:rPr lang="sv-SE" smtClean="0"/>
-              <a:t>2024-10-01</a:t>
+              <a:t>2024-10-02</a:t>
             </a:fld>
             <a:endParaRPr lang="sv-SE"/>
           </a:p>
@@ -3058,7 +3316,7 @@
           <a:p>
             <a:fld id="{DCB46C5C-7B3C-46DF-B479-A650EF2753E0}" type="datetimeFigureOut">
               <a:rPr lang="sv-SE" smtClean="0"/>
-              <a:t>2024-10-01</a:t>
+              <a:t>2024-10-02</a:t>
             </a:fld>
             <a:endParaRPr lang="sv-SE"/>
           </a:p>
@@ -3311,7 +3569,7 @@
           <a:p>
             <a:fld id="{DCB46C5C-7B3C-46DF-B479-A650EF2753E0}" type="datetimeFigureOut">
               <a:rPr lang="sv-SE" smtClean="0"/>
-              <a:t>2024-10-01</a:t>
+              <a:t>2024-10-02</a:t>
             </a:fld>
             <a:endParaRPr lang="sv-SE"/>
           </a:p>
@@ -3524,7 +3782,7 @@
           <a:p>
             <a:fld id="{DCB46C5C-7B3C-46DF-B479-A650EF2753E0}" type="datetimeFigureOut">
               <a:rPr lang="sv-SE" smtClean="0"/>
-              <a:t>2024-10-01</a:t>
+              <a:t>2024-10-02</a:t>
             </a:fld>
             <a:endParaRPr lang="sv-SE"/>
           </a:p>
@@ -4158,6 +4416,198 @@
         </p:nvSpPr>
         <p:spPr>
           <a:xfrm>
+            <a:off x="3102384" y="3412476"/>
+            <a:ext cx="545691" cy="461665"/>
+          </a:xfrm>
+          <a:prstGeom prst="rect">
+            <a:avLst/>
+          </a:prstGeom>
+          <a:noFill/>
+        </p:spPr>
+        <p:txBody>
+          <a:bodyPr wrap="square" rtlCol="0">
+            <a:spAutoFit/>
+          </a:bodyPr>
+          <a:lstStyle/>
+          <a:p>
+            <a:r>
+              <a:rPr lang="en-US" sz="2400" dirty="0" smtClean="0"/>
+              <a:t>(a)</a:t>
+            </a:r>
+            <a:endParaRPr lang="sv-SE" sz="2400" dirty="0"/>
+          </a:p>
+        </p:txBody>
+      </p:sp>
+      <p:sp>
+        <p:nvSpPr>
+          <p:cNvPr id="54" name="TextBox 53"/>
+          <p:cNvSpPr txBox="1"/>
+          <p:nvPr/>
+        </p:nvSpPr>
+        <p:spPr>
+          <a:xfrm>
+            <a:off x="8363627" y="3427593"/>
+            <a:ext cx="545691" cy="461665"/>
+          </a:xfrm>
+          <a:prstGeom prst="rect">
+            <a:avLst/>
+          </a:prstGeom>
+          <a:noFill/>
+        </p:spPr>
+        <p:txBody>
+          <a:bodyPr wrap="square" rtlCol="0">
+            <a:spAutoFit/>
+          </a:bodyPr>
+          <a:lstStyle/>
+          <a:p>
+            <a:r>
+              <a:rPr lang="en-US" sz="2400" dirty="0" smtClean="0"/>
+              <a:t>(b)</a:t>
+            </a:r>
+            <a:endParaRPr lang="sv-SE" sz="2400" dirty="0"/>
+          </a:p>
+        </p:txBody>
+      </p:sp>
+      <p:sp>
+        <p:nvSpPr>
+          <p:cNvPr id="55" name="TextBox 54"/>
+          <p:cNvSpPr txBox="1"/>
+          <p:nvPr/>
+        </p:nvSpPr>
+        <p:spPr>
+          <a:xfrm>
+            <a:off x="6116968" y="7494241"/>
+            <a:ext cx="545691" cy="461665"/>
+          </a:xfrm>
+          <a:prstGeom prst="rect">
+            <a:avLst/>
+          </a:prstGeom>
+          <a:noFill/>
+        </p:spPr>
+        <p:txBody>
+          <a:bodyPr wrap="square" rtlCol="0">
+            <a:spAutoFit/>
+          </a:bodyPr>
+          <a:lstStyle/>
+          <a:p>
+            <a:r>
+              <a:rPr lang="en-US" sz="2400" dirty="0" smtClean="0"/>
+              <a:t>(c)</a:t>
+            </a:r>
+            <a:endParaRPr lang="sv-SE" sz="2400" dirty="0"/>
+          </a:p>
+        </p:txBody>
+      </p:sp>
+      <p:pic>
+        <p:nvPicPr>
+          <p:cNvPr id="7" name="Picture 6"/>
+          <p:cNvPicPr>
+            <a:picLocks noChangeAspect="1"/>
+          </p:cNvPicPr>
+          <p:nvPr/>
+        </p:nvPicPr>
+        <p:blipFill>
+          <a:blip r:embed="rId2"/>
+          <a:stretch>
+            <a:fillRect/>
+          </a:stretch>
+        </p:blipFill>
+        <p:spPr>
+          <a:xfrm>
+            <a:off x="5696627" y="-572907"/>
+            <a:ext cx="5334000" cy="4000500"/>
+          </a:xfrm>
+          <a:prstGeom prst="rect">
+            <a:avLst/>
+          </a:prstGeom>
+        </p:spPr>
+      </p:pic>
+      <p:pic>
+        <p:nvPicPr>
+          <p:cNvPr id="8" name="Picture 7"/>
+          <p:cNvPicPr>
+            <a:picLocks noChangeAspect="1"/>
+          </p:cNvPicPr>
+          <p:nvPr/>
+        </p:nvPicPr>
+        <p:blipFill>
+          <a:blip r:embed="rId3"/>
+          <a:stretch>
+            <a:fillRect/>
+          </a:stretch>
+        </p:blipFill>
+        <p:spPr>
+          <a:xfrm>
+            <a:off x="708229" y="-588024"/>
+            <a:ext cx="5334000" cy="4000500"/>
+          </a:xfrm>
+          <a:prstGeom prst="rect">
+            <a:avLst/>
+          </a:prstGeom>
+        </p:spPr>
+      </p:pic>
+      <p:pic>
+        <p:nvPicPr>
+          <p:cNvPr id="9" name="Picture 8"/>
+          <p:cNvPicPr>
+            <a:picLocks noChangeAspect="1"/>
+          </p:cNvPicPr>
+          <p:nvPr/>
+        </p:nvPicPr>
+        <p:blipFill>
+          <a:blip r:embed="rId4"/>
+          <a:stretch>
+            <a:fillRect/>
+          </a:stretch>
+        </p:blipFill>
+        <p:spPr>
+          <a:xfrm>
+            <a:off x="3449968" y="3643308"/>
+            <a:ext cx="5334000" cy="4000500"/>
+          </a:xfrm>
+          <a:prstGeom prst="rect">
+            <a:avLst/>
+          </a:prstGeom>
+        </p:spPr>
+      </p:pic>
+    </p:spTree>
+    <p:extLst>
+      <p:ext uri="{BB962C8B-B14F-4D97-AF65-F5344CB8AC3E}">
+        <p14:creationId xmlns:p14="http://schemas.microsoft.com/office/powerpoint/2010/main" val="1638039252"/>
+      </p:ext>
+    </p:extLst>
+  </p:cSld>
+  <p:clrMapOvr>
+    <a:masterClrMapping/>
+  </p:clrMapOvr>
+</p:sld>
+</file>
+
+<file path=ppt/slides/slide11.xml><?xml version="1.0" encoding="utf-8"?>
+<p:sld xmlns:a="http://schemas.openxmlformats.org/drawingml/2006/main" xmlns:r="http://schemas.openxmlformats.org/officeDocument/2006/relationships" xmlns:p="http://schemas.openxmlformats.org/presentationml/2006/main">
+  <p:cSld>
+    <p:spTree>
+      <p:nvGrpSpPr>
+        <p:cNvPr id="1" name=""/>
+        <p:cNvGrpSpPr/>
+        <p:nvPr/>
+      </p:nvGrpSpPr>
+      <p:grpSpPr>
+        <a:xfrm>
+          <a:off x="0" y="0"/>
+          <a:ext cx="0" cy="0"/>
+          <a:chOff x="0" y="0"/>
+          <a:chExt cx="0" cy="0"/>
+        </a:xfrm>
+      </p:grpSpPr>
+      <p:sp>
+        <p:nvSpPr>
+          <p:cNvPr id="53" name="TextBox 52"/>
+          <p:cNvSpPr txBox="1"/>
+          <p:nvPr/>
+        </p:nvSpPr>
+        <p:spPr>
+          <a:xfrm>
             <a:off x="825909" y="1970016"/>
             <a:ext cx="545691" cy="461665"/>
           </a:xfrm>
@@ -5663,7 +6113,1537 @@
 </p:sld>
 </file>
 
-<file path=ppt/slides/slide11.xml><?xml version="1.0" encoding="utf-8"?>
+<file path=ppt/slides/slide12.xml><?xml version="1.0" encoding="utf-8"?>
+<p:sld xmlns:a="http://schemas.openxmlformats.org/drawingml/2006/main" xmlns:r="http://schemas.openxmlformats.org/officeDocument/2006/relationships" xmlns:p="http://schemas.openxmlformats.org/presentationml/2006/main">
+  <p:cSld>
+    <p:spTree>
+      <p:nvGrpSpPr>
+        <p:cNvPr id="1" name=""/>
+        <p:cNvGrpSpPr/>
+        <p:nvPr/>
+      </p:nvGrpSpPr>
+      <p:grpSpPr>
+        <a:xfrm>
+          <a:off x="0" y="0"/>
+          <a:ext cx="0" cy="0"/>
+          <a:chOff x="0" y="0"/>
+          <a:chExt cx="0" cy="0"/>
+        </a:xfrm>
+      </p:grpSpPr>
+      <p:pic>
+        <p:nvPicPr>
+          <p:cNvPr id="7" name="Picture 6"/>
+          <p:cNvPicPr>
+            <a:picLocks noChangeAspect="1"/>
+          </p:cNvPicPr>
+          <p:nvPr/>
+        </p:nvPicPr>
+        <p:blipFill>
+          <a:blip r:embed="rId2"/>
+          <a:stretch>
+            <a:fillRect/>
+          </a:stretch>
+        </p:blipFill>
+        <p:spPr>
+          <a:xfrm>
+            <a:off x="-489888" y="360540"/>
+            <a:ext cx="5334000" cy="4000500"/>
+          </a:xfrm>
+          <a:prstGeom prst="rect">
+            <a:avLst/>
+          </a:prstGeom>
+        </p:spPr>
+      </p:pic>
+      <p:pic>
+        <p:nvPicPr>
+          <p:cNvPr id="9" name="Picture 8"/>
+          <p:cNvPicPr>
+            <a:picLocks noChangeAspect="1"/>
+          </p:cNvPicPr>
+          <p:nvPr/>
+        </p:nvPicPr>
+        <p:blipFill>
+          <a:blip r:embed="rId3"/>
+          <a:stretch>
+            <a:fillRect/>
+          </a:stretch>
+        </p:blipFill>
+        <p:spPr>
+          <a:xfrm>
+            <a:off x="-341123" y="4500407"/>
+            <a:ext cx="5334000" cy="4000500"/>
+          </a:xfrm>
+          <a:prstGeom prst="rect">
+            <a:avLst/>
+          </a:prstGeom>
+        </p:spPr>
+      </p:pic>
+      <p:pic>
+        <p:nvPicPr>
+          <p:cNvPr id="3" name="Picture 2"/>
+          <p:cNvPicPr>
+            <a:picLocks noChangeAspect="1"/>
+          </p:cNvPicPr>
+          <p:nvPr/>
+        </p:nvPicPr>
+        <p:blipFill>
+          <a:blip r:embed="rId4"/>
+          <a:stretch>
+            <a:fillRect/>
+          </a:stretch>
+        </p:blipFill>
+        <p:spPr>
+          <a:xfrm>
+            <a:off x="4502892" y="303904"/>
+            <a:ext cx="5334000" cy="4000500"/>
+          </a:xfrm>
+          <a:prstGeom prst="rect">
+            <a:avLst/>
+          </a:prstGeom>
+        </p:spPr>
+      </p:pic>
+      <p:pic>
+        <p:nvPicPr>
+          <p:cNvPr id="4" name="Picture 3"/>
+          <p:cNvPicPr>
+            <a:picLocks noChangeAspect="1"/>
+          </p:cNvPicPr>
+          <p:nvPr/>
+        </p:nvPicPr>
+        <p:blipFill>
+          <a:blip r:embed="rId5"/>
+          <a:stretch>
+            <a:fillRect/>
+          </a:stretch>
+        </p:blipFill>
+        <p:spPr>
+          <a:xfrm>
+            <a:off x="4682834" y="4513107"/>
+            <a:ext cx="5334000" cy="4000500"/>
+          </a:xfrm>
+          <a:prstGeom prst="rect">
+            <a:avLst/>
+          </a:prstGeom>
+        </p:spPr>
+      </p:pic>
+      <p:pic>
+        <p:nvPicPr>
+          <p:cNvPr id="5" name="Picture 4"/>
+          <p:cNvPicPr>
+            <a:picLocks noChangeAspect="1"/>
+          </p:cNvPicPr>
+          <p:nvPr/>
+        </p:nvPicPr>
+        <p:blipFill>
+          <a:blip r:embed="rId6"/>
+          <a:stretch>
+            <a:fillRect/>
+          </a:stretch>
+        </p:blipFill>
+        <p:spPr>
+          <a:xfrm>
+            <a:off x="4737546" y="-3872957"/>
+            <a:ext cx="5334000" cy="4000500"/>
+          </a:xfrm>
+          <a:prstGeom prst="rect">
+            <a:avLst/>
+          </a:prstGeom>
+        </p:spPr>
+      </p:pic>
+      <p:pic>
+        <p:nvPicPr>
+          <p:cNvPr id="6" name="Picture 5"/>
+          <p:cNvPicPr>
+            <a:picLocks noChangeAspect="1"/>
+          </p:cNvPicPr>
+          <p:nvPr/>
+        </p:nvPicPr>
+        <p:blipFill>
+          <a:blip r:embed="rId7"/>
+          <a:stretch>
+            <a:fillRect/>
+          </a:stretch>
+        </p:blipFill>
+        <p:spPr>
+          <a:xfrm>
+            <a:off x="-385589" y="-3872957"/>
+            <a:ext cx="5334000" cy="4000500"/>
+          </a:xfrm>
+          <a:prstGeom prst="rect">
+            <a:avLst/>
+          </a:prstGeom>
+        </p:spPr>
+      </p:pic>
+      <p:cxnSp>
+        <p:nvCxnSpPr>
+          <p:cNvPr id="16" name="Straight Arrow Connector 15"/>
+          <p:cNvCxnSpPr/>
+          <p:nvPr/>
+        </p:nvCxnSpPr>
+        <p:spPr>
+          <a:xfrm flipH="1">
+            <a:off x="690989" y="826535"/>
+            <a:ext cx="290828" cy="0"/>
+          </a:xfrm>
+          <a:prstGeom prst="straightConnector1">
+            <a:avLst/>
+          </a:prstGeom>
+          <a:ln w="38100">
+            <a:headEnd type="diamond"/>
+            <a:tailEnd type="triangle"/>
+          </a:ln>
+        </p:spPr>
+        <p:style>
+          <a:lnRef idx="3">
+            <a:schemeClr val="dk1"/>
+          </a:lnRef>
+          <a:fillRef idx="0">
+            <a:schemeClr val="dk1"/>
+          </a:fillRef>
+          <a:effectRef idx="2">
+            <a:schemeClr val="dk1"/>
+          </a:effectRef>
+          <a:fontRef idx="minor">
+            <a:schemeClr val="tx1"/>
+          </a:fontRef>
+        </p:style>
+      </p:cxnSp>
+      <p:cxnSp>
+        <p:nvCxnSpPr>
+          <p:cNvPr id="17" name="Straight Arrow Connector 16"/>
+          <p:cNvCxnSpPr/>
+          <p:nvPr/>
+        </p:nvCxnSpPr>
+        <p:spPr>
+          <a:xfrm>
+            <a:off x="4035111" y="826535"/>
+            <a:ext cx="281726" cy="0"/>
+          </a:xfrm>
+          <a:prstGeom prst="straightConnector1">
+            <a:avLst/>
+          </a:prstGeom>
+          <a:ln w="38100">
+            <a:headEnd type="diamond"/>
+            <a:tailEnd type="triangle"/>
+          </a:ln>
+        </p:spPr>
+        <p:style>
+          <a:lnRef idx="3">
+            <a:schemeClr val="dk1"/>
+          </a:lnRef>
+          <a:fillRef idx="0">
+            <a:schemeClr val="dk1"/>
+          </a:fillRef>
+          <a:effectRef idx="2">
+            <a:schemeClr val="dk1"/>
+          </a:effectRef>
+          <a:fontRef idx="minor">
+            <a:schemeClr val="tx1"/>
+          </a:fontRef>
+        </p:style>
+      </p:cxnSp>
+      <mc:AlternateContent xmlns:mc="http://schemas.openxmlformats.org/markup-compatibility/2006">
+        <mc:Choice xmlns:a14="http://schemas.microsoft.com/office/drawing/2010/main" Requires="a14">
+          <p:sp>
+            <p:nvSpPr>
+              <p:cNvPr id="18" name="TextBox 17"/>
+              <p:cNvSpPr txBox="1"/>
+              <p:nvPr/>
+            </p:nvSpPr>
+            <p:spPr>
+              <a:xfrm>
+                <a:off x="1775997" y="686269"/>
+                <a:ext cx="1266214" cy="400110"/>
+              </a:xfrm>
+              <a:prstGeom prst="rect">
+                <a:avLst/>
+              </a:prstGeom>
+              <a:noFill/>
+            </p:spPr>
+            <p:txBody>
+              <a:bodyPr wrap="square" rtlCol="0">
+                <a:spAutoFit/>
+              </a:bodyPr>
+              <a:lstStyle/>
+              <a:p>
+                <a:pPr/>
+                <a14:m>
+                  <m:oMathPara xmlns:m="http://schemas.openxmlformats.org/officeDocument/2006/math">
+                    <m:oMathParaPr>
+                      <m:jc m:val="centerGroup"/>
+                    </m:oMathParaPr>
+                    <m:oMath xmlns:m="http://schemas.openxmlformats.org/officeDocument/2006/math">
+                      <m:sSub>
+                        <m:sSubPr>
+                          <m:ctrlPr>
+                            <a:rPr lang="en-US" sz="2000" i="1" smtClean="0">
+                              <a:latin typeface="Cambria Math" panose="02040503050406030204" pitchFamily="18" charset="0"/>
+                            </a:rPr>
+                          </m:ctrlPr>
+                        </m:sSubPr>
+                        <m:e>
+                          <m:r>
+                            <a:rPr lang="en-US" sz="2000" b="0" i="1" smtClean="0">
+                              <a:latin typeface="Cambria Math" panose="02040503050406030204" pitchFamily="18" charset="0"/>
+                            </a:rPr>
+                            <m:t>𝐷</m:t>
+                          </m:r>
+                        </m:e>
+                        <m:sub>
+                          <m:r>
+                            <a:rPr lang="en-US" sz="2000" b="0" i="1" smtClean="0">
+                              <a:latin typeface="Cambria Math" panose="02040503050406030204" pitchFamily="18" charset="0"/>
+                            </a:rPr>
+                            <m:t>𝐴</m:t>
+                          </m:r>
+                        </m:sub>
+                      </m:sSub>
+                      <m:sSub>
+                        <m:sSubPr>
+                          <m:ctrlPr>
+                            <a:rPr lang="en-US" sz="2000" i="1" smtClean="0">
+                              <a:latin typeface="Cambria Math" panose="02040503050406030204" pitchFamily="18" charset="0"/>
+                            </a:rPr>
+                          </m:ctrlPr>
+                        </m:sSubPr>
+                        <m:e>
+                          <m:r>
+                            <a:rPr lang="en-US" sz="2000" b="0" i="1" smtClean="0">
+                              <a:latin typeface="Cambria Math" panose="02040503050406030204" pitchFamily="18" charset="0"/>
+                            </a:rPr>
+                            <m:t>𝑇</m:t>
+                          </m:r>
+                        </m:e>
+                        <m:sub>
+                          <m:r>
+                            <a:rPr lang="en-US" sz="2000" b="0" i="1" smtClean="0">
+                              <a:latin typeface="Cambria Math" panose="02040503050406030204" pitchFamily="18" charset="0"/>
+                            </a:rPr>
+                            <m:t>𝑠</m:t>
+                          </m:r>
+                        </m:sub>
+                      </m:sSub>
+                    </m:oMath>
+                  </m:oMathPara>
+                </a14:m>
+                <a:endParaRPr lang="sv-SE" dirty="0"/>
+              </a:p>
+            </p:txBody>
+          </p:sp>
+        </mc:Choice>
+        <mc:Fallback>
+          <p:sp>
+            <p:nvSpPr>
+              <p:cNvPr id="18" name="TextBox 17"/>
+              <p:cNvSpPr txBox="1">
+                <a:spLocks noRot="1" noChangeAspect="1" noMove="1" noResize="1" noEditPoints="1" noAdjustHandles="1" noChangeArrowheads="1" noChangeShapeType="1" noTextEdit="1"/>
+              </p:cNvSpPr>
+              <p:nvPr/>
+            </p:nvSpPr>
+            <p:spPr>
+              <a:xfrm>
+                <a:off x="1775997" y="686269"/>
+                <a:ext cx="1266214" cy="400110"/>
+              </a:xfrm>
+              <a:prstGeom prst="rect">
+                <a:avLst/>
+              </a:prstGeom>
+              <a:blipFill>
+                <a:blip r:embed="rId8"/>
+                <a:stretch>
+                  <a:fillRect b="-1538"/>
+                </a:stretch>
+              </a:blipFill>
+            </p:spPr>
+            <p:txBody>
+              <a:bodyPr/>
+              <a:lstStyle/>
+              <a:p>
+                <a:r>
+                  <a:rPr lang="sv-SE">
+                    <a:noFill/>
+                  </a:rPr>
+                  <a:t> </a:t>
+                </a:r>
+              </a:p>
+            </p:txBody>
+          </p:sp>
+        </mc:Fallback>
+      </mc:AlternateContent>
+      <mc:AlternateContent xmlns:mc="http://schemas.openxmlformats.org/markup-compatibility/2006">
+        <mc:Choice xmlns:a14="http://schemas.microsoft.com/office/drawing/2010/main" Requires="a14">
+          <p:sp>
+            <p:nvSpPr>
+              <p:cNvPr id="19" name="TextBox 18"/>
+              <p:cNvSpPr txBox="1"/>
+              <p:nvPr/>
+            </p:nvSpPr>
+            <p:spPr>
+              <a:xfrm>
+                <a:off x="1770918" y="1411131"/>
+                <a:ext cx="1266214" cy="400110"/>
+              </a:xfrm>
+              <a:prstGeom prst="rect">
+                <a:avLst/>
+              </a:prstGeom>
+              <a:noFill/>
+            </p:spPr>
+            <p:txBody>
+              <a:bodyPr wrap="square" rtlCol="0">
+                <a:spAutoFit/>
+              </a:bodyPr>
+              <a:lstStyle/>
+              <a:p>
+                <a:pPr/>
+                <a14:m>
+                  <m:oMathPara xmlns:m="http://schemas.openxmlformats.org/officeDocument/2006/math">
+                    <m:oMathParaPr>
+                      <m:jc m:val="centerGroup"/>
+                    </m:oMathParaPr>
+                    <m:oMath xmlns:m="http://schemas.openxmlformats.org/officeDocument/2006/math">
+                      <m:sSub>
+                        <m:sSubPr>
+                          <m:ctrlPr>
+                            <a:rPr lang="en-US" sz="2000" i="1" smtClean="0">
+                              <a:latin typeface="Cambria Math" panose="02040503050406030204" pitchFamily="18" charset="0"/>
+                            </a:rPr>
+                          </m:ctrlPr>
+                        </m:sSubPr>
+                        <m:e>
+                          <m:r>
+                            <a:rPr lang="en-US" sz="2000" b="0" i="1" smtClean="0">
+                              <a:latin typeface="Cambria Math" panose="02040503050406030204" pitchFamily="18" charset="0"/>
+                            </a:rPr>
+                            <m:t>𝐷</m:t>
+                          </m:r>
+                        </m:e>
+                        <m:sub>
+                          <m:r>
+                            <a:rPr lang="en-US" sz="2000" b="0" i="1" smtClean="0">
+                              <a:latin typeface="Cambria Math" panose="02040503050406030204" pitchFamily="18" charset="0"/>
+                            </a:rPr>
+                            <m:t>𝐵</m:t>
+                          </m:r>
+                        </m:sub>
+                      </m:sSub>
+                      <m:sSub>
+                        <m:sSubPr>
+                          <m:ctrlPr>
+                            <a:rPr lang="en-US" sz="2000" i="1" smtClean="0">
+                              <a:latin typeface="Cambria Math" panose="02040503050406030204" pitchFamily="18" charset="0"/>
+                            </a:rPr>
+                          </m:ctrlPr>
+                        </m:sSubPr>
+                        <m:e>
+                          <m:r>
+                            <a:rPr lang="en-US" sz="2000" b="0" i="1" smtClean="0">
+                              <a:latin typeface="Cambria Math" panose="02040503050406030204" pitchFamily="18" charset="0"/>
+                            </a:rPr>
+                            <m:t>𝑇</m:t>
+                          </m:r>
+                        </m:e>
+                        <m:sub>
+                          <m:r>
+                            <a:rPr lang="en-US" sz="2000" b="0" i="1" smtClean="0">
+                              <a:latin typeface="Cambria Math" panose="02040503050406030204" pitchFamily="18" charset="0"/>
+                            </a:rPr>
+                            <m:t>𝑠</m:t>
+                          </m:r>
+                        </m:sub>
+                      </m:sSub>
+                    </m:oMath>
+                  </m:oMathPara>
+                </a14:m>
+                <a:endParaRPr lang="sv-SE" dirty="0"/>
+              </a:p>
+            </p:txBody>
+          </p:sp>
+        </mc:Choice>
+        <mc:Fallback>
+          <p:sp>
+            <p:nvSpPr>
+              <p:cNvPr id="19" name="TextBox 18"/>
+              <p:cNvSpPr txBox="1">
+                <a:spLocks noRot="1" noChangeAspect="1" noMove="1" noResize="1" noEditPoints="1" noAdjustHandles="1" noChangeArrowheads="1" noChangeShapeType="1" noTextEdit="1"/>
+              </p:cNvSpPr>
+              <p:nvPr/>
+            </p:nvSpPr>
+            <p:spPr>
+              <a:xfrm>
+                <a:off x="1770918" y="1411131"/>
+                <a:ext cx="1266214" cy="400110"/>
+              </a:xfrm>
+              <a:prstGeom prst="rect">
+                <a:avLst/>
+              </a:prstGeom>
+              <a:blipFill>
+                <a:blip r:embed="rId9"/>
+                <a:stretch>
+                  <a:fillRect/>
+                </a:stretch>
+              </a:blipFill>
+            </p:spPr>
+            <p:txBody>
+              <a:bodyPr/>
+              <a:lstStyle/>
+              <a:p>
+                <a:r>
+                  <a:rPr lang="sv-SE">
+                    <a:noFill/>
+                  </a:rPr>
+                  <a:t> </a:t>
+                </a:r>
+              </a:p>
+            </p:txBody>
+          </p:sp>
+        </mc:Fallback>
+      </mc:AlternateContent>
+      <mc:AlternateContent xmlns:mc="http://schemas.openxmlformats.org/markup-compatibility/2006">
+        <mc:Choice xmlns:a14="http://schemas.microsoft.com/office/drawing/2010/main" Requires="a14">
+          <p:sp>
+            <p:nvSpPr>
+              <p:cNvPr id="20" name="TextBox 19"/>
+              <p:cNvSpPr txBox="1"/>
+              <p:nvPr/>
+            </p:nvSpPr>
+            <p:spPr>
+              <a:xfrm>
+                <a:off x="3173551" y="2430729"/>
+                <a:ext cx="1266214" cy="400110"/>
+              </a:xfrm>
+              <a:prstGeom prst="rect">
+                <a:avLst/>
+              </a:prstGeom>
+              <a:noFill/>
+            </p:spPr>
+            <p:txBody>
+              <a:bodyPr wrap="square" rtlCol="0">
+                <a:spAutoFit/>
+              </a:bodyPr>
+              <a:lstStyle/>
+              <a:p>
+                <a:pPr/>
+                <a14:m>
+                  <m:oMathPara xmlns:m="http://schemas.openxmlformats.org/officeDocument/2006/math">
+                    <m:oMathParaPr>
+                      <m:jc m:val="centerGroup"/>
+                    </m:oMathParaPr>
+                    <m:oMath xmlns:m="http://schemas.openxmlformats.org/officeDocument/2006/math">
+                      <m:sSub>
+                        <m:sSubPr>
+                          <m:ctrlPr>
+                            <a:rPr lang="en-US" sz="2000" i="1" smtClean="0">
+                              <a:latin typeface="Cambria Math" panose="02040503050406030204" pitchFamily="18" charset="0"/>
+                            </a:rPr>
+                          </m:ctrlPr>
+                        </m:sSubPr>
+                        <m:e>
+                          <m:r>
+                            <a:rPr lang="en-US" sz="2000" b="0" i="1" smtClean="0">
+                              <a:latin typeface="Cambria Math" panose="02040503050406030204" pitchFamily="18" charset="0"/>
+                            </a:rPr>
+                            <m:t>𝐷</m:t>
+                          </m:r>
+                        </m:e>
+                        <m:sub>
+                          <m:r>
+                            <a:rPr lang="en-US" sz="2000" b="0" i="1" smtClean="0">
+                              <a:latin typeface="Cambria Math" panose="02040503050406030204" pitchFamily="18" charset="0"/>
+                            </a:rPr>
+                            <m:t>𝐶</m:t>
+                          </m:r>
+                        </m:sub>
+                      </m:sSub>
+                      <m:sSub>
+                        <m:sSubPr>
+                          <m:ctrlPr>
+                            <a:rPr lang="en-US" sz="2000" i="1" smtClean="0">
+                              <a:latin typeface="Cambria Math" panose="02040503050406030204" pitchFamily="18" charset="0"/>
+                            </a:rPr>
+                          </m:ctrlPr>
+                        </m:sSubPr>
+                        <m:e>
+                          <m:r>
+                            <a:rPr lang="en-US" sz="2000" b="0" i="1" smtClean="0">
+                              <a:latin typeface="Cambria Math" panose="02040503050406030204" pitchFamily="18" charset="0"/>
+                            </a:rPr>
+                            <m:t>𝑇</m:t>
+                          </m:r>
+                        </m:e>
+                        <m:sub>
+                          <m:r>
+                            <a:rPr lang="en-US" sz="2000" b="0" i="1" smtClean="0">
+                              <a:latin typeface="Cambria Math" panose="02040503050406030204" pitchFamily="18" charset="0"/>
+                            </a:rPr>
+                            <m:t>𝑠</m:t>
+                          </m:r>
+                        </m:sub>
+                      </m:sSub>
+                    </m:oMath>
+                  </m:oMathPara>
+                </a14:m>
+                <a:endParaRPr lang="sv-SE" dirty="0"/>
+              </a:p>
+            </p:txBody>
+          </p:sp>
+        </mc:Choice>
+        <mc:Fallback>
+          <p:sp>
+            <p:nvSpPr>
+              <p:cNvPr id="20" name="TextBox 19"/>
+              <p:cNvSpPr txBox="1">
+                <a:spLocks noRot="1" noChangeAspect="1" noMove="1" noResize="1" noEditPoints="1" noAdjustHandles="1" noChangeArrowheads="1" noChangeShapeType="1" noTextEdit="1"/>
+              </p:cNvSpPr>
+              <p:nvPr/>
+            </p:nvSpPr>
+            <p:spPr>
+              <a:xfrm>
+                <a:off x="3173551" y="2430729"/>
+                <a:ext cx="1266214" cy="400110"/>
+              </a:xfrm>
+              <a:prstGeom prst="rect">
+                <a:avLst/>
+              </a:prstGeom>
+              <a:blipFill>
+                <a:blip r:embed="rId10"/>
+                <a:stretch>
+                  <a:fillRect b="-1538"/>
+                </a:stretch>
+              </a:blipFill>
+            </p:spPr>
+            <p:txBody>
+              <a:bodyPr/>
+              <a:lstStyle/>
+              <a:p>
+                <a:r>
+                  <a:rPr lang="sv-SE">
+                    <a:noFill/>
+                  </a:rPr>
+                  <a:t> </a:t>
+                </a:r>
+              </a:p>
+            </p:txBody>
+          </p:sp>
+        </mc:Fallback>
+      </mc:AlternateContent>
+      <p:cxnSp>
+        <p:nvCxnSpPr>
+          <p:cNvPr id="21" name="Straight Arrow Connector 20"/>
+          <p:cNvCxnSpPr/>
+          <p:nvPr/>
+        </p:nvCxnSpPr>
+        <p:spPr>
+          <a:xfrm flipH="1">
+            <a:off x="3862177" y="2877277"/>
+            <a:ext cx="112694" cy="0"/>
+          </a:xfrm>
+          <a:prstGeom prst="straightConnector1">
+            <a:avLst/>
+          </a:prstGeom>
+          <a:ln w="38100">
+            <a:headEnd type="diamond"/>
+            <a:tailEnd type="triangle"/>
+          </a:ln>
+        </p:spPr>
+        <p:style>
+          <a:lnRef idx="3">
+            <a:schemeClr val="dk1"/>
+          </a:lnRef>
+          <a:fillRef idx="0">
+            <a:schemeClr val="dk1"/>
+          </a:fillRef>
+          <a:effectRef idx="2">
+            <a:schemeClr val="dk1"/>
+          </a:effectRef>
+          <a:fontRef idx="minor">
+            <a:schemeClr val="tx1"/>
+          </a:fontRef>
+        </p:style>
+      </p:cxnSp>
+      <p:cxnSp>
+        <p:nvCxnSpPr>
+          <p:cNvPr id="22" name="Straight Arrow Connector 21"/>
+          <p:cNvCxnSpPr/>
+          <p:nvPr/>
+        </p:nvCxnSpPr>
+        <p:spPr>
+          <a:xfrm>
+            <a:off x="3644572" y="2877277"/>
+            <a:ext cx="117561" cy="0"/>
+          </a:xfrm>
+          <a:prstGeom prst="straightConnector1">
+            <a:avLst/>
+          </a:prstGeom>
+          <a:ln w="38100">
+            <a:headEnd type="diamond"/>
+            <a:tailEnd type="triangle"/>
+          </a:ln>
+        </p:spPr>
+        <p:style>
+          <a:lnRef idx="3">
+            <a:schemeClr val="dk1"/>
+          </a:lnRef>
+          <a:fillRef idx="0">
+            <a:schemeClr val="dk1"/>
+          </a:fillRef>
+          <a:effectRef idx="2">
+            <a:schemeClr val="dk1"/>
+          </a:effectRef>
+          <a:fontRef idx="minor">
+            <a:schemeClr val="tx1"/>
+          </a:fontRef>
+        </p:style>
+      </p:cxnSp>
+      <p:cxnSp>
+        <p:nvCxnSpPr>
+          <p:cNvPr id="23" name="Straight Arrow Connector 22"/>
+          <p:cNvCxnSpPr/>
+          <p:nvPr/>
+        </p:nvCxnSpPr>
+        <p:spPr>
+          <a:xfrm>
+            <a:off x="1028807" y="1823293"/>
+            <a:ext cx="1069355" cy="3065"/>
+          </a:xfrm>
+          <a:prstGeom prst="straightConnector1">
+            <a:avLst/>
+          </a:prstGeom>
+          <a:ln w="38100">
+            <a:headEnd type="diamond"/>
+            <a:tailEnd type="triangle"/>
+          </a:ln>
+        </p:spPr>
+        <p:style>
+          <a:lnRef idx="3">
+            <a:schemeClr val="dk1"/>
+          </a:lnRef>
+          <a:fillRef idx="0">
+            <a:schemeClr val="dk1"/>
+          </a:fillRef>
+          <a:effectRef idx="2">
+            <a:schemeClr val="dk1"/>
+          </a:effectRef>
+          <a:fontRef idx="minor">
+            <a:schemeClr val="tx1"/>
+          </a:fontRef>
+        </p:style>
+      </p:cxnSp>
+      <p:cxnSp>
+        <p:nvCxnSpPr>
+          <p:cNvPr id="24" name="Straight Arrow Connector 23"/>
+          <p:cNvCxnSpPr/>
+          <p:nvPr/>
+        </p:nvCxnSpPr>
+        <p:spPr>
+          <a:xfrm flipH="1">
+            <a:off x="2681078" y="1838178"/>
+            <a:ext cx="887729" cy="1"/>
+          </a:xfrm>
+          <a:prstGeom prst="straightConnector1">
+            <a:avLst/>
+          </a:prstGeom>
+          <a:ln w="38100">
+            <a:headEnd type="diamond"/>
+            <a:tailEnd type="triangle"/>
+          </a:ln>
+        </p:spPr>
+        <p:style>
+          <a:lnRef idx="3">
+            <a:schemeClr val="dk1"/>
+          </a:lnRef>
+          <a:fillRef idx="0">
+            <a:schemeClr val="dk1"/>
+          </a:fillRef>
+          <a:effectRef idx="2">
+            <a:schemeClr val="dk1"/>
+          </a:effectRef>
+          <a:fontRef idx="minor">
+            <a:schemeClr val="tx1"/>
+          </a:fontRef>
+        </p:style>
+      </p:cxnSp>
+      <p:cxnSp>
+        <p:nvCxnSpPr>
+          <p:cNvPr id="41" name="Straight Arrow Connector 40"/>
+          <p:cNvCxnSpPr/>
+          <p:nvPr/>
+        </p:nvCxnSpPr>
+        <p:spPr>
+          <a:xfrm flipH="1">
+            <a:off x="5722576" y="786873"/>
+            <a:ext cx="1396738" cy="2663"/>
+          </a:xfrm>
+          <a:prstGeom prst="straightConnector1">
+            <a:avLst/>
+          </a:prstGeom>
+          <a:ln w="38100">
+            <a:headEnd type="diamond"/>
+            <a:tailEnd type="triangle"/>
+          </a:ln>
+        </p:spPr>
+        <p:style>
+          <a:lnRef idx="3">
+            <a:schemeClr val="dk1"/>
+          </a:lnRef>
+          <a:fillRef idx="0">
+            <a:schemeClr val="dk1"/>
+          </a:fillRef>
+          <a:effectRef idx="2">
+            <a:schemeClr val="dk1"/>
+          </a:effectRef>
+          <a:fontRef idx="minor">
+            <a:schemeClr val="tx1"/>
+          </a:fontRef>
+        </p:style>
+      </p:cxnSp>
+      <p:cxnSp>
+        <p:nvCxnSpPr>
+          <p:cNvPr id="43" name="Straight Arrow Connector 42"/>
+          <p:cNvCxnSpPr/>
+          <p:nvPr/>
+        </p:nvCxnSpPr>
+        <p:spPr>
+          <a:xfrm>
+            <a:off x="7837062" y="780551"/>
+            <a:ext cx="1500926" cy="0"/>
+          </a:xfrm>
+          <a:prstGeom prst="straightConnector1">
+            <a:avLst/>
+          </a:prstGeom>
+          <a:ln w="38100">
+            <a:headEnd type="diamond"/>
+            <a:tailEnd type="triangle"/>
+          </a:ln>
+        </p:spPr>
+        <p:style>
+          <a:lnRef idx="3">
+            <a:schemeClr val="dk1"/>
+          </a:lnRef>
+          <a:fillRef idx="0">
+            <a:schemeClr val="dk1"/>
+          </a:fillRef>
+          <a:effectRef idx="2">
+            <a:schemeClr val="dk1"/>
+          </a:effectRef>
+          <a:fontRef idx="minor">
+            <a:schemeClr val="tx1"/>
+          </a:fontRef>
+        </p:style>
+      </p:cxnSp>
+      <mc:AlternateContent xmlns:mc="http://schemas.openxmlformats.org/markup-compatibility/2006">
+        <mc:Choice xmlns:a14="http://schemas.microsoft.com/office/drawing/2010/main" Requires="a14">
+          <p:sp>
+            <p:nvSpPr>
+              <p:cNvPr id="45" name="TextBox 44"/>
+              <p:cNvSpPr txBox="1"/>
+              <p:nvPr/>
+            </p:nvSpPr>
+            <p:spPr>
+              <a:xfrm>
+                <a:off x="6845081" y="609155"/>
+                <a:ext cx="1266214" cy="400110"/>
+              </a:xfrm>
+              <a:prstGeom prst="rect">
+                <a:avLst/>
+              </a:prstGeom>
+              <a:noFill/>
+            </p:spPr>
+            <p:txBody>
+              <a:bodyPr wrap="square" rtlCol="0">
+                <a:spAutoFit/>
+              </a:bodyPr>
+              <a:lstStyle/>
+              <a:p>
+                <a:pPr/>
+                <a14:m>
+                  <m:oMathPara xmlns:m="http://schemas.openxmlformats.org/officeDocument/2006/math">
+                    <m:oMathParaPr>
+                      <m:jc m:val="centerGroup"/>
+                    </m:oMathParaPr>
+                    <m:oMath xmlns:m="http://schemas.openxmlformats.org/officeDocument/2006/math">
+                      <m:sSub>
+                        <m:sSubPr>
+                          <m:ctrlPr>
+                            <a:rPr lang="en-US" sz="2000" i="1" smtClean="0">
+                              <a:latin typeface="Cambria Math" panose="02040503050406030204" pitchFamily="18" charset="0"/>
+                            </a:rPr>
+                          </m:ctrlPr>
+                        </m:sSubPr>
+                        <m:e>
+                          <m:r>
+                            <a:rPr lang="en-US" sz="2000" b="0" i="1" smtClean="0">
+                              <a:latin typeface="Cambria Math" panose="02040503050406030204" pitchFamily="18" charset="0"/>
+                            </a:rPr>
+                            <m:t>𝐷</m:t>
+                          </m:r>
+                        </m:e>
+                        <m:sub>
+                          <m:r>
+                            <a:rPr lang="en-US" sz="2000" b="0" i="1" smtClean="0">
+                              <a:latin typeface="Cambria Math" panose="02040503050406030204" pitchFamily="18" charset="0"/>
+                            </a:rPr>
+                            <m:t>𝐴</m:t>
+                          </m:r>
+                        </m:sub>
+                      </m:sSub>
+                      <m:sSub>
+                        <m:sSubPr>
+                          <m:ctrlPr>
+                            <a:rPr lang="en-US" sz="2000" i="1" smtClean="0">
+                              <a:latin typeface="Cambria Math" panose="02040503050406030204" pitchFamily="18" charset="0"/>
+                            </a:rPr>
+                          </m:ctrlPr>
+                        </m:sSubPr>
+                        <m:e>
+                          <m:r>
+                            <a:rPr lang="en-US" sz="2000" b="0" i="1" smtClean="0">
+                              <a:latin typeface="Cambria Math" panose="02040503050406030204" pitchFamily="18" charset="0"/>
+                            </a:rPr>
+                            <m:t>𝑇</m:t>
+                          </m:r>
+                        </m:e>
+                        <m:sub>
+                          <m:r>
+                            <a:rPr lang="en-US" sz="2000" b="0" i="1" smtClean="0">
+                              <a:latin typeface="Cambria Math" panose="02040503050406030204" pitchFamily="18" charset="0"/>
+                            </a:rPr>
+                            <m:t>𝑠</m:t>
+                          </m:r>
+                        </m:sub>
+                      </m:sSub>
+                    </m:oMath>
+                  </m:oMathPara>
+                </a14:m>
+                <a:endParaRPr lang="sv-SE" dirty="0"/>
+              </a:p>
+            </p:txBody>
+          </p:sp>
+        </mc:Choice>
+        <mc:Fallback>
+          <p:sp>
+            <p:nvSpPr>
+              <p:cNvPr id="45" name="TextBox 44"/>
+              <p:cNvSpPr txBox="1">
+                <a:spLocks noRot="1" noChangeAspect="1" noMove="1" noResize="1" noEditPoints="1" noAdjustHandles="1" noChangeArrowheads="1" noChangeShapeType="1" noTextEdit="1"/>
+              </p:cNvSpPr>
+              <p:nvPr/>
+            </p:nvSpPr>
+            <p:spPr>
+              <a:xfrm>
+                <a:off x="6845081" y="609155"/>
+                <a:ext cx="1266214" cy="400110"/>
+              </a:xfrm>
+              <a:prstGeom prst="rect">
+                <a:avLst/>
+              </a:prstGeom>
+              <a:blipFill>
+                <a:blip r:embed="rId11"/>
+                <a:stretch>
+                  <a:fillRect/>
+                </a:stretch>
+              </a:blipFill>
+            </p:spPr>
+            <p:txBody>
+              <a:bodyPr/>
+              <a:lstStyle/>
+              <a:p>
+                <a:r>
+                  <a:rPr lang="sv-SE">
+                    <a:noFill/>
+                  </a:rPr>
+                  <a:t> </a:t>
+                </a:r>
+              </a:p>
+            </p:txBody>
+          </p:sp>
+        </mc:Fallback>
+      </mc:AlternateContent>
+      <p:cxnSp>
+        <p:nvCxnSpPr>
+          <p:cNvPr id="46" name="Straight Arrow Connector 45"/>
+          <p:cNvCxnSpPr/>
+          <p:nvPr/>
+        </p:nvCxnSpPr>
+        <p:spPr>
+          <a:xfrm>
+            <a:off x="8203973" y="1783823"/>
+            <a:ext cx="1065435" cy="1"/>
+          </a:xfrm>
+          <a:prstGeom prst="straightConnector1">
+            <a:avLst/>
+          </a:prstGeom>
+          <a:ln w="38100">
+            <a:headEnd type="diamond"/>
+            <a:tailEnd type="triangle"/>
+          </a:ln>
+        </p:spPr>
+        <p:style>
+          <a:lnRef idx="3">
+            <a:schemeClr val="dk1"/>
+          </a:lnRef>
+          <a:fillRef idx="0">
+            <a:schemeClr val="dk1"/>
+          </a:fillRef>
+          <a:effectRef idx="2">
+            <a:schemeClr val="dk1"/>
+          </a:effectRef>
+          <a:fontRef idx="minor">
+            <a:schemeClr val="tx1"/>
+          </a:fontRef>
+        </p:style>
+      </p:cxnSp>
+      <p:cxnSp>
+        <p:nvCxnSpPr>
+          <p:cNvPr id="49" name="Straight Arrow Connector 48"/>
+          <p:cNvCxnSpPr/>
+          <p:nvPr/>
+        </p:nvCxnSpPr>
+        <p:spPr>
+          <a:xfrm flipH="1" flipV="1">
+            <a:off x="5722576" y="1777694"/>
+            <a:ext cx="1979653" cy="6129"/>
+          </a:xfrm>
+          <a:prstGeom prst="straightConnector1">
+            <a:avLst/>
+          </a:prstGeom>
+          <a:ln w="38100">
+            <a:headEnd type="diamond"/>
+            <a:tailEnd type="triangle"/>
+          </a:ln>
+        </p:spPr>
+        <p:style>
+          <a:lnRef idx="3">
+            <a:schemeClr val="dk1"/>
+          </a:lnRef>
+          <a:fillRef idx="0">
+            <a:schemeClr val="dk1"/>
+          </a:fillRef>
+          <a:effectRef idx="2">
+            <a:schemeClr val="dk1"/>
+          </a:effectRef>
+          <a:fontRef idx="minor">
+            <a:schemeClr val="tx1"/>
+          </a:fontRef>
+        </p:style>
+      </p:cxnSp>
+      <mc:AlternateContent xmlns:mc="http://schemas.openxmlformats.org/markup-compatibility/2006">
+        <mc:Choice xmlns:a14="http://schemas.microsoft.com/office/drawing/2010/main" Requires="a14">
+          <p:sp>
+            <p:nvSpPr>
+              <p:cNvPr id="51" name="TextBox 50"/>
+              <p:cNvSpPr txBox="1"/>
+              <p:nvPr/>
+            </p:nvSpPr>
+            <p:spPr>
+              <a:xfrm>
+                <a:off x="7329386" y="1338362"/>
+                <a:ext cx="1266214" cy="400110"/>
+              </a:xfrm>
+              <a:prstGeom prst="rect">
+                <a:avLst/>
+              </a:prstGeom>
+              <a:noFill/>
+            </p:spPr>
+            <p:txBody>
+              <a:bodyPr wrap="square" rtlCol="0">
+                <a:spAutoFit/>
+              </a:bodyPr>
+              <a:lstStyle/>
+              <a:p>
+                <a:pPr/>
+                <a14:m>
+                  <m:oMathPara xmlns:m="http://schemas.openxmlformats.org/officeDocument/2006/math">
+                    <m:oMathParaPr>
+                      <m:jc m:val="centerGroup"/>
+                    </m:oMathParaPr>
+                    <m:oMath xmlns:m="http://schemas.openxmlformats.org/officeDocument/2006/math">
+                      <m:sSub>
+                        <m:sSubPr>
+                          <m:ctrlPr>
+                            <a:rPr lang="en-US" sz="2000" i="1" smtClean="0">
+                              <a:latin typeface="Cambria Math" panose="02040503050406030204" pitchFamily="18" charset="0"/>
+                            </a:rPr>
+                          </m:ctrlPr>
+                        </m:sSubPr>
+                        <m:e>
+                          <m:r>
+                            <a:rPr lang="en-US" sz="2000" b="0" i="1" smtClean="0">
+                              <a:latin typeface="Cambria Math" panose="02040503050406030204" pitchFamily="18" charset="0"/>
+                            </a:rPr>
+                            <m:t>𝐷</m:t>
+                          </m:r>
+                        </m:e>
+                        <m:sub>
+                          <m:r>
+                            <a:rPr lang="en-US" sz="2000" b="0" i="1" smtClean="0">
+                              <a:latin typeface="Cambria Math" panose="02040503050406030204" pitchFamily="18" charset="0"/>
+                            </a:rPr>
+                            <m:t>𝐵</m:t>
+                          </m:r>
+                        </m:sub>
+                      </m:sSub>
+                      <m:sSub>
+                        <m:sSubPr>
+                          <m:ctrlPr>
+                            <a:rPr lang="en-US" sz="2000" i="1" smtClean="0">
+                              <a:latin typeface="Cambria Math" panose="02040503050406030204" pitchFamily="18" charset="0"/>
+                            </a:rPr>
+                          </m:ctrlPr>
+                        </m:sSubPr>
+                        <m:e>
+                          <m:r>
+                            <a:rPr lang="en-US" sz="2000" b="0" i="1" smtClean="0">
+                              <a:latin typeface="Cambria Math" panose="02040503050406030204" pitchFamily="18" charset="0"/>
+                            </a:rPr>
+                            <m:t>𝑇</m:t>
+                          </m:r>
+                        </m:e>
+                        <m:sub>
+                          <m:r>
+                            <a:rPr lang="en-US" sz="2000" b="0" i="1" smtClean="0">
+                              <a:latin typeface="Cambria Math" panose="02040503050406030204" pitchFamily="18" charset="0"/>
+                            </a:rPr>
+                            <m:t>𝑠</m:t>
+                          </m:r>
+                        </m:sub>
+                      </m:sSub>
+                    </m:oMath>
+                  </m:oMathPara>
+                </a14:m>
+                <a:endParaRPr lang="sv-SE" dirty="0"/>
+              </a:p>
+            </p:txBody>
+          </p:sp>
+        </mc:Choice>
+        <mc:Fallback>
+          <p:sp>
+            <p:nvSpPr>
+              <p:cNvPr id="51" name="TextBox 50"/>
+              <p:cNvSpPr txBox="1">
+                <a:spLocks noRot="1" noChangeAspect="1" noMove="1" noResize="1" noEditPoints="1" noAdjustHandles="1" noChangeArrowheads="1" noChangeShapeType="1" noTextEdit="1"/>
+              </p:cNvSpPr>
+              <p:nvPr/>
+            </p:nvSpPr>
+            <p:spPr>
+              <a:xfrm>
+                <a:off x="7329386" y="1338362"/>
+                <a:ext cx="1266214" cy="400110"/>
+              </a:xfrm>
+              <a:prstGeom prst="rect">
+                <a:avLst/>
+              </a:prstGeom>
+              <a:blipFill>
+                <a:blip r:embed="rId12"/>
+                <a:stretch>
+                  <a:fillRect b="-1538"/>
+                </a:stretch>
+              </a:blipFill>
+            </p:spPr>
+            <p:txBody>
+              <a:bodyPr/>
+              <a:lstStyle/>
+              <a:p>
+                <a:r>
+                  <a:rPr lang="sv-SE">
+                    <a:noFill/>
+                  </a:rPr>
+                  <a:t> </a:t>
+                </a:r>
+              </a:p>
+            </p:txBody>
+          </p:sp>
+        </mc:Fallback>
+      </mc:AlternateContent>
+      <p:cxnSp>
+        <p:nvCxnSpPr>
+          <p:cNvPr id="52" name="Straight Arrow Connector 51"/>
+          <p:cNvCxnSpPr/>
+          <p:nvPr/>
+        </p:nvCxnSpPr>
+        <p:spPr>
+          <a:xfrm flipH="1" flipV="1">
+            <a:off x="7802461" y="2786247"/>
+            <a:ext cx="279228" cy="2078"/>
+          </a:xfrm>
+          <a:prstGeom prst="straightConnector1">
+            <a:avLst/>
+          </a:prstGeom>
+          <a:ln w="38100">
+            <a:headEnd type="diamond"/>
+            <a:tailEnd type="triangle"/>
+          </a:ln>
+        </p:spPr>
+        <p:style>
+          <a:lnRef idx="3">
+            <a:schemeClr val="dk1"/>
+          </a:lnRef>
+          <a:fillRef idx="0">
+            <a:schemeClr val="dk1"/>
+          </a:fillRef>
+          <a:effectRef idx="2">
+            <a:schemeClr val="dk1"/>
+          </a:effectRef>
+          <a:fontRef idx="minor">
+            <a:schemeClr val="tx1"/>
+          </a:fontRef>
+        </p:style>
+      </p:cxnSp>
+      <p:cxnSp>
+        <p:nvCxnSpPr>
+          <p:cNvPr id="56" name="Straight Arrow Connector 55"/>
+          <p:cNvCxnSpPr/>
+          <p:nvPr/>
+        </p:nvCxnSpPr>
+        <p:spPr>
+          <a:xfrm>
+            <a:off x="7198263" y="2786247"/>
+            <a:ext cx="303142" cy="643"/>
+          </a:xfrm>
+          <a:prstGeom prst="straightConnector1">
+            <a:avLst/>
+          </a:prstGeom>
+          <a:ln w="38100">
+            <a:headEnd type="diamond"/>
+            <a:tailEnd type="triangle"/>
+          </a:ln>
+        </p:spPr>
+        <p:style>
+          <a:lnRef idx="3">
+            <a:schemeClr val="dk1"/>
+          </a:lnRef>
+          <a:fillRef idx="0">
+            <a:schemeClr val="dk1"/>
+          </a:fillRef>
+          <a:effectRef idx="2">
+            <a:schemeClr val="dk1"/>
+          </a:effectRef>
+          <a:fontRef idx="minor">
+            <a:schemeClr val="tx1"/>
+          </a:fontRef>
+        </p:style>
+      </p:cxnSp>
+      <mc:AlternateContent xmlns:mc="http://schemas.openxmlformats.org/markup-compatibility/2006">
+        <mc:Choice xmlns:a14="http://schemas.microsoft.com/office/drawing/2010/main" Requires="a14">
+          <p:sp>
+            <p:nvSpPr>
+              <p:cNvPr id="58" name="TextBox 57"/>
+              <p:cNvSpPr txBox="1"/>
+              <p:nvPr/>
+            </p:nvSpPr>
+            <p:spPr>
+              <a:xfrm>
+                <a:off x="7012134" y="2341807"/>
+                <a:ext cx="1266214" cy="400110"/>
+              </a:xfrm>
+              <a:prstGeom prst="rect">
+                <a:avLst/>
+              </a:prstGeom>
+              <a:noFill/>
+            </p:spPr>
+            <p:txBody>
+              <a:bodyPr wrap="square" rtlCol="0">
+                <a:spAutoFit/>
+              </a:bodyPr>
+              <a:lstStyle/>
+              <a:p>
+                <a:pPr/>
+                <a14:m>
+                  <m:oMathPara xmlns:m="http://schemas.openxmlformats.org/officeDocument/2006/math">
+                    <m:oMathParaPr>
+                      <m:jc m:val="centerGroup"/>
+                    </m:oMathParaPr>
+                    <m:oMath xmlns:m="http://schemas.openxmlformats.org/officeDocument/2006/math">
+                      <m:sSub>
+                        <m:sSubPr>
+                          <m:ctrlPr>
+                            <a:rPr lang="en-US" sz="2000" i="1" smtClean="0">
+                              <a:latin typeface="Cambria Math" panose="02040503050406030204" pitchFamily="18" charset="0"/>
+                            </a:rPr>
+                          </m:ctrlPr>
+                        </m:sSubPr>
+                        <m:e>
+                          <m:r>
+                            <a:rPr lang="en-US" sz="2000" b="0" i="1" smtClean="0">
+                              <a:latin typeface="Cambria Math" panose="02040503050406030204" pitchFamily="18" charset="0"/>
+                            </a:rPr>
+                            <m:t>𝐷</m:t>
+                          </m:r>
+                        </m:e>
+                        <m:sub>
+                          <m:r>
+                            <a:rPr lang="en-US" sz="2000" b="0" i="1" smtClean="0">
+                              <a:latin typeface="Cambria Math" panose="02040503050406030204" pitchFamily="18" charset="0"/>
+                            </a:rPr>
+                            <m:t>𝐶</m:t>
+                          </m:r>
+                        </m:sub>
+                      </m:sSub>
+                      <m:sSub>
+                        <m:sSubPr>
+                          <m:ctrlPr>
+                            <a:rPr lang="en-US" sz="2000" i="1" smtClean="0">
+                              <a:latin typeface="Cambria Math" panose="02040503050406030204" pitchFamily="18" charset="0"/>
+                            </a:rPr>
+                          </m:ctrlPr>
+                        </m:sSubPr>
+                        <m:e>
+                          <m:r>
+                            <a:rPr lang="en-US" sz="2000" b="0" i="1" smtClean="0">
+                              <a:latin typeface="Cambria Math" panose="02040503050406030204" pitchFamily="18" charset="0"/>
+                            </a:rPr>
+                            <m:t>𝑇</m:t>
+                          </m:r>
+                        </m:e>
+                        <m:sub>
+                          <m:r>
+                            <a:rPr lang="en-US" sz="2000" b="0" i="1" smtClean="0">
+                              <a:latin typeface="Cambria Math" panose="02040503050406030204" pitchFamily="18" charset="0"/>
+                            </a:rPr>
+                            <m:t>𝑠</m:t>
+                          </m:r>
+                        </m:sub>
+                      </m:sSub>
+                    </m:oMath>
+                  </m:oMathPara>
+                </a14:m>
+                <a:endParaRPr lang="sv-SE" dirty="0"/>
+              </a:p>
+            </p:txBody>
+          </p:sp>
+        </mc:Choice>
+        <mc:Fallback>
+          <p:sp>
+            <p:nvSpPr>
+              <p:cNvPr id="58" name="TextBox 57"/>
+              <p:cNvSpPr txBox="1">
+                <a:spLocks noRot="1" noChangeAspect="1" noMove="1" noResize="1" noEditPoints="1" noAdjustHandles="1" noChangeArrowheads="1" noChangeShapeType="1" noTextEdit="1"/>
+              </p:cNvSpPr>
+              <p:nvPr/>
+            </p:nvSpPr>
+            <p:spPr>
+              <a:xfrm>
+                <a:off x="7012134" y="2341807"/>
+                <a:ext cx="1266214" cy="400110"/>
+              </a:xfrm>
+              <a:prstGeom prst="rect">
+                <a:avLst/>
+              </a:prstGeom>
+              <a:blipFill>
+                <a:blip r:embed="rId13"/>
+                <a:stretch>
+                  <a:fillRect/>
+                </a:stretch>
+              </a:blipFill>
+            </p:spPr>
+            <p:txBody>
+              <a:bodyPr/>
+              <a:lstStyle/>
+              <a:p>
+                <a:r>
+                  <a:rPr lang="sv-SE">
+                    <a:noFill/>
+                  </a:rPr>
+                  <a:t> </a:t>
+                </a:r>
+              </a:p>
+            </p:txBody>
+          </p:sp>
+        </mc:Fallback>
+      </mc:AlternateContent>
+      <p:sp>
+        <p:nvSpPr>
+          <p:cNvPr id="33" name="TextBox 32"/>
+          <p:cNvSpPr txBox="1"/>
+          <p:nvPr/>
+        </p:nvSpPr>
+        <p:spPr>
+          <a:xfrm>
+            <a:off x="2141447" y="62148"/>
+            <a:ext cx="545691" cy="461665"/>
+          </a:xfrm>
+          <a:prstGeom prst="rect">
+            <a:avLst/>
+          </a:prstGeom>
+          <a:noFill/>
+        </p:spPr>
+        <p:txBody>
+          <a:bodyPr wrap="square" rtlCol="0">
+            <a:spAutoFit/>
+          </a:bodyPr>
+          <a:lstStyle/>
+          <a:p>
+            <a:r>
+              <a:rPr lang="en-US" sz="2400" dirty="0" smtClean="0"/>
+              <a:t>(a)</a:t>
+            </a:r>
+            <a:endParaRPr lang="sv-SE" sz="2400" dirty="0"/>
+          </a:p>
+        </p:txBody>
+      </p:sp>
+      <p:sp>
+        <p:nvSpPr>
+          <p:cNvPr id="34" name="TextBox 33"/>
+          <p:cNvSpPr txBox="1"/>
+          <p:nvPr/>
+        </p:nvSpPr>
+        <p:spPr>
+          <a:xfrm>
+            <a:off x="2265527" y="4276655"/>
+            <a:ext cx="545691" cy="461665"/>
+          </a:xfrm>
+          <a:prstGeom prst="rect">
+            <a:avLst/>
+          </a:prstGeom>
+          <a:noFill/>
+        </p:spPr>
+        <p:txBody>
+          <a:bodyPr wrap="square" rtlCol="0">
+            <a:spAutoFit/>
+          </a:bodyPr>
+          <a:lstStyle/>
+          <a:p>
+            <a:r>
+              <a:rPr lang="en-US" sz="2400" dirty="0" smtClean="0"/>
+              <a:t>(c)</a:t>
+            </a:r>
+            <a:endParaRPr lang="sv-SE" sz="2400" dirty="0"/>
+          </a:p>
+        </p:txBody>
+      </p:sp>
+      <p:sp>
+        <p:nvSpPr>
+          <p:cNvPr id="50" name="TextBox 49"/>
+          <p:cNvSpPr txBox="1"/>
+          <p:nvPr/>
+        </p:nvSpPr>
+        <p:spPr>
+          <a:xfrm>
+            <a:off x="7196229" y="87005"/>
+            <a:ext cx="545691" cy="461665"/>
+          </a:xfrm>
+          <a:prstGeom prst="rect">
+            <a:avLst/>
+          </a:prstGeom>
+          <a:noFill/>
+        </p:spPr>
+        <p:txBody>
+          <a:bodyPr wrap="square" rtlCol="0">
+            <a:spAutoFit/>
+          </a:bodyPr>
+          <a:lstStyle/>
+          <a:p>
+            <a:r>
+              <a:rPr lang="en-US" sz="2400" dirty="0" smtClean="0"/>
+              <a:t>(b)</a:t>
+            </a:r>
+            <a:endParaRPr lang="sv-SE" sz="2400" dirty="0"/>
+          </a:p>
+        </p:txBody>
+      </p:sp>
+      <p:sp>
+        <p:nvSpPr>
+          <p:cNvPr id="57" name="TextBox 56"/>
+          <p:cNvSpPr txBox="1"/>
+          <p:nvPr/>
+        </p:nvSpPr>
+        <p:spPr>
+          <a:xfrm>
+            <a:off x="7236098" y="4282275"/>
+            <a:ext cx="545691" cy="461665"/>
+          </a:xfrm>
+          <a:prstGeom prst="rect">
+            <a:avLst/>
+          </a:prstGeom>
+          <a:noFill/>
+        </p:spPr>
+        <p:txBody>
+          <a:bodyPr wrap="square" rtlCol="0">
+            <a:spAutoFit/>
+          </a:bodyPr>
+          <a:lstStyle/>
+          <a:p>
+            <a:r>
+              <a:rPr lang="en-US" sz="2400" dirty="0" smtClean="0"/>
+              <a:t>(d)</a:t>
+            </a:r>
+            <a:endParaRPr lang="sv-SE" sz="2400" dirty="0"/>
+          </a:p>
+        </p:txBody>
+      </p:sp>
+      <p:sp>
+        <p:nvSpPr>
+          <p:cNvPr id="59" name="TextBox 58"/>
+          <p:cNvSpPr txBox="1"/>
+          <p:nvPr/>
+        </p:nvSpPr>
+        <p:spPr>
+          <a:xfrm>
+            <a:off x="7404546" y="8410683"/>
+            <a:ext cx="545691" cy="461665"/>
+          </a:xfrm>
+          <a:prstGeom prst="rect">
+            <a:avLst/>
+          </a:prstGeom>
+          <a:noFill/>
+        </p:spPr>
+        <p:txBody>
+          <a:bodyPr wrap="square" rtlCol="0">
+            <a:spAutoFit/>
+          </a:bodyPr>
+          <a:lstStyle/>
+          <a:p>
+            <a:r>
+              <a:rPr lang="en-US" sz="2400" dirty="0" smtClean="0"/>
+              <a:t>(f)</a:t>
+            </a:r>
+            <a:endParaRPr lang="sv-SE" sz="2400" dirty="0"/>
+          </a:p>
+        </p:txBody>
+      </p:sp>
+      <p:sp>
+        <p:nvSpPr>
+          <p:cNvPr id="73" name="TextBox 72"/>
+          <p:cNvSpPr txBox="1"/>
+          <p:nvPr/>
+        </p:nvSpPr>
+        <p:spPr>
+          <a:xfrm>
+            <a:off x="2347641" y="8408546"/>
+            <a:ext cx="545691" cy="461665"/>
+          </a:xfrm>
+          <a:prstGeom prst="rect">
+            <a:avLst/>
+          </a:prstGeom>
+          <a:noFill/>
+        </p:spPr>
+        <p:txBody>
+          <a:bodyPr wrap="square" rtlCol="0">
+            <a:spAutoFit/>
+          </a:bodyPr>
+          <a:lstStyle/>
+          <a:p>
+            <a:r>
+              <a:rPr lang="en-US" sz="2400" dirty="0" smtClean="0"/>
+              <a:t>(e)</a:t>
+            </a:r>
+            <a:endParaRPr lang="sv-SE" sz="2400" dirty="0"/>
+          </a:p>
+        </p:txBody>
+      </p:sp>
+    </p:spTree>
+    <p:extLst>
+      <p:ext uri="{BB962C8B-B14F-4D97-AF65-F5344CB8AC3E}">
+        <p14:creationId xmlns:p14="http://schemas.microsoft.com/office/powerpoint/2010/main" val="299714225"/>
+      </p:ext>
+    </p:extLst>
+  </p:cSld>
+  <p:clrMapOvr>
+    <a:masterClrMapping/>
+  </p:clrMapOvr>
+</p:sld>
+</file>
+
+<file path=ppt/slides/slide13.xml><?xml version="1.0" encoding="utf-8"?>
 <p:sld xmlns:a="http://schemas.openxmlformats.org/drawingml/2006/main" xmlns:r="http://schemas.openxmlformats.org/officeDocument/2006/relationships" xmlns:p="http://schemas.openxmlformats.org/presentationml/2006/main">
   <p:cSld>
     <p:spTree>
@@ -8737,7 +10717,7 @@
 </p:sld>
 </file>
 
-<file path=ppt/slides/slide12.xml><?xml version="1.0" encoding="utf-8"?>
+<file path=ppt/slides/slide14.xml><?xml version="1.0" encoding="utf-8"?>
 <p:sld xmlns:a="http://schemas.openxmlformats.org/drawingml/2006/main" xmlns:r="http://schemas.openxmlformats.org/officeDocument/2006/relationships" xmlns:p="http://schemas.openxmlformats.org/presentationml/2006/main">
   <p:cSld>
     <p:spTree>
@@ -9754,7 +11734,7 @@
 </p:sld>
 </file>
 
-<file path=ppt/slides/slide13.xml><?xml version="1.0" encoding="utf-8"?>
+<file path=ppt/slides/slide15.xml><?xml version="1.0" encoding="utf-8"?>
 <p:sld xmlns:a="http://schemas.openxmlformats.org/drawingml/2006/main" xmlns:r="http://schemas.openxmlformats.org/officeDocument/2006/relationships" xmlns:p="http://schemas.openxmlformats.org/presentationml/2006/main">
   <p:cSld>
     <p:spTree>
@@ -9771,8 +11751,8 @@
           <a:chExt cx="0" cy="0"/>
         </a:xfrm>
       </p:grpSpPr>
-      <mc:AlternateContent xmlns:mc="http://schemas.openxmlformats.org/markup-compatibility/2006">
-        <mc:Choice xmlns:a14="http://schemas.microsoft.com/office/drawing/2010/main" Requires="a14">
+      <mc:AlternateContent xmlns:mc="http://schemas.openxmlformats.org/markup-compatibility/2006" xmlns:a14="http://schemas.microsoft.com/office/drawing/2010/main">
+        <mc:Choice Requires="a14">
           <p:sp>
             <p:nvSpPr>
               <p:cNvPr id="44" name="TextBox 43"/>
@@ -9853,7 +11833,7 @@
             </p:txBody>
           </p:sp>
         </mc:Choice>
-        <mc:Fallback>
+        <mc:Fallback xmlns="">
           <p:sp>
             <p:nvSpPr>
               <p:cNvPr id="44" name="TextBox 43"/>
@@ -9894,7 +11874,7 @@
       </mc:AlternateContent>
       <p:pic>
         <p:nvPicPr>
-          <p:cNvPr id="8" name="Picture 7"/>
+          <p:cNvPr id="9" name="Picture 8"/>
           <p:cNvPicPr>
             <a:picLocks noChangeAspect="1"/>
           </p:cNvPicPr>
@@ -9908,7 +11888,7 @@
         </p:blipFill>
         <p:spPr>
           <a:xfrm>
-            <a:off x="-4018822" y="-170586"/>
+            <a:off x="1315178" y="-190631"/>
             <a:ext cx="5334000" cy="4000500"/>
           </a:xfrm>
           <a:prstGeom prst="rect">
@@ -9916,9 +11896,189 @@
           </a:prstGeom>
         </p:spPr>
       </p:pic>
+      <p:sp>
+        <p:nvSpPr>
+          <p:cNvPr id="58" name="TextBox 57"/>
+          <p:cNvSpPr txBox="1"/>
+          <p:nvPr/>
+        </p:nvSpPr>
+        <p:spPr>
+          <a:xfrm>
+            <a:off x="-1447454" y="3829914"/>
+            <a:ext cx="545691" cy="461665"/>
+          </a:xfrm>
+          <a:prstGeom prst="rect">
+            <a:avLst/>
+          </a:prstGeom>
+          <a:noFill/>
+        </p:spPr>
+        <p:txBody>
+          <a:bodyPr wrap="square" rtlCol="0">
+            <a:spAutoFit/>
+          </a:bodyPr>
+          <a:lstStyle/>
+          <a:p>
+            <a:r>
+              <a:rPr lang="en-US" sz="2400" dirty="0" smtClean="0"/>
+              <a:t>(a)</a:t>
+            </a:r>
+            <a:endParaRPr lang="sv-SE" sz="2400" dirty="0"/>
+          </a:p>
+        </p:txBody>
+      </p:sp>
+      <p:sp>
+        <p:nvSpPr>
+          <p:cNvPr id="59" name="TextBox 58"/>
+          <p:cNvSpPr txBox="1"/>
+          <p:nvPr/>
+        </p:nvSpPr>
+        <p:spPr>
+          <a:xfrm>
+            <a:off x="3788605" y="3810202"/>
+            <a:ext cx="545691" cy="461665"/>
+          </a:xfrm>
+          <a:prstGeom prst="rect">
+            <a:avLst/>
+          </a:prstGeom>
+          <a:noFill/>
+        </p:spPr>
+        <p:txBody>
+          <a:bodyPr wrap="square" rtlCol="0">
+            <a:spAutoFit/>
+          </a:bodyPr>
+          <a:lstStyle/>
+          <a:p>
+            <a:r>
+              <a:rPr lang="en-US" sz="2400" dirty="0" smtClean="0"/>
+              <a:t>(b)</a:t>
+            </a:r>
+            <a:endParaRPr lang="sv-SE" sz="2400" dirty="0"/>
+          </a:p>
+        </p:txBody>
+      </p:sp>
+      <p:sp>
+        <p:nvSpPr>
+          <p:cNvPr id="60" name="TextBox 59"/>
+          <p:cNvSpPr txBox="1"/>
+          <p:nvPr/>
+        </p:nvSpPr>
+        <p:spPr>
+          <a:xfrm>
+            <a:off x="9122606" y="3789823"/>
+            <a:ext cx="545691" cy="461665"/>
+          </a:xfrm>
+          <a:prstGeom prst="rect">
+            <a:avLst/>
+          </a:prstGeom>
+          <a:noFill/>
+        </p:spPr>
+        <p:txBody>
+          <a:bodyPr wrap="square" rtlCol="0">
+            <a:spAutoFit/>
+          </a:bodyPr>
+          <a:lstStyle/>
+          <a:p>
+            <a:r>
+              <a:rPr lang="en-US" sz="2400" dirty="0" smtClean="0"/>
+              <a:t>(c)</a:t>
+            </a:r>
+            <a:endParaRPr lang="sv-SE" sz="2400" dirty="0"/>
+          </a:p>
+        </p:txBody>
+      </p:sp>
+      <p:sp>
+        <p:nvSpPr>
+          <p:cNvPr id="61" name="TextBox 60"/>
+          <p:cNvSpPr txBox="1"/>
+          <p:nvPr/>
+        </p:nvSpPr>
+        <p:spPr>
+          <a:xfrm>
+            <a:off x="-1447454" y="8191517"/>
+            <a:ext cx="545691" cy="461665"/>
+          </a:xfrm>
+          <a:prstGeom prst="rect">
+            <a:avLst/>
+          </a:prstGeom>
+          <a:noFill/>
+        </p:spPr>
+        <p:txBody>
+          <a:bodyPr wrap="square" rtlCol="0">
+            <a:spAutoFit/>
+          </a:bodyPr>
+          <a:lstStyle/>
+          <a:p>
+            <a:r>
+              <a:rPr lang="en-US" sz="2400" dirty="0" smtClean="0"/>
+              <a:t>(d)</a:t>
+            </a:r>
+            <a:endParaRPr lang="sv-SE" sz="2400" dirty="0"/>
+          </a:p>
+        </p:txBody>
+      </p:sp>
+      <p:sp>
+        <p:nvSpPr>
+          <p:cNvPr id="62" name="TextBox 61"/>
+          <p:cNvSpPr txBox="1"/>
+          <p:nvPr/>
+        </p:nvSpPr>
+        <p:spPr>
+          <a:xfrm>
+            <a:off x="3788605" y="8171805"/>
+            <a:ext cx="545691" cy="461665"/>
+          </a:xfrm>
+          <a:prstGeom prst="rect">
+            <a:avLst/>
+          </a:prstGeom>
+          <a:noFill/>
+        </p:spPr>
+        <p:txBody>
+          <a:bodyPr wrap="square" rtlCol="0">
+            <a:spAutoFit/>
+          </a:bodyPr>
+          <a:lstStyle/>
+          <a:p>
+            <a:r>
+              <a:rPr lang="en-US" sz="2400" dirty="0" smtClean="0"/>
+              <a:t>(e)</a:t>
+            </a:r>
+            <a:endParaRPr lang="sv-SE" sz="2400" dirty="0"/>
+          </a:p>
+        </p:txBody>
+      </p:sp>
+      <p:sp>
+        <p:nvSpPr>
+          <p:cNvPr id="63" name="TextBox 62"/>
+          <p:cNvSpPr txBox="1"/>
+          <p:nvPr/>
+        </p:nvSpPr>
+        <p:spPr>
+          <a:xfrm>
+            <a:off x="9122605" y="8101310"/>
+            <a:ext cx="707195" cy="461665"/>
+          </a:xfrm>
+          <a:prstGeom prst="rect">
+            <a:avLst/>
+          </a:prstGeom>
+          <a:noFill/>
+        </p:spPr>
+        <p:txBody>
+          <a:bodyPr wrap="square" rtlCol="0">
+            <a:spAutoFit/>
+          </a:bodyPr>
+          <a:lstStyle/>
+          <a:p>
+            <a:r>
+              <a:rPr lang="en-US" sz="2400" dirty="0" smtClean="0"/>
+              <a:t>(f)</a:t>
+            </a:r>
+            <a:endParaRPr lang="sv-SE" sz="2400" dirty="0"/>
+          </a:p>
+        </p:txBody>
+      </p:sp>
       <p:pic>
         <p:nvPicPr>
-          <p:cNvPr id="9" name="Picture 8"/>
+          <p:cNvPr id="47" name="Picture 46"/>
           <p:cNvPicPr>
             <a:picLocks noChangeAspect="1"/>
           </p:cNvPicPr>
@@ -9932,7 +12092,7 @@
         </p:blipFill>
         <p:spPr>
           <a:xfrm>
-            <a:off x="1315178" y="-190631"/>
+            <a:off x="1345480" y="4171305"/>
             <a:ext cx="5334000" cy="4000500"/>
           </a:xfrm>
           <a:prstGeom prst="rect">
@@ -9942,7 +12102,7 @@
       </p:pic>
       <p:pic>
         <p:nvPicPr>
-          <p:cNvPr id="10" name="Picture 9"/>
+          <p:cNvPr id="2" name="Picture 1"/>
           <p:cNvPicPr>
             <a:picLocks noChangeAspect="1"/>
           </p:cNvPicPr>
@@ -9956,7 +12116,7 @@
         </p:blipFill>
         <p:spPr>
           <a:xfrm>
-            <a:off x="6301550" y="-210677"/>
+            <a:off x="6357664" y="-170586"/>
             <a:ext cx="5334000" cy="4000500"/>
           </a:xfrm>
           <a:prstGeom prst="rect">
@@ -9964,189 +12124,9 @@
           </a:prstGeom>
         </p:spPr>
       </p:pic>
-      <p:sp>
-        <p:nvSpPr>
-          <p:cNvPr id="58" name="TextBox 57"/>
-          <p:cNvSpPr txBox="1"/>
-          <p:nvPr/>
-        </p:nvSpPr>
-        <p:spPr>
-          <a:xfrm>
-            <a:off x="-1447454" y="3829914"/>
-            <a:ext cx="545691" cy="461665"/>
-          </a:xfrm>
-          <a:prstGeom prst="rect">
-            <a:avLst/>
-          </a:prstGeom>
-          <a:noFill/>
-        </p:spPr>
-        <p:txBody>
-          <a:bodyPr wrap="square" rtlCol="0">
-            <a:spAutoFit/>
-          </a:bodyPr>
-          <a:lstStyle/>
-          <a:p>
-            <a:r>
-              <a:rPr lang="en-US" sz="2400" dirty="0" smtClean="0"/>
-              <a:t>(a)</a:t>
-            </a:r>
-            <a:endParaRPr lang="sv-SE" sz="2400" dirty="0"/>
-          </a:p>
-        </p:txBody>
-      </p:sp>
-      <p:sp>
-        <p:nvSpPr>
-          <p:cNvPr id="59" name="TextBox 58"/>
-          <p:cNvSpPr txBox="1"/>
-          <p:nvPr/>
-        </p:nvSpPr>
-        <p:spPr>
-          <a:xfrm>
-            <a:off x="3788605" y="3810202"/>
-            <a:ext cx="545691" cy="461665"/>
-          </a:xfrm>
-          <a:prstGeom prst="rect">
-            <a:avLst/>
-          </a:prstGeom>
-          <a:noFill/>
-        </p:spPr>
-        <p:txBody>
-          <a:bodyPr wrap="square" rtlCol="0">
-            <a:spAutoFit/>
-          </a:bodyPr>
-          <a:lstStyle/>
-          <a:p>
-            <a:r>
-              <a:rPr lang="en-US" sz="2400" dirty="0" smtClean="0"/>
-              <a:t>(b)</a:t>
-            </a:r>
-            <a:endParaRPr lang="sv-SE" sz="2400" dirty="0"/>
-          </a:p>
-        </p:txBody>
-      </p:sp>
-      <p:sp>
-        <p:nvSpPr>
-          <p:cNvPr id="60" name="TextBox 59"/>
-          <p:cNvSpPr txBox="1"/>
-          <p:nvPr/>
-        </p:nvSpPr>
-        <p:spPr>
-          <a:xfrm>
-            <a:off x="9122606" y="3789823"/>
-            <a:ext cx="545691" cy="461665"/>
-          </a:xfrm>
-          <a:prstGeom prst="rect">
-            <a:avLst/>
-          </a:prstGeom>
-          <a:noFill/>
-        </p:spPr>
-        <p:txBody>
-          <a:bodyPr wrap="square" rtlCol="0">
-            <a:spAutoFit/>
-          </a:bodyPr>
-          <a:lstStyle/>
-          <a:p>
-            <a:r>
-              <a:rPr lang="en-US" sz="2400" dirty="0" smtClean="0"/>
-              <a:t>(c)</a:t>
-            </a:r>
-            <a:endParaRPr lang="sv-SE" sz="2400" dirty="0"/>
-          </a:p>
-        </p:txBody>
-      </p:sp>
-      <p:sp>
-        <p:nvSpPr>
-          <p:cNvPr id="61" name="TextBox 60"/>
-          <p:cNvSpPr txBox="1"/>
-          <p:nvPr/>
-        </p:nvSpPr>
-        <p:spPr>
-          <a:xfrm>
-            <a:off x="-1447454" y="8191517"/>
-            <a:ext cx="545691" cy="461665"/>
-          </a:xfrm>
-          <a:prstGeom prst="rect">
-            <a:avLst/>
-          </a:prstGeom>
-          <a:noFill/>
-        </p:spPr>
-        <p:txBody>
-          <a:bodyPr wrap="square" rtlCol="0">
-            <a:spAutoFit/>
-          </a:bodyPr>
-          <a:lstStyle/>
-          <a:p>
-            <a:r>
-              <a:rPr lang="en-US" sz="2400" dirty="0" smtClean="0"/>
-              <a:t>(d)</a:t>
-            </a:r>
-            <a:endParaRPr lang="sv-SE" sz="2400" dirty="0"/>
-          </a:p>
-        </p:txBody>
-      </p:sp>
-      <p:sp>
-        <p:nvSpPr>
-          <p:cNvPr id="62" name="TextBox 61"/>
-          <p:cNvSpPr txBox="1"/>
-          <p:nvPr/>
-        </p:nvSpPr>
-        <p:spPr>
-          <a:xfrm>
-            <a:off x="3788605" y="8171805"/>
-            <a:ext cx="545691" cy="461665"/>
-          </a:xfrm>
-          <a:prstGeom prst="rect">
-            <a:avLst/>
-          </a:prstGeom>
-          <a:noFill/>
-        </p:spPr>
-        <p:txBody>
-          <a:bodyPr wrap="square" rtlCol="0">
-            <a:spAutoFit/>
-          </a:bodyPr>
-          <a:lstStyle/>
-          <a:p>
-            <a:r>
-              <a:rPr lang="en-US" sz="2400" dirty="0" smtClean="0"/>
-              <a:t>(e)</a:t>
-            </a:r>
-            <a:endParaRPr lang="sv-SE" sz="2400" dirty="0"/>
-          </a:p>
-        </p:txBody>
-      </p:sp>
-      <p:sp>
-        <p:nvSpPr>
-          <p:cNvPr id="63" name="TextBox 62"/>
-          <p:cNvSpPr txBox="1"/>
-          <p:nvPr/>
-        </p:nvSpPr>
-        <p:spPr>
-          <a:xfrm>
-            <a:off x="9122605" y="8153436"/>
-            <a:ext cx="545691" cy="461665"/>
-          </a:xfrm>
-          <a:prstGeom prst="rect">
-            <a:avLst/>
-          </a:prstGeom>
-          <a:noFill/>
-        </p:spPr>
-        <p:txBody>
-          <a:bodyPr wrap="square" rtlCol="0">
-            <a:spAutoFit/>
-          </a:bodyPr>
-          <a:lstStyle/>
-          <a:p>
-            <a:r>
-              <a:rPr lang="en-US" sz="2400" dirty="0" smtClean="0"/>
-              <a:t>(f)</a:t>
-            </a:r>
-            <a:endParaRPr lang="sv-SE" sz="2400" dirty="0"/>
-          </a:p>
-        </p:txBody>
-      </p:sp>
       <p:pic>
         <p:nvPicPr>
-          <p:cNvPr id="46" name="Picture 45"/>
+          <p:cNvPr id="3" name="Picture 2"/>
           <p:cNvPicPr>
             <a:picLocks noChangeAspect="1"/>
           </p:cNvPicPr>
@@ -10160,7 +12140,7 @@
         </p:blipFill>
         <p:spPr>
           <a:xfrm>
-            <a:off x="6357664" y="4171305"/>
+            <a:off x="6357664" y="4189674"/>
             <a:ext cx="5334000" cy="4000500"/>
           </a:xfrm>
           <a:prstGeom prst="rect">
@@ -10170,7 +12150,7 @@
       </p:pic>
       <p:pic>
         <p:nvPicPr>
-          <p:cNvPr id="47" name="Picture 46"/>
+          <p:cNvPr id="5" name="Picture 4"/>
           <p:cNvPicPr>
             <a:picLocks noChangeAspect="1"/>
           </p:cNvPicPr>
@@ -10184,7 +12164,7 @@
         </p:blipFill>
         <p:spPr>
           <a:xfrm>
-            <a:off x="1345480" y="4171305"/>
+            <a:off x="-4149428" y="4171305"/>
             <a:ext cx="5334000" cy="4000500"/>
           </a:xfrm>
           <a:prstGeom prst="rect">
@@ -10194,7 +12174,7 @@
       </p:pic>
       <p:pic>
         <p:nvPicPr>
-          <p:cNvPr id="48" name="Picture 47"/>
+          <p:cNvPr id="6" name="Picture 5"/>
           <p:cNvPicPr>
             <a:picLocks noChangeAspect="1"/>
           </p:cNvPicPr>
@@ -10208,86 +12188,8 @@
         </p:blipFill>
         <p:spPr>
           <a:xfrm>
-            <a:off x="-3890579" y="4152936"/>
+            <a:off x="-4114454" y="-190631"/>
             <a:ext cx="5334000" cy="4000500"/>
-          </a:xfrm>
-          <a:prstGeom prst="rect">
-            <a:avLst/>
-          </a:prstGeom>
-        </p:spPr>
-      </p:pic>
-    </p:spTree>
-    <p:extLst>
-      <p:ext uri="{BB962C8B-B14F-4D97-AF65-F5344CB8AC3E}">
-        <p14:creationId xmlns:p14="http://schemas.microsoft.com/office/powerpoint/2010/main" val="1787800150"/>
-      </p:ext>
-    </p:extLst>
-  </p:cSld>
-  <p:clrMapOvr>
-    <a:masterClrMapping/>
-  </p:clrMapOvr>
-</p:sld>
-</file>
-
-<file path=ppt/slides/slide14.xml><?xml version="1.0" encoding="utf-8"?>
-<p:sld xmlns:a="http://schemas.openxmlformats.org/drawingml/2006/main" xmlns:r="http://schemas.openxmlformats.org/officeDocument/2006/relationships" xmlns:p="http://schemas.openxmlformats.org/presentationml/2006/main">
-  <p:cSld>
-    <p:spTree>
-      <p:nvGrpSpPr>
-        <p:cNvPr id="1" name=""/>
-        <p:cNvGrpSpPr/>
-        <p:nvPr/>
-      </p:nvGrpSpPr>
-      <p:grpSpPr>
-        <a:xfrm>
-          <a:off x="0" y="0"/>
-          <a:ext cx="0" cy="0"/>
-          <a:chOff x="0" y="0"/>
-          <a:chExt cx="0" cy="0"/>
-        </a:xfrm>
-      </p:grpSpPr>
-      <p:pic>
-        <p:nvPicPr>
-          <p:cNvPr id="2" name="Picture 1"/>
-          <p:cNvPicPr>
-            <a:picLocks noChangeAspect="1"/>
-          </p:cNvPicPr>
-          <p:nvPr/>
-        </p:nvPicPr>
-        <p:blipFill>
-          <a:blip r:embed="rId2"/>
-          <a:stretch>
-            <a:fillRect/>
-          </a:stretch>
-        </p:blipFill>
-        <p:spPr>
-          <a:xfrm>
-            <a:off x="1584959" y="554990"/>
-            <a:ext cx="4055533" cy="3041650"/>
-          </a:xfrm>
-          <a:prstGeom prst="rect">
-            <a:avLst/>
-          </a:prstGeom>
-        </p:spPr>
-      </p:pic>
-      <p:pic>
-        <p:nvPicPr>
-          <p:cNvPr id="3" name="Picture 2"/>
-          <p:cNvPicPr>
-            <a:picLocks noChangeAspect="1"/>
-          </p:cNvPicPr>
-          <p:nvPr/>
-        </p:nvPicPr>
-        <p:blipFill>
-          <a:blip r:embed="rId3"/>
-          <a:stretch>
-            <a:fillRect/>
-          </a:stretch>
-        </p:blipFill>
-        <p:spPr>
-          <a:xfrm>
-            <a:off x="6375399" y="554990"/>
-            <a:ext cx="4055533" cy="3041650"/>
           </a:xfrm>
           <a:prstGeom prst="rect">
             <a:avLst/>
@@ -10296,14 +12198,14 @@
       </p:pic>
       <p:sp>
         <p:nvSpPr>
-          <p:cNvPr id="4" name="TextBox 3"/>
+          <p:cNvPr id="45" name="TextBox 44"/>
           <p:cNvSpPr txBox="1"/>
           <p:nvPr/>
         </p:nvSpPr>
         <p:spPr>
           <a:xfrm>
-            <a:off x="4683760" y="93325"/>
-            <a:ext cx="3180080" cy="461665"/>
+            <a:off x="-16734921" y="-3506962"/>
+            <a:ext cx="545691" cy="461665"/>
           </a:xfrm>
           <a:prstGeom prst="rect">
             <a:avLst/>
@@ -10317,84 +12219,23 @@
           <a:lstStyle/>
           <a:p>
             <a:r>
-              <a:rPr lang="sv-SE" sz="2400" b="1" dirty="0" err="1" smtClean="0">
-                <a:latin typeface="Times New Roman" panose="02020603050405020304" pitchFamily="18" charset="0"/>
-                <a:cs typeface="Times New Roman" panose="02020603050405020304" pitchFamily="18" charset="0"/>
-              </a:rPr>
-              <a:t>Single</a:t>
-            </a:r>
-            <a:r>
-              <a:rPr lang="sv-SE" sz="2400" b="1" dirty="0" smtClean="0">
-                <a:latin typeface="Times New Roman" panose="02020603050405020304" pitchFamily="18" charset="0"/>
-                <a:cs typeface="Times New Roman" panose="02020603050405020304" pitchFamily="18" charset="0"/>
-              </a:rPr>
-              <a:t> Carrier Signal </a:t>
-            </a:r>
-            <a:endParaRPr lang="sv-SE" sz="2400" b="1" dirty="0">
-              <a:latin typeface="Times New Roman" panose="02020603050405020304" pitchFamily="18" charset="0"/>
-              <a:cs typeface="Times New Roman" panose="02020603050405020304" pitchFamily="18" charset="0"/>
-            </a:endParaRPr>
+              <a:rPr lang="en-US" sz="2400" dirty="0" smtClean="0"/>
+              <a:t>(a)</a:t>
+            </a:r>
+            <a:endParaRPr lang="sv-SE" sz="2400" dirty="0"/>
           </a:p>
         </p:txBody>
       </p:sp>
-      <p:pic>
-        <p:nvPicPr>
-          <p:cNvPr id="6" name="Picture 5"/>
-          <p:cNvPicPr>
-            <a:picLocks noChangeAspect="1"/>
-          </p:cNvPicPr>
-          <p:nvPr/>
-        </p:nvPicPr>
-        <p:blipFill>
-          <a:blip r:embed="rId4"/>
-          <a:stretch>
-            <a:fillRect/>
-          </a:stretch>
-        </p:blipFill>
-        <p:spPr>
-          <a:xfrm>
-            <a:off x="1584959" y="3926225"/>
-            <a:ext cx="4071593" cy="3053695"/>
-          </a:xfrm>
-          <a:prstGeom prst="rect">
-            <a:avLst/>
-          </a:prstGeom>
-        </p:spPr>
-      </p:pic>
-      <p:pic>
-        <p:nvPicPr>
-          <p:cNvPr id="8" name="Picture 7"/>
-          <p:cNvPicPr>
-            <a:picLocks noChangeAspect="1"/>
-          </p:cNvPicPr>
-          <p:nvPr/>
-        </p:nvPicPr>
-        <p:blipFill>
-          <a:blip r:embed="rId5"/>
-          <a:stretch>
-            <a:fillRect/>
-          </a:stretch>
-        </p:blipFill>
-        <p:spPr>
-          <a:xfrm>
-            <a:off x="6375399" y="3926225"/>
-            <a:ext cx="4055533" cy="3041650"/>
-          </a:xfrm>
-          <a:prstGeom prst="rect">
-            <a:avLst/>
-          </a:prstGeom>
-        </p:spPr>
-      </p:pic>
       <p:sp>
         <p:nvSpPr>
-          <p:cNvPr id="9" name="TextBox 8"/>
+          <p:cNvPr id="49" name="TextBox 48"/>
           <p:cNvSpPr txBox="1"/>
           <p:nvPr/>
         </p:nvSpPr>
         <p:spPr>
           <a:xfrm>
-            <a:off x="3357878" y="3540760"/>
-            <a:ext cx="7073054" cy="461665"/>
+            <a:off x="-16610841" y="707545"/>
+            <a:ext cx="545691" cy="461665"/>
           </a:xfrm>
           <a:prstGeom prst="rect">
             <a:avLst/>
@@ -10408,305 +12249,137 @@
           <a:lstStyle/>
           <a:p>
             <a:r>
-              <a:rPr lang="sv-SE" sz="2400" b="1" dirty="0" smtClean="0">
-                <a:latin typeface="Times New Roman" panose="02020603050405020304" pitchFamily="18" charset="0"/>
-                <a:cs typeface="Times New Roman" panose="02020603050405020304" pitchFamily="18" charset="0"/>
-              </a:rPr>
-              <a:t>Multi-Carrier Signals CPS- 0-120-240</a:t>
-            </a:r>
-            <a:endParaRPr lang="sv-SE" sz="2400" b="1" dirty="0">
-              <a:latin typeface="Times New Roman" panose="02020603050405020304" pitchFamily="18" charset="0"/>
-              <a:cs typeface="Times New Roman" panose="02020603050405020304" pitchFamily="18" charset="0"/>
-            </a:endParaRPr>
+              <a:rPr lang="en-US" sz="2400" dirty="0" smtClean="0"/>
+              <a:t>(c)</a:t>
+            </a:r>
+            <a:endParaRPr lang="sv-SE" sz="2400" dirty="0"/>
+          </a:p>
+        </p:txBody>
+      </p:sp>
+      <p:sp>
+        <p:nvSpPr>
+          <p:cNvPr id="50" name="TextBox 49"/>
+          <p:cNvSpPr txBox="1"/>
+          <p:nvPr/>
+        </p:nvSpPr>
+        <p:spPr>
+          <a:xfrm>
+            <a:off x="-11680139" y="-3482105"/>
+            <a:ext cx="545691" cy="461665"/>
+          </a:xfrm>
+          <a:prstGeom prst="rect">
+            <a:avLst/>
+          </a:prstGeom>
+          <a:noFill/>
+        </p:spPr>
+        <p:txBody>
+          <a:bodyPr wrap="square" rtlCol="0">
+            <a:spAutoFit/>
+          </a:bodyPr>
+          <a:lstStyle/>
+          <a:p>
+            <a:r>
+              <a:rPr lang="en-US" sz="2400" dirty="0" smtClean="0"/>
+              <a:t>(b)</a:t>
+            </a:r>
+            <a:endParaRPr lang="sv-SE" sz="2400" dirty="0"/>
+          </a:p>
+        </p:txBody>
+      </p:sp>
+      <p:sp>
+        <p:nvSpPr>
+          <p:cNvPr id="51" name="TextBox 50"/>
+          <p:cNvSpPr txBox="1"/>
+          <p:nvPr/>
+        </p:nvSpPr>
+        <p:spPr>
+          <a:xfrm>
+            <a:off x="-11640270" y="713165"/>
+            <a:ext cx="545691" cy="461665"/>
+          </a:xfrm>
+          <a:prstGeom prst="rect">
+            <a:avLst/>
+          </a:prstGeom>
+          <a:noFill/>
+        </p:spPr>
+        <p:txBody>
+          <a:bodyPr wrap="square" rtlCol="0">
+            <a:spAutoFit/>
+          </a:bodyPr>
+          <a:lstStyle/>
+          <a:p>
+            <a:r>
+              <a:rPr lang="en-US" sz="2400" dirty="0" smtClean="0"/>
+              <a:t>(d)</a:t>
+            </a:r>
+            <a:endParaRPr lang="sv-SE" sz="2400" dirty="0"/>
+          </a:p>
+        </p:txBody>
+      </p:sp>
+      <p:sp>
+        <p:nvSpPr>
+          <p:cNvPr id="52" name="TextBox 51"/>
+          <p:cNvSpPr txBox="1"/>
+          <p:nvPr/>
+        </p:nvSpPr>
+        <p:spPr>
+          <a:xfrm>
+            <a:off x="-11471822" y="4841573"/>
+            <a:ext cx="545691" cy="461665"/>
+          </a:xfrm>
+          <a:prstGeom prst="rect">
+            <a:avLst/>
+          </a:prstGeom>
+          <a:noFill/>
+        </p:spPr>
+        <p:txBody>
+          <a:bodyPr wrap="square" rtlCol="0">
+            <a:spAutoFit/>
+          </a:bodyPr>
+          <a:lstStyle/>
+          <a:p>
+            <a:r>
+              <a:rPr lang="en-US" sz="2400" dirty="0" smtClean="0"/>
+              <a:t>(f)</a:t>
+            </a:r>
+            <a:endParaRPr lang="sv-SE" sz="2400" dirty="0"/>
+          </a:p>
+        </p:txBody>
+      </p:sp>
+      <p:sp>
+        <p:nvSpPr>
+          <p:cNvPr id="53" name="TextBox 52"/>
+          <p:cNvSpPr txBox="1"/>
+          <p:nvPr/>
+        </p:nvSpPr>
+        <p:spPr>
+          <a:xfrm>
+            <a:off x="-16528727" y="4839436"/>
+            <a:ext cx="545691" cy="461665"/>
+          </a:xfrm>
+          <a:prstGeom prst="rect">
+            <a:avLst/>
+          </a:prstGeom>
+          <a:noFill/>
+        </p:spPr>
+        <p:txBody>
+          <a:bodyPr wrap="square" rtlCol="0">
+            <a:spAutoFit/>
+          </a:bodyPr>
+          <a:lstStyle/>
+          <a:p>
+            <a:r>
+              <a:rPr lang="en-US" sz="2400" dirty="0" smtClean="0"/>
+              <a:t>(e)</a:t>
+            </a:r>
+            <a:endParaRPr lang="sv-SE" sz="2400" dirty="0"/>
           </a:p>
         </p:txBody>
       </p:sp>
     </p:spTree>
     <p:extLst>
       <p:ext uri="{BB962C8B-B14F-4D97-AF65-F5344CB8AC3E}">
-        <p14:creationId xmlns:p14="http://schemas.microsoft.com/office/powerpoint/2010/main" val="918334070"/>
-      </p:ext>
-    </p:extLst>
-  </p:cSld>
-  <p:clrMapOvr>
-    <a:masterClrMapping/>
-  </p:clrMapOvr>
-</p:sld>
-</file>
-
-<file path=ppt/slides/slide15.xml><?xml version="1.0" encoding="utf-8"?>
-<p:sld xmlns:a="http://schemas.openxmlformats.org/drawingml/2006/main" xmlns:r="http://schemas.openxmlformats.org/officeDocument/2006/relationships" xmlns:p="http://schemas.openxmlformats.org/presentationml/2006/main">
-  <p:cSld>
-    <p:spTree>
-      <p:nvGrpSpPr>
-        <p:cNvPr id="1" name=""/>
-        <p:cNvGrpSpPr/>
-        <p:nvPr/>
-      </p:nvGrpSpPr>
-      <p:grpSpPr>
-        <a:xfrm>
-          <a:off x="0" y="0"/>
-          <a:ext cx="0" cy="0"/>
-          <a:chOff x="0" y="0"/>
-          <a:chExt cx="0" cy="0"/>
-        </a:xfrm>
-      </p:grpSpPr>
-      <p:pic>
-        <p:nvPicPr>
-          <p:cNvPr id="5" name="Picture 4"/>
-          <p:cNvPicPr>
-            <a:picLocks noChangeAspect="1"/>
-          </p:cNvPicPr>
-          <p:nvPr/>
-        </p:nvPicPr>
-        <p:blipFill>
-          <a:blip r:embed="rId3"/>
-          <a:stretch>
-            <a:fillRect/>
-          </a:stretch>
-        </p:blipFill>
-        <p:spPr>
-          <a:xfrm>
-            <a:off x="1488439" y="3708400"/>
-            <a:ext cx="4199467" cy="3149600"/>
-          </a:xfrm>
-          <a:prstGeom prst="rect">
-            <a:avLst/>
-          </a:prstGeom>
-        </p:spPr>
-      </p:pic>
-      <p:pic>
-        <p:nvPicPr>
-          <p:cNvPr id="7" name="Picture 6"/>
-          <p:cNvPicPr>
-            <a:picLocks noChangeAspect="1"/>
-          </p:cNvPicPr>
-          <p:nvPr/>
-        </p:nvPicPr>
-        <p:blipFill>
-          <a:blip r:embed="rId4"/>
-          <a:stretch>
-            <a:fillRect/>
-          </a:stretch>
-        </p:blipFill>
-        <p:spPr>
-          <a:xfrm>
-            <a:off x="6436358" y="3825875"/>
-            <a:ext cx="4042833" cy="3032125"/>
-          </a:xfrm>
-          <a:prstGeom prst="rect">
-            <a:avLst/>
-          </a:prstGeom>
-        </p:spPr>
-      </p:pic>
-      <p:sp>
-        <p:nvSpPr>
-          <p:cNvPr id="6" name="TextBox 5"/>
-          <p:cNvSpPr txBox="1"/>
-          <p:nvPr/>
-        </p:nvSpPr>
-        <p:spPr>
-          <a:xfrm>
-            <a:off x="721360" y="116840"/>
-            <a:ext cx="10881360" cy="461665"/>
-          </a:xfrm>
-          <a:prstGeom prst="rect">
-            <a:avLst/>
-          </a:prstGeom>
-          <a:noFill/>
-        </p:spPr>
-        <p:txBody>
-          <a:bodyPr wrap="square" rtlCol="0">
-            <a:spAutoFit/>
-          </a:bodyPr>
-          <a:lstStyle/>
-          <a:p>
-            <a:r>
-              <a:rPr lang="sv-SE" sz="2400" b="1" dirty="0" smtClean="0">
-                <a:latin typeface="Times New Roman" panose="02020603050405020304" pitchFamily="18" charset="0"/>
-                <a:cs typeface="Times New Roman" panose="02020603050405020304" pitchFamily="18" charset="0"/>
-              </a:rPr>
-              <a:t>Multi-Carrier Signals (</a:t>
-            </a:r>
-            <a:r>
-              <a:rPr lang="sv-SE" sz="2400" b="1" dirty="0" err="1" smtClean="0">
-                <a:latin typeface="Times New Roman" panose="02020603050405020304" pitchFamily="18" charset="0"/>
-                <a:cs typeface="Times New Roman" panose="02020603050405020304" pitchFamily="18" charset="0"/>
-              </a:rPr>
-              <a:t>Variable</a:t>
-            </a:r>
-            <a:r>
-              <a:rPr lang="sv-SE" sz="2400" b="1" dirty="0" smtClean="0">
-                <a:latin typeface="Times New Roman" panose="02020603050405020304" pitchFamily="18" charset="0"/>
-                <a:cs typeface="Times New Roman" panose="02020603050405020304" pitchFamily="18" charset="0"/>
-              </a:rPr>
-              <a:t> CPS- Fundamental Component </a:t>
-            </a:r>
-            <a:r>
-              <a:rPr lang="sv-SE" sz="2400" b="1" dirty="0" err="1" smtClean="0">
-                <a:latin typeface="Times New Roman" panose="02020603050405020304" pitchFamily="18" charset="0"/>
-                <a:cs typeface="Times New Roman" panose="02020603050405020304" pitchFamily="18" charset="0"/>
-              </a:rPr>
-              <a:t>Reduction</a:t>
-            </a:r>
-            <a:r>
-              <a:rPr lang="sv-SE" sz="2400" b="1" dirty="0" smtClean="0">
-                <a:latin typeface="Times New Roman" panose="02020603050405020304" pitchFamily="18" charset="0"/>
-                <a:cs typeface="Times New Roman" panose="02020603050405020304" pitchFamily="18" charset="0"/>
-              </a:rPr>
-              <a:t>)</a:t>
-            </a:r>
-            <a:endParaRPr lang="sv-SE" sz="2400" b="1" dirty="0">
-              <a:latin typeface="Times New Roman" panose="02020603050405020304" pitchFamily="18" charset="0"/>
-              <a:cs typeface="Times New Roman" panose="02020603050405020304" pitchFamily="18" charset="0"/>
-            </a:endParaRPr>
-          </a:p>
-        </p:txBody>
-      </p:sp>
-      <p:pic>
-        <p:nvPicPr>
-          <p:cNvPr id="4" name="Picture 3"/>
-          <p:cNvPicPr>
-            <a:picLocks noChangeAspect="1"/>
-          </p:cNvPicPr>
-          <p:nvPr/>
-        </p:nvPicPr>
-        <p:blipFill>
-          <a:blip r:embed="rId5"/>
-          <a:stretch>
-            <a:fillRect/>
-          </a:stretch>
-        </p:blipFill>
-        <p:spPr>
-          <a:xfrm>
-            <a:off x="1594272" y="447040"/>
-            <a:ext cx="3987800" cy="2990850"/>
-          </a:xfrm>
-          <a:prstGeom prst="rect">
-            <a:avLst/>
-          </a:prstGeom>
-        </p:spPr>
-      </p:pic>
-      <p:pic>
-        <p:nvPicPr>
-          <p:cNvPr id="8" name="Picture 7"/>
-          <p:cNvPicPr>
-            <a:picLocks noChangeAspect="1"/>
-          </p:cNvPicPr>
-          <p:nvPr/>
-        </p:nvPicPr>
-        <p:blipFill>
-          <a:blip r:embed="rId6"/>
-          <a:stretch>
-            <a:fillRect/>
-          </a:stretch>
-        </p:blipFill>
-        <p:spPr>
-          <a:xfrm>
-            <a:off x="6436358" y="447040"/>
-            <a:ext cx="3987800" cy="2990850"/>
-          </a:xfrm>
-          <a:prstGeom prst="rect">
-            <a:avLst/>
-          </a:prstGeom>
-        </p:spPr>
-      </p:pic>
-      <p:sp>
-        <p:nvSpPr>
-          <p:cNvPr id="9" name="TextBox 8"/>
-          <p:cNvSpPr txBox="1"/>
-          <p:nvPr/>
-        </p:nvSpPr>
-        <p:spPr>
-          <a:xfrm>
-            <a:off x="721360" y="3342313"/>
-            <a:ext cx="10881360" cy="461665"/>
-          </a:xfrm>
-          <a:prstGeom prst="rect">
-            <a:avLst/>
-          </a:prstGeom>
-          <a:noFill/>
-        </p:spPr>
-        <p:txBody>
-          <a:bodyPr wrap="square" rtlCol="0">
-            <a:spAutoFit/>
-          </a:bodyPr>
-          <a:lstStyle/>
-          <a:p>
-            <a:r>
-              <a:rPr lang="sv-SE" sz="2400" b="1" dirty="0" smtClean="0">
-                <a:latin typeface="Times New Roman" panose="02020603050405020304" pitchFamily="18" charset="0"/>
-                <a:cs typeface="Times New Roman" panose="02020603050405020304" pitchFamily="18" charset="0"/>
-              </a:rPr>
-              <a:t>Multi-Carrier Signals (DC </a:t>
-            </a:r>
-            <a:r>
-              <a:rPr lang="sv-SE" sz="2400" b="1" dirty="0" err="1" smtClean="0">
-                <a:latin typeface="Times New Roman" panose="02020603050405020304" pitchFamily="18" charset="0"/>
-                <a:cs typeface="Times New Roman" panose="02020603050405020304" pitchFamily="18" charset="0"/>
-              </a:rPr>
-              <a:t>injected</a:t>
-            </a:r>
-            <a:r>
-              <a:rPr lang="sv-SE" sz="2400" b="1" dirty="0" smtClean="0">
-                <a:latin typeface="Times New Roman" panose="02020603050405020304" pitchFamily="18" charset="0"/>
-                <a:cs typeface="Times New Roman" panose="02020603050405020304" pitchFamily="18" charset="0"/>
-              </a:rPr>
-              <a:t>- </a:t>
-            </a:r>
-            <a:r>
-              <a:rPr lang="sv-SE" sz="2400" b="1" dirty="0" err="1" smtClean="0">
-                <a:latin typeface="Times New Roman" panose="02020603050405020304" pitchFamily="18" charset="0"/>
-                <a:cs typeface="Times New Roman" panose="02020603050405020304" pitchFamily="18" charset="0"/>
-              </a:rPr>
-              <a:t>Variable</a:t>
-            </a:r>
-            <a:r>
-              <a:rPr lang="sv-SE" sz="2400" b="1" dirty="0" smtClean="0">
-                <a:latin typeface="Times New Roman" panose="02020603050405020304" pitchFamily="18" charset="0"/>
-                <a:cs typeface="Times New Roman" panose="02020603050405020304" pitchFamily="18" charset="0"/>
-              </a:rPr>
-              <a:t> CPS- Total </a:t>
-            </a:r>
-            <a:r>
-              <a:rPr lang="sv-SE" sz="2400" b="1" dirty="0" err="1" smtClean="0">
-                <a:latin typeface="Times New Roman" panose="02020603050405020304" pitchFamily="18" charset="0"/>
-                <a:cs typeface="Times New Roman" panose="02020603050405020304" pitchFamily="18" charset="0"/>
-              </a:rPr>
-              <a:t>Harmonic</a:t>
-            </a:r>
-            <a:r>
-              <a:rPr lang="sv-SE" sz="2400" b="1" dirty="0" smtClean="0">
-                <a:latin typeface="Times New Roman" panose="02020603050405020304" pitchFamily="18" charset="0"/>
-                <a:cs typeface="Times New Roman" panose="02020603050405020304" pitchFamily="18" charset="0"/>
-              </a:rPr>
-              <a:t> </a:t>
-            </a:r>
-            <a:r>
-              <a:rPr lang="sv-SE" sz="2400" b="1" dirty="0" err="1" smtClean="0">
-                <a:latin typeface="Times New Roman" panose="02020603050405020304" pitchFamily="18" charset="0"/>
-                <a:cs typeface="Times New Roman" panose="02020603050405020304" pitchFamily="18" charset="0"/>
-              </a:rPr>
-              <a:t>Reduction</a:t>
-            </a:r>
-            <a:r>
-              <a:rPr lang="sv-SE" sz="2400" b="1" dirty="0" smtClean="0">
-                <a:latin typeface="Times New Roman" panose="02020603050405020304" pitchFamily="18" charset="0"/>
-                <a:cs typeface="Times New Roman" panose="02020603050405020304" pitchFamily="18" charset="0"/>
-              </a:rPr>
-              <a:t>)</a:t>
-            </a:r>
-            <a:endParaRPr lang="sv-SE" sz="2400" b="1" dirty="0">
-              <a:latin typeface="Times New Roman" panose="02020603050405020304" pitchFamily="18" charset="0"/>
-              <a:cs typeface="Times New Roman" panose="02020603050405020304" pitchFamily="18" charset="0"/>
-            </a:endParaRPr>
-          </a:p>
-        </p:txBody>
-      </p:sp>
-    </p:spTree>
-    <p:extLst>
-      <p:ext uri="{BB962C8B-B14F-4D97-AF65-F5344CB8AC3E}">
-        <p14:creationId xmlns:p14="http://schemas.microsoft.com/office/powerpoint/2010/main" val="456135894"/>
+        <p14:creationId xmlns:p14="http://schemas.microsoft.com/office/powerpoint/2010/main" val="1787800150"/>
       </p:ext>
     </p:extLst>
   </p:cSld>
@@ -10733,44 +12406,127 @@
           <a:chExt cx="0" cy="0"/>
         </a:xfrm>
       </p:grpSpPr>
-      <p:sp>
-        <p:nvSpPr>
-          <p:cNvPr id="5" name="TextBox 4"/>
-          <p:cNvSpPr txBox="1"/>
-          <p:nvPr/>
-        </p:nvSpPr>
-        <p:spPr>
-          <a:xfrm>
-            <a:off x="4683760" y="0"/>
-            <a:ext cx="3281680" cy="707886"/>
-          </a:xfrm>
-          <a:prstGeom prst="rect">
-            <a:avLst/>
-          </a:prstGeom>
-          <a:noFill/>
-        </p:spPr>
-        <p:txBody>
-          <a:bodyPr wrap="square" rtlCol="0">
-            <a:spAutoFit/>
-          </a:bodyPr>
-          <a:lstStyle/>
-          <a:p>
-            <a:r>
-              <a:rPr lang="en-US" sz="4000" dirty="0" smtClean="0">
-                <a:solidFill>
-                  <a:srgbClr val="C00000"/>
-                </a:solidFill>
-              </a:rPr>
-              <a:t>Non-Idealities</a:t>
-            </a:r>
-            <a:endParaRPr lang="sv-SE" sz="4000" dirty="0">
-              <a:solidFill>
-                <a:srgbClr val="C00000"/>
-              </a:solidFill>
-            </a:endParaRPr>
-          </a:p>
-        </p:txBody>
-      </p:sp>
+      <mc:AlternateContent xmlns:mc="http://schemas.openxmlformats.org/markup-compatibility/2006" xmlns:a14="http://schemas.microsoft.com/office/drawing/2010/main">
+        <mc:Choice Requires="a14">
+          <p:sp>
+            <p:nvSpPr>
+              <p:cNvPr id="44" name="TextBox 43"/>
+              <p:cNvSpPr txBox="1"/>
+              <p:nvPr/>
+            </p:nvSpPr>
+            <p:spPr>
+              <a:xfrm>
+                <a:off x="-1435691" y="15112516"/>
+                <a:ext cx="533928" cy="400110"/>
+              </a:xfrm>
+              <a:prstGeom prst="rect">
+                <a:avLst/>
+              </a:prstGeom>
+              <a:noFill/>
+            </p:spPr>
+            <p:txBody>
+              <a:bodyPr wrap="square" rtlCol="0">
+                <a:spAutoFit/>
+              </a:bodyPr>
+              <a:lstStyle/>
+              <a:p>
+                <a:pPr/>
+                <a14:m>
+                  <m:oMathPara xmlns:m="http://schemas.openxmlformats.org/officeDocument/2006/math">
+                    <m:oMathParaPr>
+                      <m:jc m:val="centerGroup"/>
+                    </m:oMathParaPr>
+                    <m:oMath xmlns:m="http://schemas.openxmlformats.org/officeDocument/2006/math">
+                      <m:sSub>
+                        <m:sSubPr>
+                          <m:ctrlPr>
+                            <a:rPr lang="en-US" sz="2000" b="0" i="1" smtClean="0">
+                              <a:solidFill>
+                                <a:srgbClr val="3AE657"/>
+                              </a:solidFill>
+                              <a:latin typeface="Cambria Math" panose="02040503050406030204" pitchFamily="18" charset="0"/>
+                            </a:rPr>
+                          </m:ctrlPr>
+                        </m:sSubPr>
+                        <m:e>
+                          <m:r>
+                            <a:rPr lang="en-US" sz="2000" b="0" i="1" smtClean="0">
+                              <a:solidFill>
+                                <a:srgbClr val="3AE657"/>
+                              </a:solidFill>
+                              <a:latin typeface="Cambria Math" panose="02040503050406030204" pitchFamily="18" charset="0"/>
+                            </a:rPr>
+                            <m:t>−</m:t>
+                          </m:r>
+                          <m:r>
+                            <a:rPr lang="en-US" sz="2000" i="1" smtClean="0">
+                              <a:solidFill>
+                                <a:srgbClr val="3AE657"/>
+                              </a:solidFill>
+                              <a:latin typeface="Cambria Math" panose="02040503050406030204" pitchFamily="18" charset="0"/>
+                            </a:rPr>
+                            <m:t>𝑡</m:t>
+                          </m:r>
+                        </m:e>
+                        <m:sub>
+                          <m:r>
+                            <a:rPr lang="en-US" sz="2000" b="0" i="1" smtClean="0">
+                              <a:solidFill>
+                                <a:srgbClr val="3AE657"/>
+                              </a:solidFill>
+                              <a:latin typeface="Cambria Math" panose="02040503050406030204" pitchFamily="18" charset="0"/>
+                            </a:rPr>
+                            <m:t>𝐶</m:t>
+                          </m:r>
+                        </m:sub>
+                      </m:sSub>
+                    </m:oMath>
+                  </m:oMathPara>
+                </a14:m>
+                <a:endParaRPr lang="sv-SE" dirty="0"/>
+              </a:p>
+            </p:txBody>
+          </p:sp>
+        </mc:Choice>
+        <mc:Fallback xmlns="">
+          <p:sp>
+            <p:nvSpPr>
+              <p:cNvPr id="44" name="TextBox 43"/>
+              <p:cNvSpPr txBox="1">
+                <a:spLocks noRot="1" noChangeAspect="1" noMove="1" noResize="1" noEditPoints="1" noAdjustHandles="1" noChangeArrowheads="1" noChangeShapeType="1" noTextEdit="1"/>
+              </p:cNvSpPr>
+              <p:nvPr/>
+            </p:nvSpPr>
+            <p:spPr>
+              <a:xfrm>
+                <a:off x="-1435691" y="15112516"/>
+                <a:ext cx="533928" cy="400110"/>
+              </a:xfrm>
+              <a:prstGeom prst="rect">
+                <a:avLst/>
+              </a:prstGeom>
+              <a:blipFill>
+                <a:blip r:embed="rId3"/>
+                <a:stretch>
+                  <a:fillRect r="-4545"/>
+                </a:stretch>
+              </a:blipFill>
+            </p:spPr>
+            <p:txBody>
+              <a:bodyPr/>
+              <a:lstStyle/>
+              <a:p>
+                <a:r>
+                  <a:rPr lang="sv-SE">
+                    <a:noFill/>
+                  </a:rPr>
+                  <a:t> </a:t>
+                </a:r>
+              </a:p>
+            </p:txBody>
+          </p:sp>
+        </mc:Fallback>
+      </mc:AlternateContent>
       <p:pic>
         <p:nvPicPr>
           <p:cNvPr id="9" name="Picture 8"/>
@@ -10780,15 +12536,15 @@
           <p:nvPr/>
         </p:nvPicPr>
         <p:blipFill>
-          <a:blip r:embed="rId2"/>
+          <a:blip r:embed="rId4"/>
           <a:stretch>
             <a:fillRect/>
           </a:stretch>
         </p:blipFill>
         <p:spPr>
           <a:xfrm>
-            <a:off x="6343649" y="786922"/>
-            <a:ext cx="5547997" cy="4160998"/>
+            <a:off x="978309" y="-408213"/>
+            <a:ext cx="5334000" cy="4000500"/>
           </a:xfrm>
           <a:prstGeom prst="rect">
             <a:avLst/>
@@ -10797,32 +12553,424 @@
       </p:pic>
       <p:pic>
         <p:nvPicPr>
-          <p:cNvPr id="10" name="Picture 9"/>
+          <p:cNvPr id="47" name="Picture 46"/>
           <p:cNvPicPr>
             <a:picLocks noChangeAspect="1"/>
           </p:cNvPicPr>
           <p:nvPr/>
         </p:nvPicPr>
         <p:blipFill>
-          <a:blip r:embed="rId3"/>
+          <a:blip r:embed="rId5"/>
           <a:stretch>
             <a:fillRect/>
           </a:stretch>
         </p:blipFill>
         <p:spPr>
           <a:xfrm>
-            <a:off x="274320" y="786922"/>
-            <a:ext cx="5832476" cy="4374357"/>
+            <a:off x="6072960" y="-404710"/>
+            <a:ext cx="5334000" cy="4000500"/>
           </a:xfrm>
           <a:prstGeom prst="rect">
             <a:avLst/>
           </a:prstGeom>
         </p:spPr>
       </p:pic>
+      <p:pic>
+        <p:nvPicPr>
+          <p:cNvPr id="2" name="Picture 1"/>
+          <p:cNvPicPr>
+            <a:picLocks noChangeAspect="1"/>
+          </p:cNvPicPr>
+          <p:nvPr/>
+        </p:nvPicPr>
+        <p:blipFill>
+          <a:blip r:embed="rId6"/>
+          <a:stretch>
+            <a:fillRect/>
+          </a:stretch>
+        </p:blipFill>
+        <p:spPr>
+          <a:xfrm>
+            <a:off x="978309" y="3834681"/>
+            <a:ext cx="5334000" cy="4000500"/>
+          </a:xfrm>
+          <a:prstGeom prst="rect">
+            <a:avLst/>
+          </a:prstGeom>
+        </p:spPr>
+      </p:pic>
+      <p:pic>
+        <p:nvPicPr>
+          <p:cNvPr id="3" name="Picture 2"/>
+          <p:cNvPicPr>
+            <a:picLocks noChangeAspect="1"/>
+          </p:cNvPicPr>
+          <p:nvPr/>
+        </p:nvPicPr>
+        <p:blipFill>
+          <a:blip r:embed="rId7"/>
+          <a:stretch>
+            <a:fillRect/>
+          </a:stretch>
+        </p:blipFill>
+        <p:spPr>
+          <a:xfrm>
+            <a:off x="6072960" y="3786932"/>
+            <a:ext cx="5334000" cy="4000500"/>
+          </a:xfrm>
+          <a:prstGeom prst="rect">
+            <a:avLst/>
+          </a:prstGeom>
+        </p:spPr>
+      </p:pic>
+      <p:pic>
+        <p:nvPicPr>
+          <p:cNvPr id="5" name="Picture 4"/>
+          <p:cNvPicPr>
+            <a:picLocks noChangeAspect="1"/>
+          </p:cNvPicPr>
+          <p:nvPr/>
+        </p:nvPicPr>
+        <p:blipFill>
+          <a:blip r:embed="rId8"/>
+          <a:stretch>
+            <a:fillRect/>
+          </a:stretch>
+        </p:blipFill>
+        <p:spPr>
+          <a:xfrm>
+            <a:off x="6072960" y="-4578428"/>
+            <a:ext cx="5334000" cy="4000500"/>
+          </a:xfrm>
+          <a:prstGeom prst="rect">
+            <a:avLst/>
+          </a:prstGeom>
+        </p:spPr>
+      </p:pic>
+      <p:pic>
+        <p:nvPicPr>
+          <p:cNvPr id="6" name="Picture 5"/>
+          <p:cNvPicPr>
+            <a:picLocks noChangeAspect="1"/>
+          </p:cNvPicPr>
+          <p:nvPr/>
+        </p:nvPicPr>
+        <p:blipFill>
+          <a:blip r:embed="rId9"/>
+          <a:stretch>
+            <a:fillRect/>
+          </a:stretch>
+        </p:blipFill>
+        <p:spPr>
+          <a:xfrm>
+            <a:off x="978309" y="-4537264"/>
+            <a:ext cx="5334000" cy="4000500"/>
+          </a:xfrm>
+          <a:prstGeom prst="rect">
+            <a:avLst/>
+          </a:prstGeom>
+        </p:spPr>
+      </p:pic>
+      <p:sp>
+        <p:nvSpPr>
+          <p:cNvPr id="45" name="TextBox 44"/>
+          <p:cNvSpPr txBox="1"/>
+          <p:nvPr/>
+        </p:nvSpPr>
+        <p:spPr>
+          <a:xfrm>
+            <a:off x="3645309" y="-616278"/>
+            <a:ext cx="545691" cy="461665"/>
+          </a:xfrm>
+          <a:prstGeom prst="rect">
+            <a:avLst/>
+          </a:prstGeom>
+          <a:noFill/>
+        </p:spPr>
+        <p:txBody>
+          <a:bodyPr wrap="square" rtlCol="0">
+            <a:spAutoFit/>
+          </a:bodyPr>
+          <a:lstStyle/>
+          <a:p>
+            <a:r>
+              <a:rPr lang="en-US" sz="2400" dirty="0" smtClean="0"/>
+              <a:t>(a)</a:t>
+            </a:r>
+            <a:endParaRPr lang="sv-SE" sz="2400" dirty="0"/>
+          </a:p>
+        </p:txBody>
+      </p:sp>
+      <p:sp>
+        <p:nvSpPr>
+          <p:cNvPr id="49" name="TextBox 48"/>
+          <p:cNvSpPr txBox="1"/>
+          <p:nvPr/>
+        </p:nvSpPr>
+        <p:spPr>
+          <a:xfrm>
+            <a:off x="3769389" y="3598229"/>
+            <a:ext cx="545691" cy="461665"/>
+          </a:xfrm>
+          <a:prstGeom prst="rect">
+            <a:avLst/>
+          </a:prstGeom>
+          <a:noFill/>
+        </p:spPr>
+        <p:txBody>
+          <a:bodyPr wrap="square" rtlCol="0">
+            <a:spAutoFit/>
+          </a:bodyPr>
+          <a:lstStyle/>
+          <a:p>
+            <a:r>
+              <a:rPr lang="en-US" sz="2400" dirty="0" smtClean="0"/>
+              <a:t>(c)</a:t>
+            </a:r>
+            <a:endParaRPr lang="sv-SE" sz="2400" dirty="0"/>
+          </a:p>
+        </p:txBody>
+      </p:sp>
+      <p:sp>
+        <p:nvSpPr>
+          <p:cNvPr id="50" name="TextBox 49"/>
+          <p:cNvSpPr txBox="1"/>
+          <p:nvPr/>
+        </p:nvSpPr>
+        <p:spPr>
+          <a:xfrm>
+            <a:off x="8700091" y="-591421"/>
+            <a:ext cx="545691" cy="461665"/>
+          </a:xfrm>
+          <a:prstGeom prst="rect">
+            <a:avLst/>
+          </a:prstGeom>
+          <a:noFill/>
+        </p:spPr>
+        <p:txBody>
+          <a:bodyPr wrap="square" rtlCol="0">
+            <a:spAutoFit/>
+          </a:bodyPr>
+          <a:lstStyle/>
+          <a:p>
+            <a:r>
+              <a:rPr lang="en-US" sz="2400" dirty="0" smtClean="0"/>
+              <a:t>(b)</a:t>
+            </a:r>
+            <a:endParaRPr lang="sv-SE" sz="2400" dirty="0"/>
+          </a:p>
+        </p:txBody>
+      </p:sp>
+      <p:sp>
+        <p:nvSpPr>
+          <p:cNvPr id="51" name="TextBox 50"/>
+          <p:cNvSpPr txBox="1"/>
+          <p:nvPr/>
+        </p:nvSpPr>
+        <p:spPr>
+          <a:xfrm>
+            <a:off x="8739960" y="3603849"/>
+            <a:ext cx="545691" cy="461665"/>
+          </a:xfrm>
+          <a:prstGeom prst="rect">
+            <a:avLst/>
+          </a:prstGeom>
+          <a:noFill/>
+        </p:spPr>
+        <p:txBody>
+          <a:bodyPr wrap="square" rtlCol="0">
+            <a:spAutoFit/>
+          </a:bodyPr>
+          <a:lstStyle/>
+          <a:p>
+            <a:r>
+              <a:rPr lang="en-US" sz="2400" dirty="0" smtClean="0"/>
+              <a:t>(d)</a:t>
+            </a:r>
+            <a:endParaRPr lang="sv-SE" sz="2400" dirty="0"/>
+          </a:p>
+        </p:txBody>
+      </p:sp>
+      <p:sp>
+        <p:nvSpPr>
+          <p:cNvPr id="52" name="TextBox 51"/>
+          <p:cNvSpPr txBox="1"/>
+          <p:nvPr/>
+        </p:nvSpPr>
+        <p:spPr>
+          <a:xfrm>
+            <a:off x="8908408" y="7732257"/>
+            <a:ext cx="545691" cy="461665"/>
+          </a:xfrm>
+          <a:prstGeom prst="rect">
+            <a:avLst/>
+          </a:prstGeom>
+          <a:noFill/>
+        </p:spPr>
+        <p:txBody>
+          <a:bodyPr wrap="square" rtlCol="0">
+            <a:spAutoFit/>
+          </a:bodyPr>
+          <a:lstStyle/>
+          <a:p>
+            <a:r>
+              <a:rPr lang="en-US" sz="2400" dirty="0" smtClean="0"/>
+              <a:t>(f)</a:t>
+            </a:r>
+            <a:endParaRPr lang="sv-SE" sz="2400" dirty="0"/>
+          </a:p>
+        </p:txBody>
+      </p:sp>
+      <p:sp>
+        <p:nvSpPr>
+          <p:cNvPr id="53" name="TextBox 52"/>
+          <p:cNvSpPr txBox="1"/>
+          <p:nvPr/>
+        </p:nvSpPr>
+        <p:spPr>
+          <a:xfrm>
+            <a:off x="3851503" y="7730120"/>
+            <a:ext cx="545691" cy="461665"/>
+          </a:xfrm>
+          <a:prstGeom prst="rect">
+            <a:avLst/>
+          </a:prstGeom>
+          <a:noFill/>
+        </p:spPr>
+        <p:txBody>
+          <a:bodyPr wrap="square" rtlCol="0">
+            <a:spAutoFit/>
+          </a:bodyPr>
+          <a:lstStyle/>
+          <a:p>
+            <a:r>
+              <a:rPr lang="en-US" sz="2400" dirty="0" smtClean="0"/>
+              <a:t>(e)</a:t>
+            </a:r>
+            <a:endParaRPr lang="sv-SE" sz="2400" dirty="0"/>
+          </a:p>
+        </p:txBody>
+      </p:sp>
+      <p:pic>
+        <p:nvPicPr>
+          <p:cNvPr id="21" name="Picture 20"/>
+          <p:cNvPicPr>
+            <a:picLocks noChangeAspect="1"/>
+          </p:cNvPicPr>
+          <p:nvPr/>
+        </p:nvPicPr>
+        <p:blipFill>
+          <a:blip r:embed="rId10"/>
+          <a:stretch>
+            <a:fillRect/>
+          </a:stretch>
+        </p:blipFill>
+        <p:spPr>
+          <a:xfrm>
+            <a:off x="1223436" y="8023884"/>
+            <a:ext cx="5334000" cy="4000500"/>
+          </a:xfrm>
+          <a:prstGeom prst="rect">
+            <a:avLst/>
+          </a:prstGeom>
+        </p:spPr>
+      </p:pic>
+      <p:pic>
+        <p:nvPicPr>
+          <p:cNvPr id="22" name="Picture 21"/>
+          <p:cNvPicPr>
+            <a:picLocks noChangeAspect="1"/>
+          </p:cNvPicPr>
+          <p:nvPr/>
+        </p:nvPicPr>
+        <p:blipFill>
+          <a:blip r:embed="rId11"/>
+          <a:stretch>
+            <a:fillRect/>
+          </a:stretch>
+        </p:blipFill>
+        <p:spPr>
+          <a:xfrm>
+            <a:off x="6312309" y="8023884"/>
+            <a:ext cx="5334000" cy="4000500"/>
+          </a:xfrm>
+          <a:prstGeom prst="rect">
+            <a:avLst/>
+          </a:prstGeom>
+        </p:spPr>
+      </p:pic>
+      <p:sp>
+        <p:nvSpPr>
+          <p:cNvPr id="23" name="TextBox 22"/>
+          <p:cNvSpPr txBox="1"/>
+          <p:nvPr/>
+        </p:nvSpPr>
+        <p:spPr>
+          <a:xfrm>
+            <a:off x="8908407" y="11966769"/>
+            <a:ext cx="545691" cy="461665"/>
+          </a:xfrm>
+          <a:prstGeom prst="rect">
+            <a:avLst/>
+          </a:prstGeom>
+          <a:noFill/>
+        </p:spPr>
+        <p:txBody>
+          <a:bodyPr wrap="square" rtlCol="0">
+            <a:spAutoFit/>
+          </a:bodyPr>
+          <a:lstStyle/>
+          <a:p>
+            <a:r>
+              <a:rPr lang="en-US" sz="2400" dirty="0" smtClean="0"/>
+              <a:t>(</a:t>
+            </a:r>
+            <a:r>
+              <a:rPr lang="en-US" sz="2400" dirty="0"/>
+              <a:t>h</a:t>
+            </a:r>
+            <a:r>
+              <a:rPr lang="en-US" sz="2400" dirty="0" smtClean="0"/>
+              <a:t>)</a:t>
+            </a:r>
+            <a:endParaRPr lang="sv-SE" sz="2400" dirty="0"/>
+          </a:p>
+        </p:txBody>
+      </p:sp>
+      <p:sp>
+        <p:nvSpPr>
+          <p:cNvPr id="24" name="TextBox 23"/>
+          <p:cNvSpPr txBox="1"/>
+          <p:nvPr/>
+        </p:nvSpPr>
+        <p:spPr>
+          <a:xfrm>
+            <a:off x="3851503" y="12024384"/>
+            <a:ext cx="545691" cy="461665"/>
+          </a:xfrm>
+          <a:prstGeom prst="rect">
+            <a:avLst/>
+          </a:prstGeom>
+          <a:noFill/>
+        </p:spPr>
+        <p:txBody>
+          <a:bodyPr wrap="square" rtlCol="0">
+            <a:spAutoFit/>
+          </a:bodyPr>
+          <a:lstStyle/>
+          <a:p>
+            <a:r>
+              <a:rPr lang="en-US" sz="2400" dirty="0" smtClean="0"/>
+              <a:t>(g)</a:t>
+            </a:r>
+            <a:endParaRPr lang="sv-SE" sz="2400" dirty="0"/>
+          </a:p>
+        </p:txBody>
+      </p:sp>
     </p:spTree>
     <p:extLst>
       <p:ext uri="{BB962C8B-B14F-4D97-AF65-F5344CB8AC3E}">
-        <p14:creationId xmlns:p14="http://schemas.microsoft.com/office/powerpoint/2010/main" val="102751297"/>
+        <p14:creationId xmlns:p14="http://schemas.microsoft.com/office/powerpoint/2010/main" val="1355618306"/>
       </p:ext>
     </p:extLst>
   </p:cSld>
@@ -10849,16 +12997,137 @@
           <a:chExt cx="0" cy="0"/>
         </a:xfrm>
       </p:grpSpPr>
+      <mc:AlternateContent xmlns:mc="http://schemas.openxmlformats.org/markup-compatibility/2006" xmlns:a14="http://schemas.microsoft.com/office/drawing/2010/main">
+        <mc:Choice Requires="a14">
+          <p:sp>
+            <p:nvSpPr>
+              <p:cNvPr id="44" name="TextBox 43"/>
+              <p:cNvSpPr txBox="1"/>
+              <p:nvPr/>
+            </p:nvSpPr>
+            <p:spPr>
+              <a:xfrm>
+                <a:off x="-1435691" y="15112516"/>
+                <a:ext cx="533928" cy="400110"/>
+              </a:xfrm>
+              <a:prstGeom prst="rect">
+                <a:avLst/>
+              </a:prstGeom>
+              <a:noFill/>
+            </p:spPr>
+            <p:txBody>
+              <a:bodyPr wrap="square" rtlCol="0">
+                <a:spAutoFit/>
+              </a:bodyPr>
+              <a:lstStyle/>
+              <a:p>
+                <a:pPr/>
+                <a14:m>
+                  <m:oMathPara xmlns:m="http://schemas.openxmlformats.org/officeDocument/2006/math">
+                    <m:oMathParaPr>
+                      <m:jc m:val="centerGroup"/>
+                    </m:oMathParaPr>
+                    <m:oMath xmlns:m="http://schemas.openxmlformats.org/officeDocument/2006/math">
+                      <m:sSub>
+                        <m:sSubPr>
+                          <m:ctrlPr>
+                            <a:rPr lang="en-US" sz="2000" b="0" i="1" smtClean="0">
+                              <a:solidFill>
+                                <a:srgbClr val="3AE657"/>
+                              </a:solidFill>
+                              <a:latin typeface="Cambria Math" panose="02040503050406030204" pitchFamily="18" charset="0"/>
+                            </a:rPr>
+                          </m:ctrlPr>
+                        </m:sSubPr>
+                        <m:e>
+                          <m:r>
+                            <a:rPr lang="en-US" sz="2000" b="0" i="1" smtClean="0">
+                              <a:solidFill>
+                                <a:srgbClr val="3AE657"/>
+                              </a:solidFill>
+                              <a:latin typeface="Cambria Math" panose="02040503050406030204" pitchFamily="18" charset="0"/>
+                            </a:rPr>
+                            <m:t>−</m:t>
+                          </m:r>
+                          <m:r>
+                            <a:rPr lang="en-US" sz="2000" i="1" smtClean="0">
+                              <a:solidFill>
+                                <a:srgbClr val="3AE657"/>
+                              </a:solidFill>
+                              <a:latin typeface="Cambria Math" panose="02040503050406030204" pitchFamily="18" charset="0"/>
+                            </a:rPr>
+                            <m:t>𝑡</m:t>
+                          </m:r>
+                        </m:e>
+                        <m:sub>
+                          <m:r>
+                            <a:rPr lang="en-US" sz="2000" b="0" i="1" smtClean="0">
+                              <a:solidFill>
+                                <a:srgbClr val="3AE657"/>
+                              </a:solidFill>
+                              <a:latin typeface="Cambria Math" panose="02040503050406030204" pitchFamily="18" charset="0"/>
+                            </a:rPr>
+                            <m:t>𝐶</m:t>
+                          </m:r>
+                        </m:sub>
+                      </m:sSub>
+                    </m:oMath>
+                  </m:oMathPara>
+                </a14:m>
+                <a:endParaRPr lang="sv-SE" dirty="0"/>
+              </a:p>
+            </p:txBody>
+          </p:sp>
+        </mc:Choice>
+        <mc:Fallback xmlns="">
+          <p:sp>
+            <p:nvSpPr>
+              <p:cNvPr id="44" name="TextBox 43"/>
+              <p:cNvSpPr txBox="1">
+                <a:spLocks noRot="1" noChangeAspect="1" noMove="1" noResize="1" noEditPoints="1" noAdjustHandles="1" noChangeArrowheads="1" noChangeShapeType="1" noTextEdit="1"/>
+              </p:cNvSpPr>
+              <p:nvPr/>
+            </p:nvSpPr>
+            <p:spPr>
+              <a:xfrm>
+                <a:off x="-1435691" y="15112516"/>
+                <a:ext cx="533928" cy="400110"/>
+              </a:xfrm>
+              <a:prstGeom prst="rect">
+                <a:avLst/>
+              </a:prstGeom>
+              <a:blipFill>
+                <a:blip r:embed="rId3"/>
+                <a:stretch>
+                  <a:fillRect r="-4545"/>
+                </a:stretch>
+              </a:blipFill>
+            </p:spPr>
+            <p:txBody>
+              <a:bodyPr/>
+              <a:lstStyle/>
+              <a:p>
+                <a:r>
+                  <a:rPr lang="sv-SE">
+                    <a:noFill/>
+                  </a:rPr>
+                  <a:t> </a:t>
+                </a:r>
+              </a:p>
+            </p:txBody>
+          </p:sp>
+        </mc:Fallback>
+      </mc:AlternateContent>
       <p:sp>
         <p:nvSpPr>
-          <p:cNvPr id="5" name="TextBox 4"/>
+          <p:cNvPr id="58" name="TextBox 57"/>
           <p:cNvSpPr txBox="1"/>
           <p:nvPr/>
         </p:nvSpPr>
         <p:spPr>
           <a:xfrm>
-            <a:off x="4653280" y="213360"/>
-            <a:ext cx="2621280" cy="707886"/>
+            <a:off x="3769335" y="4766289"/>
+            <a:ext cx="545691" cy="461665"/>
           </a:xfrm>
           <a:prstGeom prst="rect">
             <a:avLst/>
@@ -10872,31 +13141,23 @@
           <a:lstStyle/>
           <a:p>
             <a:r>
-              <a:rPr lang="en-US" sz="4000" dirty="0" smtClean="0">
-                <a:solidFill>
-                  <a:srgbClr val="C00000"/>
-                </a:solidFill>
-              </a:rPr>
-              <a:t>Drawbacks</a:t>
-            </a:r>
-            <a:endParaRPr lang="sv-SE" sz="4000" dirty="0">
-              <a:solidFill>
-                <a:srgbClr val="C00000"/>
-              </a:solidFill>
-            </a:endParaRPr>
+              <a:rPr lang="en-US" sz="2400" dirty="0" smtClean="0"/>
+              <a:t>(a)</a:t>
+            </a:r>
+            <a:endParaRPr lang="sv-SE" sz="2400" dirty="0"/>
           </a:p>
         </p:txBody>
       </p:sp>
       <p:sp>
         <p:nvSpPr>
-          <p:cNvPr id="6" name="TextBox 5"/>
+          <p:cNvPr id="59" name="TextBox 58"/>
           <p:cNvSpPr txBox="1"/>
           <p:nvPr/>
         </p:nvSpPr>
         <p:spPr>
           <a:xfrm>
-            <a:off x="856621" y="921246"/>
-            <a:ext cx="10556240" cy="1477328"/>
+            <a:off x="9103335" y="4797174"/>
+            <a:ext cx="545691" cy="461665"/>
           </a:xfrm>
           <a:prstGeom prst="rect">
             <a:avLst/>
@@ -10909,241 +13170,66 @@
           </a:bodyPr>
           <a:lstStyle/>
           <a:p>
-            <a:pPr marL="285750" indent="-285750">
-              <a:buFont typeface="Arial" panose="020B0604020202020204" pitchFamily="34" charset="0"/>
-              <a:buChar char="•"/>
-            </a:pPr>
-            <a:r>
-              <a:rPr lang="en-US" dirty="0" smtClean="0">
-                <a:latin typeface="Times New Roman" panose="02020603050405020304" pitchFamily="18" charset="0"/>
-                <a:cs typeface="Times New Roman" panose="02020603050405020304" pitchFamily="18" charset="0"/>
-              </a:rPr>
-              <a:t>The maximum modulation is limited to 2/3 due to DC injection.</a:t>
-            </a:r>
-          </a:p>
-          <a:p>
-            <a:pPr marL="285750" indent="-285750">
-              <a:buFont typeface="Arial" panose="020B0604020202020204" pitchFamily="34" charset="0"/>
-              <a:buChar char="•"/>
-            </a:pPr>
-            <a:endParaRPr lang="en-US" dirty="0">
-              <a:latin typeface="Times New Roman" panose="02020603050405020304" pitchFamily="18" charset="0"/>
-              <a:cs typeface="Times New Roman" panose="02020603050405020304" pitchFamily="18" charset="0"/>
-            </a:endParaRPr>
-          </a:p>
-          <a:p>
-            <a:pPr marL="285750" indent="-285750">
-              <a:buFont typeface="Arial" panose="020B0604020202020204" pitchFamily="34" charset="0"/>
-              <a:buChar char="•"/>
-            </a:pPr>
-            <a:r>
-              <a:rPr lang="en-US" dirty="0" smtClean="0">
-                <a:latin typeface="Times New Roman" panose="02020603050405020304" pitchFamily="18" charset="0"/>
-                <a:cs typeface="Times New Roman" panose="02020603050405020304" pitchFamily="18" charset="0"/>
-              </a:rPr>
-              <a:t>Implementation is difficult due to delay time of practical components and other </a:t>
-            </a:r>
-            <a:r>
-              <a:rPr lang="en-US" dirty="0" err="1" smtClean="0">
-                <a:latin typeface="Times New Roman" panose="02020603050405020304" pitchFamily="18" charset="0"/>
-                <a:cs typeface="Times New Roman" panose="02020603050405020304" pitchFamily="18" charset="0"/>
-              </a:rPr>
-              <a:t>nonidealities</a:t>
-            </a:r>
-            <a:r>
-              <a:rPr lang="en-US" dirty="0" smtClean="0">
-                <a:latin typeface="Times New Roman" panose="02020603050405020304" pitchFamily="18" charset="0"/>
-                <a:cs typeface="Times New Roman" panose="02020603050405020304" pitchFamily="18" charset="0"/>
-              </a:rPr>
-              <a:t>.</a:t>
-            </a:r>
-          </a:p>
-          <a:p>
-            <a:endParaRPr lang="en-US" dirty="0">
-              <a:latin typeface="Times New Roman" panose="02020603050405020304" pitchFamily="18" charset="0"/>
-              <a:cs typeface="Times New Roman" panose="02020603050405020304" pitchFamily="18" charset="0"/>
-            </a:endParaRPr>
-          </a:p>
-          <a:p>
-            <a:pPr marL="285750" indent="-285750">
-              <a:buFont typeface="Arial" panose="020B0604020202020204" pitchFamily="34" charset="0"/>
-              <a:buChar char="•"/>
-            </a:pPr>
-            <a:endParaRPr lang="en-US" dirty="0" smtClean="0">
-              <a:latin typeface="Times New Roman" panose="02020603050405020304" pitchFamily="18" charset="0"/>
-              <a:cs typeface="Times New Roman" panose="02020603050405020304" pitchFamily="18" charset="0"/>
-            </a:endParaRPr>
+            <a:r>
+              <a:rPr lang="en-US" sz="2400" dirty="0" smtClean="0"/>
+              <a:t>(b)</a:t>
+            </a:r>
+            <a:endParaRPr lang="sv-SE" sz="2400" dirty="0"/>
           </a:p>
         </p:txBody>
       </p:sp>
-      <p:sp>
-        <p:nvSpPr>
-          <p:cNvPr id="7" name="TextBox 6"/>
-          <p:cNvSpPr txBox="1"/>
-          <p:nvPr/>
-        </p:nvSpPr>
-        <p:spPr>
-          <a:xfrm>
-            <a:off x="3416941" y="2153245"/>
-            <a:ext cx="5435600" cy="707886"/>
+      <p:pic>
+        <p:nvPicPr>
+          <p:cNvPr id="6" name="Picture 5"/>
+          <p:cNvPicPr>
+            <a:picLocks noChangeAspect="1"/>
+          </p:cNvPicPr>
+          <p:nvPr/>
+        </p:nvPicPr>
+        <p:blipFill>
+          <a:blip r:embed="rId4"/>
+          <a:stretch>
+            <a:fillRect/>
+          </a:stretch>
+        </p:blipFill>
+        <p:spPr>
+          <a:xfrm>
+            <a:off x="1102335" y="796674"/>
+            <a:ext cx="5334000" cy="4000500"/>
           </a:xfrm>
           <a:prstGeom prst="rect">
             <a:avLst/>
           </a:prstGeom>
-          <a:noFill/>
-        </p:spPr>
-        <p:txBody>
-          <a:bodyPr wrap="square" rtlCol="0">
-            <a:spAutoFit/>
-          </a:bodyPr>
-          <a:lstStyle/>
-          <a:p>
-            <a:r>
-              <a:rPr lang="en-US" sz="4000" dirty="0" smtClean="0">
-                <a:solidFill>
-                  <a:srgbClr val="C00000"/>
-                </a:solidFill>
-              </a:rPr>
-              <a:t>Further Investigation</a:t>
-            </a:r>
-            <a:endParaRPr lang="sv-SE" sz="4000" dirty="0">
-              <a:solidFill>
-                <a:srgbClr val="C00000"/>
-              </a:solidFill>
-            </a:endParaRPr>
-          </a:p>
-        </p:txBody>
-      </p:sp>
-      <p:sp>
-        <p:nvSpPr>
-          <p:cNvPr id="12" name="TextBox 11"/>
-          <p:cNvSpPr txBox="1"/>
-          <p:nvPr/>
-        </p:nvSpPr>
-        <p:spPr>
-          <a:xfrm>
-            <a:off x="958221" y="3197086"/>
-            <a:ext cx="10556240" cy="2031325"/>
+        </p:spPr>
+      </p:pic>
+      <p:pic>
+        <p:nvPicPr>
+          <p:cNvPr id="7" name="Picture 6"/>
+          <p:cNvPicPr>
+            <a:picLocks noChangeAspect="1"/>
+          </p:cNvPicPr>
+          <p:nvPr/>
+        </p:nvPicPr>
+        <p:blipFill>
+          <a:blip r:embed="rId5"/>
+          <a:stretch>
+            <a:fillRect/>
+          </a:stretch>
+        </p:blipFill>
+        <p:spPr>
+          <a:xfrm>
+            <a:off x="6436335" y="816386"/>
+            <a:ext cx="5334000" cy="4000500"/>
           </a:xfrm>
           <a:prstGeom prst="rect">
             <a:avLst/>
           </a:prstGeom>
-          <a:noFill/>
-        </p:spPr>
-        <p:txBody>
-          <a:bodyPr wrap="square" rtlCol="0">
-            <a:spAutoFit/>
-          </a:bodyPr>
-          <a:lstStyle/>
-          <a:p>
-            <a:pPr marL="285750" indent="-285750">
-              <a:buFont typeface="Arial" panose="020B0604020202020204" pitchFamily="34" charset="0"/>
-              <a:buChar char="•"/>
-            </a:pPr>
-            <a:r>
-              <a:rPr lang="en-US" dirty="0" smtClean="0">
-                <a:latin typeface="Times New Roman" panose="02020603050405020304" pitchFamily="18" charset="0"/>
-                <a:cs typeface="Times New Roman" panose="02020603050405020304" pitchFamily="18" charset="0"/>
-              </a:rPr>
-              <a:t>SVPWM or third harmonic injection to increase DC-link utilization.</a:t>
-            </a:r>
-          </a:p>
-          <a:p>
-            <a:pPr marL="285750" indent="-285750">
-              <a:buFont typeface="Arial" panose="020B0604020202020204" pitchFamily="34" charset="0"/>
-              <a:buChar char="•"/>
-            </a:pPr>
-            <a:endParaRPr lang="en-US" dirty="0">
-              <a:latin typeface="Times New Roman" panose="02020603050405020304" pitchFamily="18" charset="0"/>
-              <a:cs typeface="Times New Roman" panose="02020603050405020304" pitchFamily="18" charset="0"/>
-            </a:endParaRPr>
-          </a:p>
-          <a:p>
-            <a:pPr marL="285750" indent="-285750">
-              <a:buFont typeface="Arial" panose="020B0604020202020204" pitchFamily="34" charset="0"/>
-              <a:buChar char="•"/>
-            </a:pPr>
-            <a:r>
-              <a:rPr lang="en-US" dirty="0" smtClean="0">
-                <a:latin typeface="Times New Roman" panose="02020603050405020304" pitchFamily="18" charset="0"/>
-                <a:cs typeface="Times New Roman" panose="02020603050405020304" pitchFamily="18" charset="0"/>
-              </a:rPr>
-              <a:t>Constant dv/</a:t>
-            </a:r>
-            <a:r>
-              <a:rPr lang="en-US" dirty="0" err="1" smtClean="0">
-                <a:latin typeface="Times New Roman" panose="02020603050405020304" pitchFamily="18" charset="0"/>
-                <a:cs typeface="Times New Roman" panose="02020603050405020304" pitchFamily="18" charset="0"/>
-              </a:rPr>
-              <a:t>dt</a:t>
-            </a:r>
-            <a:r>
-              <a:rPr lang="en-US" dirty="0" smtClean="0">
-                <a:latin typeface="Times New Roman" panose="02020603050405020304" pitchFamily="18" charset="0"/>
-                <a:cs typeface="Times New Roman" panose="02020603050405020304" pitchFamily="18" charset="0"/>
-              </a:rPr>
-              <a:t> for both turn-on and turn-off transition. (Variable gate resistance)</a:t>
-            </a:r>
-          </a:p>
-          <a:p>
-            <a:pPr marL="285750" indent="-285750">
-              <a:buFont typeface="Arial" panose="020B0604020202020204" pitchFamily="34" charset="0"/>
-              <a:buChar char="•"/>
-            </a:pPr>
-            <a:endParaRPr lang="en-US" dirty="0">
-              <a:latin typeface="Times New Roman" panose="02020603050405020304" pitchFamily="18" charset="0"/>
-              <a:cs typeface="Times New Roman" panose="02020603050405020304" pitchFamily="18" charset="0"/>
-            </a:endParaRPr>
-          </a:p>
-          <a:p>
-            <a:pPr marL="285750" indent="-285750">
-              <a:buFont typeface="Arial" panose="020B0604020202020204" pitchFamily="34" charset="0"/>
-              <a:buChar char="•"/>
-            </a:pPr>
-            <a:r>
-              <a:rPr lang="en-US" dirty="0" smtClean="0">
-                <a:latin typeface="Times New Roman" panose="02020603050405020304" pitchFamily="18" charset="0"/>
-                <a:cs typeface="Times New Roman" panose="02020603050405020304" pitchFamily="18" charset="0"/>
-              </a:rPr>
-              <a:t>Enhanced mathematical model including dead time, different dv/</a:t>
-            </a:r>
-            <a:r>
-              <a:rPr lang="en-US" dirty="0" err="1" smtClean="0">
-                <a:latin typeface="Times New Roman" panose="02020603050405020304" pitchFamily="18" charset="0"/>
-                <a:cs typeface="Times New Roman" panose="02020603050405020304" pitchFamily="18" charset="0"/>
-              </a:rPr>
-              <a:t>dt</a:t>
-            </a:r>
-            <a:r>
-              <a:rPr lang="en-US" dirty="0" smtClean="0">
-                <a:latin typeface="Times New Roman" panose="02020603050405020304" pitchFamily="18" charset="0"/>
-                <a:cs typeface="Times New Roman" panose="02020603050405020304" pitchFamily="18" charset="0"/>
-              </a:rPr>
-              <a:t> effect (different loading).</a:t>
-            </a:r>
-          </a:p>
-          <a:p>
-            <a:endParaRPr lang="en-US" dirty="0">
-              <a:latin typeface="Times New Roman" panose="02020603050405020304" pitchFamily="18" charset="0"/>
-              <a:cs typeface="Times New Roman" panose="02020603050405020304" pitchFamily="18" charset="0"/>
-            </a:endParaRPr>
-          </a:p>
-          <a:p>
-            <a:pPr marL="285750" indent="-285750">
-              <a:buFont typeface="Arial" panose="020B0604020202020204" pitchFamily="34" charset="0"/>
-              <a:buChar char="•"/>
-            </a:pPr>
-            <a:endParaRPr lang="en-US" dirty="0" smtClean="0">
-              <a:latin typeface="Times New Roman" panose="02020603050405020304" pitchFamily="18" charset="0"/>
-              <a:cs typeface="Times New Roman" panose="02020603050405020304" pitchFamily="18" charset="0"/>
-            </a:endParaRPr>
-          </a:p>
-        </p:txBody>
-      </p:sp>
+        </p:spPr>
+      </p:pic>
     </p:spTree>
     <p:extLst>
       <p:ext uri="{BB962C8B-B14F-4D97-AF65-F5344CB8AC3E}">
-        <p14:creationId xmlns:p14="http://schemas.microsoft.com/office/powerpoint/2010/main" val="3992381661"/>
+        <p14:creationId xmlns:p14="http://schemas.microsoft.com/office/powerpoint/2010/main" val="3488593451"/>
       </p:ext>
     </p:extLst>
   </p:cSld>
@@ -11170,265 +13256,265 @@
           <a:chExt cx="0" cy="0"/>
         </a:xfrm>
       </p:grpSpPr>
+      <mc:AlternateContent xmlns:mc="http://schemas.openxmlformats.org/markup-compatibility/2006" xmlns:a14="http://schemas.microsoft.com/office/drawing/2010/main">
+        <mc:Choice Requires="a14">
+          <p:sp>
+            <p:nvSpPr>
+              <p:cNvPr id="44" name="TextBox 43"/>
+              <p:cNvSpPr txBox="1"/>
+              <p:nvPr/>
+            </p:nvSpPr>
+            <p:spPr>
+              <a:xfrm>
+                <a:off x="-1435691" y="15112516"/>
+                <a:ext cx="533928" cy="400110"/>
+              </a:xfrm>
+              <a:prstGeom prst="rect">
+                <a:avLst/>
+              </a:prstGeom>
+              <a:noFill/>
+            </p:spPr>
+            <p:txBody>
+              <a:bodyPr wrap="square" rtlCol="0">
+                <a:spAutoFit/>
+              </a:bodyPr>
+              <a:lstStyle/>
+              <a:p>
+                <a:pPr/>
+                <a14:m>
+                  <m:oMathPara xmlns:m="http://schemas.openxmlformats.org/officeDocument/2006/math">
+                    <m:oMathParaPr>
+                      <m:jc m:val="centerGroup"/>
+                    </m:oMathParaPr>
+                    <m:oMath xmlns:m="http://schemas.openxmlformats.org/officeDocument/2006/math">
+                      <m:sSub>
+                        <m:sSubPr>
+                          <m:ctrlPr>
+                            <a:rPr lang="en-US" sz="2000" b="0" i="1" smtClean="0">
+                              <a:solidFill>
+                                <a:srgbClr val="3AE657"/>
+                              </a:solidFill>
+                              <a:latin typeface="Cambria Math" panose="02040503050406030204" pitchFamily="18" charset="0"/>
+                            </a:rPr>
+                          </m:ctrlPr>
+                        </m:sSubPr>
+                        <m:e>
+                          <m:r>
+                            <a:rPr lang="en-US" sz="2000" b="0" i="1" smtClean="0">
+                              <a:solidFill>
+                                <a:srgbClr val="3AE657"/>
+                              </a:solidFill>
+                              <a:latin typeface="Cambria Math" panose="02040503050406030204" pitchFamily="18" charset="0"/>
+                            </a:rPr>
+                            <m:t>−</m:t>
+                          </m:r>
+                          <m:r>
+                            <a:rPr lang="en-US" sz="2000" i="1" smtClean="0">
+                              <a:solidFill>
+                                <a:srgbClr val="3AE657"/>
+                              </a:solidFill>
+                              <a:latin typeface="Cambria Math" panose="02040503050406030204" pitchFamily="18" charset="0"/>
+                            </a:rPr>
+                            <m:t>𝑡</m:t>
+                          </m:r>
+                        </m:e>
+                        <m:sub>
+                          <m:r>
+                            <a:rPr lang="en-US" sz="2000" b="0" i="1" smtClean="0">
+                              <a:solidFill>
+                                <a:srgbClr val="3AE657"/>
+                              </a:solidFill>
+                              <a:latin typeface="Cambria Math" panose="02040503050406030204" pitchFamily="18" charset="0"/>
+                            </a:rPr>
+                            <m:t>𝐶</m:t>
+                          </m:r>
+                        </m:sub>
+                      </m:sSub>
+                    </m:oMath>
+                  </m:oMathPara>
+                </a14:m>
+                <a:endParaRPr lang="sv-SE" dirty="0"/>
+              </a:p>
+            </p:txBody>
+          </p:sp>
+        </mc:Choice>
+        <mc:Fallback xmlns="">
+          <p:sp>
+            <p:nvSpPr>
+              <p:cNvPr id="44" name="TextBox 43"/>
+              <p:cNvSpPr txBox="1">
+                <a:spLocks noRot="1" noChangeAspect="1" noMove="1" noResize="1" noEditPoints="1" noAdjustHandles="1" noChangeArrowheads="1" noChangeShapeType="1" noTextEdit="1"/>
+              </p:cNvSpPr>
+              <p:nvPr/>
+            </p:nvSpPr>
+            <p:spPr>
+              <a:xfrm>
+                <a:off x="-1435691" y="15112516"/>
+                <a:ext cx="533928" cy="400110"/>
+              </a:xfrm>
+              <a:prstGeom prst="rect">
+                <a:avLst/>
+              </a:prstGeom>
+              <a:blipFill>
+                <a:blip r:embed="rId3"/>
+                <a:stretch>
+                  <a:fillRect r="-4545"/>
+                </a:stretch>
+              </a:blipFill>
+            </p:spPr>
+            <p:txBody>
+              <a:bodyPr/>
+              <a:lstStyle/>
+              <a:p>
+                <a:r>
+                  <a:rPr lang="sv-SE">
+                    <a:noFill/>
+                  </a:rPr>
+                  <a:t> </a:t>
+                </a:r>
+              </a:p>
+            </p:txBody>
+          </p:sp>
+        </mc:Fallback>
+      </mc:AlternateContent>
       <p:sp>
         <p:nvSpPr>
-          <p:cNvPr id="2" name="Title 1"/>
-          <p:cNvSpPr>
-            <a:spLocks noGrp="1"/>
-          </p:cNvSpPr>
-          <p:nvPr>
-            <p:ph type="title"/>
-          </p:nvPr>
+          <p:cNvPr id="58" name="TextBox 57"/>
+          <p:cNvSpPr txBox="1"/>
+          <p:nvPr/>
         </p:nvSpPr>
         <p:spPr>
           <a:xfrm>
-            <a:off x="3105288" y="21950"/>
-            <a:ext cx="6324600" cy="1325563"/>
-          </a:xfrm>
+            <a:off x="3448396" y="2572614"/>
+            <a:ext cx="545691" cy="461665"/>
+          </a:xfrm>
+          <a:prstGeom prst="rect">
+            <a:avLst/>
+          </a:prstGeom>
+          <a:noFill/>
         </p:spPr>
         <p:txBody>
-          <a:bodyPr/>
+          <a:bodyPr wrap="square" rtlCol="0">
+            <a:spAutoFit/>
+          </a:bodyPr>
           <a:lstStyle/>
           <a:p>
             <a:r>
-              <a:rPr lang="en-US" dirty="0" smtClean="0">
-                <a:solidFill>
-                  <a:srgbClr val="C00000"/>
-                </a:solidFill>
-              </a:rPr>
-              <a:t>Capacitive Power Transfer</a:t>
-            </a:r>
-            <a:endParaRPr lang="sv-SE" dirty="0">
-              <a:solidFill>
-                <a:srgbClr val="C00000"/>
-              </a:solidFill>
-            </a:endParaRPr>
+              <a:rPr lang="en-US" sz="2400" dirty="0" smtClean="0"/>
+              <a:t>(a)</a:t>
+            </a:r>
+            <a:endParaRPr lang="sv-SE" sz="2400" dirty="0"/>
           </a:p>
         </p:txBody>
       </p:sp>
       <p:sp>
         <p:nvSpPr>
-          <p:cNvPr id="4" name="Rectangle 3"/>
-          <p:cNvSpPr/>
+          <p:cNvPr id="59" name="TextBox 58"/>
+          <p:cNvSpPr txBox="1"/>
           <p:nvPr/>
         </p:nvSpPr>
         <p:spPr>
           <a:xfrm>
-            <a:off x="381551" y="836276"/>
-            <a:ext cx="6431280" cy="2031325"/>
+            <a:off x="8684455" y="2552902"/>
+            <a:ext cx="545691" cy="461665"/>
           </a:xfrm>
           <a:prstGeom prst="rect">
             <a:avLst/>
           </a:prstGeom>
+          <a:noFill/>
         </p:spPr>
         <p:txBody>
-          <a:bodyPr wrap="square">
+          <a:bodyPr wrap="square" rtlCol="0">
             <a:spAutoFit/>
           </a:bodyPr>
           <a:lstStyle/>
           <a:p>
-            <a:endParaRPr lang="sv-SE" dirty="0" smtClean="0"/>
-          </a:p>
-          <a:p>
-            <a:r>
-              <a:rPr lang="sv-SE" b="1" dirty="0" smtClean="0"/>
-              <a:t>Rotary </a:t>
-            </a:r>
-            <a:r>
-              <a:rPr lang="sv-SE" b="1" dirty="0" err="1" smtClean="0"/>
-              <a:t>capacitor</a:t>
-            </a:r>
-            <a:r>
-              <a:rPr lang="sv-SE" b="1" dirty="0" smtClean="0"/>
-              <a:t> </a:t>
-            </a:r>
-            <a:r>
-              <a:rPr lang="sv-SE" dirty="0" err="1" smtClean="0"/>
-              <a:t>assemblies</a:t>
-            </a:r>
-            <a:r>
-              <a:rPr lang="sv-SE" dirty="0" smtClean="0"/>
-              <a:t> </a:t>
-            </a:r>
-            <a:r>
-              <a:rPr lang="sv-SE" dirty="0" err="1" smtClean="0"/>
-              <a:t>divert</a:t>
-            </a:r>
-            <a:r>
-              <a:rPr lang="sv-SE" dirty="0" smtClean="0"/>
-              <a:t> or </a:t>
-            </a:r>
-            <a:r>
-              <a:rPr lang="sv-SE" b="1" dirty="0" err="1" smtClean="0"/>
-              <a:t>mitigate</a:t>
-            </a:r>
-            <a:r>
-              <a:rPr lang="sv-SE" dirty="0" smtClean="0"/>
-              <a:t> </a:t>
-            </a:r>
-            <a:r>
-              <a:rPr lang="en-US" b="1" dirty="0" smtClean="0"/>
-              <a:t>high-frequency</a:t>
-            </a:r>
-            <a:r>
-              <a:rPr lang="sv-SE" b="1" dirty="0" smtClean="0"/>
-              <a:t> </a:t>
-            </a:r>
-            <a:r>
-              <a:rPr lang="sv-SE" b="1" dirty="0" err="1" smtClean="0"/>
-              <a:t>electrical</a:t>
-            </a:r>
-            <a:r>
-              <a:rPr lang="sv-SE" b="1" dirty="0" smtClean="0"/>
-              <a:t> </a:t>
-            </a:r>
-            <a:r>
-              <a:rPr lang="sv-SE" b="1" dirty="0" err="1" smtClean="0"/>
-              <a:t>currents</a:t>
-            </a:r>
-            <a:r>
-              <a:rPr lang="sv-SE" b="1" dirty="0" smtClean="0"/>
-              <a:t> </a:t>
-            </a:r>
-            <a:r>
-              <a:rPr lang="sv-SE" dirty="0" smtClean="0"/>
-              <a:t>and </a:t>
-            </a:r>
-            <a:r>
-              <a:rPr lang="sv-SE" dirty="0" err="1" smtClean="0"/>
-              <a:t>voltages</a:t>
-            </a:r>
-            <a:r>
-              <a:rPr lang="sv-SE" dirty="0" smtClean="0"/>
-              <a:t> </a:t>
-            </a:r>
-            <a:r>
-              <a:rPr lang="sv-SE" b="1" dirty="0" smtClean="0"/>
-              <a:t>in </a:t>
-            </a:r>
-            <a:r>
-              <a:rPr lang="sv-SE" b="1" dirty="0" err="1" smtClean="0"/>
-              <a:t>bearings</a:t>
-            </a:r>
-            <a:r>
-              <a:rPr lang="sv-SE" b="1" dirty="0" smtClean="0"/>
-              <a:t> </a:t>
-            </a:r>
-            <a:r>
-              <a:rPr lang="sv-SE" dirty="0" err="1" smtClean="0"/>
-              <a:t>of</a:t>
-            </a:r>
-            <a:r>
-              <a:rPr lang="sv-SE" dirty="0" smtClean="0"/>
-              <a:t> </a:t>
-            </a:r>
-            <a:r>
-              <a:rPr lang="sv-SE" dirty="0" err="1" smtClean="0"/>
-              <a:t>electric</a:t>
-            </a:r>
-            <a:r>
-              <a:rPr lang="sv-SE" dirty="0" smtClean="0"/>
-              <a:t> </a:t>
-            </a:r>
-            <a:r>
-              <a:rPr lang="sv-SE" dirty="0" err="1" smtClean="0"/>
-              <a:t>machinery</a:t>
-            </a:r>
-            <a:r>
-              <a:rPr lang="sv-SE" dirty="0" smtClean="0"/>
-              <a:t> (</a:t>
-            </a:r>
-            <a:r>
-              <a:rPr lang="sv-SE" dirty="0" err="1" smtClean="0"/>
-              <a:t>e.g</a:t>
-            </a:r>
-            <a:r>
-              <a:rPr lang="sv-SE" dirty="0" smtClean="0"/>
-              <a:t>., motors and </a:t>
-            </a:r>
-            <a:r>
-              <a:rPr lang="sv-SE" dirty="0"/>
-              <a:t>generators) </a:t>
-            </a:r>
-            <a:r>
-              <a:rPr lang="sv-SE" dirty="0" err="1"/>
-              <a:t>without</a:t>
-            </a:r>
-            <a:r>
-              <a:rPr lang="sv-SE" dirty="0"/>
-              <a:t> </a:t>
-            </a:r>
-            <a:r>
-              <a:rPr lang="sv-SE" dirty="0" err="1"/>
-              <a:t>direct</a:t>
-            </a:r>
-            <a:r>
-              <a:rPr lang="sv-SE" dirty="0"/>
-              <a:t> </a:t>
-            </a:r>
-            <a:r>
-              <a:rPr lang="sv-SE" dirty="0" err="1"/>
-              <a:t>contact</a:t>
-            </a:r>
-            <a:r>
-              <a:rPr lang="sv-SE" dirty="0"/>
-              <a:t> </a:t>
-            </a:r>
-            <a:r>
-              <a:rPr lang="sv-SE" dirty="0" err="1"/>
-              <a:t>with</a:t>
-            </a:r>
-            <a:r>
-              <a:rPr lang="sv-SE" dirty="0"/>
-              <a:t> </a:t>
-            </a:r>
-            <a:r>
-              <a:rPr lang="sv-SE" dirty="0" smtClean="0"/>
-              <a:t>the </a:t>
-            </a:r>
-            <a:r>
-              <a:rPr lang="sv-SE" dirty="0" err="1"/>
-              <a:t>bearings</a:t>
-            </a:r>
-            <a:r>
-              <a:rPr lang="sv-SE" dirty="0"/>
-              <a:t>. </a:t>
-            </a:r>
-            <a:r>
-              <a:rPr lang="sv-SE" dirty="0" smtClean="0"/>
-              <a:t> </a:t>
-            </a:r>
-          </a:p>
-          <a:p>
-            <a:endParaRPr lang="en-US" dirty="0"/>
-          </a:p>
-          <a:p>
-            <a:r>
-              <a:rPr lang="sv-SE" dirty="0"/>
-              <a:t>United States Patent, US 9,653,970B2</a:t>
-            </a:r>
-            <a:endParaRPr lang="sv-SE" dirty="0" smtClean="0"/>
+            <a:r>
+              <a:rPr lang="en-US" sz="2400" dirty="0" smtClean="0"/>
+              <a:t>(b)</a:t>
+            </a:r>
+            <a:endParaRPr lang="sv-SE" sz="2400" dirty="0"/>
+          </a:p>
+        </p:txBody>
+      </p:sp>
+      <p:sp>
+        <p:nvSpPr>
+          <p:cNvPr id="60" name="TextBox 59"/>
+          <p:cNvSpPr txBox="1"/>
+          <p:nvPr/>
+        </p:nvSpPr>
+        <p:spPr>
+          <a:xfrm>
+            <a:off x="3448395" y="6914505"/>
+            <a:ext cx="545691" cy="461665"/>
+          </a:xfrm>
+          <a:prstGeom prst="rect">
+            <a:avLst/>
+          </a:prstGeom>
+          <a:noFill/>
+        </p:spPr>
+        <p:txBody>
+          <a:bodyPr wrap="square" rtlCol="0">
+            <a:spAutoFit/>
+          </a:bodyPr>
+          <a:lstStyle/>
+          <a:p>
+            <a:r>
+              <a:rPr lang="en-US" sz="2400" dirty="0" smtClean="0"/>
+              <a:t>(c)</a:t>
+            </a:r>
+            <a:endParaRPr lang="sv-SE" sz="2400" dirty="0"/>
+          </a:p>
+        </p:txBody>
+      </p:sp>
+      <p:sp>
+        <p:nvSpPr>
+          <p:cNvPr id="62" name="TextBox 61"/>
+          <p:cNvSpPr txBox="1"/>
+          <p:nvPr/>
+        </p:nvSpPr>
+        <p:spPr>
+          <a:xfrm>
+            <a:off x="8684454" y="6945091"/>
+            <a:ext cx="545691" cy="461665"/>
+          </a:xfrm>
+          <a:prstGeom prst="rect">
+            <a:avLst/>
+          </a:prstGeom>
+          <a:noFill/>
+        </p:spPr>
+        <p:txBody>
+          <a:bodyPr wrap="square" rtlCol="0">
+            <a:spAutoFit/>
+          </a:bodyPr>
+          <a:lstStyle/>
+          <a:p>
+            <a:r>
+              <a:rPr lang="en-US" sz="2400" dirty="0" smtClean="0"/>
+              <a:t>(d)</a:t>
+            </a:r>
+            <a:endParaRPr lang="sv-SE" sz="2400" dirty="0"/>
           </a:p>
         </p:txBody>
       </p:sp>
       <p:pic>
         <p:nvPicPr>
-          <p:cNvPr id="5" name="Picture 4"/>
+          <p:cNvPr id="4" name="Picture 3"/>
           <p:cNvPicPr>
             <a:picLocks noChangeAspect="1"/>
           </p:cNvPicPr>
           <p:nvPr/>
         </p:nvPicPr>
         <p:blipFill>
-          <a:blip r:embed="rId2"/>
+          <a:blip r:embed="rId4"/>
           <a:stretch>
             <a:fillRect/>
           </a:stretch>
         </p:blipFill>
         <p:spPr>
           <a:xfrm>
-            <a:off x="6667775" y="2556193"/>
-            <a:ext cx="5379169" cy="4301807"/>
+            <a:off x="674849" y="-1467977"/>
+            <a:ext cx="5334000" cy="4000500"/>
           </a:xfrm>
           <a:prstGeom prst="rect">
             <a:avLst/>
@@ -11437,22 +13523,70 @@
       </p:pic>
       <p:pic>
         <p:nvPicPr>
-          <p:cNvPr id="6" name="Picture 5"/>
+          <p:cNvPr id="7" name="Picture 6"/>
           <p:cNvPicPr>
             <a:picLocks noChangeAspect="1"/>
           </p:cNvPicPr>
           <p:nvPr/>
         </p:nvPicPr>
         <p:blipFill>
-          <a:blip r:embed="rId3"/>
+          <a:blip r:embed="rId5"/>
           <a:stretch>
             <a:fillRect/>
           </a:stretch>
         </p:blipFill>
         <p:spPr>
           <a:xfrm>
-            <a:off x="1325795" y="3030080"/>
-            <a:ext cx="4103799" cy="3665359"/>
+            <a:off x="6115397" y="-1397317"/>
+            <a:ext cx="5334000" cy="4000500"/>
+          </a:xfrm>
+          <a:prstGeom prst="rect">
+            <a:avLst/>
+          </a:prstGeom>
+        </p:spPr>
+      </p:pic>
+      <p:pic>
+        <p:nvPicPr>
+          <p:cNvPr id="8" name="Picture 7"/>
+          <p:cNvPicPr>
+            <a:picLocks noChangeAspect="1"/>
+          </p:cNvPicPr>
+          <p:nvPr/>
+        </p:nvPicPr>
+        <p:blipFill>
+          <a:blip r:embed="rId6"/>
+          <a:stretch>
+            <a:fillRect/>
+          </a:stretch>
+        </p:blipFill>
+        <p:spPr>
+          <a:xfrm>
+            <a:off x="611901" y="2803446"/>
+            <a:ext cx="5334000" cy="4000500"/>
+          </a:xfrm>
+          <a:prstGeom prst="rect">
+            <a:avLst/>
+          </a:prstGeom>
+        </p:spPr>
+      </p:pic>
+      <p:pic>
+        <p:nvPicPr>
+          <p:cNvPr id="10" name="Picture 9"/>
+          <p:cNvPicPr>
+            <a:picLocks noChangeAspect="1"/>
+          </p:cNvPicPr>
+          <p:nvPr/>
+        </p:nvPicPr>
+        <p:blipFill>
+          <a:blip r:embed="rId7"/>
+          <a:stretch>
+            <a:fillRect/>
+          </a:stretch>
+        </p:blipFill>
+        <p:spPr>
+          <a:xfrm>
+            <a:off x="6115397" y="2803446"/>
+            <a:ext cx="5334000" cy="4000500"/>
           </a:xfrm>
           <a:prstGeom prst="rect">
             <a:avLst/>
@@ -11462,7 +13596,7 @@
     </p:spTree>
     <p:extLst>
       <p:ext uri="{BB962C8B-B14F-4D97-AF65-F5344CB8AC3E}">
-        <p14:creationId xmlns:p14="http://schemas.microsoft.com/office/powerpoint/2010/main" val="1399511619"/>
+        <p14:creationId xmlns:p14="http://schemas.microsoft.com/office/powerpoint/2010/main" val="1109817906"/>
       </p:ext>
     </p:extLst>
   </p:cSld>
@@ -11489,276 +13623,115 @@
           <a:chExt cx="0" cy="0"/>
         </a:xfrm>
       </p:grpSpPr>
+      <p:pic>
+        <p:nvPicPr>
+          <p:cNvPr id="2" name="Picture 1"/>
+          <p:cNvPicPr>
+            <a:picLocks noChangeAspect="1"/>
+          </p:cNvPicPr>
+          <p:nvPr/>
+        </p:nvPicPr>
+        <p:blipFill>
+          <a:blip r:embed="rId2"/>
+          <a:stretch>
+            <a:fillRect/>
+          </a:stretch>
+        </p:blipFill>
+        <p:spPr>
+          <a:xfrm>
+            <a:off x="1584959" y="554990"/>
+            <a:ext cx="4055533" cy="3041650"/>
+          </a:xfrm>
+          <a:prstGeom prst="rect">
+            <a:avLst/>
+          </a:prstGeom>
+        </p:spPr>
+      </p:pic>
+      <p:pic>
+        <p:nvPicPr>
+          <p:cNvPr id="3" name="Picture 2"/>
+          <p:cNvPicPr>
+            <a:picLocks noChangeAspect="1"/>
+          </p:cNvPicPr>
+          <p:nvPr/>
+        </p:nvPicPr>
+        <p:blipFill>
+          <a:blip r:embed="rId3"/>
+          <a:stretch>
+            <a:fillRect/>
+          </a:stretch>
+        </p:blipFill>
+        <p:spPr>
+          <a:xfrm>
+            <a:off x="6375399" y="554990"/>
+            <a:ext cx="4055533" cy="3041650"/>
+          </a:xfrm>
+          <a:prstGeom prst="rect">
+            <a:avLst/>
+          </a:prstGeom>
+        </p:spPr>
+      </p:pic>
       <p:sp>
         <p:nvSpPr>
-          <p:cNvPr id="2" name="Title 1"/>
-          <p:cNvSpPr>
-            <a:spLocks noGrp="1"/>
-          </p:cNvSpPr>
-          <p:nvPr>
-            <p:ph type="title"/>
-          </p:nvPr>
+          <p:cNvPr id="4" name="TextBox 3"/>
+          <p:cNvSpPr txBox="1"/>
+          <p:nvPr/>
         </p:nvSpPr>
         <p:spPr>
           <a:xfrm>
-            <a:off x="3032760" y="153115"/>
-            <a:ext cx="6324600" cy="1325563"/>
-          </a:xfrm>
+            <a:off x="4683760" y="93325"/>
+            <a:ext cx="3180080" cy="461665"/>
+          </a:xfrm>
+          <a:prstGeom prst="rect">
+            <a:avLst/>
+          </a:prstGeom>
+          <a:noFill/>
         </p:spPr>
         <p:txBody>
-          <a:bodyPr/>
-          <a:lstStyle/>
-          <a:p>
-            <a:r>
-              <a:rPr lang="en-US" dirty="0" smtClean="0">
-                <a:solidFill>
-                  <a:srgbClr val="C00000"/>
-                </a:solidFill>
-              </a:rPr>
-              <a:t>Capacitive Power Transfer</a:t>
-            </a:r>
-            <a:endParaRPr lang="sv-SE" dirty="0">
-              <a:solidFill>
-                <a:srgbClr val="C00000"/>
-              </a:solidFill>
-            </a:endParaRPr>
-          </a:p>
-        </p:txBody>
-      </p:sp>
-      <p:sp>
-        <p:nvSpPr>
-          <p:cNvPr id="3" name="Rectangle 2"/>
-          <p:cNvSpPr/>
-          <p:nvPr/>
-        </p:nvSpPr>
-        <p:spPr>
-          <a:xfrm>
-            <a:off x="182880" y="1356940"/>
-            <a:ext cx="5334000" cy="923330"/>
-          </a:xfrm>
-          <a:prstGeom prst="rect">
-            <a:avLst/>
-          </a:prstGeom>
-        </p:spPr>
-        <p:txBody>
-          <a:bodyPr wrap="square">
+          <a:bodyPr wrap="square" rtlCol="0">
             <a:spAutoFit/>
           </a:bodyPr>
           <a:lstStyle/>
           <a:p>
             <a:r>
-              <a:rPr lang="sv-SE" dirty="0" err="1"/>
-              <a:t>Analysis</a:t>
-            </a:r>
-            <a:r>
-              <a:rPr lang="sv-SE" dirty="0"/>
-              <a:t> and </a:t>
-            </a:r>
-            <a:r>
-              <a:rPr lang="sv-SE" dirty="0" err="1"/>
-              <a:t>Utilization</a:t>
-            </a:r>
-            <a:r>
-              <a:rPr lang="sv-SE" dirty="0"/>
-              <a:t> </a:t>
-            </a:r>
-            <a:r>
-              <a:rPr lang="sv-SE" dirty="0" err="1"/>
-              <a:t>of</a:t>
-            </a:r>
-            <a:r>
-              <a:rPr lang="sv-SE" dirty="0"/>
-              <a:t> Common-Mode </a:t>
-            </a:r>
-            <a:r>
-              <a:rPr lang="sv-SE" dirty="0" err="1"/>
-              <a:t>Voltage</a:t>
-            </a:r>
-            <a:r>
-              <a:rPr lang="sv-SE" dirty="0"/>
-              <a:t> in </a:t>
-            </a:r>
-            <a:r>
-              <a:rPr lang="sv-SE" dirty="0" err="1"/>
-              <a:t>Inverters</a:t>
-            </a:r>
-            <a:r>
-              <a:rPr lang="sv-SE" dirty="0"/>
-              <a:t> for Power </a:t>
-            </a:r>
-            <a:r>
-              <a:rPr lang="sv-SE" dirty="0" err="1" smtClean="0"/>
-              <a:t>Supply</a:t>
-            </a:r>
-            <a:r>
-              <a:rPr lang="sv-SE" dirty="0" smtClean="0"/>
-              <a:t>, </a:t>
-            </a:r>
-            <a:r>
-              <a:rPr lang="en-US" dirty="0"/>
-              <a:t>IEEE TRANSACTIONS ON POWER ELECTRONICS, VOL. 38, NO. 7, JULY 2023</a:t>
-            </a:r>
-            <a:endParaRPr lang="sv-SE" dirty="0"/>
-          </a:p>
-        </p:txBody>
-      </p:sp>
-      <p:sp>
-        <p:nvSpPr>
-          <p:cNvPr id="6" name="Rectangle 5"/>
-          <p:cNvSpPr/>
-          <p:nvPr/>
-        </p:nvSpPr>
-        <p:spPr>
-          <a:xfrm>
-            <a:off x="182880" y="2475548"/>
-            <a:ext cx="5445760" cy="923330"/>
-          </a:xfrm>
-          <a:prstGeom prst="rect">
-            <a:avLst/>
-          </a:prstGeom>
-        </p:spPr>
-        <p:txBody>
-          <a:bodyPr wrap="square">
-            <a:spAutoFit/>
-          </a:bodyPr>
-          <a:lstStyle/>
-          <a:p>
-            <a:r>
-              <a:rPr lang="sv-SE" dirty="0"/>
-              <a:t>From the </a:t>
-            </a:r>
-            <a:r>
-              <a:rPr lang="sv-SE" dirty="0" err="1"/>
-              <a:t>perspective</a:t>
-            </a:r>
-            <a:r>
-              <a:rPr lang="sv-SE" dirty="0"/>
-              <a:t> </a:t>
-            </a:r>
-            <a:r>
-              <a:rPr lang="sv-SE" dirty="0" err="1"/>
-              <a:t>of</a:t>
-            </a:r>
-            <a:r>
-              <a:rPr lang="sv-SE" dirty="0"/>
-              <a:t> </a:t>
-            </a:r>
-            <a:r>
-              <a:rPr lang="sv-SE" b="1" dirty="0" err="1"/>
-              <a:t>energy</a:t>
-            </a:r>
-            <a:r>
-              <a:rPr lang="sv-SE" b="1" dirty="0"/>
-              <a:t> </a:t>
-            </a:r>
-            <a:r>
-              <a:rPr lang="sv-SE" b="1" dirty="0" err="1"/>
-              <a:t>utilization</a:t>
-            </a:r>
-            <a:r>
-              <a:rPr lang="sv-SE" dirty="0"/>
-              <a:t>, </a:t>
-            </a:r>
-            <a:r>
-              <a:rPr lang="sv-SE" dirty="0" err="1"/>
-              <a:t>this</a:t>
-            </a:r>
-            <a:r>
-              <a:rPr lang="sv-SE" dirty="0"/>
-              <a:t> </a:t>
-            </a:r>
-            <a:r>
-              <a:rPr lang="sv-SE" dirty="0" err="1"/>
-              <a:t>article</a:t>
-            </a:r>
-            <a:r>
-              <a:rPr lang="sv-SE" dirty="0"/>
-              <a:t> </a:t>
-            </a:r>
-            <a:r>
-              <a:rPr lang="sv-SE" dirty="0" err="1"/>
-              <a:t>proposed</a:t>
-            </a:r>
-            <a:r>
-              <a:rPr lang="sv-SE" dirty="0"/>
-              <a:t> a </a:t>
-            </a:r>
-            <a:r>
-              <a:rPr lang="sv-SE" dirty="0" err="1"/>
-              <a:t>method</a:t>
-            </a:r>
-            <a:r>
-              <a:rPr lang="sv-SE" dirty="0"/>
-              <a:t> </a:t>
-            </a:r>
-            <a:r>
-              <a:rPr lang="sv-SE" dirty="0" err="1"/>
-              <a:t>of</a:t>
-            </a:r>
-            <a:r>
-              <a:rPr lang="sv-SE" dirty="0"/>
-              <a:t> </a:t>
-            </a:r>
-            <a:r>
-              <a:rPr lang="sv-SE" dirty="0" err="1"/>
-              <a:t>powering</a:t>
-            </a:r>
-            <a:r>
-              <a:rPr lang="sv-SE" dirty="0"/>
-              <a:t> the </a:t>
-            </a:r>
-            <a:r>
-              <a:rPr lang="sv-SE" dirty="0" err="1"/>
-              <a:t>load</a:t>
-            </a:r>
-            <a:r>
-              <a:rPr lang="sv-SE" dirty="0"/>
-              <a:t> by </a:t>
-            </a:r>
-            <a:r>
-              <a:rPr lang="sv-SE" dirty="0" err="1"/>
-              <a:t>collecting</a:t>
-            </a:r>
-            <a:r>
-              <a:rPr lang="sv-SE" dirty="0"/>
-              <a:t> the </a:t>
-            </a:r>
-            <a:r>
-              <a:rPr lang="sv-SE" dirty="0" err="1"/>
-              <a:t>energy</a:t>
-            </a:r>
-            <a:r>
-              <a:rPr lang="sv-SE" dirty="0"/>
-              <a:t> </a:t>
-            </a:r>
-            <a:r>
-              <a:rPr lang="sv-SE" dirty="0" err="1"/>
-              <a:t>of</a:t>
-            </a:r>
-            <a:r>
-              <a:rPr lang="sv-SE" dirty="0"/>
-              <a:t> CMV.</a:t>
-            </a:r>
+              <a:rPr lang="sv-SE" sz="2400" b="1" dirty="0" err="1" smtClean="0">
+                <a:latin typeface="Times New Roman" panose="02020603050405020304" pitchFamily="18" charset="0"/>
+                <a:cs typeface="Times New Roman" panose="02020603050405020304" pitchFamily="18" charset="0"/>
+              </a:rPr>
+              <a:t>Single</a:t>
+            </a:r>
+            <a:r>
+              <a:rPr lang="sv-SE" sz="2400" b="1" dirty="0" smtClean="0">
+                <a:latin typeface="Times New Roman" panose="02020603050405020304" pitchFamily="18" charset="0"/>
+                <a:cs typeface="Times New Roman" panose="02020603050405020304" pitchFamily="18" charset="0"/>
+              </a:rPr>
+              <a:t> Carrier Signal </a:t>
+            </a:r>
+            <a:endParaRPr lang="sv-SE" sz="2400" b="1" dirty="0">
+              <a:latin typeface="Times New Roman" panose="02020603050405020304" pitchFamily="18" charset="0"/>
+              <a:cs typeface="Times New Roman" panose="02020603050405020304" pitchFamily="18" charset="0"/>
+            </a:endParaRPr>
           </a:p>
         </p:txBody>
       </p:sp>
       <p:pic>
         <p:nvPicPr>
-          <p:cNvPr id="7" name="Picture 6"/>
+          <p:cNvPr id="6" name="Picture 5"/>
           <p:cNvPicPr>
             <a:picLocks noChangeAspect="1"/>
           </p:cNvPicPr>
           <p:nvPr/>
         </p:nvPicPr>
-        <p:blipFill rotWithShape="1">
-          <a:blip r:embed="rId2"/>
-          <a:srcRect l="2315"/>
-          <a:stretch/>
+        <p:blipFill>
+          <a:blip r:embed="rId4"/>
+          <a:stretch>
+            <a:fillRect/>
+          </a:stretch>
         </p:blipFill>
         <p:spPr>
           <a:xfrm>
-            <a:off x="6154420" y="1185958"/>
-            <a:ext cx="5577003" cy="5695124"/>
+            <a:off x="1584959" y="3926225"/>
+            <a:ext cx="4071593" cy="3053695"/>
           </a:xfrm>
           <a:prstGeom prst="rect">
             <a:avLst/>
@@ -11774,25 +13747,61 @@
           <p:nvPr/>
         </p:nvPicPr>
         <p:blipFill>
-          <a:blip r:embed="rId3"/>
+          <a:blip r:embed="rId5"/>
           <a:stretch>
             <a:fillRect/>
           </a:stretch>
         </p:blipFill>
         <p:spPr>
           <a:xfrm>
-            <a:off x="0" y="4033520"/>
-            <a:ext cx="5805259" cy="2492194"/>
+            <a:off x="6375399" y="3926225"/>
+            <a:ext cx="4055533" cy="3041650"/>
           </a:xfrm>
           <a:prstGeom prst="rect">
             <a:avLst/>
           </a:prstGeom>
         </p:spPr>
       </p:pic>
+      <p:sp>
+        <p:nvSpPr>
+          <p:cNvPr id="9" name="TextBox 8"/>
+          <p:cNvSpPr txBox="1"/>
+          <p:nvPr/>
+        </p:nvSpPr>
+        <p:spPr>
+          <a:xfrm>
+            <a:off x="3357878" y="3540760"/>
+            <a:ext cx="7073054" cy="461665"/>
+          </a:xfrm>
+          <a:prstGeom prst="rect">
+            <a:avLst/>
+          </a:prstGeom>
+          <a:noFill/>
+        </p:spPr>
+        <p:txBody>
+          <a:bodyPr wrap="square" rtlCol="0">
+            <a:spAutoFit/>
+          </a:bodyPr>
+          <a:lstStyle/>
+          <a:p>
+            <a:r>
+              <a:rPr lang="sv-SE" sz="2400" b="1" dirty="0" smtClean="0">
+                <a:latin typeface="Times New Roman" panose="02020603050405020304" pitchFamily="18" charset="0"/>
+                <a:cs typeface="Times New Roman" panose="02020603050405020304" pitchFamily="18" charset="0"/>
+              </a:rPr>
+              <a:t>Multi-Carrier Signals CPS- 0-120-240</a:t>
+            </a:r>
+            <a:endParaRPr lang="sv-SE" sz="2400" b="1" dirty="0">
+              <a:latin typeface="Times New Roman" panose="02020603050405020304" pitchFamily="18" charset="0"/>
+              <a:cs typeface="Times New Roman" panose="02020603050405020304" pitchFamily="18" charset="0"/>
+            </a:endParaRPr>
+          </a:p>
+        </p:txBody>
+      </p:sp>
     </p:spTree>
     <p:extLst>
       <p:ext uri="{BB962C8B-B14F-4D97-AF65-F5344CB8AC3E}">
-        <p14:creationId xmlns:p14="http://schemas.microsoft.com/office/powerpoint/2010/main" val="4072981099"/>
+        <p14:creationId xmlns:p14="http://schemas.microsoft.com/office/powerpoint/2010/main" val="918334070"/>
       </p:ext>
     </p:extLst>
   </p:cSld>
@@ -12687,6 +14696,2110 @@
 </file>
 
 <file path=ppt/slides/slide20.xml><?xml version="1.0" encoding="utf-8"?>
+<p:sld xmlns:a="http://schemas.openxmlformats.org/drawingml/2006/main" xmlns:r="http://schemas.openxmlformats.org/officeDocument/2006/relationships" xmlns:p="http://schemas.openxmlformats.org/presentationml/2006/main">
+  <p:cSld>
+    <p:spTree>
+      <p:nvGrpSpPr>
+        <p:cNvPr id="1" name=""/>
+        <p:cNvGrpSpPr/>
+        <p:nvPr/>
+      </p:nvGrpSpPr>
+      <p:grpSpPr>
+        <a:xfrm>
+          <a:off x="0" y="0"/>
+          <a:ext cx="0" cy="0"/>
+          <a:chOff x="0" y="0"/>
+          <a:chExt cx="0" cy="0"/>
+        </a:xfrm>
+      </p:grpSpPr>
+      <p:pic>
+        <p:nvPicPr>
+          <p:cNvPr id="5" name="Picture 4"/>
+          <p:cNvPicPr>
+            <a:picLocks noChangeAspect="1"/>
+          </p:cNvPicPr>
+          <p:nvPr/>
+        </p:nvPicPr>
+        <p:blipFill>
+          <a:blip r:embed="rId3"/>
+          <a:stretch>
+            <a:fillRect/>
+          </a:stretch>
+        </p:blipFill>
+        <p:spPr>
+          <a:xfrm>
+            <a:off x="1488439" y="3708400"/>
+            <a:ext cx="4199467" cy="3149600"/>
+          </a:xfrm>
+          <a:prstGeom prst="rect">
+            <a:avLst/>
+          </a:prstGeom>
+        </p:spPr>
+      </p:pic>
+      <p:pic>
+        <p:nvPicPr>
+          <p:cNvPr id="7" name="Picture 6"/>
+          <p:cNvPicPr>
+            <a:picLocks noChangeAspect="1"/>
+          </p:cNvPicPr>
+          <p:nvPr/>
+        </p:nvPicPr>
+        <p:blipFill>
+          <a:blip r:embed="rId4"/>
+          <a:stretch>
+            <a:fillRect/>
+          </a:stretch>
+        </p:blipFill>
+        <p:spPr>
+          <a:xfrm>
+            <a:off x="6436358" y="3825875"/>
+            <a:ext cx="4042833" cy="3032125"/>
+          </a:xfrm>
+          <a:prstGeom prst="rect">
+            <a:avLst/>
+          </a:prstGeom>
+        </p:spPr>
+      </p:pic>
+      <p:sp>
+        <p:nvSpPr>
+          <p:cNvPr id="6" name="TextBox 5"/>
+          <p:cNvSpPr txBox="1"/>
+          <p:nvPr/>
+        </p:nvSpPr>
+        <p:spPr>
+          <a:xfrm>
+            <a:off x="721360" y="116840"/>
+            <a:ext cx="10881360" cy="461665"/>
+          </a:xfrm>
+          <a:prstGeom prst="rect">
+            <a:avLst/>
+          </a:prstGeom>
+          <a:noFill/>
+        </p:spPr>
+        <p:txBody>
+          <a:bodyPr wrap="square" rtlCol="0">
+            <a:spAutoFit/>
+          </a:bodyPr>
+          <a:lstStyle/>
+          <a:p>
+            <a:r>
+              <a:rPr lang="sv-SE" sz="2400" b="1" dirty="0" smtClean="0">
+                <a:latin typeface="Times New Roman" panose="02020603050405020304" pitchFamily="18" charset="0"/>
+                <a:cs typeface="Times New Roman" panose="02020603050405020304" pitchFamily="18" charset="0"/>
+              </a:rPr>
+              <a:t>Multi-Carrier Signals (</a:t>
+            </a:r>
+            <a:r>
+              <a:rPr lang="sv-SE" sz="2400" b="1" dirty="0" err="1" smtClean="0">
+                <a:latin typeface="Times New Roman" panose="02020603050405020304" pitchFamily="18" charset="0"/>
+                <a:cs typeface="Times New Roman" panose="02020603050405020304" pitchFamily="18" charset="0"/>
+              </a:rPr>
+              <a:t>Variable</a:t>
+            </a:r>
+            <a:r>
+              <a:rPr lang="sv-SE" sz="2400" b="1" dirty="0" smtClean="0">
+                <a:latin typeface="Times New Roman" panose="02020603050405020304" pitchFamily="18" charset="0"/>
+                <a:cs typeface="Times New Roman" panose="02020603050405020304" pitchFamily="18" charset="0"/>
+              </a:rPr>
+              <a:t> CPS- Fundamental Component </a:t>
+            </a:r>
+            <a:r>
+              <a:rPr lang="sv-SE" sz="2400" b="1" dirty="0" err="1" smtClean="0">
+                <a:latin typeface="Times New Roman" panose="02020603050405020304" pitchFamily="18" charset="0"/>
+                <a:cs typeface="Times New Roman" panose="02020603050405020304" pitchFamily="18" charset="0"/>
+              </a:rPr>
+              <a:t>Reduction</a:t>
+            </a:r>
+            <a:r>
+              <a:rPr lang="sv-SE" sz="2400" b="1" dirty="0" smtClean="0">
+                <a:latin typeface="Times New Roman" panose="02020603050405020304" pitchFamily="18" charset="0"/>
+                <a:cs typeface="Times New Roman" panose="02020603050405020304" pitchFamily="18" charset="0"/>
+              </a:rPr>
+              <a:t>)</a:t>
+            </a:r>
+            <a:endParaRPr lang="sv-SE" sz="2400" b="1" dirty="0">
+              <a:latin typeface="Times New Roman" panose="02020603050405020304" pitchFamily="18" charset="0"/>
+              <a:cs typeface="Times New Roman" panose="02020603050405020304" pitchFamily="18" charset="0"/>
+            </a:endParaRPr>
+          </a:p>
+        </p:txBody>
+      </p:sp>
+      <p:pic>
+        <p:nvPicPr>
+          <p:cNvPr id="4" name="Picture 3"/>
+          <p:cNvPicPr>
+            <a:picLocks noChangeAspect="1"/>
+          </p:cNvPicPr>
+          <p:nvPr/>
+        </p:nvPicPr>
+        <p:blipFill>
+          <a:blip r:embed="rId5"/>
+          <a:stretch>
+            <a:fillRect/>
+          </a:stretch>
+        </p:blipFill>
+        <p:spPr>
+          <a:xfrm>
+            <a:off x="1594272" y="447040"/>
+            <a:ext cx="3987800" cy="2990850"/>
+          </a:xfrm>
+          <a:prstGeom prst="rect">
+            <a:avLst/>
+          </a:prstGeom>
+        </p:spPr>
+      </p:pic>
+      <p:pic>
+        <p:nvPicPr>
+          <p:cNvPr id="8" name="Picture 7"/>
+          <p:cNvPicPr>
+            <a:picLocks noChangeAspect="1"/>
+          </p:cNvPicPr>
+          <p:nvPr/>
+        </p:nvPicPr>
+        <p:blipFill>
+          <a:blip r:embed="rId6"/>
+          <a:stretch>
+            <a:fillRect/>
+          </a:stretch>
+        </p:blipFill>
+        <p:spPr>
+          <a:xfrm>
+            <a:off x="6436358" y="447040"/>
+            <a:ext cx="3987800" cy="2990850"/>
+          </a:xfrm>
+          <a:prstGeom prst="rect">
+            <a:avLst/>
+          </a:prstGeom>
+        </p:spPr>
+      </p:pic>
+      <p:sp>
+        <p:nvSpPr>
+          <p:cNvPr id="9" name="TextBox 8"/>
+          <p:cNvSpPr txBox="1"/>
+          <p:nvPr/>
+        </p:nvSpPr>
+        <p:spPr>
+          <a:xfrm>
+            <a:off x="721360" y="3342313"/>
+            <a:ext cx="10881360" cy="461665"/>
+          </a:xfrm>
+          <a:prstGeom prst="rect">
+            <a:avLst/>
+          </a:prstGeom>
+          <a:noFill/>
+        </p:spPr>
+        <p:txBody>
+          <a:bodyPr wrap="square" rtlCol="0">
+            <a:spAutoFit/>
+          </a:bodyPr>
+          <a:lstStyle/>
+          <a:p>
+            <a:r>
+              <a:rPr lang="sv-SE" sz="2400" b="1" dirty="0" smtClean="0">
+                <a:latin typeface="Times New Roman" panose="02020603050405020304" pitchFamily="18" charset="0"/>
+                <a:cs typeface="Times New Roman" panose="02020603050405020304" pitchFamily="18" charset="0"/>
+              </a:rPr>
+              <a:t>Multi-Carrier Signals (DC </a:t>
+            </a:r>
+            <a:r>
+              <a:rPr lang="sv-SE" sz="2400" b="1" dirty="0" err="1" smtClean="0">
+                <a:latin typeface="Times New Roman" panose="02020603050405020304" pitchFamily="18" charset="0"/>
+                <a:cs typeface="Times New Roman" panose="02020603050405020304" pitchFamily="18" charset="0"/>
+              </a:rPr>
+              <a:t>injected</a:t>
+            </a:r>
+            <a:r>
+              <a:rPr lang="sv-SE" sz="2400" b="1" dirty="0" smtClean="0">
+                <a:latin typeface="Times New Roman" panose="02020603050405020304" pitchFamily="18" charset="0"/>
+                <a:cs typeface="Times New Roman" panose="02020603050405020304" pitchFamily="18" charset="0"/>
+              </a:rPr>
+              <a:t>- </a:t>
+            </a:r>
+            <a:r>
+              <a:rPr lang="sv-SE" sz="2400" b="1" dirty="0" err="1" smtClean="0">
+                <a:latin typeface="Times New Roman" panose="02020603050405020304" pitchFamily="18" charset="0"/>
+                <a:cs typeface="Times New Roman" panose="02020603050405020304" pitchFamily="18" charset="0"/>
+              </a:rPr>
+              <a:t>Variable</a:t>
+            </a:r>
+            <a:r>
+              <a:rPr lang="sv-SE" sz="2400" b="1" dirty="0" smtClean="0">
+                <a:latin typeface="Times New Roman" panose="02020603050405020304" pitchFamily="18" charset="0"/>
+                <a:cs typeface="Times New Roman" panose="02020603050405020304" pitchFamily="18" charset="0"/>
+              </a:rPr>
+              <a:t> CPS- Total </a:t>
+            </a:r>
+            <a:r>
+              <a:rPr lang="sv-SE" sz="2400" b="1" dirty="0" err="1" smtClean="0">
+                <a:latin typeface="Times New Roman" panose="02020603050405020304" pitchFamily="18" charset="0"/>
+                <a:cs typeface="Times New Roman" panose="02020603050405020304" pitchFamily="18" charset="0"/>
+              </a:rPr>
+              <a:t>Harmonic</a:t>
+            </a:r>
+            <a:r>
+              <a:rPr lang="sv-SE" sz="2400" b="1" dirty="0" smtClean="0">
+                <a:latin typeface="Times New Roman" panose="02020603050405020304" pitchFamily="18" charset="0"/>
+                <a:cs typeface="Times New Roman" panose="02020603050405020304" pitchFamily="18" charset="0"/>
+              </a:rPr>
+              <a:t> </a:t>
+            </a:r>
+            <a:r>
+              <a:rPr lang="sv-SE" sz="2400" b="1" dirty="0" err="1" smtClean="0">
+                <a:latin typeface="Times New Roman" panose="02020603050405020304" pitchFamily="18" charset="0"/>
+                <a:cs typeface="Times New Roman" panose="02020603050405020304" pitchFamily="18" charset="0"/>
+              </a:rPr>
+              <a:t>Reduction</a:t>
+            </a:r>
+            <a:r>
+              <a:rPr lang="sv-SE" sz="2400" b="1" dirty="0" smtClean="0">
+                <a:latin typeface="Times New Roman" panose="02020603050405020304" pitchFamily="18" charset="0"/>
+                <a:cs typeface="Times New Roman" panose="02020603050405020304" pitchFamily="18" charset="0"/>
+              </a:rPr>
+              <a:t>)</a:t>
+            </a:r>
+            <a:endParaRPr lang="sv-SE" sz="2400" b="1" dirty="0">
+              <a:latin typeface="Times New Roman" panose="02020603050405020304" pitchFamily="18" charset="0"/>
+              <a:cs typeface="Times New Roman" panose="02020603050405020304" pitchFamily="18" charset="0"/>
+            </a:endParaRPr>
+          </a:p>
+        </p:txBody>
+      </p:sp>
+    </p:spTree>
+    <p:extLst>
+      <p:ext uri="{BB962C8B-B14F-4D97-AF65-F5344CB8AC3E}">
+        <p14:creationId xmlns:p14="http://schemas.microsoft.com/office/powerpoint/2010/main" val="456135894"/>
+      </p:ext>
+    </p:extLst>
+  </p:cSld>
+  <p:clrMapOvr>
+    <a:masterClrMapping/>
+  </p:clrMapOvr>
+</p:sld>
+</file>
+
+<file path=ppt/slides/slide21.xml><?xml version="1.0" encoding="utf-8"?>
+<p:sld xmlns:a="http://schemas.openxmlformats.org/drawingml/2006/main" xmlns:r="http://schemas.openxmlformats.org/officeDocument/2006/relationships" xmlns:p="http://schemas.openxmlformats.org/presentationml/2006/main">
+  <p:cSld>
+    <p:spTree>
+      <p:nvGrpSpPr>
+        <p:cNvPr id="1" name=""/>
+        <p:cNvGrpSpPr/>
+        <p:nvPr/>
+      </p:nvGrpSpPr>
+      <p:grpSpPr>
+        <a:xfrm>
+          <a:off x="0" y="0"/>
+          <a:ext cx="0" cy="0"/>
+          <a:chOff x="0" y="0"/>
+          <a:chExt cx="0" cy="0"/>
+        </a:xfrm>
+      </p:grpSpPr>
+      <p:sp>
+        <p:nvSpPr>
+          <p:cNvPr id="5" name="TextBox 4"/>
+          <p:cNvSpPr txBox="1"/>
+          <p:nvPr/>
+        </p:nvSpPr>
+        <p:spPr>
+          <a:xfrm>
+            <a:off x="4683760" y="0"/>
+            <a:ext cx="3281680" cy="707886"/>
+          </a:xfrm>
+          <a:prstGeom prst="rect">
+            <a:avLst/>
+          </a:prstGeom>
+          <a:noFill/>
+        </p:spPr>
+        <p:txBody>
+          <a:bodyPr wrap="square" rtlCol="0">
+            <a:spAutoFit/>
+          </a:bodyPr>
+          <a:lstStyle/>
+          <a:p>
+            <a:r>
+              <a:rPr lang="en-US" sz="4000" dirty="0" smtClean="0">
+                <a:solidFill>
+                  <a:srgbClr val="C00000"/>
+                </a:solidFill>
+              </a:rPr>
+              <a:t>Non-Idealities</a:t>
+            </a:r>
+            <a:endParaRPr lang="sv-SE" sz="4000" dirty="0">
+              <a:solidFill>
+                <a:srgbClr val="C00000"/>
+              </a:solidFill>
+            </a:endParaRPr>
+          </a:p>
+        </p:txBody>
+      </p:sp>
+      <p:pic>
+        <p:nvPicPr>
+          <p:cNvPr id="9" name="Picture 8"/>
+          <p:cNvPicPr>
+            <a:picLocks noChangeAspect="1"/>
+          </p:cNvPicPr>
+          <p:nvPr/>
+        </p:nvPicPr>
+        <p:blipFill>
+          <a:blip r:embed="rId2"/>
+          <a:stretch>
+            <a:fillRect/>
+          </a:stretch>
+        </p:blipFill>
+        <p:spPr>
+          <a:xfrm>
+            <a:off x="6343649" y="786922"/>
+            <a:ext cx="5547997" cy="4160998"/>
+          </a:xfrm>
+          <a:prstGeom prst="rect">
+            <a:avLst/>
+          </a:prstGeom>
+        </p:spPr>
+      </p:pic>
+      <p:pic>
+        <p:nvPicPr>
+          <p:cNvPr id="10" name="Picture 9"/>
+          <p:cNvPicPr>
+            <a:picLocks noChangeAspect="1"/>
+          </p:cNvPicPr>
+          <p:nvPr/>
+        </p:nvPicPr>
+        <p:blipFill>
+          <a:blip r:embed="rId3"/>
+          <a:stretch>
+            <a:fillRect/>
+          </a:stretch>
+        </p:blipFill>
+        <p:spPr>
+          <a:xfrm>
+            <a:off x="274320" y="786922"/>
+            <a:ext cx="5832476" cy="4374357"/>
+          </a:xfrm>
+          <a:prstGeom prst="rect">
+            <a:avLst/>
+          </a:prstGeom>
+        </p:spPr>
+      </p:pic>
+    </p:spTree>
+    <p:extLst>
+      <p:ext uri="{BB962C8B-B14F-4D97-AF65-F5344CB8AC3E}">
+        <p14:creationId xmlns:p14="http://schemas.microsoft.com/office/powerpoint/2010/main" val="102751297"/>
+      </p:ext>
+    </p:extLst>
+  </p:cSld>
+  <p:clrMapOvr>
+    <a:masterClrMapping/>
+  </p:clrMapOvr>
+</p:sld>
+</file>
+
+<file path=ppt/slides/slide22.xml><?xml version="1.0" encoding="utf-8"?>
+<p:sld xmlns:a="http://schemas.openxmlformats.org/drawingml/2006/main" xmlns:r="http://schemas.openxmlformats.org/officeDocument/2006/relationships" xmlns:p="http://schemas.openxmlformats.org/presentationml/2006/main">
+  <p:cSld>
+    <p:spTree>
+      <p:nvGrpSpPr>
+        <p:cNvPr id="1" name=""/>
+        <p:cNvGrpSpPr/>
+        <p:nvPr/>
+      </p:nvGrpSpPr>
+      <p:grpSpPr>
+        <a:xfrm>
+          <a:off x="0" y="0"/>
+          <a:ext cx="0" cy="0"/>
+          <a:chOff x="0" y="0"/>
+          <a:chExt cx="0" cy="0"/>
+        </a:xfrm>
+      </p:grpSpPr>
+      <p:sp>
+        <p:nvSpPr>
+          <p:cNvPr id="5" name="TextBox 4"/>
+          <p:cNvSpPr txBox="1"/>
+          <p:nvPr/>
+        </p:nvSpPr>
+        <p:spPr>
+          <a:xfrm>
+            <a:off x="4653280" y="213360"/>
+            <a:ext cx="2621280" cy="707886"/>
+          </a:xfrm>
+          <a:prstGeom prst="rect">
+            <a:avLst/>
+          </a:prstGeom>
+          <a:noFill/>
+        </p:spPr>
+        <p:txBody>
+          <a:bodyPr wrap="square" rtlCol="0">
+            <a:spAutoFit/>
+          </a:bodyPr>
+          <a:lstStyle/>
+          <a:p>
+            <a:r>
+              <a:rPr lang="en-US" sz="4000" dirty="0" smtClean="0">
+                <a:solidFill>
+                  <a:srgbClr val="C00000"/>
+                </a:solidFill>
+              </a:rPr>
+              <a:t>Drawbacks</a:t>
+            </a:r>
+            <a:endParaRPr lang="sv-SE" sz="4000" dirty="0">
+              <a:solidFill>
+                <a:srgbClr val="C00000"/>
+              </a:solidFill>
+            </a:endParaRPr>
+          </a:p>
+        </p:txBody>
+      </p:sp>
+      <p:sp>
+        <p:nvSpPr>
+          <p:cNvPr id="6" name="TextBox 5"/>
+          <p:cNvSpPr txBox="1"/>
+          <p:nvPr/>
+        </p:nvSpPr>
+        <p:spPr>
+          <a:xfrm>
+            <a:off x="856621" y="921246"/>
+            <a:ext cx="10556240" cy="1477328"/>
+          </a:xfrm>
+          <a:prstGeom prst="rect">
+            <a:avLst/>
+          </a:prstGeom>
+          <a:noFill/>
+        </p:spPr>
+        <p:txBody>
+          <a:bodyPr wrap="square" rtlCol="0">
+            <a:spAutoFit/>
+          </a:bodyPr>
+          <a:lstStyle/>
+          <a:p>
+            <a:pPr marL="285750" indent="-285750">
+              <a:buFont typeface="Arial" panose="020B0604020202020204" pitchFamily="34" charset="0"/>
+              <a:buChar char="•"/>
+            </a:pPr>
+            <a:r>
+              <a:rPr lang="en-US" dirty="0" smtClean="0">
+                <a:latin typeface="Times New Roman" panose="02020603050405020304" pitchFamily="18" charset="0"/>
+                <a:cs typeface="Times New Roman" panose="02020603050405020304" pitchFamily="18" charset="0"/>
+              </a:rPr>
+              <a:t>The maximum modulation is limited to 2/3 due to DC injection.</a:t>
+            </a:r>
+          </a:p>
+          <a:p>
+            <a:pPr marL="285750" indent="-285750">
+              <a:buFont typeface="Arial" panose="020B0604020202020204" pitchFamily="34" charset="0"/>
+              <a:buChar char="•"/>
+            </a:pPr>
+            <a:endParaRPr lang="en-US" dirty="0">
+              <a:latin typeface="Times New Roman" panose="02020603050405020304" pitchFamily="18" charset="0"/>
+              <a:cs typeface="Times New Roman" panose="02020603050405020304" pitchFamily="18" charset="0"/>
+            </a:endParaRPr>
+          </a:p>
+          <a:p>
+            <a:pPr marL="285750" indent="-285750">
+              <a:buFont typeface="Arial" panose="020B0604020202020204" pitchFamily="34" charset="0"/>
+              <a:buChar char="•"/>
+            </a:pPr>
+            <a:r>
+              <a:rPr lang="en-US" dirty="0" smtClean="0">
+                <a:latin typeface="Times New Roman" panose="02020603050405020304" pitchFamily="18" charset="0"/>
+                <a:cs typeface="Times New Roman" panose="02020603050405020304" pitchFamily="18" charset="0"/>
+              </a:rPr>
+              <a:t>Implementation is difficult due to delay time of practical components and other </a:t>
+            </a:r>
+            <a:r>
+              <a:rPr lang="en-US" dirty="0" err="1" smtClean="0">
+                <a:latin typeface="Times New Roman" panose="02020603050405020304" pitchFamily="18" charset="0"/>
+                <a:cs typeface="Times New Roman" panose="02020603050405020304" pitchFamily="18" charset="0"/>
+              </a:rPr>
+              <a:t>nonidealities</a:t>
+            </a:r>
+            <a:r>
+              <a:rPr lang="en-US" dirty="0" smtClean="0">
+                <a:latin typeface="Times New Roman" panose="02020603050405020304" pitchFamily="18" charset="0"/>
+                <a:cs typeface="Times New Roman" panose="02020603050405020304" pitchFamily="18" charset="0"/>
+              </a:rPr>
+              <a:t>.</a:t>
+            </a:r>
+          </a:p>
+          <a:p>
+            <a:endParaRPr lang="en-US" dirty="0">
+              <a:latin typeface="Times New Roman" panose="02020603050405020304" pitchFamily="18" charset="0"/>
+              <a:cs typeface="Times New Roman" panose="02020603050405020304" pitchFamily="18" charset="0"/>
+            </a:endParaRPr>
+          </a:p>
+          <a:p>
+            <a:pPr marL="285750" indent="-285750">
+              <a:buFont typeface="Arial" panose="020B0604020202020204" pitchFamily="34" charset="0"/>
+              <a:buChar char="•"/>
+            </a:pPr>
+            <a:endParaRPr lang="en-US" dirty="0" smtClean="0">
+              <a:latin typeface="Times New Roman" panose="02020603050405020304" pitchFamily="18" charset="0"/>
+              <a:cs typeface="Times New Roman" panose="02020603050405020304" pitchFamily="18" charset="0"/>
+            </a:endParaRPr>
+          </a:p>
+        </p:txBody>
+      </p:sp>
+      <p:sp>
+        <p:nvSpPr>
+          <p:cNvPr id="7" name="TextBox 6"/>
+          <p:cNvSpPr txBox="1"/>
+          <p:nvPr/>
+        </p:nvSpPr>
+        <p:spPr>
+          <a:xfrm>
+            <a:off x="3416941" y="2153245"/>
+            <a:ext cx="5435600" cy="707886"/>
+          </a:xfrm>
+          <a:prstGeom prst="rect">
+            <a:avLst/>
+          </a:prstGeom>
+          <a:noFill/>
+        </p:spPr>
+        <p:txBody>
+          <a:bodyPr wrap="square" rtlCol="0">
+            <a:spAutoFit/>
+          </a:bodyPr>
+          <a:lstStyle/>
+          <a:p>
+            <a:r>
+              <a:rPr lang="en-US" sz="4000" dirty="0" smtClean="0">
+                <a:solidFill>
+                  <a:srgbClr val="C00000"/>
+                </a:solidFill>
+              </a:rPr>
+              <a:t>Further Investigation</a:t>
+            </a:r>
+            <a:endParaRPr lang="sv-SE" sz="4000" dirty="0">
+              <a:solidFill>
+                <a:srgbClr val="C00000"/>
+              </a:solidFill>
+            </a:endParaRPr>
+          </a:p>
+        </p:txBody>
+      </p:sp>
+      <p:sp>
+        <p:nvSpPr>
+          <p:cNvPr id="12" name="TextBox 11"/>
+          <p:cNvSpPr txBox="1"/>
+          <p:nvPr/>
+        </p:nvSpPr>
+        <p:spPr>
+          <a:xfrm>
+            <a:off x="958221" y="3197086"/>
+            <a:ext cx="10556240" cy="2031325"/>
+          </a:xfrm>
+          <a:prstGeom prst="rect">
+            <a:avLst/>
+          </a:prstGeom>
+          <a:noFill/>
+        </p:spPr>
+        <p:txBody>
+          <a:bodyPr wrap="square" rtlCol="0">
+            <a:spAutoFit/>
+          </a:bodyPr>
+          <a:lstStyle/>
+          <a:p>
+            <a:pPr marL="285750" indent="-285750">
+              <a:buFont typeface="Arial" panose="020B0604020202020204" pitchFamily="34" charset="0"/>
+              <a:buChar char="•"/>
+            </a:pPr>
+            <a:r>
+              <a:rPr lang="en-US" dirty="0" smtClean="0">
+                <a:latin typeface="Times New Roman" panose="02020603050405020304" pitchFamily="18" charset="0"/>
+                <a:cs typeface="Times New Roman" panose="02020603050405020304" pitchFamily="18" charset="0"/>
+              </a:rPr>
+              <a:t>SVPWM or third harmonic injection to increase DC-link utilization.</a:t>
+            </a:r>
+          </a:p>
+          <a:p>
+            <a:pPr marL="285750" indent="-285750">
+              <a:buFont typeface="Arial" panose="020B0604020202020204" pitchFamily="34" charset="0"/>
+              <a:buChar char="•"/>
+            </a:pPr>
+            <a:endParaRPr lang="en-US" dirty="0">
+              <a:latin typeface="Times New Roman" panose="02020603050405020304" pitchFamily="18" charset="0"/>
+              <a:cs typeface="Times New Roman" panose="02020603050405020304" pitchFamily="18" charset="0"/>
+            </a:endParaRPr>
+          </a:p>
+          <a:p>
+            <a:pPr marL="285750" indent="-285750">
+              <a:buFont typeface="Arial" panose="020B0604020202020204" pitchFamily="34" charset="0"/>
+              <a:buChar char="•"/>
+            </a:pPr>
+            <a:r>
+              <a:rPr lang="en-US" dirty="0" smtClean="0">
+                <a:latin typeface="Times New Roman" panose="02020603050405020304" pitchFamily="18" charset="0"/>
+                <a:cs typeface="Times New Roman" panose="02020603050405020304" pitchFamily="18" charset="0"/>
+              </a:rPr>
+              <a:t>Constant dv/</a:t>
+            </a:r>
+            <a:r>
+              <a:rPr lang="en-US" dirty="0" err="1" smtClean="0">
+                <a:latin typeface="Times New Roman" panose="02020603050405020304" pitchFamily="18" charset="0"/>
+                <a:cs typeface="Times New Roman" panose="02020603050405020304" pitchFamily="18" charset="0"/>
+              </a:rPr>
+              <a:t>dt</a:t>
+            </a:r>
+            <a:r>
+              <a:rPr lang="en-US" dirty="0" smtClean="0">
+                <a:latin typeface="Times New Roman" panose="02020603050405020304" pitchFamily="18" charset="0"/>
+                <a:cs typeface="Times New Roman" panose="02020603050405020304" pitchFamily="18" charset="0"/>
+              </a:rPr>
+              <a:t> for both turn-on and turn-off transition. (Variable gate resistance)</a:t>
+            </a:r>
+          </a:p>
+          <a:p>
+            <a:pPr marL="285750" indent="-285750">
+              <a:buFont typeface="Arial" panose="020B0604020202020204" pitchFamily="34" charset="0"/>
+              <a:buChar char="•"/>
+            </a:pPr>
+            <a:endParaRPr lang="en-US" dirty="0">
+              <a:latin typeface="Times New Roman" panose="02020603050405020304" pitchFamily="18" charset="0"/>
+              <a:cs typeface="Times New Roman" panose="02020603050405020304" pitchFamily="18" charset="0"/>
+            </a:endParaRPr>
+          </a:p>
+          <a:p>
+            <a:pPr marL="285750" indent="-285750">
+              <a:buFont typeface="Arial" panose="020B0604020202020204" pitchFamily="34" charset="0"/>
+              <a:buChar char="•"/>
+            </a:pPr>
+            <a:r>
+              <a:rPr lang="en-US" dirty="0" smtClean="0">
+                <a:latin typeface="Times New Roman" panose="02020603050405020304" pitchFamily="18" charset="0"/>
+                <a:cs typeface="Times New Roman" panose="02020603050405020304" pitchFamily="18" charset="0"/>
+              </a:rPr>
+              <a:t>Enhanced mathematical model including dead time, different dv/</a:t>
+            </a:r>
+            <a:r>
+              <a:rPr lang="en-US" dirty="0" err="1" smtClean="0">
+                <a:latin typeface="Times New Roman" panose="02020603050405020304" pitchFamily="18" charset="0"/>
+                <a:cs typeface="Times New Roman" panose="02020603050405020304" pitchFamily="18" charset="0"/>
+              </a:rPr>
+              <a:t>dt</a:t>
+            </a:r>
+            <a:r>
+              <a:rPr lang="en-US" dirty="0" smtClean="0">
+                <a:latin typeface="Times New Roman" panose="02020603050405020304" pitchFamily="18" charset="0"/>
+                <a:cs typeface="Times New Roman" panose="02020603050405020304" pitchFamily="18" charset="0"/>
+              </a:rPr>
+              <a:t> effect (different loading).</a:t>
+            </a:r>
+          </a:p>
+          <a:p>
+            <a:endParaRPr lang="en-US" dirty="0">
+              <a:latin typeface="Times New Roman" panose="02020603050405020304" pitchFamily="18" charset="0"/>
+              <a:cs typeface="Times New Roman" panose="02020603050405020304" pitchFamily="18" charset="0"/>
+            </a:endParaRPr>
+          </a:p>
+          <a:p>
+            <a:pPr marL="285750" indent="-285750">
+              <a:buFont typeface="Arial" panose="020B0604020202020204" pitchFamily="34" charset="0"/>
+              <a:buChar char="•"/>
+            </a:pPr>
+            <a:endParaRPr lang="en-US" dirty="0" smtClean="0">
+              <a:latin typeface="Times New Roman" panose="02020603050405020304" pitchFamily="18" charset="0"/>
+              <a:cs typeface="Times New Roman" panose="02020603050405020304" pitchFamily="18" charset="0"/>
+            </a:endParaRPr>
+          </a:p>
+        </p:txBody>
+      </p:sp>
+    </p:spTree>
+    <p:extLst>
+      <p:ext uri="{BB962C8B-B14F-4D97-AF65-F5344CB8AC3E}">
+        <p14:creationId xmlns:p14="http://schemas.microsoft.com/office/powerpoint/2010/main" val="3992381661"/>
+      </p:ext>
+    </p:extLst>
+  </p:cSld>
+  <p:clrMapOvr>
+    <a:masterClrMapping/>
+  </p:clrMapOvr>
+</p:sld>
+</file>
+
+<file path=ppt/slides/slide23.xml><?xml version="1.0" encoding="utf-8"?>
+<p:sld xmlns:a="http://schemas.openxmlformats.org/drawingml/2006/main" xmlns:r="http://schemas.openxmlformats.org/officeDocument/2006/relationships" xmlns:p="http://schemas.openxmlformats.org/presentationml/2006/main">
+  <p:cSld>
+    <p:spTree>
+      <p:nvGrpSpPr>
+        <p:cNvPr id="1" name=""/>
+        <p:cNvGrpSpPr/>
+        <p:nvPr/>
+      </p:nvGrpSpPr>
+      <p:grpSpPr>
+        <a:xfrm>
+          <a:off x="0" y="0"/>
+          <a:ext cx="0" cy="0"/>
+          <a:chOff x="0" y="0"/>
+          <a:chExt cx="0" cy="0"/>
+        </a:xfrm>
+      </p:grpSpPr>
+      <p:sp>
+        <p:nvSpPr>
+          <p:cNvPr id="5" name="Rounded Rectangle 4"/>
+          <p:cNvSpPr/>
+          <p:nvPr/>
+        </p:nvSpPr>
+        <p:spPr>
+          <a:xfrm>
+            <a:off x="469250" y="2347099"/>
+            <a:ext cx="1524000" cy="495300"/>
+          </a:xfrm>
+          <a:prstGeom prst="roundRect">
+            <a:avLst/>
+          </a:prstGeom>
+          <a:solidFill>
+            <a:schemeClr val="bg1"/>
+          </a:solidFill>
+          <a:ln>
+            <a:solidFill>
+              <a:schemeClr val="tx1"/>
+            </a:solidFill>
+          </a:ln>
+        </p:spPr>
+        <p:style>
+          <a:lnRef idx="2">
+            <a:schemeClr val="accent1">
+              <a:shade val="50000"/>
+            </a:schemeClr>
+          </a:lnRef>
+          <a:fillRef idx="1">
+            <a:schemeClr val="accent1"/>
+          </a:fillRef>
+          <a:effectRef idx="0">
+            <a:schemeClr val="accent1"/>
+          </a:effectRef>
+          <a:fontRef idx="minor">
+            <a:schemeClr val="lt1"/>
+          </a:fontRef>
+        </p:style>
+        <p:txBody>
+          <a:bodyPr rtlCol="0" anchor="ctr"/>
+          <a:lstStyle/>
+          <a:p>
+            <a:pPr algn="ctr"/>
+            <a:r>
+              <a:rPr lang="en-US" dirty="0" smtClean="0">
+                <a:solidFill>
+                  <a:schemeClr val="tx1"/>
+                </a:solidFill>
+                <a:latin typeface="Times New Roman" panose="02020603050405020304" pitchFamily="18" charset="0"/>
+                <a:cs typeface="Times New Roman" panose="02020603050405020304" pitchFamily="18" charset="0"/>
+              </a:rPr>
+              <a:t>Controller</a:t>
+            </a:r>
+            <a:endParaRPr lang="sv-SE" dirty="0">
+              <a:solidFill>
+                <a:schemeClr val="tx1"/>
+              </a:solidFill>
+              <a:latin typeface="Times New Roman" panose="02020603050405020304" pitchFamily="18" charset="0"/>
+              <a:cs typeface="Times New Roman" panose="02020603050405020304" pitchFamily="18" charset="0"/>
+            </a:endParaRPr>
+          </a:p>
+        </p:txBody>
+      </p:sp>
+      <p:cxnSp>
+        <p:nvCxnSpPr>
+          <p:cNvPr id="7" name="Straight Arrow Connector 6"/>
+          <p:cNvCxnSpPr/>
+          <p:nvPr/>
+        </p:nvCxnSpPr>
+        <p:spPr>
+          <a:xfrm>
+            <a:off x="729600" y="1661299"/>
+            <a:ext cx="12700" cy="685800"/>
+          </a:xfrm>
+          <a:prstGeom prst="straightConnector1">
+            <a:avLst/>
+          </a:prstGeom>
+          <a:ln>
+            <a:solidFill>
+              <a:schemeClr val="tx1"/>
+            </a:solidFill>
+            <a:tailEnd type="triangle"/>
+          </a:ln>
+        </p:spPr>
+        <p:style>
+          <a:lnRef idx="1">
+            <a:schemeClr val="accent1"/>
+          </a:lnRef>
+          <a:fillRef idx="0">
+            <a:schemeClr val="accent1"/>
+          </a:fillRef>
+          <a:effectRef idx="0">
+            <a:schemeClr val="accent1"/>
+          </a:effectRef>
+          <a:fontRef idx="minor">
+            <a:schemeClr val="tx1"/>
+          </a:fontRef>
+        </p:style>
+      </p:cxnSp>
+      <p:cxnSp>
+        <p:nvCxnSpPr>
+          <p:cNvPr id="8" name="Straight Arrow Connector 7"/>
+          <p:cNvCxnSpPr/>
+          <p:nvPr/>
+        </p:nvCxnSpPr>
+        <p:spPr>
+          <a:xfrm>
+            <a:off x="1009000" y="1661299"/>
+            <a:ext cx="12700" cy="685800"/>
+          </a:xfrm>
+          <a:prstGeom prst="straightConnector1">
+            <a:avLst/>
+          </a:prstGeom>
+          <a:ln>
+            <a:solidFill>
+              <a:schemeClr val="tx1"/>
+            </a:solidFill>
+            <a:tailEnd type="triangle"/>
+          </a:ln>
+        </p:spPr>
+        <p:style>
+          <a:lnRef idx="1">
+            <a:schemeClr val="accent1"/>
+          </a:lnRef>
+          <a:fillRef idx="0">
+            <a:schemeClr val="accent1"/>
+          </a:fillRef>
+          <a:effectRef idx="0">
+            <a:schemeClr val="accent1"/>
+          </a:effectRef>
+          <a:fontRef idx="minor">
+            <a:schemeClr val="tx1"/>
+          </a:fontRef>
+        </p:style>
+      </p:cxnSp>
+      <p:cxnSp>
+        <p:nvCxnSpPr>
+          <p:cNvPr id="9" name="Straight Arrow Connector 8"/>
+          <p:cNvCxnSpPr/>
+          <p:nvPr/>
+        </p:nvCxnSpPr>
+        <p:spPr>
+          <a:xfrm>
+            <a:off x="1288400" y="1661299"/>
+            <a:ext cx="12700" cy="685800"/>
+          </a:xfrm>
+          <a:prstGeom prst="straightConnector1">
+            <a:avLst/>
+          </a:prstGeom>
+          <a:ln>
+            <a:solidFill>
+              <a:schemeClr val="tx1"/>
+            </a:solidFill>
+            <a:tailEnd type="triangle"/>
+          </a:ln>
+        </p:spPr>
+        <p:style>
+          <a:lnRef idx="1">
+            <a:schemeClr val="accent1"/>
+          </a:lnRef>
+          <a:fillRef idx="0">
+            <a:schemeClr val="accent1"/>
+          </a:fillRef>
+          <a:effectRef idx="0">
+            <a:schemeClr val="accent1"/>
+          </a:effectRef>
+          <a:fontRef idx="minor">
+            <a:schemeClr val="tx1"/>
+          </a:fontRef>
+        </p:style>
+      </p:cxnSp>
+      <p:cxnSp>
+        <p:nvCxnSpPr>
+          <p:cNvPr id="10" name="Straight Arrow Connector 9"/>
+          <p:cNvCxnSpPr/>
+          <p:nvPr/>
+        </p:nvCxnSpPr>
+        <p:spPr>
+          <a:xfrm>
+            <a:off x="1561450" y="1648599"/>
+            <a:ext cx="12700" cy="685800"/>
+          </a:xfrm>
+          <a:prstGeom prst="straightConnector1">
+            <a:avLst/>
+          </a:prstGeom>
+          <a:ln>
+            <a:solidFill>
+              <a:schemeClr val="tx1"/>
+            </a:solidFill>
+            <a:tailEnd type="triangle"/>
+          </a:ln>
+        </p:spPr>
+        <p:style>
+          <a:lnRef idx="1">
+            <a:schemeClr val="accent1"/>
+          </a:lnRef>
+          <a:fillRef idx="0">
+            <a:schemeClr val="accent1"/>
+          </a:fillRef>
+          <a:effectRef idx="0">
+            <a:schemeClr val="accent1"/>
+          </a:effectRef>
+          <a:fontRef idx="minor">
+            <a:schemeClr val="tx1"/>
+          </a:fontRef>
+        </p:style>
+      </p:cxnSp>
+      <p:sp>
+        <p:nvSpPr>
+          <p:cNvPr id="11" name="TextBox 10"/>
+          <p:cNvSpPr txBox="1"/>
+          <p:nvPr/>
+        </p:nvSpPr>
+        <p:spPr>
+          <a:xfrm>
+            <a:off x="1327150" y="895350"/>
+            <a:ext cx="1460500" cy="369332"/>
+          </a:xfrm>
+          <a:prstGeom prst="rect">
+            <a:avLst/>
+          </a:prstGeom>
+          <a:noFill/>
+        </p:spPr>
+        <p:txBody>
+          <a:bodyPr wrap="square" rtlCol="0">
+            <a:spAutoFit/>
+          </a:bodyPr>
+          <a:lstStyle/>
+          <a:p>
+            <a:r>
+              <a:rPr lang="en-US" dirty="0" smtClean="0">
+                <a:latin typeface="Times New Roman" panose="02020603050405020304" pitchFamily="18" charset="0"/>
+                <a:cs typeface="Times New Roman" panose="02020603050405020304" pitchFamily="18" charset="0"/>
+              </a:rPr>
+              <a:t>Speed</a:t>
+            </a:r>
+            <a:endParaRPr lang="sv-SE" dirty="0">
+              <a:latin typeface="Times New Roman" panose="02020603050405020304" pitchFamily="18" charset="0"/>
+              <a:cs typeface="Times New Roman" panose="02020603050405020304" pitchFamily="18" charset="0"/>
+            </a:endParaRPr>
+          </a:p>
+        </p:txBody>
+      </p:sp>
+      <p:sp>
+        <p:nvSpPr>
+          <p:cNvPr id="12" name="Oval 11"/>
+          <p:cNvSpPr/>
+          <p:nvPr/>
+        </p:nvSpPr>
+        <p:spPr>
+          <a:xfrm>
+            <a:off x="7688752" y="2075475"/>
+            <a:ext cx="1289050" cy="1255100"/>
+          </a:xfrm>
+          <a:prstGeom prst="ellipse">
+            <a:avLst/>
+          </a:prstGeom>
+          <a:noFill/>
+          <a:ln>
+            <a:solidFill>
+              <a:schemeClr val="tx1"/>
+            </a:solidFill>
+          </a:ln>
+        </p:spPr>
+        <p:style>
+          <a:lnRef idx="2">
+            <a:schemeClr val="accent1">
+              <a:shade val="50000"/>
+            </a:schemeClr>
+          </a:lnRef>
+          <a:fillRef idx="1">
+            <a:schemeClr val="accent1"/>
+          </a:fillRef>
+          <a:effectRef idx="0">
+            <a:schemeClr val="accent1"/>
+          </a:effectRef>
+          <a:fontRef idx="minor">
+            <a:schemeClr val="lt1"/>
+          </a:fontRef>
+        </p:style>
+        <p:txBody>
+          <a:bodyPr rtlCol="0" anchor="ctr"/>
+          <a:lstStyle/>
+          <a:p>
+            <a:pPr algn="ctr"/>
+            <a:r>
+              <a:rPr lang="en-US" dirty="0" smtClean="0">
+                <a:solidFill>
+                  <a:schemeClr val="tx1"/>
+                </a:solidFill>
+              </a:rPr>
+              <a:t>EM</a:t>
+            </a:r>
+            <a:endParaRPr lang="sv-SE" dirty="0">
+              <a:solidFill>
+                <a:schemeClr val="tx1"/>
+              </a:solidFill>
+            </a:endParaRPr>
+          </a:p>
+        </p:txBody>
+      </p:sp>
+      <p:cxnSp>
+        <p:nvCxnSpPr>
+          <p:cNvPr id="13" name="Straight Arrow Connector 12"/>
+          <p:cNvCxnSpPr/>
+          <p:nvPr/>
+        </p:nvCxnSpPr>
+        <p:spPr>
+          <a:xfrm>
+            <a:off x="8947150" y="2647950"/>
+            <a:ext cx="400050" cy="0"/>
+          </a:xfrm>
+          <a:prstGeom prst="straightConnector1">
+            <a:avLst/>
+          </a:prstGeom>
+          <a:ln w="12700">
+            <a:solidFill>
+              <a:schemeClr val="tx1"/>
+            </a:solidFill>
+            <a:headEnd type="none"/>
+            <a:tailEnd type="stealth"/>
+          </a:ln>
+        </p:spPr>
+        <p:style>
+          <a:lnRef idx="1">
+            <a:schemeClr val="accent1"/>
+          </a:lnRef>
+          <a:fillRef idx="0">
+            <a:schemeClr val="accent1"/>
+          </a:fillRef>
+          <a:effectRef idx="0">
+            <a:schemeClr val="accent1"/>
+          </a:effectRef>
+          <a:fontRef idx="minor">
+            <a:schemeClr val="tx1"/>
+          </a:fontRef>
+        </p:style>
+      </p:cxnSp>
+      <mc:AlternateContent xmlns:mc="http://schemas.openxmlformats.org/markup-compatibility/2006">
+        <mc:Choice xmlns:a14="http://schemas.microsoft.com/office/drawing/2010/main" Requires="a14">
+          <p:sp>
+            <p:nvSpPr>
+              <p:cNvPr id="15" name="TextBox 14"/>
+              <p:cNvSpPr txBox="1"/>
+              <p:nvPr/>
+            </p:nvSpPr>
+            <p:spPr>
+              <a:xfrm>
+                <a:off x="8977802" y="2317750"/>
+                <a:ext cx="338746" cy="276999"/>
+              </a:xfrm>
+              <a:prstGeom prst="rect">
+                <a:avLst/>
+              </a:prstGeom>
+              <a:noFill/>
+            </p:spPr>
+            <p:txBody>
+              <a:bodyPr wrap="none" lIns="0" tIns="0" rIns="0" bIns="0" rtlCol="0">
+                <a:spAutoFit/>
+              </a:bodyPr>
+              <a:lstStyle/>
+              <a:p>
+                <a14:m>
+                  <m:oMathPara xmlns:m="http://schemas.openxmlformats.org/officeDocument/2006/math">
+                    <m:oMathParaPr>
+                      <m:jc m:val="centerGroup"/>
+                    </m:oMathParaPr>
+                    <m:oMath xmlns:m="http://schemas.openxmlformats.org/officeDocument/2006/math">
+                      <m:sSub>
+                        <m:sSubPr>
+                          <m:ctrlPr>
+                            <a:rPr lang="en-US" b="0" i="1" smtClean="0">
+                              <a:latin typeface="Cambria Math" panose="02040503050406030204" pitchFamily="18" charset="0"/>
+                            </a:rPr>
+                          </m:ctrlPr>
+                        </m:sSubPr>
+                        <m:e>
+                          <m:r>
+                            <a:rPr lang="en-US" b="0" i="1" smtClean="0">
+                              <a:latin typeface="Cambria Math" panose="02040503050406030204" pitchFamily="18" charset="0"/>
+                            </a:rPr>
+                            <m:t>𝜃</m:t>
+                          </m:r>
+                        </m:e>
+                        <m:sub>
+                          <m:r>
+                            <a:rPr lang="en-US" b="0" i="1" smtClean="0">
+                              <a:latin typeface="Cambria Math" panose="02040503050406030204" pitchFamily="18" charset="0"/>
+                            </a:rPr>
+                            <m:t>𝑚</m:t>
+                          </m:r>
+                        </m:sub>
+                      </m:sSub>
+                    </m:oMath>
+                  </m:oMathPara>
+                </a14:m>
+                <a:endParaRPr lang="sv-SE" dirty="0"/>
+              </a:p>
+            </p:txBody>
+          </p:sp>
+        </mc:Choice>
+        <mc:Fallback>
+          <p:sp>
+            <p:nvSpPr>
+              <p:cNvPr id="15" name="TextBox 14"/>
+              <p:cNvSpPr txBox="1">
+                <a:spLocks noRot="1" noChangeAspect="1" noMove="1" noResize="1" noEditPoints="1" noAdjustHandles="1" noChangeArrowheads="1" noChangeShapeType="1" noTextEdit="1"/>
+              </p:cNvSpPr>
+              <p:nvPr/>
+            </p:nvSpPr>
+            <p:spPr>
+              <a:xfrm>
+                <a:off x="8977802" y="2317750"/>
+                <a:ext cx="338746" cy="276999"/>
+              </a:xfrm>
+              <a:prstGeom prst="rect">
+                <a:avLst/>
+              </a:prstGeom>
+              <a:blipFill>
+                <a:blip r:embed="rId2"/>
+                <a:stretch>
+                  <a:fillRect l="-16364" r="-3636" b="-10870"/>
+                </a:stretch>
+              </a:blipFill>
+            </p:spPr>
+            <p:txBody>
+              <a:bodyPr/>
+              <a:lstStyle/>
+              <a:p>
+                <a:r>
+                  <a:rPr lang="sv-SE">
+                    <a:noFill/>
+                  </a:rPr>
+                  <a:t> </a:t>
+                </a:r>
+              </a:p>
+            </p:txBody>
+          </p:sp>
+        </mc:Fallback>
+      </mc:AlternateContent>
+      <p:cxnSp>
+        <p:nvCxnSpPr>
+          <p:cNvPr id="16" name="Straight Arrow Connector 15"/>
+          <p:cNvCxnSpPr/>
+          <p:nvPr/>
+        </p:nvCxnSpPr>
+        <p:spPr>
+          <a:xfrm flipV="1">
+            <a:off x="7164445" y="2456249"/>
+            <a:ext cx="581761" cy="2"/>
+          </a:xfrm>
+          <a:prstGeom prst="straightConnector1">
+            <a:avLst/>
+          </a:prstGeom>
+          <a:ln w="12700">
+            <a:solidFill>
+              <a:schemeClr val="tx1"/>
+            </a:solidFill>
+            <a:headEnd type="none"/>
+            <a:tailEnd type="stealth"/>
+          </a:ln>
+        </p:spPr>
+        <p:style>
+          <a:lnRef idx="1">
+            <a:schemeClr val="accent1"/>
+          </a:lnRef>
+          <a:fillRef idx="0">
+            <a:schemeClr val="accent1"/>
+          </a:fillRef>
+          <a:effectRef idx="0">
+            <a:schemeClr val="accent1"/>
+          </a:effectRef>
+          <a:fontRef idx="minor">
+            <a:schemeClr val="tx1"/>
+          </a:fontRef>
+        </p:style>
+      </p:cxnSp>
+      <p:sp>
+        <p:nvSpPr>
+          <p:cNvPr id="21" name="Rounded Rectangle 20"/>
+          <p:cNvSpPr/>
+          <p:nvPr/>
+        </p:nvSpPr>
+        <p:spPr>
+          <a:xfrm>
+            <a:off x="4541375" y="2041300"/>
+            <a:ext cx="1055725" cy="1222600"/>
+          </a:xfrm>
+          <a:prstGeom prst="roundRect">
+            <a:avLst/>
+          </a:prstGeom>
+          <a:solidFill>
+            <a:schemeClr val="bg1"/>
+          </a:solidFill>
+          <a:ln>
+            <a:solidFill>
+              <a:schemeClr val="tx1"/>
+            </a:solidFill>
+          </a:ln>
+        </p:spPr>
+        <p:style>
+          <a:lnRef idx="2">
+            <a:schemeClr val="accent1">
+              <a:shade val="50000"/>
+            </a:schemeClr>
+          </a:lnRef>
+          <a:fillRef idx="1">
+            <a:schemeClr val="accent1"/>
+          </a:fillRef>
+          <a:effectRef idx="0">
+            <a:schemeClr val="accent1"/>
+          </a:effectRef>
+          <a:fontRef idx="minor">
+            <a:schemeClr val="lt1"/>
+          </a:fontRef>
+        </p:style>
+        <p:txBody>
+          <a:bodyPr rtlCol="0" anchor="ctr"/>
+          <a:lstStyle/>
+          <a:p>
+            <a:pPr algn="ctr"/>
+            <a:r>
+              <a:rPr lang="en-US" dirty="0" smtClean="0">
+                <a:solidFill>
+                  <a:schemeClr val="tx1"/>
+                </a:solidFill>
+                <a:latin typeface="Times New Roman" panose="02020603050405020304" pitchFamily="18" charset="0"/>
+                <a:cs typeface="Times New Roman" panose="02020603050405020304" pitchFamily="18" charset="0"/>
+              </a:rPr>
+              <a:t>SPWM</a:t>
+            </a:r>
+          </a:p>
+          <a:p>
+            <a:pPr algn="ctr"/>
+            <a:r>
+              <a:rPr lang="en-US" dirty="0" smtClean="0">
+                <a:solidFill>
+                  <a:schemeClr val="tx1"/>
+                </a:solidFill>
+                <a:latin typeface="Times New Roman" panose="02020603050405020304" pitchFamily="18" charset="0"/>
+                <a:cs typeface="Times New Roman" panose="02020603050405020304" pitchFamily="18" charset="0"/>
+              </a:rPr>
+              <a:t>Generator</a:t>
+            </a:r>
+            <a:endParaRPr lang="sv-SE" dirty="0">
+              <a:solidFill>
+                <a:schemeClr val="tx1"/>
+              </a:solidFill>
+              <a:latin typeface="Times New Roman" panose="02020603050405020304" pitchFamily="18" charset="0"/>
+              <a:cs typeface="Times New Roman" panose="02020603050405020304" pitchFamily="18" charset="0"/>
+            </a:endParaRPr>
+          </a:p>
+        </p:txBody>
+      </p:sp>
+      <p:sp>
+        <p:nvSpPr>
+          <p:cNvPr id="22" name="Rounded Rectangle 21"/>
+          <p:cNvSpPr/>
+          <p:nvPr/>
+        </p:nvSpPr>
+        <p:spPr>
+          <a:xfrm>
+            <a:off x="6109154" y="2036650"/>
+            <a:ext cx="1055725" cy="1222600"/>
+          </a:xfrm>
+          <a:prstGeom prst="roundRect">
+            <a:avLst/>
+          </a:prstGeom>
+          <a:solidFill>
+            <a:schemeClr val="bg1"/>
+          </a:solidFill>
+          <a:ln>
+            <a:solidFill>
+              <a:schemeClr val="tx1"/>
+            </a:solidFill>
+          </a:ln>
+        </p:spPr>
+        <p:style>
+          <a:lnRef idx="2">
+            <a:schemeClr val="accent1">
+              <a:shade val="50000"/>
+            </a:schemeClr>
+          </a:lnRef>
+          <a:fillRef idx="1">
+            <a:schemeClr val="accent1"/>
+          </a:fillRef>
+          <a:effectRef idx="0">
+            <a:schemeClr val="accent1"/>
+          </a:effectRef>
+          <a:fontRef idx="minor">
+            <a:schemeClr val="lt1"/>
+          </a:fontRef>
+        </p:style>
+        <p:txBody>
+          <a:bodyPr rtlCol="0" anchor="ctr"/>
+          <a:lstStyle/>
+          <a:p>
+            <a:pPr algn="ctr"/>
+            <a:r>
+              <a:rPr lang="en-US" dirty="0" smtClean="0">
+                <a:solidFill>
+                  <a:schemeClr val="tx1"/>
+                </a:solidFill>
+                <a:latin typeface="Times New Roman" panose="02020603050405020304" pitchFamily="18" charset="0"/>
+                <a:cs typeface="Times New Roman" panose="02020603050405020304" pitchFamily="18" charset="0"/>
+              </a:rPr>
+              <a:t>2L</a:t>
+            </a:r>
+          </a:p>
+          <a:p>
+            <a:pPr algn="ctr"/>
+            <a:r>
+              <a:rPr lang="en-US" dirty="0" smtClean="0">
+                <a:solidFill>
+                  <a:schemeClr val="tx1"/>
+                </a:solidFill>
+                <a:latin typeface="Times New Roman" panose="02020603050405020304" pitchFamily="18" charset="0"/>
+                <a:cs typeface="Times New Roman" panose="02020603050405020304" pitchFamily="18" charset="0"/>
+              </a:rPr>
+              <a:t>VSI</a:t>
+            </a:r>
+            <a:endParaRPr lang="sv-SE" dirty="0">
+              <a:solidFill>
+                <a:schemeClr val="tx1"/>
+              </a:solidFill>
+              <a:latin typeface="Times New Roman" panose="02020603050405020304" pitchFamily="18" charset="0"/>
+              <a:cs typeface="Times New Roman" panose="02020603050405020304" pitchFamily="18" charset="0"/>
+            </a:endParaRPr>
+          </a:p>
+        </p:txBody>
+      </p:sp>
+      <p:cxnSp>
+        <p:nvCxnSpPr>
+          <p:cNvPr id="28" name="Straight Arrow Connector 27"/>
+          <p:cNvCxnSpPr/>
+          <p:nvPr/>
+        </p:nvCxnSpPr>
+        <p:spPr>
+          <a:xfrm flipV="1">
+            <a:off x="7164445" y="2666185"/>
+            <a:ext cx="512488" cy="1"/>
+          </a:xfrm>
+          <a:prstGeom prst="straightConnector1">
+            <a:avLst/>
+          </a:prstGeom>
+          <a:ln w="12700">
+            <a:solidFill>
+              <a:schemeClr val="tx1"/>
+            </a:solidFill>
+            <a:headEnd type="none"/>
+            <a:tailEnd type="stealth"/>
+          </a:ln>
+        </p:spPr>
+        <p:style>
+          <a:lnRef idx="1">
+            <a:schemeClr val="accent1"/>
+          </a:lnRef>
+          <a:fillRef idx="0">
+            <a:schemeClr val="accent1"/>
+          </a:fillRef>
+          <a:effectRef idx="0">
+            <a:schemeClr val="accent1"/>
+          </a:effectRef>
+          <a:fontRef idx="minor">
+            <a:schemeClr val="tx1"/>
+          </a:fontRef>
+        </p:style>
+      </p:cxnSp>
+      <p:cxnSp>
+        <p:nvCxnSpPr>
+          <p:cNvPr id="29" name="Straight Arrow Connector 28"/>
+          <p:cNvCxnSpPr/>
+          <p:nvPr/>
+        </p:nvCxnSpPr>
+        <p:spPr>
+          <a:xfrm>
+            <a:off x="7164445" y="2874424"/>
+            <a:ext cx="550805" cy="1426"/>
+          </a:xfrm>
+          <a:prstGeom prst="straightConnector1">
+            <a:avLst/>
+          </a:prstGeom>
+          <a:ln w="12700">
+            <a:solidFill>
+              <a:schemeClr val="tx1"/>
+            </a:solidFill>
+            <a:headEnd type="none"/>
+            <a:tailEnd type="stealth"/>
+          </a:ln>
+        </p:spPr>
+        <p:style>
+          <a:lnRef idx="1">
+            <a:schemeClr val="accent1"/>
+          </a:lnRef>
+          <a:fillRef idx="0">
+            <a:schemeClr val="accent1"/>
+          </a:fillRef>
+          <a:effectRef idx="0">
+            <a:schemeClr val="accent1"/>
+          </a:effectRef>
+          <a:fontRef idx="minor">
+            <a:schemeClr val="tx1"/>
+          </a:fontRef>
+        </p:style>
+      </p:cxnSp>
+    </p:spTree>
+    <p:extLst>
+      <p:ext uri="{BB962C8B-B14F-4D97-AF65-F5344CB8AC3E}">
+        <p14:creationId xmlns:p14="http://schemas.microsoft.com/office/powerpoint/2010/main" val="595035249"/>
+      </p:ext>
+    </p:extLst>
+  </p:cSld>
+  <p:clrMapOvr>
+    <a:masterClrMapping/>
+  </p:clrMapOvr>
+</p:sld>
+</file>
+
+<file path=ppt/slides/slide24.xml><?xml version="1.0" encoding="utf-8"?>
+<p:sld xmlns:a="http://schemas.openxmlformats.org/drawingml/2006/main" xmlns:r="http://schemas.openxmlformats.org/officeDocument/2006/relationships" xmlns:p="http://schemas.openxmlformats.org/presentationml/2006/main">
+  <p:cSld>
+    <p:spTree>
+      <p:nvGrpSpPr>
+        <p:cNvPr id="1" name=""/>
+        <p:cNvGrpSpPr/>
+        <p:nvPr/>
+      </p:nvGrpSpPr>
+      <p:grpSpPr>
+        <a:xfrm>
+          <a:off x="0" y="0"/>
+          <a:ext cx="0" cy="0"/>
+          <a:chOff x="0" y="0"/>
+          <a:chExt cx="0" cy="0"/>
+        </a:xfrm>
+      </p:grpSpPr>
+      <p:sp>
+        <p:nvSpPr>
+          <p:cNvPr id="2" name="Title 1"/>
+          <p:cNvSpPr>
+            <a:spLocks noGrp="1"/>
+          </p:cNvSpPr>
+          <p:nvPr>
+            <p:ph type="title"/>
+          </p:nvPr>
+        </p:nvSpPr>
+        <p:spPr>
+          <a:xfrm>
+            <a:off x="3105288" y="21950"/>
+            <a:ext cx="6324600" cy="1325563"/>
+          </a:xfrm>
+        </p:spPr>
+        <p:txBody>
+          <a:bodyPr/>
+          <a:lstStyle/>
+          <a:p>
+            <a:r>
+              <a:rPr lang="en-US" dirty="0" smtClean="0">
+                <a:solidFill>
+                  <a:srgbClr val="C00000"/>
+                </a:solidFill>
+              </a:rPr>
+              <a:t>Capacitive Power Transfer</a:t>
+            </a:r>
+            <a:endParaRPr lang="sv-SE" dirty="0">
+              <a:solidFill>
+                <a:srgbClr val="C00000"/>
+              </a:solidFill>
+            </a:endParaRPr>
+          </a:p>
+        </p:txBody>
+      </p:sp>
+      <p:sp>
+        <p:nvSpPr>
+          <p:cNvPr id="4" name="Rectangle 3"/>
+          <p:cNvSpPr/>
+          <p:nvPr/>
+        </p:nvSpPr>
+        <p:spPr>
+          <a:xfrm>
+            <a:off x="381551" y="836276"/>
+            <a:ext cx="6431280" cy="2031325"/>
+          </a:xfrm>
+          <a:prstGeom prst="rect">
+            <a:avLst/>
+          </a:prstGeom>
+        </p:spPr>
+        <p:txBody>
+          <a:bodyPr wrap="square">
+            <a:spAutoFit/>
+          </a:bodyPr>
+          <a:lstStyle/>
+          <a:p>
+            <a:endParaRPr lang="sv-SE" dirty="0" smtClean="0"/>
+          </a:p>
+          <a:p>
+            <a:r>
+              <a:rPr lang="sv-SE" b="1" dirty="0" smtClean="0"/>
+              <a:t>Rotary </a:t>
+            </a:r>
+            <a:r>
+              <a:rPr lang="sv-SE" b="1" dirty="0" err="1" smtClean="0"/>
+              <a:t>capacitor</a:t>
+            </a:r>
+            <a:r>
+              <a:rPr lang="sv-SE" b="1" dirty="0" smtClean="0"/>
+              <a:t> </a:t>
+            </a:r>
+            <a:r>
+              <a:rPr lang="sv-SE" dirty="0" err="1" smtClean="0"/>
+              <a:t>assemblies</a:t>
+            </a:r>
+            <a:r>
+              <a:rPr lang="sv-SE" dirty="0" smtClean="0"/>
+              <a:t> </a:t>
+            </a:r>
+            <a:r>
+              <a:rPr lang="sv-SE" dirty="0" err="1" smtClean="0"/>
+              <a:t>divert</a:t>
+            </a:r>
+            <a:r>
+              <a:rPr lang="sv-SE" dirty="0" smtClean="0"/>
+              <a:t> or </a:t>
+            </a:r>
+            <a:r>
+              <a:rPr lang="sv-SE" b="1" dirty="0" err="1" smtClean="0"/>
+              <a:t>mitigate</a:t>
+            </a:r>
+            <a:r>
+              <a:rPr lang="sv-SE" dirty="0" smtClean="0"/>
+              <a:t> </a:t>
+            </a:r>
+            <a:r>
+              <a:rPr lang="en-US" b="1" dirty="0" smtClean="0"/>
+              <a:t>high-frequency</a:t>
+            </a:r>
+            <a:r>
+              <a:rPr lang="sv-SE" b="1" dirty="0" smtClean="0"/>
+              <a:t> </a:t>
+            </a:r>
+            <a:r>
+              <a:rPr lang="sv-SE" b="1" dirty="0" err="1" smtClean="0"/>
+              <a:t>electrical</a:t>
+            </a:r>
+            <a:r>
+              <a:rPr lang="sv-SE" b="1" dirty="0" smtClean="0"/>
+              <a:t> </a:t>
+            </a:r>
+            <a:r>
+              <a:rPr lang="sv-SE" b="1" dirty="0" err="1" smtClean="0"/>
+              <a:t>currents</a:t>
+            </a:r>
+            <a:r>
+              <a:rPr lang="sv-SE" b="1" dirty="0" smtClean="0"/>
+              <a:t> </a:t>
+            </a:r>
+            <a:r>
+              <a:rPr lang="sv-SE" dirty="0" smtClean="0"/>
+              <a:t>and </a:t>
+            </a:r>
+            <a:r>
+              <a:rPr lang="sv-SE" dirty="0" err="1" smtClean="0"/>
+              <a:t>voltages</a:t>
+            </a:r>
+            <a:r>
+              <a:rPr lang="sv-SE" dirty="0" smtClean="0"/>
+              <a:t> </a:t>
+            </a:r>
+            <a:r>
+              <a:rPr lang="sv-SE" b="1" dirty="0" smtClean="0"/>
+              <a:t>in </a:t>
+            </a:r>
+            <a:r>
+              <a:rPr lang="sv-SE" b="1" dirty="0" err="1" smtClean="0"/>
+              <a:t>bearings</a:t>
+            </a:r>
+            <a:r>
+              <a:rPr lang="sv-SE" b="1" dirty="0" smtClean="0"/>
+              <a:t> </a:t>
+            </a:r>
+            <a:r>
+              <a:rPr lang="sv-SE" dirty="0" err="1" smtClean="0"/>
+              <a:t>of</a:t>
+            </a:r>
+            <a:r>
+              <a:rPr lang="sv-SE" dirty="0" smtClean="0"/>
+              <a:t> </a:t>
+            </a:r>
+            <a:r>
+              <a:rPr lang="sv-SE" dirty="0" err="1" smtClean="0"/>
+              <a:t>electric</a:t>
+            </a:r>
+            <a:r>
+              <a:rPr lang="sv-SE" dirty="0" smtClean="0"/>
+              <a:t> </a:t>
+            </a:r>
+            <a:r>
+              <a:rPr lang="sv-SE" dirty="0" err="1" smtClean="0"/>
+              <a:t>machinery</a:t>
+            </a:r>
+            <a:r>
+              <a:rPr lang="sv-SE" dirty="0" smtClean="0"/>
+              <a:t> (</a:t>
+            </a:r>
+            <a:r>
+              <a:rPr lang="sv-SE" dirty="0" err="1" smtClean="0"/>
+              <a:t>e.g</a:t>
+            </a:r>
+            <a:r>
+              <a:rPr lang="sv-SE" dirty="0" smtClean="0"/>
+              <a:t>., motors and </a:t>
+            </a:r>
+            <a:r>
+              <a:rPr lang="sv-SE" dirty="0"/>
+              <a:t>generators) </a:t>
+            </a:r>
+            <a:r>
+              <a:rPr lang="sv-SE" dirty="0" err="1"/>
+              <a:t>without</a:t>
+            </a:r>
+            <a:r>
+              <a:rPr lang="sv-SE" dirty="0"/>
+              <a:t> </a:t>
+            </a:r>
+            <a:r>
+              <a:rPr lang="sv-SE" dirty="0" err="1"/>
+              <a:t>direct</a:t>
+            </a:r>
+            <a:r>
+              <a:rPr lang="sv-SE" dirty="0"/>
+              <a:t> </a:t>
+            </a:r>
+            <a:r>
+              <a:rPr lang="sv-SE" dirty="0" err="1"/>
+              <a:t>contact</a:t>
+            </a:r>
+            <a:r>
+              <a:rPr lang="sv-SE" dirty="0"/>
+              <a:t> </a:t>
+            </a:r>
+            <a:r>
+              <a:rPr lang="sv-SE" dirty="0" err="1"/>
+              <a:t>with</a:t>
+            </a:r>
+            <a:r>
+              <a:rPr lang="sv-SE" dirty="0"/>
+              <a:t> </a:t>
+            </a:r>
+            <a:r>
+              <a:rPr lang="sv-SE" dirty="0" smtClean="0"/>
+              <a:t>the </a:t>
+            </a:r>
+            <a:r>
+              <a:rPr lang="sv-SE" dirty="0" err="1"/>
+              <a:t>bearings</a:t>
+            </a:r>
+            <a:r>
+              <a:rPr lang="sv-SE" dirty="0"/>
+              <a:t>. </a:t>
+            </a:r>
+            <a:r>
+              <a:rPr lang="sv-SE" dirty="0" smtClean="0"/>
+              <a:t> </a:t>
+            </a:r>
+          </a:p>
+          <a:p>
+            <a:endParaRPr lang="en-US" dirty="0"/>
+          </a:p>
+          <a:p>
+            <a:r>
+              <a:rPr lang="sv-SE" dirty="0"/>
+              <a:t>United States Patent, US 9,653,970B2</a:t>
+            </a:r>
+            <a:endParaRPr lang="sv-SE" dirty="0" smtClean="0"/>
+          </a:p>
+        </p:txBody>
+      </p:sp>
+      <p:pic>
+        <p:nvPicPr>
+          <p:cNvPr id="5" name="Picture 4"/>
+          <p:cNvPicPr>
+            <a:picLocks noChangeAspect="1"/>
+          </p:cNvPicPr>
+          <p:nvPr/>
+        </p:nvPicPr>
+        <p:blipFill>
+          <a:blip r:embed="rId2"/>
+          <a:stretch>
+            <a:fillRect/>
+          </a:stretch>
+        </p:blipFill>
+        <p:spPr>
+          <a:xfrm>
+            <a:off x="6667775" y="2556193"/>
+            <a:ext cx="5379169" cy="4301807"/>
+          </a:xfrm>
+          <a:prstGeom prst="rect">
+            <a:avLst/>
+          </a:prstGeom>
+        </p:spPr>
+      </p:pic>
+      <p:pic>
+        <p:nvPicPr>
+          <p:cNvPr id="6" name="Picture 5"/>
+          <p:cNvPicPr>
+            <a:picLocks noChangeAspect="1"/>
+          </p:cNvPicPr>
+          <p:nvPr/>
+        </p:nvPicPr>
+        <p:blipFill>
+          <a:blip r:embed="rId3"/>
+          <a:stretch>
+            <a:fillRect/>
+          </a:stretch>
+        </p:blipFill>
+        <p:spPr>
+          <a:xfrm>
+            <a:off x="1325795" y="3030080"/>
+            <a:ext cx="4103799" cy="3665359"/>
+          </a:xfrm>
+          <a:prstGeom prst="rect">
+            <a:avLst/>
+          </a:prstGeom>
+        </p:spPr>
+      </p:pic>
+    </p:spTree>
+    <p:extLst>
+      <p:ext uri="{BB962C8B-B14F-4D97-AF65-F5344CB8AC3E}">
+        <p14:creationId xmlns:p14="http://schemas.microsoft.com/office/powerpoint/2010/main" val="1399511619"/>
+      </p:ext>
+    </p:extLst>
+  </p:cSld>
+  <p:clrMapOvr>
+    <a:masterClrMapping/>
+  </p:clrMapOvr>
+</p:sld>
+</file>
+
+<file path=ppt/slides/slide25.xml><?xml version="1.0" encoding="utf-8"?>
+<p:sld xmlns:a="http://schemas.openxmlformats.org/drawingml/2006/main" xmlns:r="http://schemas.openxmlformats.org/officeDocument/2006/relationships" xmlns:p="http://schemas.openxmlformats.org/presentationml/2006/main">
+  <p:cSld>
+    <p:spTree>
+      <p:nvGrpSpPr>
+        <p:cNvPr id="1" name=""/>
+        <p:cNvGrpSpPr/>
+        <p:nvPr/>
+      </p:nvGrpSpPr>
+      <p:grpSpPr>
+        <a:xfrm>
+          <a:off x="0" y="0"/>
+          <a:ext cx="0" cy="0"/>
+          <a:chOff x="0" y="0"/>
+          <a:chExt cx="0" cy="0"/>
+        </a:xfrm>
+      </p:grpSpPr>
+      <p:sp>
+        <p:nvSpPr>
+          <p:cNvPr id="2" name="Title 1"/>
+          <p:cNvSpPr>
+            <a:spLocks noGrp="1"/>
+          </p:cNvSpPr>
+          <p:nvPr>
+            <p:ph type="title"/>
+          </p:nvPr>
+        </p:nvSpPr>
+        <p:spPr>
+          <a:xfrm>
+            <a:off x="3032760" y="153115"/>
+            <a:ext cx="6324600" cy="1325563"/>
+          </a:xfrm>
+        </p:spPr>
+        <p:txBody>
+          <a:bodyPr/>
+          <a:lstStyle/>
+          <a:p>
+            <a:r>
+              <a:rPr lang="en-US" dirty="0" smtClean="0">
+                <a:solidFill>
+                  <a:srgbClr val="C00000"/>
+                </a:solidFill>
+              </a:rPr>
+              <a:t>Capacitive Power Transfer</a:t>
+            </a:r>
+            <a:endParaRPr lang="sv-SE" dirty="0">
+              <a:solidFill>
+                <a:srgbClr val="C00000"/>
+              </a:solidFill>
+            </a:endParaRPr>
+          </a:p>
+        </p:txBody>
+      </p:sp>
+      <p:sp>
+        <p:nvSpPr>
+          <p:cNvPr id="3" name="Rectangle 2"/>
+          <p:cNvSpPr/>
+          <p:nvPr/>
+        </p:nvSpPr>
+        <p:spPr>
+          <a:xfrm>
+            <a:off x="182880" y="1356940"/>
+            <a:ext cx="5334000" cy="923330"/>
+          </a:xfrm>
+          <a:prstGeom prst="rect">
+            <a:avLst/>
+          </a:prstGeom>
+        </p:spPr>
+        <p:txBody>
+          <a:bodyPr wrap="square">
+            <a:spAutoFit/>
+          </a:bodyPr>
+          <a:lstStyle/>
+          <a:p>
+            <a:r>
+              <a:rPr lang="sv-SE" dirty="0" err="1"/>
+              <a:t>Analysis</a:t>
+            </a:r>
+            <a:r>
+              <a:rPr lang="sv-SE" dirty="0"/>
+              <a:t> and </a:t>
+            </a:r>
+            <a:r>
+              <a:rPr lang="sv-SE" dirty="0" err="1"/>
+              <a:t>Utilization</a:t>
+            </a:r>
+            <a:r>
+              <a:rPr lang="sv-SE" dirty="0"/>
+              <a:t> </a:t>
+            </a:r>
+            <a:r>
+              <a:rPr lang="sv-SE" dirty="0" err="1"/>
+              <a:t>of</a:t>
+            </a:r>
+            <a:r>
+              <a:rPr lang="sv-SE" dirty="0"/>
+              <a:t> Common-Mode </a:t>
+            </a:r>
+            <a:r>
+              <a:rPr lang="sv-SE" dirty="0" err="1"/>
+              <a:t>Voltage</a:t>
+            </a:r>
+            <a:r>
+              <a:rPr lang="sv-SE" dirty="0"/>
+              <a:t> in </a:t>
+            </a:r>
+            <a:r>
+              <a:rPr lang="sv-SE" dirty="0" err="1"/>
+              <a:t>Inverters</a:t>
+            </a:r>
+            <a:r>
+              <a:rPr lang="sv-SE" dirty="0"/>
+              <a:t> for Power </a:t>
+            </a:r>
+            <a:r>
+              <a:rPr lang="sv-SE" dirty="0" err="1" smtClean="0"/>
+              <a:t>Supply</a:t>
+            </a:r>
+            <a:r>
+              <a:rPr lang="sv-SE" dirty="0" smtClean="0"/>
+              <a:t>, </a:t>
+            </a:r>
+            <a:r>
+              <a:rPr lang="en-US" dirty="0"/>
+              <a:t>IEEE TRANSACTIONS ON POWER ELECTRONICS, VOL. 38, NO. 7, JULY 2023</a:t>
+            </a:r>
+            <a:endParaRPr lang="sv-SE" dirty="0"/>
+          </a:p>
+        </p:txBody>
+      </p:sp>
+      <p:sp>
+        <p:nvSpPr>
+          <p:cNvPr id="6" name="Rectangle 5"/>
+          <p:cNvSpPr/>
+          <p:nvPr/>
+        </p:nvSpPr>
+        <p:spPr>
+          <a:xfrm>
+            <a:off x="182880" y="2475548"/>
+            <a:ext cx="5445760" cy="923330"/>
+          </a:xfrm>
+          <a:prstGeom prst="rect">
+            <a:avLst/>
+          </a:prstGeom>
+        </p:spPr>
+        <p:txBody>
+          <a:bodyPr wrap="square">
+            <a:spAutoFit/>
+          </a:bodyPr>
+          <a:lstStyle/>
+          <a:p>
+            <a:r>
+              <a:rPr lang="sv-SE" dirty="0"/>
+              <a:t>From the </a:t>
+            </a:r>
+            <a:r>
+              <a:rPr lang="sv-SE" dirty="0" err="1"/>
+              <a:t>perspective</a:t>
+            </a:r>
+            <a:r>
+              <a:rPr lang="sv-SE" dirty="0"/>
+              <a:t> </a:t>
+            </a:r>
+            <a:r>
+              <a:rPr lang="sv-SE" dirty="0" err="1"/>
+              <a:t>of</a:t>
+            </a:r>
+            <a:r>
+              <a:rPr lang="sv-SE" dirty="0"/>
+              <a:t> </a:t>
+            </a:r>
+            <a:r>
+              <a:rPr lang="sv-SE" b="1" dirty="0" err="1"/>
+              <a:t>energy</a:t>
+            </a:r>
+            <a:r>
+              <a:rPr lang="sv-SE" b="1" dirty="0"/>
+              <a:t> </a:t>
+            </a:r>
+            <a:r>
+              <a:rPr lang="sv-SE" b="1" dirty="0" err="1"/>
+              <a:t>utilization</a:t>
+            </a:r>
+            <a:r>
+              <a:rPr lang="sv-SE" dirty="0"/>
+              <a:t>, </a:t>
+            </a:r>
+            <a:r>
+              <a:rPr lang="sv-SE" dirty="0" err="1"/>
+              <a:t>this</a:t>
+            </a:r>
+            <a:r>
+              <a:rPr lang="sv-SE" dirty="0"/>
+              <a:t> </a:t>
+            </a:r>
+            <a:r>
+              <a:rPr lang="sv-SE" dirty="0" err="1"/>
+              <a:t>article</a:t>
+            </a:r>
+            <a:r>
+              <a:rPr lang="sv-SE" dirty="0"/>
+              <a:t> </a:t>
+            </a:r>
+            <a:r>
+              <a:rPr lang="sv-SE" dirty="0" err="1"/>
+              <a:t>proposed</a:t>
+            </a:r>
+            <a:r>
+              <a:rPr lang="sv-SE" dirty="0"/>
+              <a:t> a </a:t>
+            </a:r>
+            <a:r>
+              <a:rPr lang="sv-SE" dirty="0" err="1"/>
+              <a:t>method</a:t>
+            </a:r>
+            <a:r>
+              <a:rPr lang="sv-SE" dirty="0"/>
+              <a:t> </a:t>
+            </a:r>
+            <a:r>
+              <a:rPr lang="sv-SE" dirty="0" err="1"/>
+              <a:t>of</a:t>
+            </a:r>
+            <a:r>
+              <a:rPr lang="sv-SE" dirty="0"/>
+              <a:t> </a:t>
+            </a:r>
+            <a:r>
+              <a:rPr lang="sv-SE" dirty="0" err="1"/>
+              <a:t>powering</a:t>
+            </a:r>
+            <a:r>
+              <a:rPr lang="sv-SE" dirty="0"/>
+              <a:t> the </a:t>
+            </a:r>
+            <a:r>
+              <a:rPr lang="sv-SE" dirty="0" err="1"/>
+              <a:t>load</a:t>
+            </a:r>
+            <a:r>
+              <a:rPr lang="sv-SE" dirty="0"/>
+              <a:t> by </a:t>
+            </a:r>
+            <a:r>
+              <a:rPr lang="sv-SE" dirty="0" err="1"/>
+              <a:t>collecting</a:t>
+            </a:r>
+            <a:r>
+              <a:rPr lang="sv-SE" dirty="0"/>
+              <a:t> the </a:t>
+            </a:r>
+            <a:r>
+              <a:rPr lang="sv-SE" dirty="0" err="1"/>
+              <a:t>energy</a:t>
+            </a:r>
+            <a:r>
+              <a:rPr lang="sv-SE" dirty="0"/>
+              <a:t> </a:t>
+            </a:r>
+            <a:r>
+              <a:rPr lang="sv-SE" dirty="0" err="1"/>
+              <a:t>of</a:t>
+            </a:r>
+            <a:r>
+              <a:rPr lang="sv-SE" dirty="0"/>
+              <a:t> CMV.</a:t>
+            </a:r>
+          </a:p>
+        </p:txBody>
+      </p:sp>
+      <p:pic>
+        <p:nvPicPr>
+          <p:cNvPr id="7" name="Picture 6"/>
+          <p:cNvPicPr>
+            <a:picLocks noChangeAspect="1"/>
+          </p:cNvPicPr>
+          <p:nvPr/>
+        </p:nvPicPr>
+        <p:blipFill rotWithShape="1">
+          <a:blip r:embed="rId2"/>
+          <a:srcRect l="2315"/>
+          <a:stretch/>
+        </p:blipFill>
+        <p:spPr>
+          <a:xfrm>
+            <a:off x="6154420" y="1185958"/>
+            <a:ext cx="5577003" cy="5695124"/>
+          </a:xfrm>
+          <a:prstGeom prst="rect">
+            <a:avLst/>
+          </a:prstGeom>
+        </p:spPr>
+      </p:pic>
+      <p:pic>
+        <p:nvPicPr>
+          <p:cNvPr id="8" name="Picture 7"/>
+          <p:cNvPicPr>
+            <a:picLocks noChangeAspect="1"/>
+          </p:cNvPicPr>
+          <p:nvPr/>
+        </p:nvPicPr>
+        <p:blipFill>
+          <a:blip r:embed="rId3"/>
+          <a:stretch>
+            <a:fillRect/>
+          </a:stretch>
+        </p:blipFill>
+        <p:spPr>
+          <a:xfrm>
+            <a:off x="0" y="4033520"/>
+            <a:ext cx="5805259" cy="2492194"/>
+          </a:xfrm>
+          <a:prstGeom prst="rect">
+            <a:avLst/>
+          </a:prstGeom>
+        </p:spPr>
+      </p:pic>
+    </p:spTree>
+    <p:extLst>
+      <p:ext uri="{BB962C8B-B14F-4D97-AF65-F5344CB8AC3E}">
+        <p14:creationId xmlns:p14="http://schemas.microsoft.com/office/powerpoint/2010/main" val="4072981099"/>
+      </p:ext>
+    </p:extLst>
+  </p:cSld>
+  <p:clrMapOvr>
+    <a:masterClrMapping/>
+  </p:clrMapOvr>
+</p:sld>
+</file>
+
+<file path=ppt/slides/slide26.xml><?xml version="1.0" encoding="utf-8"?>
 <p:sld xmlns:a="http://schemas.openxmlformats.org/drawingml/2006/main" xmlns:r="http://schemas.openxmlformats.org/officeDocument/2006/relationships" xmlns:p="http://schemas.openxmlformats.org/presentationml/2006/main">
   <p:cSld>
     <p:spTree>
@@ -19822,6 +23935,2010 @@
           <a:chExt cx="0" cy="0"/>
         </a:xfrm>
       </p:grpSpPr>
+      <p:pic>
+        <p:nvPicPr>
+          <p:cNvPr id="41" name="Picture 40"/>
+          <p:cNvPicPr>
+            <a:picLocks noChangeAspect="1"/>
+          </p:cNvPicPr>
+          <p:nvPr/>
+        </p:nvPicPr>
+        <p:blipFill>
+          <a:blip r:embed="rId2"/>
+          <a:stretch>
+            <a:fillRect/>
+          </a:stretch>
+        </p:blipFill>
+        <p:spPr>
+          <a:xfrm>
+            <a:off x="-187273" y="3530965"/>
+            <a:ext cx="5334000" cy="4000500"/>
+          </a:xfrm>
+          <a:prstGeom prst="rect">
+            <a:avLst/>
+          </a:prstGeom>
+        </p:spPr>
+      </p:pic>
+      <p:sp>
+        <p:nvSpPr>
+          <p:cNvPr id="6" name="TextBox 5"/>
+          <p:cNvSpPr txBox="1"/>
+          <p:nvPr/>
+        </p:nvSpPr>
+        <p:spPr>
+          <a:xfrm>
+            <a:off x="2409495" y="3259453"/>
+            <a:ext cx="545691" cy="461665"/>
+          </a:xfrm>
+          <a:prstGeom prst="rect">
+            <a:avLst/>
+          </a:prstGeom>
+          <a:noFill/>
+        </p:spPr>
+        <p:txBody>
+          <a:bodyPr wrap="square" rtlCol="0">
+            <a:spAutoFit/>
+          </a:bodyPr>
+          <a:lstStyle/>
+          <a:p>
+            <a:r>
+              <a:rPr lang="en-US" sz="2400" dirty="0" smtClean="0"/>
+              <a:t>(a)</a:t>
+            </a:r>
+            <a:endParaRPr lang="sv-SE" sz="2400" dirty="0"/>
+          </a:p>
+        </p:txBody>
+      </p:sp>
+      <p:sp>
+        <p:nvSpPr>
+          <p:cNvPr id="7" name="TextBox 6"/>
+          <p:cNvSpPr txBox="1"/>
+          <p:nvPr/>
+        </p:nvSpPr>
+        <p:spPr>
+          <a:xfrm>
+            <a:off x="2533575" y="7473960"/>
+            <a:ext cx="545691" cy="461665"/>
+          </a:xfrm>
+          <a:prstGeom prst="rect">
+            <a:avLst/>
+          </a:prstGeom>
+          <a:noFill/>
+        </p:spPr>
+        <p:txBody>
+          <a:bodyPr wrap="square" rtlCol="0">
+            <a:spAutoFit/>
+          </a:bodyPr>
+          <a:lstStyle/>
+          <a:p>
+            <a:r>
+              <a:rPr lang="en-US" sz="2400" dirty="0" smtClean="0"/>
+              <a:t>(c)</a:t>
+            </a:r>
+            <a:endParaRPr lang="sv-SE" sz="2400" dirty="0"/>
+          </a:p>
+        </p:txBody>
+      </p:sp>
+      <p:cxnSp>
+        <p:nvCxnSpPr>
+          <p:cNvPr id="43" name="Straight Arrow Connector 42"/>
+          <p:cNvCxnSpPr/>
+          <p:nvPr/>
+        </p:nvCxnSpPr>
+        <p:spPr>
+          <a:xfrm flipH="1">
+            <a:off x="1000388" y="3945596"/>
+            <a:ext cx="599054" cy="0"/>
+          </a:xfrm>
+          <a:prstGeom prst="straightConnector1">
+            <a:avLst/>
+          </a:prstGeom>
+          <a:ln w="38100">
+            <a:headEnd type="diamond"/>
+            <a:tailEnd type="triangle"/>
+          </a:ln>
+        </p:spPr>
+        <p:style>
+          <a:lnRef idx="3">
+            <a:schemeClr val="dk1"/>
+          </a:lnRef>
+          <a:fillRef idx="0">
+            <a:schemeClr val="dk1"/>
+          </a:fillRef>
+          <a:effectRef idx="2">
+            <a:schemeClr val="dk1"/>
+          </a:effectRef>
+          <a:fontRef idx="minor">
+            <a:schemeClr val="tx1"/>
+          </a:fontRef>
+        </p:style>
+      </p:cxnSp>
+      <p:cxnSp>
+        <p:nvCxnSpPr>
+          <p:cNvPr id="44" name="Straight Arrow Connector 43"/>
+          <p:cNvCxnSpPr/>
+          <p:nvPr/>
+        </p:nvCxnSpPr>
+        <p:spPr>
+          <a:xfrm>
+            <a:off x="3994411" y="3945596"/>
+            <a:ext cx="631825" cy="0"/>
+          </a:xfrm>
+          <a:prstGeom prst="straightConnector1">
+            <a:avLst/>
+          </a:prstGeom>
+          <a:ln w="38100">
+            <a:headEnd type="diamond"/>
+            <a:tailEnd type="triangle"/>
+          </a:ln>
+        </p:spPr>
+        <p:style>
+          <a:lnRef idx="3">
+            <a:schemeClr val="dk1"/>
+          </a:lnRef>
+          <a:fillRef idx="0">
+            <a:schemeClr val="dk1"/>
+          </a:fillRef>
+          <a:effectRef idx="2">
+            <a:schemeClr val="dk1"/>
+          </a:effectRef>
+          <a:fontRef idx="minor">
+            <a:schemeClr val="tx1"/>
+          </a:fontRef>
+        </p:style>
+      </p:cxnSp>
+      <mc:AlternateContent xmlns:mc="http://schemas.openxmlformats.org/markup-compatibility/2006">
+        <mc:Choice xmlns:a14="http://schemas.microsoft.com/office/drawing/2010/main" Requires="a14">
+          <p:sp>
+            <p:nvSpPr>
+              <p:cNvPr id="45" name="TextBox 44"/>
+              <p:cNvSpPr txBox="1"/>
+              <p:nvPr/>
+            </p:nvSpPr>
+            <p:spPr>
+              <a:xfrm>
+                <a:off x="2172277" y="3802661"/>
+                <a:ext cx="1266214" cy="400110"/>
+              </a:xfrm>
+              <a:prstGeom prst="rect">
+                <a:avLst/>
+              </a:prstGeom>
+              <a:noFill/>
+            </p:spPr>
+            <p:txBody>
+              <a:bodyPr wrap="square" rtlCol="0">
+                <a:spAutoFit/>
+              </a:bodyPr>
+              <a:lstStyle/>
+              <a:p>
+                <a:pPr/>
+                <a14:m>
+                  <m:oMathPara xmlns:m="http://schemas.openxmlformats.org/officeDocument/2006/math">
+                    <m:oMathParaPr>
+                      <m:jc m:val="centerGroup"/>
+                    </m:oMathParaPr>
+                    <m:oMath xmlns:m="http://schemas.openxmlformats.org/officeDocument/2006/math">
+                      <m:sSub>
+                        <m:sSubPr>
+                          <m:ctrlPr>
+                            <a:rPr lang="en-US" sz="2000" i="1" smtClean="0">
+                              <a:latin typeface="Cambria Math" panose="02040503050406030204" pitchFamily="18" charset="0"/>
+                            </a:rPr>
+                          </m:ctrlPr>
+                        </m:sSubPr>
+                        <m:e>
+                          <m:r>
+                            <a:rPr lang="en-US" sz="2000" b="0" i="1" smtClean="0">
+                              <a:latin typeface="Cambria Math" panose="02040503050406030204" pitchFamily="18" charset="0"/>
+                            </a:rPr>
+                            <m:t>𝐷</m:t>
+                          </m:r>
+                        </m:e>
+                        <m:sub>
+                          <m:r>
+                            <a:rPr lang="en-US" sz="2000" b="0" i="1" smtClean="0">
+                              <a:latin typeface="Cambria Math" panose="02040503050406030204" pitchFamily="18" charset="0"/>
+                            </a:rPr>
+                            <m:t>𝐴</m:t>
+                          </m:r>
+                        </m:sub>
+                      </m:sSub>
+                      <m:sSub>
+                        <m:sSubPr>
+                          <m:ctrlPr>
+                            <a:rPr lang="en-US" sz="2000" i="1" smtClean="0">
+                              <a:latin typeface="Cambria Math" panose="02040503050406030204" pitchFamily="18" charset="0"/>
+                            </a:rPr>
+                          </m:ctrlPr>
+                        </m:sSubPr>
+                        <m:e>
+                          <m:r>
+                            <a:rPr lang="en-US" sz="2000" b="0" i="1" smtClean="0">
+                              <a:latin typeface="Cambria Math" panose="02040503050406030204" pitchFamily="18" charset="0"/>
+                            </a:rPr>
+                            <m:t>𝑇</m:t>
+                          </m:r>
+                        </m:e>
+                        <m:sub>
+                          <m:r>
+                            <a:rPr lang="en-US" sz="2000" b="0" i="1" smtClean="0">
+                              <a:latin typeface="Cambria Math" panose="02040503050406030204" pitchFamily="18" charset="0"/>
+                            </a:rPr>
+                            <m:t>𝑠</m:t>
+                          </m:r>
+                        </m:sub>
+                      </m:sSub>
+                    </m:oMath>
+                  </m:oMathPara>
+                </a14:m>
+                <a:endParaRPr lang="sv-SE" dirty="0"/>
+              </a:p>
+            </p:txBody>
+          </p:sp>
+        </mc:Choice>
+        <mc:Fallback>
+          <p:sp>
+            <p:nvSpPr>
+              <p:cNvPr id="45" name="TextBox 44"/>
+              <p:cNvSpPr txBox="1">
+                <a:spLocks noRot="1" noChangeAspect="1" noMove="1" noResize="1" noEditPoints="1" noAdjustHandles="1" noChangeArrowheads="1" noChangeShapeType="1" noTextEdit="1"/>
+              </p:cNvSpPr>
+              <p:nvPr/>
+            </p:nvSpPr>
+            <p:spPr>
+              <a:xfrm>
+                <a:off x="2172277" y="3802661"/>
+                <a:ext cx="1266214" cy="400110"/>
+              </a:xfrm>
+              <a:prstGeom prst="rect">
+                <a:avLst/>
+              </a:prstGeom>
+              <a:blipFill>
+                <a:blip r:embed="rId3"/>
+                <a:stretch>
+                  <a:fillRect b="-1538"/>
+                </a:stretch>
+              </a:blipFill>
+            </p:spPr>
+            <p:txBody>
+              <a:bodyPr/>
+              <a:lstStyle/>
+              <a:p>
+                <a:r>
+                  <a:rPr lang="sv-SE">
+                    <a:noFill/>
+                  </a:rPr>
+                  <a:t> </a:t>
+                </a:r>
+              </a:p>
+            </p:txBody>
+          </p:sp>
+        </mc:Fallback>
+      </mc:AlternateContent>
+      <mc:AlternateContent xmlns:mc="http://schemas.openxmlformats.org/markup-compatibility/2006">
+        <mc:Choice xmlns:a14="http://schemas.microsoft.com/office/drawing/2010/main" Requires="a14">
+          <p:sp>
+            <p:nvSpPr>
+              <p:cNvPr id="48" name="TextBox 47"/>
+              <p:cNvSpPr txBox="1"/>
+              <p:nvPr/>
+            </p:nvSpPr>
+            <p:spPr>
+              <a:xfrm>
+                <a:off x="2137380" y="4478552"/>
+                <a:ext cx="1266214" cy="400110"/>
+              </a:xfrm>
+              <a:prstGeom prst="rect">
+                <a:avLst/>
+              </a:prstGeom>
+              <a:noFill/>
+            </p:spPr>
+            <p:txBody>
+              <a:bodyPr wrap="square" rtlCol="0">
+                <a:spAutoFit/>
+              </a:bodyPr>
+              <a:lstStyle/>
+              <a:p>
+                <a:pPr/>
+                <a14:m>
+                  <m:oMathPara xmlns:m="http://schemas.openxmlformats.org/officeDocument/2006/math">
+                    <m:oMathParaPr>
+                      <m:jc m:val="centerGroup"/>
+                    </m:oMathParaPr>
+                    <m:oMath xmlns:m="http://schemas.openxmlformats.org/officeDocument/2006/math">
+                      <m:sSub>
+                        <m:sSubPr>
+                          <m:ctrlPr>
+                            <a:rPr lang="en-US" sz="2000" i="1" smtClean="0">
+                              <a:latin typeface="Cambria Math" panose="02040503050406030204" pitchFamily="18" charset="0"/>
+                            </a:rPr>
+                          </m:ctrlPr>
+                        </m:sSubPr>
+                        <m:e>
+                          <m:r>
+                            <a:rPr lang="en-US" sz="2000" b="0" i="1" smtClean="0">
+                              <a:latin typeface="Cambria Math" panose="02040503050406030204" pitchFamily="18" charset="0"/>
+                            </a:rPr>
+                            <m:t>𝐷</m:t>
+                          </m:r>
+                        </m:e>
+                        <m:sub>
+                          <m:r>
+                            <a:rPr lang="en-US" sz="2000" b="0" i="1" smtClean="0">
+                              <a:latin typeface="Cambria Math" panose="02040503050406030204" pitchFamily="18" charset="0"/>
+                            </a:rPr>
+                            <m:t>𝐵</m:t>
+                          </m:r>
+                        </m:sub>
+                      </m:sSub>
+                      <m:sSub>
+                        <m:sSubPr>
+                          <m:ctrlPr>
+                            <a:rPr lang="en-US" sz="2000" i="1" smtClean="0">
+                              <a:latin typeface="Cambria Math" panose="02040503050406030204" pitchFamily="18" charset="0"/>
+                            </a:rPr>
+                          </m:ctrlPr>
+                        </m:sSubPr>
+                        <m:e>
+                          <m:r>
+                            <a:rPr lang="en-US" sz="2000" b="0" i="1" smtClean="0">
+                              <a:latin typeface="Cambria Math" panose="02040503050406030204" pitchFamily="18" charset="0"/>
+                            </a:rPr>
+                            <m:t>𝑇</m:t>
+                          </m:r>
+                        </m:e>
+                        <m:sub>
+                          <m:r>
+                            <a:rPr lang="en-US" sz="2000" b="0" i="1" smtClean="0">
+                              <a:latin typeface="Cambria Math" panose="02040503050406030204" pitchFamily="18" charset="0"/>
+                            </a:rPr>
+                            <m:t>𝑠</m:t>
+                          </m:r>
+                        </m:sub>
+                      </m:sSub>
+                    </m:oMath>
+                  </m:oMathPara>
+                </a14:m>
+                <a:endParaRPr lang="sv-SE" dirty="0"/>
+              </a:p>
+            </p:txBody>
+          </p:sp>
+        </mc:Choice>
+        <mc:Fallback>
+          <p:sp>
+            <p:nvSpPr>
+              <p:cNvPr id="48" name="TextBox 47"/>
+              <p:cNvSpPr txBox="1">
+                <a:spLocks noRot="1" noChangeAspect="1" noMove="1" noResize="1" noEditPoints="1" noAdjustHandles="1" noChangeArrowheads="1" noChangeShapeType="1" noTextEdit="1"/>
+              </p:cNvSpPr>
+              <p:nvPr/>
+            </p:nvSpPr>
+            <p:spPr>
+              <a:xfrm>
+                <a:off x="2137380" y="4478552"/>
+                <a:ext cx="1266214" cy="400110"/>
+              </a:xfrm>
+              <a:prstGeom prst="rect">
+                <a:avLst/>
+              </a:prstGeom>
+              <a:blipFill>
+                <a:blip r:embed="rId4"/>
+                <a:stretch>
+                  <a:fillRect b="-1538"/>
+                </a:stretch>
+              </a:blipFill>
+            </p:spPr>
+            <p:txBody>
+              <a:bodyPr/>
+              <a:lstStyle/>
+              <a:p>
+                <a:r>
+                  <a:rPr lang="sv-SE">
+                    <a:noFill/>
+                  </a:rPr>
+                  <a:t> </a:t>
+                </a:r>
+              </a:p>
+            </p:txBody>
+          </p:sp>
+        </mc:Fallback>
+      </mc:AlternateContent>
+      <mc:AlternateContent xmlns:mc="http://schemas.openxmlformats.org/markup-compatibility/2006">
+        <mc:Choice xmlns:a14="http://schemas.microsoft.com/office/drawing/2010/main" Requires="a14">
+          <p:sp>
+            <p:nvSpPr>
+              <p:cNvPr id="49" name="TextBox 48"/>
+              <p:cNvSpPr txBox="1"/>
+              <p:nvPr/>
+            </p:nvSpPr>
+            <p:spPr>
+              <a:xfrm>
+                <a:off x="2057634" y="5706935"/>
+                <a:ext cx="1266214" cy="400110"/>
+              </a:xfrm>
+              <a:prstGeom prst="rect">
+                <a:avLst/>
+              </a:prstGeom>
+              <a:noFill/>
+            </p:spPr>
+            <p:txBody>
+              <a:bodyPr wrap="square" rtlCol="0">
+                <a:spAutoFit/>
+              </a:bodyPr>
+              <a:lstStyle/>
+              <a:p>
+                <a:pPr/>
+                <a14:m>
+                  <m:oMathPara xmlns:m="http://schemas.openxmlformats.org/officeDocument/2006/math">
+                    <m:oMathParaPr>
+                      <m:jc m:val="centerGroup"/>
+                    </m:oMathParaPr>
+                    <m:oMath xmlns:m="http://schemas.openxmlformats.org/officeDocument/2006/math">
+                      <m:sSub>
+                        <m:sSubPr>
+                          <m:ctrlPr>
+                            <a:rPr lang="en-US" sz="2000" i="1" smtClean="0">
+                              <a:latin typeface="Cambria Math" panose="02040503050406030204" pitchFamily="18" charset="0"/>
+                            </a:rPr>
+                          </m:ctrlPr>
+                        </m:sSubPr>
+                        <m:e>
+                          <m:r>
+                            <a:rPr lang="en-US" sz="2000" b="0" i="1" smtClean="0">
+                              <a:latin typeface="Cambria Math" panose="02040503050406030204" pitchFamily="18" charset="0"/>
+                            </a:rPr>
+                            <m:t>𝐷</m:t>
+                          </m:r>
+                        </m:e>
+                        <m:sub>
+                          <m:r>
+                            <a:rPr lang="en-US" sz="2000" b="0" i="1" smtClean="0">
+                              <a:latin typeface="Cambria Math" panose="02040503050406030204" pitchFamily="18" charset="0"/>
+                            </a:rPr>
+                            <m:t>𝐶</m:t>
+                          </m:r>
+                        </m:sub>
+                      </m:sSub>
+                      <m:sSub>
+                        <m:sSubPr>
+                          <m:ctrlPr>
+                            <a:rPr lang="en-US" sz="2000" i="1" smtClean="0">
+                              <a:latin typeface="Cambria Math" panose="02040503050406030204" pitchFamily="18" charset="0"/>
+                            </a:rPr>
+                          </m:ctrlPr>
+                        </m:sSubPr>
+                        <m:e>
+                          <m:r>
+                            <a:rPr lang="en-US" sz="2000" b="0" i="1" smtClean="0">
+                              <a:latin typeface="Cambria Math" panose="02040503050406030204" pitchFamily="18" charset="0"/>
+                            </a:rPr>
+                            <m:t>𝑇</m:t>
+                          </m:r>
+                        </m:e>
+                        <m:sub>
+                          <m:r>
+                            <a:rPr lang="en-US" sz="2000" b="0" i="1" smtClean="0">
+                              <a:latin typeface="Cambria Math" panose="02040503050406030204" pitchFamily="18" charset="0"/>
+                            </a:rPr>
+                            <m:t>𝑠</m:t>
+                          </m:r>
+                        </m:sub>
+                      </m:sSub>
+                    </m:oMath>
+                  </m:oMathPara>
+                </a14:m>
+                <a:endParaRPr lang="sv-SE" dirty="0"/>
+              </a:p>
+            </p:txBody>
+          </p:sp>
+        </mc:Choice>
+        <mc:Fallback>
+          <p:sp>
+            <p:nvSpPr>
+              <p:cNvPr id="49" name="TextBox 48"/>
+              <p:cNvSpPr txBox="1">
+                <a:spLocks noRot="1" noChangeAspect="1" noMove="1" noResize="1" noEditPoints="1" noAdjustHandles="1" noChangeArrowheads="1" noChangeShapeType="1" noTextEdit="1"/>
+              </p:cNvSpPr>
+              <p:nvPr/>
+            </p:nvSpPr>
+            <p:spPr>
+              <a:xfrm>
+                <a:off x="2057634" y="5706935"/>
+                <a:ext cx="1266214" cy="400110"/>
+              </a:xfrm>
+              <a:prstGeom prst="rect">
+                <a:avLst/>
+              </a:prstGeom>
+              <a:blipFill>
+                <a:blip r:embed="rId5"/>
+                <a:stretch>
+                  <a:fillRect/>
+                </a:stretch>
+              </a:blipFill>
+            </p:spPr>
+            <p:txBody>
+              <a:bodyPr/>
+              <a:lstStyle/>
+              <a:p>
+                <a:r>
+                  <a:rPr lang="sv-SE">
+                    <a:noFill/>
+                  </a:rPr>
+                  <a:t> </a:t>
+                </a:r>
+              </a:p>
+            </p:txBody>
+          </p:sp>
+        </mc:Fallback>
+      </mc:AlternateContent>
+      <p:cxnSp>
+        <p:nvCxnSpPr>
+          <p:cNvPr id="50" name="Straight Arrow Connector 49"/>
+          <p:cNvCxnSpPr/>
+          <p:nvPr/>
+        </p:nvCxnSpPr>
+        <p:spPr>
+          <a:xfrm>
+            <a:off x="4165861" y="5906990"/>
+            <a:ext cx="486595" cy="0"/>
+          </a:xfrm>
+          <a:prstGeom prst="straightConnector1">
+            <a:avLst/>
+          </a:prstGeom>
+          <a:ln w="38100">
+            <a:headEnd type="diamond"/>
+            <a:tailEnd type="triangle"/>
+          </a:ln>
+        </p:spPr>
+        <p:style>
+          <a:lnRef idx="3">
+            <a:schemeClr val="dk1"/>
+          </a:lnRef>
+          <a:fillRef idx="0">
+            <a:schemeClr val="dk1"/>
+          </a:fillRef>
+          <a:effectRef idx="2">
+            <a:schemeClr val="dk1"/>
+          </a:effectRef>
+          <a:fontRef idx="minor">
+            <a:schemeClr val="tx1"/>
+          </a:fontRef>
+        </p:style>
+      </p:cxnSp>
+      <p:cxnSp>
+        <p:nvCxnSpPr>
+          <p:cNvPr id="51" name="Straight Arrow Connector 50"/>
+          <p:cNvCxnSpPr/>
+          <p:nvPr/>
+        </p:nvCxnSpPr>
+        <p:spPr>
+          <a:xfrm flipH="1" flipV="1">
+            <a:off x="995643" y="5906990"/>
+            <a:ext cx="388918" cy="10311"/>
+          </a:xfrm>
+          <a:prstGeom prst="straightConnector1">
+            <a:avLst/>
+          </a:prstGeom>
+          <a:ln w="38100">
+            <a:headEnd type="diamond"/>
+            <a:tailEnd type="triangle"/>
+          </a:ln>
+        </p:spPr>
+        <p:style>
+          <a:lnRef idx="3">
+            <a:schemeClr val="dk1"/>
+          </a:lnRef>
+          <a:fillRef idx="0">
+            <a:schemeClr val="dk1"/>
+          </a:fillRef>
+          <a:effectRef idx="2">
+            <a:schemeClr val="dk1"/>
+          </a:effectRef>
+          <a:fontRef idx="minor">
+            <a:schemeClr val="tx1"/>
+          </a:fontRef>
+        </p:style>
+      </p:cxnSp>
+      <p:cxnSp>
+        <p:nvCxnSpPr>
+          <p:cNvPr id="59" name="Straight Arrow Connector 58"/>
+          <p:cNvCxnSpPr/>
+          <p:nvPr/>
+        </p:nvCxnSpPr>
+        <p:spPr>
+          <a:xfrm flipH="1" flipV="1">
+            <a:off x="1026608" y="4862400"/>
+            <a:ext cx="1435099" cy="3175"/>
+          </a:xfrm>
+          <a:prstGeom prst="straightConnector1">
+            <a:avLst/>
+          </a:prstGeom>
+          <a:ln w="38100">
+            <a:headEnd type="diamond"/>
+            <a:tailEnd type="triangle"/>
+          </a:ln>
+        </p:spPr>
+        <p:style>
+          <a:lnRef idx="3">
+            <a:schemeClr val="dk1"/>
+          </a:lnRef>
+          <a:fillRef idx="0">
+            <a:schemeClr val="dk1"/>
+          </a:fillRef>
+          <a:effectRef idx="2">
+            <a:schemeClr val="dk1"/>
+          </a:effectRef>
+          <a:fontRef idx="minor">
+            <a:schemeClr val="tx1"/>
+          </a:fontRef>
+        </p:style>
+      </p:cxnSp>
+      <p:cxnSp>
+        <p:nvCxnSpPr>
+          <p:cNvPr id="64" name="Straight Arrow Connector 63"/>
+          <p:cNvCxnSpPr/>
+          <p:nvPr/>
+        </p:nvCxnSpPr>
+        <p:spPr>
+          <a:xfrm>
+            <a:off x="3079266" y="4862400"/>
+            <a:ext cx="1546970" cy="3258"/>
+          </a:xfrm>
+          <a:prstGeom prst="straightConnector1">
+            <a:avLst/>
+          </a:prstGeom>
+          <a:ln w="38100">
+            <a:headEnd type="diamond"/>
+            <a:tailEnd type="triangle"/>
+          </a:ln>
+        </p:spPr>
+        <p:style>
+          <a:lnRef idx="3">
+            <a:schemeClr val="dk1"/>
+          </a:lnRef>
+          <a:fillRef idx="0">
+            <a:schemeClr val="dk1"/>
+          </a:fillRef>
+          <a:effectRef idx="2">
+            <a:schemeClr val="dk1"/>
+          </a:effectRef>
+          <a:fontRef idx="minor">
+            <a:schemeClr val="tx1"/>
+          </a:fontRef>
+        </p:style>
+      </p:cxnSp>
+      <p:pic>
+        <p:nvPicPr>
+          <p:cNvPr id="3" name="Picture 2"/>
+          <p:cNvPicPr>
+            <a:picLocks noChangeAspect="1"/>
+          </p:cNvPicPr>
+          <p:nvPr/>
+        </p:nvPicPr>
+        <p:blipFill>
+          <a:blip r:embed="rId6"/>
+          <a:stretch>
+            <a:fillRect/>
+          </a:stretch>
+        </p:blipFill>
+        <p:spPr>
+          <a:xfrm>
+            <a:off x="5066480" y="-659653"/>
+            <a:ext cx="5334000" cy="4000500"/>
+          </a:xfrm>
+          <a:prstGeom prst="rect">
+            <a:avLst/>
+          </a:prstGeom>
+        </p:spPr>
+      </p:pic>
+      <p:sp>
+        <p:nvSpPr>
+          <p:cNvPr id="26" name="TextBox 25"/>
+          <p:cNvSpPr txBox="1"/>
+          <p:nvPr/>
+        </p:nvSpPr>
+        <p:spPr>
+          <a:xfrm>
+            <a:off x="7552692" y="3278690"/>
+            <a:ext cx="545691" cy="461665"/>
+          </a:xfrm>
+          <a:prstGeom prst="rect">
+            <a:avLst/>
+          </a:prstGeom>
+          <a:noFill/>
+        </p:spPr>
+        <p:txBody>
+          <a:bodyPr wrap="square" rtlCol="0">
+            <a:spAutoFit/>
+          </a:bodyPr>
+          <a:lstStyle/>
+          <a:p>
+            <a:r>
+              <a:rPr lang="en-US" sz="2400" dirty="0" smtClean="0"/>
+              <a:t>(b)</a:t>
+            </a:r>
+            <a:endParaRPr lang="sv-SE" sz="2400" dirty="0"/>
+          </a:p>
+        </p:txBody>
+      </p:sp>
+      <p:sp>
+        <p:nvSpPr>
+          <p:cNvPr id="28" name="TextBox 27"/>
+          <p:cNvSpPr txBox="1"/>
+          <p:nvPr/>
+        </p:nvSpPr>
+        <p:spPr>
+          <a:xfrm>
+            <a:off x="7592561" y="7473960"/>
+            <a:ext cx="545691" cy="461665"/>
+          </a:xfrm>
+          <a:prstGeom prst="rect">
+            <a:avLst/>
+          </a:prstGeom>
+          <a:noFill/>
+        </p:spPr>
+        <p:txBody>
+          <a:bodyPr wrap="square" rtlCol="0">
+            <a:spAutoFit/>
+          </a:bodyPr>
+          <a:lstStyle/>
+          <a:p>
+            <a:r>
+              <a:rPr lang="en-US" sz="2400" dirty="0" smtClean="0"/>
+              <a:t>(d)</a:t>
+            </a:r>
+            <a:endParaRPr lang="sv-SE" sz="2400" dirty="0"/>
+          </a:p>
+        </p:txBody>
+      </p:sp>
+      <p:sp>
+        <p:nvSpPr>
+          <p:cNvPr id="29" name="TextBox 28"/>
+          <p:cNvSpPr txBox="1"/>
+          <p:nvPr/>
+        </p:nvSpPr>
+        <p:spPr>
+          <a:xfrm>
+            <a:off x="7761009" y="11602368"/>
+            <a:ext cx="545691" cy="461665"/>
+          </a:xfrm>
+          <a:prstGeom prst="rect">
+            <a:avLst/>
+          </a:prstGeom>
+          <a:noFill/>
+        </p:spPr>
+        <p:txBody>
+          <a:bodyPr wrap="square" rtlCol="0">
+            <a:spAutoFit/>
+          </a:bodyPr>
+          <a:lstStyle/>
+          <a:p>
+            <a:r>
+              <a:rPr lang="en-US" sz="2400" dirty="0" smtClean="0"/>
+              <a:t>(f)</a:t>
+            </a:r>
+            <a:endParaRPr lang="sv-SE" sz="2400" dirty="0"/>
+          </a:p>
+        </p:txBody>
+      </p:sp>
+      <p:pic>
+        <p:nvPicPr>
+          <p:cNvPr id="5" name="Picture 4"/>
+          <p:cNvPicPr>
+            <a:picLocks noChangeAspect="1"/>
+          </p:cNvPicPr>
+          <p:nvPr/>
+        </p:nvPicPr>
+        <p:blipFill>
+          <a:blip r:embed="rId7"/>
+          <a:stretch>
+            <a:fillRect/>
+          </a:stretch>
+        </p:blipFill>
+        <p:spPr>
+          <a:xfrm>
+            <a:off x="4885692" y="3542815"/>
+            <a:ext cx="5334000" cy="4000500"/>
+          </a:xfrm>
+          <a:prstGeom prst="rect">
+            <a:avLst/>
+          </a:prstGeom>
+        </p:spPr>
+      </p:pic>
+      <p:pic>
+        <p:nvPicPr>
+          <p:cNvPr id="8" name="Picture 7"/>
+          <p:cNvPicPr>
+            <a:picLocks noChangeAspect="1"/>
+          </p:cNvPicPr>
+          <p:nvPr/>
+        </p:nvPicPr>
+        <p:blipFill>
+          <a:blip r:embed="rId8"/>
+          <a:stretch>
+            <a:fillRect/>
+          </a:stretch>
+        </p:blipFill>
+        <p:spPr>
+          <a:xfrm>
+            <a:off x="4975850" y="7646067"/>
+            <a:ext cx="5334000" cy="4000500"/>
+          </a:xfrm>
+          <a:prstGeom prst="rect">
+            <a:avLst/>
+          </a:prstGeom>
+        </p:spPr>
+      </p:pic>
+      <p:cxnSp>
+        <p:nvCxnSpPr>
+          <p:cNvPr id="31" name="Straight Arrow Connector 30"/>
+          <p:cNvCxnSpPr/>
+          <p:nvPr/>
+        </p:nvCxnSpPr>
+        <p:spPr>
+          <a:xfrm flipH="1">
+            <a:off x="6059831" y="3990199"/>
+            <a:ext cx="538928" cy="0"/>
+          </a:xfrm>
+          <a:prstGeom prst="straightConnector1">
+            <a:avLst/>
+          </a:prstGeom>
+          <a:ln w="38100">
+            <a:headEnd type="diamond"/>
+            <a:tailEnd type="triangle"/>
+          </a:ln>
+        </p:spPr>
+        <p:style>
+          <a:lnRef idx="3">
+            <a:schemeClr val="dk1"/>
+          </a:lnRef>
+          <a:fillRef idx="0">
+            <a:schemeClr val="dk1"/>
+          </a:fillRef>
+          <a:effectRef idx="2">
+            <a:schemeClr val="dk1"/>
+          </a:effectRef>
+          <a:fontRef idx="minor">
+            <a:schemeClr val="tx1"/>
+          </a:fontRef>
+        </p:style>
+      </p:cxnSp>
+      <p:cxnSp>
+        <p:nvCxnSpPr>
+          <p:cNvPr id="32" name="Straight Arrow Connector 31"/>
+          <p:cNvCxnSpPr/>
+          <p:nvPr/>
+        </p:nvCxnSpPr>
+        <p:spPr>
+          <a:xfrm>
+            <a:off x="9065734" y="3990199"/>
+            <a:ext cx="619945" cy="0"/>
+          </a:xfrm>
+          <a:prstGeom prst="straightConnector1">
+            <a:avLst/>
+          </a:prstGeom>
+          <a:ln w="38100">
+            <a:headEnd type="diamond"/>
+            <a:tailEnd type="triangle"/>
+          </a:ln>
+        </p:spPr>
+        <p:style>
+          <a:lnRef idx="3">
+            <a:schemeClr val="dk1"/>
+          </a:lnRef>
+          <a:fillRef idx="0">
+            <a:schemeClr val="dk1"/>
+          </a:fillRef>
+          <a:effectRef idx="2">
+            <a:schemeClr val="dk1"/>
+          </a:effectRef>
+          <a:fontRef idx="minor">
+            <a:schemeClr val="tx1"/>
+          </a:fontRef>
+        </p:style>
+      </p:cxnSp>
+      <mc:AlternateContent xmlns:mc="http://schemas.openxmlformats.org/markup-compatibility/2006">
+        <mc:Choice xmlns:a14="http://schemas.microsoft.com/office/drawing/2010/main" Requires="a14">
+          <p:sp>
+            <p:nvSpPr>
+              <p:cNvPr id="33" name="TextBox 32"/>
+              <p:cNvSpPr txBox="1"/>
+              <p:nvPr/>
+            </p:nvSpPr>
+            <p:spPr>
+              <a:xfrm>
+                <a:off x="7231720" y="3847264"/>
+                <a:ext cx="1266214" cy="400110"/>
+              </a:xfrm>
+              <a:prstGeom prst="rect">
+                <a:avLst/>
+              </a:prstGeom>
+              <a:noFill/>
+            </p:spPr>
+            <p:txBody>
+              <a:bodyPr wrap="square" rtlCol="0">
+                <a:spAutoFit/>
+              </a:bodyPr>
+              <a:lstStyle/>
+              <a:p>
+                <a:pPr/>
+                <a14:m>
+                  <m:oMathPara xmlns:m="http://schemas.openxmlformats.org/officeDocument/2006/math">
+                    <m:oMathParaPr>
+                      <m:jc m:val="centerGroup"/>
+                    </m:oMathParaPr>
+                    <m:oMath xmlns:m="http://schemas.openxmlformats.org/officeDocument/2006/math">
+                      <m:sSub>
+                        <m:sSubPr>
+                          <m:ctrlPr>
+                            <a:rPr lang="en-US" sz="2000" i="1" smtClean="0">
+                              <a:latin typeface="Cambria Math" panose="02040503050406030204" pitchFamily="18" charset="0"/>
+                            </a:rPr>
+                          </m:ctrlPr>
+                        </m:sSubPr>
+                        <m:e>
+                          <m:r>
+                            <a:rPr lang="en-US" sz="2000" b="0" i="1" smtClean="0">
+                              <a:latin typeface="Cambria Math" panose="02040503050406030204" pitchFamily="18" charset="0"/>
+                            </a:rPr>
+                            <m:t>𝐷</m:t>
+                          </m:r>
+                        </m:e>
+                        <m:sub>
+                          <m:r>
+                            <a:rPr lang="en-US" sz="2000" b="0" i="1" smtClean="0">
+                              <a:latin typeface="Cambria Math" panose="02040503050406030204" pitchFamily="18" charset="0"/>
+                            </a:rPr>
+                            <m:t>𝐴</m:t>
+                          </m:r>
+                        </m:sub>
+                      </m:sSub>
+                      <m:sSub>
+                        <m:sSubPr>
+                          <m:ctrlPr>
+                            <a:rPr lang="en-US" sz="2000" i="1" smtClean="0">
+                              <a:latin typeface="Cambria Math" panose="02040503050406030204" pitchFamily="18" charset="0"/>
+                            </a:rPr>
+                          </m:ctrlPr>
+                        </m:sSubPr>
+                        <m:e>
+                          <m:r>
+                            <a:rPr lang="en-US" sz="2000" b="0" i="1" smtClean="0">
+                              <a:latin typeface="Cambria Math" panose="02040503050406030204" pitchFamily="18" charset="0"/>
+                            </a:rPr>
+                            <m:t>𝑇</m:t>
+                          </m:r>
+                        </m:e>
+                        <m:sub>
+                          <m:r>
+                            <a:rPr lang="en-US" sz="2000" b="0" i="1" smtClean="0">
+                              <a:latin typeface="Cambria Math" panose="02040503050406030204" pitchFamily="18" charset="0"/>
+                            </a:rPr>
+                            <m:t>𝑠</m:t>
+                          </m:r>
+                        </m:sub>
+                      </m:sSub>
+                    </m:oMath>
+                  </m:oMathPara>
+                </a14:m>
+                <a:endParaRPr lang="sv-SE" dirty="0"/>
+              </a:p>
+            </p:txBody>
+          </p:sp>
+        </mc:Choice>
+        <mc:Fallback>
+          <p:sp>
+            <p:nvSpPr>
+              <p:cNvPr id="33" name="TextBox 32"/>
+              <p:cNvSpPr txBox="1">
+                <a:spLocks noRot="1" noChangeAspect="1" noMove="1" noResize="1" noEditPoints="1" noAdjustHandles="1" noChangeArrowheads="1" noChangeShapeType="1" noTextEdit="1"/>
+              </p:cNvSpPr>
+              <p:nvPr/>
+            </p:nvSpPr>
+            <p:spPr>
+              <a:xfrm>
+                <a:off x="7231720" y="3847264"/>
+                <a:ext cx="1266214" cy="400110"/>
+              </a:xfrm>
+              <a:prstGeom prst="rect">
+                <a:avLst/>
+              </a:prstGeom>
+              <a:blipFill>
+                <a:blip r:embed="rId9"/>
+                <a:stretch>
+                  <a:fillRect/>
+                </a:stretch>
+              </a:blipFill>
+            </p:spPr>
+            <p:txBody>
+              <a:bodyPr/>
+              <a:lstStyle/>
+              <a:p>
+                <a:r>
+                  <a:rPr lang="sv-SE">
+                    <a:noFill/>
+                  </a:rPr>
+                  <a:t> </a:t>
+                </a:r>
+              </a:p>
+            </p:txBody>
+          </p:sp>
+        </mc:Fallback>
+      </mc:AlternateContent>
+      <mc:AlternateContent xmlns:mc="http://schemas.openxmlformats.org/markup-compatibility/2006">
+        <mc:Choice xmlns:a14="http://schemas.microsoft.com/office/drawing/2010/main" Requires="a14">
+          <p:sp>
+            <p:nvSpPr>
+              <p:cNvPr id="36" name="TextBox 35"/>
+              <p:cNvSpPr txBox="1"/>
+              <p:nvPr/>
+            </p:nvSpPr>
+            <p:spPr>
+              <a:xfrm>
+                <a:off x="6894390" y="4647334"/>
+                <a:ext cx="1266214" cy="400110"/>
+              </a:xfrm>
+              <a:prstGeom prst="rect">
+                <a:avLst/>
+              </a:prstGeom>
+              <a:noFill/>
+            </p:spPr>
+            <p:txBody>
+              <a:bodyPr wrap="square" rtlCol="0">
+                <a:spAutoFit/>
+              </a:bodyPr>
+              <a:lstStyle/>
+              <a:p>
+                <a:pPr/>
+                <a14:m>
+                  <m:oMathPara xmlns:m="http://schemas.openxmlformats.org/officeDocument/2006/math">
+                    <m:oMathParaPr>
+                      <m:jc m:val="centerGroup"/>
+                    </m:oMathParaPr>
+                    <m:oMath xmlns:m="http://schemas.openxmlformats.org/officeDocument/2006/math">
+                      <m:sSub>
+                        <m:sSubPr>
+                          <m:ctrlPr>
+                            <a:rPr lang="en-US" sz="2000" i="1" smtClean="0">
+                              <a:latin typeface="Cambria Math" panose="02040503050406030204" pitchFamily="18" charset="0"/>
+                            </a:rPr>
+                          </m:ctrlPr>
+                        </m:sSubPr>
+                        <m:e>
+                          <m:r>
+                            <a:rPr lang="en-US" sz="2000" b="0" i="1" smtClean="0">
+                              <a:latin typeface="Cambria Math" panose="02040503050406030204" pitchFamily="18" charset="0"/>
+                            </a:rPr>
+                            <m:t>𝐷</m:t>
+                          </m:r>
+                        </m:e>
+                        <m:sub>
+                          <m:r>
+                            <a:rPr lang="en-US" sz="2000" b="0" i="1" smtClean="0">
+                              <a:latin typeface="Cambria Math" panose="02040503050406030204" pitchFamily="18" charset="0"/>
+                            </a:rPr>
+                            <m:t>𝐵</m:t>
+                          </m:r>
+                        </m:sub>
+                      </m:sSub>
+                      <m:sSub>
+                        <m:sSubPr>
+                          <m:ctrlPr>
+                            <a:rPr lang="en-US" sz="2000" i="1" smtClean="0">
+                              <a:latin typeface="Cambria Math" panose="02040503050406030204" pitchFamily="18" charset="0"/>
+                            </a:rPr>
+                          </m:ctrlPr>
+                        </m:sSubPr>
+                        <m:e>
+                          <m:r>
+                            <a:rPr lang="en-US" sz="2000" b="0" i="1" smtClean="0">
+                              <a:latin typeface="Cambria Math" panose="02040503050406030204" pitchFamily="18" charset="0"/>
+                            </a:rPr>
+                            <m:t>𝑇</m:t>
+                          </m:r>
+                        </m:e>
+                        <m:sub>
+                          <m:r>
+                            <a:rPr lang="en-US" sz="2000" b="0" i="1" smtClean="0">
+                              <a:latin typeface="Cambria Math" panose="02040503050406030204" pitchFamily="18" charset="0"/>
+                            </a:rPr>
+                            <m:t>𝑠</m:t>
+                          </m:r>
+                        </m:sub>
+                      </m:sSub>
+                    </m:oMath>
+                  </m:oMathPara>
+                </a14:m>
+                <a:endParaRPr lang="sv-SE" dirty="0"/>
+              </a:p>
+            </p:txBody>
+          </p:sp>
+        </mc:Choice>
+        <mc:Fallback>
+          <p:sp>
+            <p:nvSpPr>
+              <p:cNvPr id="36" name="TextBox 35"/>
+              <p:cNvSpPr txBox="1">
+                <a:spLocks noRot="1" noChangeAspect="1" noMove="1" noResize="1" noEditPoints="1" noAdjustHandles="1" noChangeArrowheads="1" noChangeShapeType="1" noTextEdit="1"/>
+              </p:cNvSpPr>
+              <p:nvPr/>
+            </p:nvSpPr>
+            <p:spPr>
+              <a:xfrm>
+                <a:off x="6894390" y="4647334"/>
+                <a:ext cx="1266214" cy="400110"/>
+              </a:xfrm>
+              <a:prstGeom prst="rect">
+                <a:avLst/>
+              </a:prstGeom>
+              <a:blipFill>
+                <a:blip r:embed="rId10"/>
+                <a:stretch>
+                  <a:fillRect/>
+                </a:stretch>
+              </a:blipFill>
+            </p:spPr>
+            <p:txBody>
+              <a:bodyPr/>
+              <a:lstStyle/>
+              <a:p>
+                <a:r>
+                  <a:rPr lang="sv-SE">
+                    <a:noFill/>
+                  </a:rPr>
+                  <a:t> </a:t>
+                </a:r>
+              </a:p>
+            </p:txBody>
+          </p:sp>
+        </mc:Fallback>
+      </mc:AlternateContent>
+      <p:cxnSp>
+        <p:nvCxnSpPr>
+          <p:cNvPr id="37" name="Straight Arrow Connector 36"/>
+          <p:cNvCxnSpPr/>
+          <p:nvPr/>
+        </p:nvCxnSpPr>
+        <p:spPr>
+          <a:xfrm flipH="1">
+            <a:off x="5985025" y="5009462"/>
+            <a:ext cx="1160766" cy="1"/>
+          </a:xfrm>
+          <a:prstGeom prst="straightConnector1">
+            <a:avLst/>
+          </a:prstGeom>
+          <a:ln w="38100">
+            <a:headEnd type="diamond"/>
+            <a:tailEnd type="triangle"/>
+          </a:ln>
+        </p:spPr>
+        <p:style>
+          <a:lnRef idx="3">
+            <a:schemeClr val="dk1"/>
+          </a:lnRef>
+          <a:fillRef idx="0">
+            <a:schemeClr val="dk1"/>
+          </a:fillRef>
+          <a:effectRef idx="2">
+            <a:schemeClr val="dk1"/>
+          </a:effectRef>
+          <a:fontRef idx="minor">
+            <a:schemeClr val="tx1"/>
+          </a:fontRef>
+        </p:style>
+      </p:cxnSp>
+      <p:cxnSp>
+        <p:nvCxnSpPr>
+          <p:cNvPr id="38" name="Straight Arrow Connector 37"/>
+          <p:cNvCxnSpPr/>
+          <p:nvPr/>
+        </p:nvCxnSpPr>
+        <p:spPr>
+          <a:xfrm>
+            <a:off x="7909202" y="5009462"/>
+            <a:ext cx="1708982" cy="3470"/>
+          </a:xfrm>
+          <a:prstGeom prst="straightConnector1">
+            <a:avLst/>
+          </a:prstGeom>
+          <a:ln w="38100">
+            <a:headEnd type="diamond"/>
+            <a:tailEnd type="triangle"/>
+          </a:ln>
+        </p:spPr>
+        <p:style>
+          <a:lnRef idx="3">
+            <a:schemeClr val="dk1"/>
+          </a:lnRef>
+          <a:fillRef idx="0">
+            <a:schemeClr val="dk1"/>
+          </a:fillRef>
+          <a:effectRef idx="2">
+            <a:schemeClr val="dk1"/>
+          </a:effectRef>
+          <a:fontRef idx="minor">
+            <a:schemeClr val="tx1"/>
+          </a:fontRef>
+        </p:style>
+      </p:cxnSp>
+      <mc:AlternateContent xmlns:mc="http://schemas.openxmlformats.org/markup-compatibility/2006">
+        <mc:Choice xmlns:a14="http://schemas.microsoft.com/office/drawing/2010/main" Requires="a14">
+          <p:sp>
+            <p:nvSpPr>
+              <p:cNvPr id="42" name="TextBox 41"/>
+              <p:cNvSpPr txBox="1"/>
+              <p:nvPr/>
+            </p:nvSpPr>
+            <p:spPr>
+              <a:xfrm>
+                <a:off x="8112489" y="5543065"/>
+                <a:ext cx="1266214" cy="400110"/>
+              </a:xfrm>
+              <a:prstGeom prst="rect">
+                <a:avLst/>
+              </a:prstGeom>
+              <a:noFill/>
+            </p:spPr>
+            <p:txBody>
+              <a:bodyPr wrap="square" rtlCol="0">
+                <a:spAutoFit/>
+              </a:bodyPr>
+              <a:lstStyle/>
+              <a:p>
+                <a:pPr/>
+                <a14:m>
+                  <m:oMathPara xmlns:m="http://schemas.openxmlformats.org/officeDocument/2006/math">
+                    <m:oMathParaPr>
+                      <m:jc m:val="centerGroup"/>
+                    </m:oMathParaPr>
+                    <m:oMath xmlns:m="http://schemas.openxmlformats.org/officeDocument/2006/math">
+                      <m:sSub>
+                        <m:sSubPr>
+                          <m:ctrlPr>
+                            <a:rPr lang="en-US" sz="2000" i="1" smtClean="0">
+                              <a:latin typeface="Cambria Math" panose="02040503050406030204" pitchFamily="18" charset="0"/>
+                            </a:rPr>
+                          </m:ctrlPr>
+                        </m:sSubPr>
+                        <m:e>
+                          <m:r>
+                            <a:rPr lang="en-US" sz="2000" b="0" i="1" smtClean="0">
+                              <a:latin typeface="Cambria Math" panose="02040503050406030204" pitchFamily="18" charset="0"/>
+                            </a:rPr>
+                            <m:t>𝐷</m:t>
+                          </m:r>
+                        </m:e>
+                        <m:sub>
+                          <m:r>
+                            <a:rPr lang="en-US" sz="2000" b="0" i="1" smtClean="0">
+                              <a:latin typeface="Cambria Math" panose="02040503050406030204" pitchFamily="18" charset="0"/>
+                            </a:rPr>
+                            <m:t>𝐶</m:t>
+                          </m:r>
+                        </m:sub>
+                      </m:sSub>
+                      <m:sSub>
+                        <m:sSubPr>
+                          <m:ctrlPr>
+                            <a:rPr lang="en-US" sz="2000" i="1" smtClean="0">
+                              <a:latin typeface="Cambria Math" panose="02040503050406030204" pitchFamily="18" charset="0"/>
+                            </a:rPr>
+                          </m:ctrlPr>
+                        </m:sSubPr>
+                        <m:e>
+                          <m:r>
+                            <a:rPr lang="en-US" sz="2000" b="0" i="1" smtClean="0">
+                              <a:latin typeface="Cambria Math" panose="02040503050406030204" pitchFamily="18" charset="0"/>
+                            </a:rPr>
+                            <m:t>𝑇</m:t>
+                          </m:r>
+                        </m:e>
+                        <m:sub>
+                          <m:r>
+                            <a:rPr lang="en-US" sz="2000" b="0" i="1" smtClean="0">
+                              <a:latin typeface="Cambria Math" panose="02040503050406030204" pitchFamily="18" charset="0"/>
+                            </a:rPr>
+                            <m:t>𝑠</m:t>
+                          </m:r>
+                        </m:sub>
+                      </m:sSub>
+                    </m:oMath>
+                  </m:oMathPara>
+                </a14:m>
+                <a:endParaRPr lang="sv-SE" dirty="0"/>
+              </a:p>
+            </p:txBody>
+          </p:sp>
+        </mc:Choice>
+        <mc:Fallback>
+          <p:sp>
+            <p:nvSpPr>
+              <p:cNvPr id="42" name="TextBox 41"/>
+              <p:cNvSpPr txBox="1">
+                <a:spLocks noRot="1" noChangeAspect="1" noMove="1" noResize="1" noEditPoints="1" noAdjustHandles="1" noChangeArrowheads="1" noChangeShapeType="1" noTextEdit="1"/>
+              </p:cNvSpPr>
+              <p:nvPr/>
+            </p:nvSpPr>
+            <p:spPr>
+              <a:xfrm>
+                <a:off x="8112489" y="5543065"/>
+                <a:ext cx="1266214" cy="400110"/>
+              </a:xfrm>
+              <a:prstGeom prst="rect">
+                <a:avLst/>
+              </a:prstGeom>
+              <a:blipFill>
+                <a:blip r:embed="rId11"/>
+                <a:stretch>
+                  <a:fillRect/>
+                </a:stretch>
+              </a:blipFill>
+            </p:spPr>
+            <p:txBody>
+              <a:bodyPr/>
+              <a:lstStyle/>
+              <a:p>
+                <a:r>
+                  <a:rPr lang="sv-SE">
+                    <a:noFill/>
+                  </a:rPr>
+                  <a:t> </a:t>
+                </a:r>
+              </a:p>
+            </p:txBody>
+          </p:sp>
+        </mc:Fallback>
+      </mc:AlternateContent>
+      <p:cxnSp>
+        <p:nvCxnSpPr>
+          <p:cNvPr id="46" name="Straight Arrow Connector 45"/>
+          <p:cNvCxnSpPr/>
+          <p:nvPr/>
+        </p:nvCxnSpPr>
+        <p:spPr>
+          <a:xfrm>
+            <a:off x="8357071" y="6032194"/>
+            <a:ext cx="281726" cy="2942"/>
+          </a:xfrm>
+          <a:prstGeom prst="straightConnector1">
+            <a:avLst/>
+          </a:prstGeom>
+          <a:ln w="38100">
+            <a:headEnd type="diamond"/>
+            <a:tailEnd type="triangle"/>
+          </a:ln>
+        </p:spPr>
+        <p:style>
+          <a:lnRef idx="3">
+            <a:schemeClr val="dk1"/>
+          </a:lnRef>
+          <a:fillRef idx="0">
+            <a:schemeClr val="dk1"/>
+          </a:fillRef>
+          <a:effectRef idx="2">
+            <a:schemeClr val="dk1"/>
+          </a:effectRef>
+          <a:fontRef idx="minor">
+            <a:schemeClr val="tx1"/>
+          </a:fontRef>
+        </p:style>
+      </p:cxnSp>
+      <p:cxnSp>
+        <p:nvCxnSpPr>
+          <p:cNvPr id="47" name="Straight Arrow Connector 46"/>
+          <p:cNvCxnSpPr/>
+          <p:nvPr/>
+        </p:nvCxnSpPr>
+        <p:spPr>
+          <a:xfrm flipH="1" flipV="1">
+            <a:off x="8763694" y="6032195"/>
+            <a:ext cx="263940" cy="9437"/>
+          </a:xfrm>
+          <a:prstGeom prst="straightConnector1">
+            <a:avLst/>
+          </a:prstGeom>
+          <a:ln w="38100">
+            <a:headEnd type="diamond"/>
+            <a:tailEnd type="triangle"/>
+          </a:ln>
+        </p:spPr>
+        <p:style>
+          <a:lnRef idx="3">
+            <a:schemeClr val="dk1"/>
+          </a:lnRef>
+          <a:fillRef idx="0">
+            <a:schemeClr val="dk1"/>
+          </a:fillRef>
+          <a:effectRef idx="2">
+            <a:schemeClr val="dk1"/>
+          </a:effectRef>
+          <a:fontRef idx="minor">
+            <a:schemeClr val="tx1"/>
+          </a:fontRef>
+        </p:style>
+      </p:cxnSp>
+      <p:pic>
+        <p:nvPicPr>
+          <p:cNvPr id="17" name="Picture 16"/>
+          <p:cNvPicPr>
+            <a:picLocks noChangeAspect="1"/>
+          </p:cNvPicPr>
+          <p:nvPr/>
+        </p:nvPicPr>
+        <p:blipFill>
+          <a:blip r:embed="rId12"/>
+          <a:stretch>
+            <a:fillRect/>
+          </a:stretch>
+        </p:blipFill>
+        <p:spPr>
+          <a:xfrm>
+            <a:off x="-101600" y="-679365"/>
+            <a:ext cx="5334000" cy="4000500"/>
+          </a:xfrm>
+          <a:prstGeom prst="rect">
+            <a:avLst/>
+          </a:prstGeom>
+        </p:spPr>
+      </p:pic>
+      <p:pic>
+        <p:nvPicPr>
+          <p:cNvPr id="18" name="Picture 17"/>
+          <p:cNvPicPr>
+            <a:picLocks noChangeAspect="1"/>
+          </p:cNvPicPr>
+          <p:nvPr/>
+        </p:nvPicPr>
+        <p:blipFill>
+          <a:blip r:embed="rId13"/>
+          <a:stretch>
+            <a:fillRect/>
+          </a:stretch>
+        </p:blipFill>
+        <p:spPr>
+          <a:xfrm>
+            <a:off x="-115290" y="7634217"/>
+            <a:ext cx="5334000" cy="4000500"/>
+          </a:xfrm>
+          <a:prstGeom prst="rect">
+            <a:avLst/>
+          </a:prstGeom>
+        </p:spPr>
+      </p:pic>
+      <p:sp>
+        <p:nvSpPr>
+          <p:cNvPr id="60" name="TextBox 59"/>
+          <p:cNvSpPr txBox="1"/>
+          <p:nvPr/>
+        </p:nvSpPr>
+        <p:spPr>
+          <a:xfrm>
+            <a:off x="2615689" y="11605851"/>
+            <a:ext cx="545691" cy="461665"/>
+          </a:xfrm>
+          <a:prstGeom prst="rect">
+            <a:avLst/>
+          </a:prstGeom>
+          <a:noFill/>
+        </p:spPr>
+        <p:txBody>
+          <a:bodyPr wrap="square" rtlCol="0">
+            <a:spAutoFit/>
+          </a:bodyPr>
+          <a:lstStyle/>
+          <a:p>
+            <a:r>
+              <a:rPr lang="en-US" sz="2400" dirty="0" smtClean="0"/>
+              <a:t>(e)</a:t>
+            </a:r>
+            <a:endParaRPr lang="sv-SE" sz="2400" dirty="0"/>
+          </a:p>
+        </p:txBody>
+      </p:sp>
+      <p:cxnSp>
+        <p:nvCxnSpPr>
+          <p:cNvPr id="68" name="Straight Arrow Connector 67"/>
+          <p:cNvCxnSpPr/>
+          <p:nvPr/>
+        </p:nvCxnSpPr>
+        <p:spPr>
+          <a:xfrm>
+            <a:off x="7782450" y="-302268"/>
+            <a:ext cx="0" cy="2408283"/>
+          </a:xfrm>
+          <a:prstGeom prst="straightConnector1">
+            <a:avLst/>
+          </a:prstGeom>
+          <a:ln>
+            <a:solidFill>
+              <a:srgbClr val="313BFF"/>
+            </a:solidFill>
+            <a:prstDash val="sysDot"/>
+            <a:tailEnd type="triangle"/>
+          </a:ln>
+        </p:spPr>
+        <p:style>
+          <a:lnRef idx="1">
+            <a:schemeClr val="accent1"/>
+          </a:lnRef>
+          <a:fillRef idx="0">
+            <a:schemeClr val="accent1"/>
+          </a:fillRef>
+          <a:effectRef idx="0">
+            <a:schemeClr val="accent1"/>
+          </a:effectRef>
+          <a:fontRef idx="minor">
+            <a:schemeClr val="tx1"/>
+          </a:fontRef>
+        </p:style>
+      </p:cxnSp>
+      <p:cxnSp>
+        <p:nvCxnSpPr>
+          <p:cNvPr id="95" name="Straight Arrow Connector 94"/>
+          <p:cNvCxnSpPr/>
+          <p:nvPr/>
+        </p:nvCxnSpPr>
+        <p:spPr>
+          <a:xfrm flipH="1">
+            <a:off x="7263277" y="-302268"/>
+            <a:ext cx="9586" cy="2551909"/>
+          </a:xfrm>
+          <a:prstGeom prst="straightConnector1">
+            <a:avLst/>
+          </a:prstGeom>
+          <a:ln>
+            <a:solidFill>
+              <a:srgbClr val="FF00FF"/>
+            </a:solidFill>
+            <a:prstDash val="sysDot"/>
+            <a:tailEnd type="triangle"/>
+          </a:ln>
+        </p:spPr>
+        <p:style>
+          <a:lnRef idx="1">
+            <a:schemeClr val="accent1"/>
+          </a:lnRef>
+          <a:fillRef idx="0">
+            <a:schemeClr val="accent1"/>
+          </a:fillRef>
+          <a:effectRef idx="0">
+            <a:schemeClr val="accent1"/>
+          </a:effectRef>
+          <a:fontRef idx="minor">
+            <a:schemeClr val="tx1"/>
+          </a:fontRef>
+        </p:style>
+      </p:cxnSp>
+      <p:cxnSp>
+        <p:nvCxnSpPr>
+          <p:cNvPr id="96" name="Straight Arrow Connector 95"/>
+          <p:cNvCxnSpPr/>
+          <p:nvPr/>
+        </p:nvCxnSpPr>
+        <p:spPr>
+          <a:xfrm>
+            <a:off x="6710888" y="-302268"/>
+            <a:ext cx="8954" cy="2681922"/>
+          </a:xfrm>
+          <a:prstGeom prst="straightConnector1">
+            <a:avLst/>
+          </a:prstGeom>
+          <a:ln>
+            <a:solidFill>
+              <a:srgbClr val="3AE657"/>
+            </a:solidFill>
+            <a:prstDash val="sysDot"/>
+            <a:tailEnd type="triangle"/>
+          </a:ln>
+        </p:spPr>
+        <p:style>
+          <a:lnRef idx="1">
+            <a:schemeClr val="accent1"/>
+          </a:lnRef>
+          <a:fillRef idx="0">
+            <a:schemeClr val="accent1"/>
+          </a:fillRef>
+          <a:effectRef idx="0">
+            <a:schemeClr val="accent1"/>
+          </a:effectRef>
+          <a:fontRef idx="minor">
+            <a:schemeClr val="tx1"/>
+          </a:fontRef>
+        </p:style>
+      </p:cxnSp>
+      <mc:AlternateContent xmlns:mc="http://schemas.openxmlformats.org/markup-compatibility/2006">
+        <mc:Choice xmlns:a14="http://schemas.microsoft.com/office/drawing/2010/main" Requires="a14">
+          <p:sp>
+            <p:nvSpPr>
+              <p:cNvPr id="97" name="TextBox 96"/>
+              <p:cNvSpPr txBox="1"/>
+              <p:nvPr/>
+            </p:nvSpPr>
+            <p:spPr>
+              <a:xfrm>
+                <a:off x="6965169" y="2169662"/>
+                <a:ext cx="533928" cy="400110"/>
+              </a:xfrm>
+              <a:prstGeom prst="rect">
+                <a:avLst/>
+              </a:prstGeom>
+              <a:noFill/>
+            </p:spPr>
+            <p:txBody>
+              <a:bodyPr wrap="square" rtlCol="0">
+                <a:spAutoFit/>
+              </a:bodyPr>
+              <a:lstStyle/>
+              <a:p>
+                <a:pPr/>
+                <a14:m>
+                  <m:oMathPara xmlns:m="http://schemas.openxmlformats.org/officeDocument/2006/math">
+                    <m:oMathParaPr>
+                      <m:jc m:val="centerGroup"/>
+                    </m:oMathParaPr>
+                    <m:oMath xmlns:m="http://schemas.openxmlformats.org/officeDocument/2006/math">
+                      <m:sSub>
+                        <m:sSubPr>
+                          <m:ctrlPr>
+                            <a:rPr lang="en-US" sz="2000" b="0" i="1" smtClean="0">
+                              <a:solidFill>
+                                <a:srgbClr val="FF00FF"/>
+                              </a:solidFill>
+                              <a:latin typeface="Cambria Math" panose="02040503050406030204" pitchFamily="18" charset="0"/>
+                            </a:rPr>
+                          </m:ctrlPr>
+                        </m:sSubPr>
+                        <m:e>
+                          <m:r>
+                            <a:rPr lang="en-US" sz="2000" b="0" i="1" smtClean="0">
+                              <a:solidFill>
+                                <a:srgbClr val="FF00FF"/>
+                              </a:solidFill>
+                              <a:latin typeface="Cambria Math" panose="02040503050406030204" pitchFamily="18" charset="0"/>
+                            </a:rPr>
+                            <m:t>−</m:t>
+                          </m:r>
+                          <m:r>
+                            <a:rPr lang="en-US" sz="2000" i="1" smtClean="0">
+                              <a:solidFill>
+                                <a:srgbClr val="FF00FF"/>
+                              </a:solidFill>
+                              <a:latin typeface="Cambria Math" panose="02040503050406030204" pitchFamily="18" charset="0"/>
+                            </a:rPr>
+                            <m:t>𝑡</m:t>
+                          </m:r>
+                        </m:e>
+                        <m:sub>
+                          <m:r>
+                            <a:rPr lang="en-US" sz="2000" b="0" i="1" smtClean="0">
+                              <a:solidFill>
+                                <a:srgbClr val="FF00FF"/>
+                              </a:solidFill>
+                              <a:latin typeface="Cambria Math" panose="02040503050406030204" pitchFamily="18" charset="0"/>
+                            </a:rPr>
+                            <m:t>𝐵</m:t>
+                          </m:r>
+                        </m:sub>
+                      </m:sSub>
+                    </m:oMath>
+                  </m:oMathPara>
+                </a14:m>
+                <a:endParaRPr lang="sv-SE" dirty="0"/>
+              </a:p>
+            </p:txBody>
+          </p:sp>
+        </mc:Choice>
+        <mc:Fallback>
+          <p:sp>
+            <p:nvSpPr>
+              <p:cNvPr id="97" name="TextBox 96"/>
+              <p:cNvSpPr txBox="1">
+                <a:spLocks noRot="1" noChangeAspect="1" noMove="1" noResize="1" noEditPoints="1" noAdjustHandles="1" noChangeArrowheads="1" noChangeShapeType="1" noTextEdit="1"/>
+              </p:cNvSpPr>
+              <p:nvPr/>
+            </p:nvSpPr>
+            <p:spPr>
+              <a:xfrm>
+                <a:off x="6965169" y="2169662"/>
+                <a:ext cx="533928" cy="400110"/>
+              </a:xfrm>
+              <a:prstGeom prst="rect">
+                <a:avLst/>
+              </a:prstGeom>
+              <a:blipFill>
+                <a:blip r:embed="rId14"/>
+                <a:stretch>
+                  <a:fillRect r="-6897"/>
+                </a:stretch>
+              </a:blipFill>
+            </p:spPr>
+            <p:txBody>
+              <a:bodyPr/>
+              <a:lstStyle/>
+              <a:p>
+                <a:r>
+                  <a:rPr lang="sv-SE">
+                    <a:noFill/>
+                  </a:rPr>
+                  <a:t> </a:t>
+                </a:r>
+              </a:p>
+            </p:txBody>
+          </p:sp>
+        </mc:Fallback>
+      </mc:AlternateContent>
+      <mc:AlternateContent xmlns:mc="http://schemas.openxmlformats.org/markup-compatibility/2006">
+        <mc:Choice xmlns:a14="http://schemas.microsoft.com/office/drawing/2010/main" Requires="a14">
+          <p:sp>
+            <p:nvSpPr>
+              <p:cNvPr id="99" name="TextBox 98"/>
+              <p:cNvSpPr txBox="1"/>
+              <p:nvPr/>
+            </p:nvSpPr>
+            <p:spPr>
+              <a:xfrm>
+                <a:off x="6431241" y="2265438"/>
+                <a:ext cx="533928" cy="400110"/>
+              </a:xfrm>
+              <a:prstGeom prst="rect">
+                <a:avLst/>
+              </a:prstGeom>
+              <a:noFill/>
+            </p:spPr>
+            <p:txBody>
+              <a:bodyPr wrap="square" rtlCol="0">
+                <a:spAutoFit/>
+              </a:bodyPr>
+              <a:lstStyle/>
+              <a:p>
+                <a:pPr/>
+                <a14:m>
+                  <m:oMathPara xmlns:m="http://schemas.openxmlformats.org/officeDocument/2006/math">
+                    <m:oMathParaPr>
+                      <m:jc m:val="centerGroup"/>
+                    </m:oMathParaPr>
+                    <m:oMath xmlns:m="http://schemas.openxmlformats.org/officeDocument/2006/math">
+                      <m:sSub>
+                        <m:sSubPr>
+                          <m:ctrlPr>
+                            <a:rPr lang="en-US" sz="2000" b="0" i="1" smtClean="0">
+                              <a:solidFill>
+                                <a:srgbClr val="3AE657"/>
+                              </a:solidFill>
+                              <a:latin typeface="Cambria Math" panose="02040503050406030204" pitchFamily="18" charset="0"/>
+                            </a:rPr>
+                          </m:ctrlPr>
+                        </m:sSubPr>
+                        <m:e>
+                          <m:r>
+                            <a:rPr lang="en-US" sz="2000" b="0" i="1" smtClean="0">
+                              <a:solidFill>
+                                <a:srgbClr val="3AE657"/>
+                              </a:solidFill>
+                              <a:latin typeface="Cambria Math" panose="02040503050406030204" pitchFamily="18" charset="0"/>
+                            </a:rPr>
+                            <m:t>−</m:t>
+                          </m:r>
+                          <m:r>
+                            <a:rPr lang="en-US" sz="2000" i="1" smtClean="0">
+                              <a:solidFill>
+                                <a:srgbClr val="3AE657"/>
+                              </a:solidFill>
+                              <a:latin typeface="Cambria Math" panose="02040503050406030204" pitchFamily="18" charset="0"/>
+                            </a:rPr>
+                            <m:t>𝑡</m:t>
+                          </m:r>
+                        </m:e>
+                        <m:sub>
+                          <m:r>
+                            <a:rPr lang="en-US" sz="2000" b="0" i="1" smtClean="0">
+                              <a:solidFill>
+                                <a:srgbClr val="3AE657"/>
+                              </a:solidFill>
+                              <a:latin typeface="Cambria Math" panose="02040503050406030204" pitchFamily="18" charset="0"/>
+                            </a:rPr>
+                            <m:t>𝐶</m:t>
+                          </m:r>
+                        </m:sub>
+                      </m:sSub>
+                    </m:oMath>
+                  </m:oMathPara>
+                </a14:m>
+                <a:endParaRPr lang="sv-SE" dirty="0"/>
+              </a:p>
+            </p:txBody>
+          </p:sp>
+        </mc:Choice>
+        <mc:Fallback>
+          <p:sp>
+            <p:nvSpPr>
+              <p:cNvPr id="99" name="TextBox 98"/>
+              <p:cNvSpPr txBox="1">
+                <a:spLocks noRot="1" noChangeAspect="1" noMove="1" noResize="1" noEditPoints="1" noAdjustHandles="1" noChangeArrowheads="1" noChangeShapeType="1" noTextEdit="1"/>
+              </p:cNvSpPr>
+              <p:nvPr/>
+            </p:nvSpPr>
+            <p:spPr>
+              <a:xfrm>
+                <a:off x="6431241" y="2265438"/>
+                <a:ext cx="533928" cy="400110"/>
+              </a:xfrm>
+              <a:prstGeom prst="rect">
+                <a:avLst/>
+              </a:prstGeom>
+              <a:blipFill>
+                <a:blip r:embed="rId15"/>
+                <a:stretch>
+                  <a:fillRect r="-3409" b="-1538"/>
+                </a:stretch>
+              </a:blipFill>
+            </p:spPr>
+            <p:txBody>
+              <a:bodyPr/>
+              <a:lstStyle/>
+              <a:p>
+                <a:r>
+                  <a:rPr lang="sv-SE">
+                    <a:noFill/>
+                  </a:rPr>
+                  <a:t> </a:t>
+                </a:r>
+              </a:p>
+            </p:txBody>
+          </p:sp>
+        </mc:Fallback>
+      </mc:AlternateContent>
+      <mc:AlternateContent xmlns:mc="http://schemas.openxmlformats.org/markup-compatibility/2006">
+        <mc:Choice xmlns:a14="http://schemas.microsoft.com/office/drawing/2010/main" Requires="a14">
+          <p:sp>
+            <p:nvSpPr>
+              <p:cNvPr id="100" name="TextBox 99"/>
+              <p:cNvSpPr txBox="1"/>
+              <p:nvPr/>
+            </p:nvSpPr>
+            <p:spPr>
+              <a:xfrm>
+                <a:off x="7393210" y="1979544"/>
+                <a:ext cx="932676" cy="400110"/>
+              </a:xfrm>
+              <a:prstGeom prst="rect">
+                <a:avLst/>
+              </a:prstGeom>
+              <a:noFill/>
+            </p:spPr>
+            <p:txBody>
+              <a:bodyPr wrap="square" rtlCol="0">
+                <a:spAutoFit/>
+              </a:bodyPr>
+              <a:lstStyle/>
+              <a:p>
+                <a:pPr/>
+                <a14:m>
+                  <m:oMathPara xmlns:m="http://schemas.openxmlformats.org/officeDocument/2006/math">
+                    <m:oMathParaPr>
+                      <m:jc m:val="centerGroup"/>
+                    </m:oMathParaPr>
+                    <m:oMath xmlns:m="http://schemas.openxmlformats.org/officeDocument/2006/math">
+                      <m:sSub>
+                        <m:sSubPr>
+                          <m:ctrlPr>
+                            <a:rPr lang="en-US" sz="2000" b="0" i="1" smtClean="0">
+                              <a:solidFill>
+                                <a:srgbClr val="313BFF"/>
+                              </a:solidFill>
+                              <a:latin typeface="Cambria Math" panose="02040503050406030204" pitchFamily="18" charset="0"/>
+                            </a:rPr>
+                          </m:ctrlPr>
+                        </m:sSubPr>
+                        <m:e>
+                          <m:r>
+                            <a:rPr lang="en-US" sz="2000" i="1" smtClean="0">
+                              <a:solidFill>
+                                <a:srgbClr val="313BFF"/>
+                              </a:solidFill>
+                              <a:latin typeface="Cambria Math" panose="02040503050406030204" pitchFamily="18" charset="0"/>
+                            </a:rPr>
+                            <m:t>𝑡</m:t>
+                          </m:r>
+                        </m:e>
+                        <m:sub>
+                          <m:r>
+                            <a:rPr lang="en-US" sz="2000" b="0" i="1" smtClean="0">
+                              <a:solidFill>
+                                <a:srgbClr val="313BFF"/>
+                              </a:solidFill>
+                              <a:latin typeface="Cambria Math" panose="02040503050406030204" pitchFamily="18" charset="0"/>
+                            </a:rPr>
+                            <m:t>𝐴</m:t>
+                          </m:r>
+                        </m:sub>
+                      </m:sSub>
+                      <m:r>
+                        <a:rPr lang="en-US" sz="2000" b="0" i="1" smtClean="0">
+                          <a:solidFill>
+                            <a:srgbClr val="313BFF"/>
+                          </a:solidFill>
+                          <a:latin typeface="Cambria Math" panose="02040503050406030204" pitchFamily="18" charset="0"/>
+                        </a:rPr>
+                        <m:t>=0</m:t>
+                      </m:r>
+                    </m:oMath>
+                  </m:oMathPara>
+                </a14:m>
+                <a:endParaRPr lang="sv-SE" dirty="0"/>
+              </a:p>
+            </p:txBody>
+          </p:sp>
+        </mc:Choice>
+        <mc:Fallback>
+          <p:sp>
+            <p:nvSpPr>
+              <p:cNvPr id="100" name="TextBox 99"/>
+              <p:cNvSpPr txBox="1">
+                <a:spLocks noRot="1" noChangeAspect="1" noMove="1" noResize="1" noEditPoints="1" noAdjustHandles="1" noChangeArrowheads="1" noChangeShapeType="1" noTextEdit="1"/>
+              </p:cNvSpPr>
+              <p:nvPr/>
+            </p:nvSpPr>
+            <p:spPr>
+              <a:xfrm>
+                <a:off x="7393210" y="1979544"/>
+                <a:ext cx="932676" cy="400110"/>
+              </a:xfrm>
+              <a:prstGeom prst="rect">
+                <a:avLst/>
+              </a:prstGeom>
+              <a:blipFill>
+                <a:blip r:embed="rId16"/>
+                <a:stretch>
+                  <a:fillRect b="-1538"/>
+                </a:stretch>
+              </a:blipFill>
+            </p:spPr>
+            <p:txBody>
+              <a:bodyPr/>
+              <a:lstStyle/>
+              <a:p>
+                <a:r>
+                  <a:rPr lang="sv-SE">
+                    <a:noFill/>
+                  </a:rPr>
+                  <a:t> </a:t>
+                </a:r>
+              </a:p>
+            </p:txBody>
+          </p:sp>
+        </mc:Fallback>
+      </mc:AlternateContent>
+    </p:spTree>
+    <p:extLst>
+      <p:ext uri="{BB962C8B-B14F-4D97-AF65-F5344CB8AC3E}">
+        <p14:creationId xmlns:p14="http://schemas.microsoft.com/office/powerpoint/2010/main" val="234317864"/>
+      </p:ext>
+    </p:extLst>
+  </p:cSld>
+  <p:clrMapOvr>
+    <a:masterClrMapping/>
+  </p:clrMapOvr>
+</p:sld>
+</file>
+
+<file path=ppt/slides/slide8.xml><?xml version="1.0" encoding="utf-8"?>
+<p:sld xmlns:a="http://schemas.openxmlformats.org/drawingml/2006/main" xmlns:r="http://schemas.openxmlformats.org/officeDocument/2006/relationships" xmlns:p="http://schemas.openxmlformats.org/presentationml/2006/main">
+  <p:cSld>
+    <p:spTree>
+      <p:nvGrpSpPr>
+        <p:cNvPr id="1" name=""/>
+        <p:cNvGrpSpPr/>
+        <p:nvPr/>
+      </p:nvGrpSpPr>
+      <p:grpSpPr>
+        <a:xfrm>
+          <a:off x="0" y="0"/>
+          <a:ext cx="0" cy="0"/>
+          <a:chOff x="0" y="0"/>
+          <a:chExt cx="0" cy="0"/>
+        </a:xfrm>
+      </p:grpSpPr>
       <p:sp>
         <p:nvSpPr>
           <p:cNvPr id="14" name="TextBox 13"/>
@@ -20464,7 +26581,7 @@
 </p:sld>
 </file>
 
-<file path=ppt/slides/slide8.xml><?xml version="1.0" encoding="utf-8"?>
+<file path=ppt/slides/slide9.xml><?xml version="1.0" encoding="utf-8"?>
 <p:sld xmlns:a="http://schemas.openxmlformats.org/drawingml/2006/main" xmlns:r="http://schemas.openxmlformats.org/officeDocument/2006/relationships" xmlns:p="http://schemas.openxmlformats.org/presentationml/2006/main">
   <p:cSld>
     <p:spTree>
@@ -22036,198 +28153,6 @@
     <p:extLst>
       <p:ext uri="{BB962C8B-B14F-4D97-AF65-F5344CB8AC3E}">
         <p14:creationId xmlns:p14="http://schemas.microsoft.com/office/powerpoint/2010/main" val="10421843"/>
-      </p:ext>
-    </p:extLst>
-  </p:cSld>
-  <p:clrMapOvr>
-    <a:masterClrMapping/>
-  </p:clrMapOvr>
-</p:sld>
-</file>
-
-<file path=ppt/slides/slide9.xml><?xml version="1.0" encoding="utf-8"?>
-<p:sld xmlns:a="http://schemas.openxmlformats.org/drawingml/2006/main" xmlns:r="http://schemas.openxmlformats.org/officeDocument/2006/relationships" xmlns:p="http://schemas.openxmlformats.org/presentationml/2006/main">
-  <p:cSld>
-    <p:spTree>
-      <p:nvGrpSpPr>
-        <p:cNvPr id="1" name=""/>
-        <p:cNvGrpSpPr/>
-        <p:nvPr/>
-      </p:nvGrpSpPr>
-      <p:grpSpPr>
-        <a:xfrm>
-          <a:off x="0" y="0"/>
-          <a:ext cx="0" cy="0"/>
-          <a:chOff x="0" y="0"/>
-          <a:chExt cx="0" cy="0"/>
-        </a:xfrm>
-      </p:grpSpPr>
-      <p:sp>
-        <p:nvSpPr>
-          <p:cNvPr id="53" name="TextBox 52"/>
-          <p:cNvSpPr txBox="1"/>
-          <p:nvPr/>
-        </p:nvSpPr>
-        <p:spPr>
-          <a:xfrm>
-            <a:off x="3102384" y="3412476"/>
-            <a:ext cx="545691" cy="461665"/>
-          </a:xfrm>
-          <a:prstGeom prst="rect">
-            <a:avLst/>
-          </a:prstGeom>
-          <a:noFill/>
-        </p:spPr>
-        <p:txBody>
-          <a:bodyPr wrap="square" rtlCol="0">
-            <a:spAutoFit/>
-          </a:bodyPr>
-          <a:lstStyle/>
-          <a:p>
-            <a:r>
-              <a:rPr lang="en-US" sz="2400" dirty="0" smtClean="0"/>
-              <a:t>(a)</a:t>
-            </a:r>
-            <a:endParaRPr lang="sv-SE" sz="2400" dirty="0"/>
-          </a:p>
-        </p:txBody>
-      </p:sp>
-      <p:sp>
-        <p:nvSpPr>
-          <p:cNvPr id="54" name="TextBox 53"/>
-          <p:cNvSpPr txBox="1"/>
-          <p:nvPr/>
-        </p:nvSpPr>
-        <p:spPr>
-          <a:xfrm>
-            <a:off x="8363627" y="3427593"/>
-            <a:ext cx="545691" cy="461665"/>
-          </a:xfrm>
-          <a:prstGeom prst="rect">
-            <a:avLst/>
-          </a:prstGeom>
-          <a:noFill/>
-        </p:spPr>
-        <p:txBody>
-          <a:bodyPr wrap="square" rtlCol="0">
-            <a:spAutoFit/>
-          </a:bodyPr>
-          <a:lstStyle/>
-          <a:p>
-            <a:r>
-              <a:rPr lang="en-US" sz="2400" dirty="0" smtClean="0"/>
-              <a:t>(b)</a:t>
-            </a:r>
-            <a:endParaRPr lang="sv-SE" sz="2400" dirty="0"/>
-          </a:p>
-        </p:txBody>
-      </p:sp>
-      <p:sp>
-        <p:nvSpPr>
-          <p:cNvPr id="55" name="TextBox 54"/>
-          <p:cNvSpPr txBox="1"/>
-          <p:nvPr/>
-        </p:nvSpPr>
-        <p:spPr>
-          <a:xfrm>
-            <a:off x="6116968" y="7494241"/>
-            <a:ext cx="545691" cy="461665"/>
-          </a:xfrm>
-          <a:prstGeom prst="rect">
-            <a:avLst/>
-          </a:prstGeom>
-          <a:noFill/>
-        </p:spPr>
-        <p:txBody>
-          <a:bodyPr wrap="square" rtlCol="0">
-            <a:spAutoFit/>
-          </a:bodyPr>
-          <a:lstStyle/>
-          <a:p>
-            <a:r>
-              <a:rPr lang="en-US" sz="2400" dirty="0" smtClean="0"/>
-              <a:t>(c)</a:t>
-            </a:r>
-            <a:endParaRPr lang="sv-SE" sz="2400" dirty="0"/>
-          </a:p>
-        </p:txBody>
-      </p:sp>
-      <p:pic>
-        <p:nvPicPr>
-          <p:cNvPr id="7" name="Picture 6"/>
-          <p:cNvPicPr>
-            <a:picLocks noChangeAspect="1"/>
-          </p:cNvPicPr>
-          <p:nvPr/>
-        </p:nvPicPr>
-        <p:blipFill>
-          <a:blip r:embed="rId2"/>
-          <a:stretch>
-            <a:fillRect/>
-          </a:stretch>
-        </p:blipFill>
-        <p:spPr>
-          <a:xfrm>
-            <a:off x="5696627" y="-572907"/>
-            <a:ext cx="5334000" cy="4000500"/>
-          </a:xfrm>
-          <a:prstGeom prst="rect">
-            <a:avLst/>
-          </a:prstGeom>
-        </p:spPr>
-      </p:pic>
-      <p:pic>
-        <p:nvPicPr>
-          <p:cNvPr id="8" name="Picture 7"/>
-          <p:cNvPicPr>
-            <a:picLocks noChangeAspect="1"/>
-          </p:cNvPicPr>
-          <p:nvPr/>
-        </p:nvPicPr>
-        <p:blipFill>
-          <a:blip r:embed="rId3"/>
-          <a:stretch>
-            <a:fillRect/>
-          </a:stretch>
-        </p:blipFill>
-        <p:spPr>
-          <a:xfrm>
-            <a:off x="708229" y="-588024"/>
-            <a:ext cx="5334000" cy="4000500"/>
-          </a:xfrm>
-          <a:prstGeom prst="rect">
-            <a:avLst/>
-          </a:prstGeom>
-        </p:spPr>
-      </p:pic>
-      <p:pic>
-        <p:nvPicPr>
-          <p:cNvPr id="9" name="Picture 8"/>
-          <p:cNvPicPr>
-            <a:picLocks noChangeAspect="1"/>
-          </p:cNvPicPr>
-          <p:nvPr/>
-        </p:nvPicPr>
-        <p:blipFill>
-          <a:blip r:embed="rId4"/>
-          <a:stretch>
-            <a:fillRect/>
-          </a:stretch>
-        </p:blipFill>
-        <p:spPr>
-          <a:xfrm>
-            <a:off x="3449968" y="3643308"/>
-            <a:ext cx="5334000" cy="4000500"/>
-          </a:xfrm>
-          <a:prstGeom prst="rect">
-            <a:avLst/>
-          </a:prstGeom>
-        </p:spPr>
-      </p:pic>
-    </p:spTree>
-    <p:extLst>
-      <p:ext uri="{BB962C8B-B14F-4D97-AF65-F5344CB8AC3E}">
-        <p14:creationId xmlns:p14="http://schemas.microsoft.com/office/powerpoint/2010/main" val="1638039252"/>
       </p:ext>
     </p:extLst>
   </p:cSld>

--- a/Switching Function - Reduced CMV PWM/Access-paper/dvdt.2.pptx
+++ b/Switching Function - Reduced CMV PWM/Access-paper/dvdt.2.pptx
@@ -5,7 +5,7 @@
     <p:sldMasterId id="2147483648" r:id="rId1"/>
   </p:sldMasterIdLst>
   <p:notesMasterIdLst>
-    <p:notesMasterId r:id="rId28"/>
+    <p:notesMasterId r:id="rId30"/>
   </p:notesMasterIdLst>
   <p:sldIdLst>
     <p:sldId id="256" r:id="rId2"/>
@@ -24,16 +24,18 @@
     <p:sldId id="263" r:id="rId15"/>
     <p:sldId id="279" r:id="rId16"/>
     <p:sldId id="284" r:id="rId17"/>
-    <p:sldId id="280" r:id="rId18"/>
-    <p:sldId id="281" r:id="rId19"/>
-    <p:sldId id="264" r:id="rId20"/>
-    <p:sldId id="265" r:id="rId21"/>
-    <p:sldId id="267" r:id="rId22"/>
-    <p:sldId id="269" r:id="rId23"/>
-    <p:sldId id="285" r:id="rId24"/>
-    <p:sldId id="270" r:id="rId25"/>
-    <p:sldId id="271" r:id="rId26"/>
-    <p:sldId id="272" r:id="rId27"/>
+    <p:sldId id="286" r:id="rId18"/>
+    <p:sldId id="280" r:id="rId19"/>
+    <p:sldId id="281" r:id="rId20"/>
+    <p:sldId id="287" r:id="rId21"/>
+    <p:sldId id="264" r:id="rId22"/>
+    <p:sldId id="265" r:id="rId23"/>
+    <p:sldId id="267" r:id="rId24"/>
+    <p:sldId id="269" r:id="rId25"/>
+    <p:sldId id="285" r:id="rId26"/>
+    <p:sldId id="270" r:id="rId27"/>
+    <p:sldId id="271" r:id="rId28"/>
+    <p:sldId id="272" r:id="rId29"/>
   </p:sldIdLst>
   <p:sldSz cx="12192000" cy="6858000"/>
   <p:notesSz cx="6858000" cy="9144000"/>
@@ -222,7 +224,7 @@
           <a:p>
             <a:fld id="{C51242EF-9523-44CC-A9D6-8A54B75E8B6F}" type="datetimeFigureOut">
               <a:rPr lang="sv-SE" smtClean="0"/>
-              <a:t>2024-10-02</a:t>
+              <a:t>2025-04-23</a:t>
             </a:fld>
             <a:endParaRPr lang="sv-SE"/>
           </a:p>
@@ -639,7 +641,175 @@
           <a:p>
             <a:fld id="{A07A3E73-AB6F-473D-8A0C-3F8FACBF84DC}" type="slidenum">
               <a:rPr lang="sv-SE" smtClean="0"/>
-              <a:t>26</a:t>
+              <a:t>20</a:t>
+            </a:fld>
+            <a:endParaRPr lang="sv-SE"/>
+          </a:p>
+        </p:txBody>
+      </p:sp>
+    </p:spTree>
+    <p:extLst>
+      <p:ext uri="{BB962C8B-B14F-4D97-AF65-F5344CB8AC3E}">
+        <p14:creationId xmlns:p14="http://schemas.microsoft.com/office/powerpoint/2010/main" val="3659658978"/>
+      </p:ext>
+    </p:extLst>
+  </p:cSld>
+  <p:clrMapOvr>
+    <a:masterClrMapping/>
+  </p:clrMapOvr>
+</p:notes>
+</file>
+
+<file path=ppt/notesSlides/notesSlide11.xml><?xml version="1.0" encoding="utf-8"?>
+<p:notes xmlns:a="http://schemas.openxmlformats.org/drawingml/2006/main" xmlns:r="http://schemas.openxmlformats.org/officeDocument/2006/relationships" xmlns:p="http://schemas.openxmlformats.org/presentationml/2006/main">
+  <p:cSld>
+    <p:spTree>
+      <p:nvGrpSpPr>
+        <p:cNvPr id="1" name=""/>
+        <p:cNvGrpSpPr/>
+        <p:nvPr/>
+      </p:nvGrpSpPr>
+      <p:grpSpPr>
+        <a:xfrm>
+          <a:off x="0" y="0"/>
+          <a:ext cx="0" cy="0"/>
+          <a:chOff x="0" y="0"/>
+          <a:chExt cx="0" cy="0"/>
+        </a:xfrm>
+      </p:grpSpPr>
+      <p:sp>
+        <p:nvSpPr>
+          <p:cNvPr id="2" name="Slide Image Placeholder 1"/>
+          <p:cNvSpPr>
+            <a:spLocks noGrp="1" noRot="1" noChangeAspect="1"/>
+          </p:cNvSpPr>
+          <p:nvPr>
+            <p:ph type="sldImg"/>
+          </p:nvPr>
+        </p:nvSpPr>
+        <p:spPr/>
+      </p:sp>
+      <p:sp>
+        <p:nvSpPr>
+          <p:cNvPr id="3" name="Notes Placeholder 2"/>
+          <p:cNvSpPr>
+            <a:spLocks noGrp="1"/>
+          </p:cNvSpPr>
+          <p:nvPr>
+            <p:ph type="body" idx="1"/>
+          </p:nvPr>
+        </p:nvSpPr>
+        <p:spPr/>
+        <p:txBody>
+          <a:bodyPr/>
+          <a:lstStyle/>
+          <a:p>
+            <a:endParaRPr lang="sv-SE" dirty="0"/>
+          </a:p>
+        </p:txBody>
+      </p:sp>
+      <p:sp>
+        <p:nvSpPr>
+          <p:cNvPr id="4" name="Slide Number Placeholder 3"/>
+          <p:cNvSpPr>
+            <a:spLocks noGrp="1"/>
+          </p:cNvSpPr>
+          <p:nvPr>
+            <p:ph type="sldNum" sz="quarter" idx="10"/>
+          </p:nvPr>
+        </p:nvSpPr>
+        <p:spPr/>
+        <p:txBody>
+          <a:bodyPr/>
+          <a:lstStyle/>
+          <a:p>
+            <a:fld id="{A07A3E73-AB6F-473D-8A0C-3F8FACBF84DC}" type="slidenum">
+              <a:rPr lang="sv-SE" smtClean="0"/>
+              <a:t>22</a:t>
+            </a:fld>
+            <a:endParaRPr lang="sv-SE"/>
+          </a:p>
+        </p:txBody>
+      </p:sp>
+    </p:spTree>
+    <p:extLst>
+      <p:ext uri="{BB962C8B-B14F-4D97-AF65-F5344CB8AC3E}">
+        <p14:creationId xmlns:p14="http://schemas.microsoft.com/office/powerpoint/2010/main" val="1217811430"/>
+      </p:ext>
+    </p:extLst>
+  </p:cSld>
+  <p:clrMapOvr>
+    <a:masterClrMapping/>
+  </p:clrMapOvr>
+</p:notes>
+</file>
+
+<file path=ppt/notesSlides/notesSlide12.xml><?xml version="1.0" encoding="utf-8"?>
+<p:notes xmlns:a="http://schemas.openxmlformats.org/drawingml/2006/main" xmlns:r="http://schemas.openxmlformats.org/officeDocument/2006/relationships" xmlns:p="http://schemas.openxmlformats.org/presentationml/2006/main">
+  <p:cSld>
+    <p:spTree>
+      <p:nvGrpSpPr>
+        <p:cNvPr id="1" name=""/>
+        <p:cNvGrpSpPr/>
+        <p:nvPr/>
+      </p:nvGrpSpPr>
+      <p:grpSpPr>
+        <a:xfrm>
+          <a:off x="0" y="0"/>
+          <a:ext cx="0" cy="0"/>
+          <a:chOff x="0" y="0"/>
+          <a:chExt cx="0" cy="0"/>
+        </a:xfrm>
+      </p:grpSpPr>
+      <p:sp>
+        <p:nvSpPr>
+          <p:cNvPr id="2" name="Slide Image Placeholder 1"/>
+          <p:cNvSpPr>
+            <a:spLocks noGrp="1" noRot="1" noChangeAspect="1"/>
+          </p:cNvSpPr>
+          <p:nvPr>
+            <p:ph type="sldImg"/>
+          </p:nvPr>
+        </p:nvSpPr>
+        <p:spPr/>
+      </p:sp>
+      <p:sp>
+        <p:nvSpPr>
+          <p:cNvPr id="3" name="Notes Placeholder 2"/>
+          <p:cNvSpPr>
+            <a:spLocks noGrp="1"/>
+          </p:cNvSpPr>
+          <p:nvPr>
+            <p:ph type="body" idx="1"/>
+          </p:nvPr>
+        </p:nvSpPr>
+        <p:spPr/>
+        <p:txBody>
+          <a:bodyPr/>
+          <a:lstStyle/>
+          <a:p>
+            <a:endParaRPr lang="sv-SE" dirty="0"/>
+          </a:p>
+        </p:txBody>
+      </p:sp>
+      <p:sp>
+        <p:nvSpPr>
+          <p:cNvPr id="4" name="Slide Number Placeholder 3"/>
+          <p:cNvSpPr>
+            <a:spLocks noGrp="1"/>
+          </p:cNvSpPr>
+          <p:nvPr>
+            <p:ph type="sldNum" sz="quarter" idx="10"/>
+          </p:nvPr>
+        </p:nvSpPr>
+        <p:spPr/>
+        <p:txBody>
+          <a:bodyPr/>
+          <a:lstStyle/>
+          <a:p>
+            <a:fld id="{A07A3E73-AB6F-473D-8A0C-3F8FACBF84DC}" type="slidenum">
+              <a:rPr lang="sv-SE" smtClean="0"/>
+              <a:t>28</a:t>
             </a:fld>
             <a:endParaRPr lang="sv-SE"/>
           </a:p>
@@ -1152,7 +1322,7 @@
     </p:spTree>
     <p:extLst>
       <p:ext uri="{BB962C8B-B14F-4D97-AF65-F5344CB8AC3E}">
-        <p14:creationId xmlns:p14="http://schemas.microsoft.com/office/powerpoint/2010/main" val="3012612983"/>
+        <p14:creationId xmlns:p14="http://schemas.microsoft.com/office/powerpoint/2010/main" val="2831636018"/>
       </p:ext>
     </p:extLst>
   </p:cSld>
@@ -1236,7 +1406,7 @@
     </p:spTree>
     <p:extLst>
       <p:ext uri="{BB962C8B-B14F-4D97-AF65-F5344CB8AC3E}">
-        <p14:creationId xmlns:p14="http://schemas.microsoft.com/office/powerpoint/2010/main" val="958955456"/>
+        <p14:creationId xmlns:p14="http://schemas.microsoft.com/office/powerpoint/2010/main" val="3012612983"/>
       </p:ext>
     </p:extLst>
   </p:cSld>
@@ -1311,7 +1481,7 @@
           <a:p>
             <a:fld id="{A07A3E73-AB6F-473D-8A0C-3F8FACBF84DC}" type="slidenum">
               <a:rPr lang="sv-SE" smtClean="0"/>
-              <a:t>20</a:t>
+              <a:t>19</a:t>
             </a:fld>
             <a:endParaRPr lang="sv-SE"/>
           </a:p>
@@ -1320,7 +1490,7 @@
     </p:spTree>
     <p:extLst>
       <p:ext uri="{BB962C8B-B14F-4D97-AF65-F5344CB8AC3E}">
-        <p14:creationId xmlns:p14="http://schemas.microsoft.com/office/powerpoint/2010/main" val="1217811430"/>
+        <p14:creationId xmlns:p14="http://schemas.microsoft.com/office/powerpoint/2010/main" val="958955456"/>
       </p:ext>
     </p:extLst>
   </p:cSld>
@@ -1461,7 +1631,7 @@
           <a:p>
             <a:fld id="{DCB46C5C-7B3C-46DF-B479-A650EF2753E0}" type="datetimeFigureOut">
               <a:rPr lang="sv-SE" smtClean="0"/>
-              <a:t>2024-10-02</a:t>
+              <a:t>2025-04-23</a:t>
             </a:fld>
             <a:endParaRPr lang="sv-SE"/>
           </a:p>
@@ -1631,7 +1801,7 @@
           <a:p>
             <a:fld id="{DCB46C5C-7B3C-46DF-B479-A650EF2753E0}" type="datetimeFigureOut">
               <a:rPr lang="sv-SE" smtClean="0"/>
-              <a:t>2024-10-02</a:t>
+              <a:t>2025-04-23</a:t>
             </a:fld>
             <a:endParaRPr lang="sv-SE"/>
           </a:p>
@@ -1811,7 +1981,7 @@
           <a:p>
             <a:fld id="{DCB46C5C-7B3C-46DF-B479-A650EF2753E0}" type="datetimeFigureOut">
               <a:rPr lang="sv-SE" smtClean="0"/>
-              <a:t>2024-10-02</a:t>
+              <a:t>2025-04-23</a:t>
             </a:fld>
             <a:endParaRPr lang="sv-SE"/>
           </a:p>
@@ -1981,7 +2151,7 @@
           <a:p>
             <a:fld id="{DCB46C5C-7B3C-46DF-B479-A650EF2753E0}" type="datetimeFigureOut">
               <a:rPr lang="sv-SE" smtClean="0"/>
-              <a:t>2024-10-02</a:t>
+              <a:t>2025-04-23</a:t>
             </a:fld>
             <a:endParaRPr lang="sv-SE"/>
           </a:p>
@@ -2227,7 +2397,7 @@
           <a:p>
             <a:fld id="{DCB46C5C-7B3C-46DF-B479-A650EF2753E0}" type="datetimeFigureOut">
               <a:rPr lang="sv-SE" smtClean="0"/>
-              <a:t>2024-10-02</a:t>
+              <a:t>2025-04-23</a:t>
             </a:fld>
             <a:endParaRPr lang="sv-SE"/>
           </a:p>
@@ -2459,7 +2629,7 @@
           <a:p>
             <a:fld id="{DCB46C5C-7B3C-46DF-B479-A650EF2753E0}" type="datetimeFigureOut">
               <a:rPr lang="sv-SE" smtClean="0"/>
-              <a:t>2024-10-02</a:t>
+              <a:t>2025-04-23</a:t>
             </a:fld>
             <a:endParaRPr lang="sv-SE"/>
           </a:p>
@@ -2826,7 +2996,7 @@
           <a:p>
             <a:fld id="{DCB46C5C-7B3C-46DF-B479-A650EF2753E0}" type="datetimeFigureOut">
               <a:rPr lang="sv-SE" smtClean="0"/>
-              <a:t>2024-10-02</a:t>
+              <a:t>2025-04-23</a:t>
             </a:fld>
             <a:endParaRPr lang="sv-SE"/>
           </a:p>
@@ -2944,7 +3114,7 @@
           <a:p>
             <a:fld id="{DCB46C5C-7B3C-46DF-B479-A650EF2753E0}" type="datetimeFigureOut">
               <a:rPr lang="sv-SE" smtClean="0"/>
-              <a:t>2024-10-02</a:t>
+              <a:t>2025-04-23</a:t>
             </a:fld>
             <a:endParaRPr lang="sv-SE"/>
           </a:p>
@@ -3039,7 +3209,7 @@
           <a:p>
             <a:fld id="{DCB46C5C-7B3C-46DF-B479-A650EF2753E0}" type="datetimeFigureOut">
               <a:rPr lang="sv-SE" smtClean="0"/>
-              <a:t>2024-10-02</a:t>
+              <a:t>2025-04-23</a:t>
             </a:fld>
             <a:endParaRPr lang="sv-SE"/>
           </a:p>
@@ -3316,7 +3486,7 @@
           <a:p>
             <a:fld id="{DCB46C5C-7B3C-46DF-B479-A650EF2753E0}" type="datetimeFigureOut">
               <a:rPr lang="sv-SE" smtClean="0"/>
-              <a:t>2024-10-02</a:t>
+              <a:t>2025-04-23</a:t>
             </a:fld>
             <a:endParaRPr lang="sv-SE"/>
           </a:p>
@@ -3569,7 +3739,7 @@
           <a:p>
             <a:fld id="{DCB46C5C-7B3C-46DF-B479-A650EF2753E0}" type="datetimeFigureOut">
               <a:rPr lang="sv-SE" smtClean="0"/>
-              <a:t>2024-10-02</a:t>
+              <a:t>2025-04-23</a:t>
             </a:fld>
             <a:endParaRPr lang="sv-SE"/>
           </a:p>
@@ -3782,7 +3952,7 @@
           <a:p>
             <a:fld id="{DCB46C5C-7B3C-46DF-B479-A650EF2753E0}" type="datetimeFigureOut">
               <a:rPr lang="sv-SE" smtClean="0"/>
-              <a:t>2024-10-02</a:t>
+              <a:t>2025-04-23</a:t>
             </a:fld>
             <a:endParaRPr lang="sv-SE"/>
           </a:p>
@@ -6342,8 +6512,8 @@
           </a:fontRef>
         </p:style>
       </p:cxnSp>
-      <mc:AlternateContent xmlns:mc="http://schemas.openxmlformats.org/markup-compatibility/2006">
-        <mc:Choice xmlns:a14="http://schemas.microsoft.com/office/drawing/2010/main" Requires="a14">
+      <mc:AlternateContent xmlns:mc="http://schemas.openxmlformats.org/markup-compatibility/2006" xmlns:a14="http://schemas.microsoft.com/office/drawing/2010/main">
+        <mc:Choice Requires="a14">
           <p:sp>
             <p:nvSpPr>
               <p:cNvPr id="18" name="TextBox 17"/>
@@ -6431,7 +6601,7 @@
             </p:txBody>
           </p:sp>
         </mc:Choice>
-        <mc:Fallback>
+        <mc:Fallback xmlns="">
           <p:sp>
             <p:nvSpPr>
               <p:cNvPr id="18" name="TextBox 17"/>
@@ -6470,8 +6640,8 @@
           </p:sp>
         </mc:Fallback>
       </mc:AlternateContent>
-      <mc:AlternateContent xmlns:mc="http://schemas.openxmlformats.org/markup-compatibility/2006">
-        <mc:Choice xmlns:a14="http://schemas.microsoft.com/office/drawing/2010/main" Requires="a14">
+      <mc:AlternateContent xmlns:mc="http://schemas.openxmlformats.org/markup-compatibility/2006" xmlns:a14="http://schemas.microsoft.com/office/drawing/2010/main">
+        <mc:Choice Requires="a14">
           <p:sp>
             <p:nvSpPr>
               <p:cNvPr id="19" name="TextBox 18"/>
@@ -6559,7 +6729,7 @@
             </p:txBody>
           </p:sp>
         </mc:Choice>
-        <mc:Fallback>
+        <mc:Fallback xmlns="">
           <p:sp>
             <p:nvSpPr>
               <p:cNvPr id="19" name="TextBox 18"/>
@@ -6598,8 +6768,8 @@
           </p:sp>
         </mc:Fallback>
       </mc:AlternateContent>
-      <mc:AlternateContent xmlns:mc="http://schemas.openxmlformats.org/markup-compatibility/2006">
-        <mc:Choice xmlns:a14="http://schemas.microsoft.com/office/drawing/2010/main" Requires="a14">
+      <mc:AlternateContent xmlns:mc="http://schemas.openxmlformats.org/markup-compatibility/2006" xmlns:a14="http://schemas.microsoft.com/office/drawing/2010/main">
+        <mc:Choice Requires="a14">
           <p:sp>
             <p:nvSpPr>
               <p:cNvPr id="20" name="TextBox 19"/>
@@ -6687,7 +6857,7 @@
             </p:txBody>
           </p:sp>
         </mc:Choice>
-        <mc:Fallback>
+        <mc:Fallback xmlns="">
           <p:sp>
             <p:nvSpPr>
               <p:cNvPr id="20" name="TextBox 19"/>
@@ -6930,8 +7100,8 @@
           </a:fontRef>
         </p:style>
       </p:cxnSp>
-      <mc:AlternateContent xmlns:mc="http://schemas.openxmlformats.org/markup-compatibility/2006">
-        <mc:Choice xmlns:a14="http://schemas.microsoft.com/office/drawing/2010/main" Requires="a14">
+      <mc:AlternateContent xmlns:mc="http://schemas.openxmlformats.org/markup-compatibility/2006" xmlns:a14="http://schemas.microsoft.com/office/drawing/2010/main">
+        <mc:Choice Requires="a14">
           <p:sp>
             <p:nvSpPr>
               <p:cNvPr id="45" name="TextBox 44"/>
@@ -7019,7 +7189,7 @@
             </p:txBody>
           </p:sp>
         </mc:Choice>
-        <mc:Fallback>
+        <mc:Fallback xmlns="">
           <p:sp>
             <p:nvSpPr>
               <p:cNvPr id="45" name="TextBox 44"/>
@@ -7126,8 +7296,8 @@
           </a:fontRef>
         </p:style>
       </p:cxnSp>
-      <mc:AlternateContent xmlns:mc="http://schemas.openxmlformats.org/markup-compatibility/2006">
-        <mc:Choice xmlns:a14="http://schemas.microsoft.com/office/drawing/2010/main" Requires="a14">
+      <mc:AlternateContent xmlns:mc="http://schemas.openxmlformats.org/markup-compatibility/2006" xmlns:a14="http://schemas.microsoft.com/office/drawing/2010/main">
+        <mc:Choice Requires="a14">
           <p:sp>
             <p:nvSpPr>
               <p:cNvPr id="51" name="TextBox 50"/>
@@ -7215,7 +7385,7 @@
             </p:txBody>
           </p:sp>
         </mc:Choice>
-        <mc:Fallback>
+        <mc:Fallback xmlns="">
           <p:sp>
             <p:nvSpPr>
               <p:cNvPr id="51" name="TextBox 50"/>
@@ -7322,8 +7492,8 @@
           </a:fontRef>
         </p:style>
       </p:cxnSp>
-      <mc:AlternateContent xmlns:mc="http://schemas.openxmlformats.org/markup-compatibility/2006">
-        <mc:Choice xmlns:a14="http://schemas.microsoft.com/office/drawing/2010/main" Requires="a14">
+      <mc:AlternateContent xmlns:mc="http://schemas.openxmlformats.org/markup-compatibility/2006" xmlns:a14="http://schemas.microsoft.com/office/drawing/2010/main">
+        <mc:Choice Requires="a14">
           <p:sp>
             <p:nvSpPr>
               <p:cNvPr id="58" name="TextBox 57"/>
@@ -7411,7 +7581,7 @@
             </p:txBody>
           </p:sp>
         </mc:Choice>
-        <mc:Fallback>
+        <mc:Fallback xmlns="">
           <p:sp>
             <p:nvSpPr>
               <p:cNvPr id="58" name="TextBox 57"/>
@@ -12997,190 +13167,33 @@
           <a:chExt cx="0" cy="0"/>
         </a:xfrm>
       </p:grpSpPr>
-      <mc:AlternateContent xmlns:mc="http://schemas.openxmlformats.org/markup-compatibility/2006" xmlns:a14="http://schemas.microsoft.com/office/drawing/2010/main">
-        <mc:Choice Requires="a14">
-          <p:sp>
-            <p:nvSpPr>
-              <p:cNvPr id="44" name="TextBox 43"/>
-              <p:cNvSpPr txBox="1"/>
-              <p:nvPr/>
-            </p:nvSpPr>
-            <p:spPr>
-              <a:xfrm>
-                <a:off x="-1435691" y="15112516"/>
-                <a:ext cx="533928" cy="400110"/>
-              </a:xfrm>
-              <a:prstGeom prst="rect">
-                <a:avLst/>
-              </a:prstGeom>
-              <a:noFill/>
-            </p:spPr>
-            <p:txBody>
-              <a:bodyPr wrap="square" rtlCol="0">
-                <a:spAutoFit/>
-              </a:bodyPr>
-              <a:lstStyle/>
-              <a:p>
-                <a:pPr/>
-                <a14:m>
-                  <m:oMathPara xmlns:m="http://schemas.openxmlformats.org/officeDocument/2006/math">
-                    <m:oMathParaPr>
-                      <m:jc m:val="centerGroup"/>
-                    </m:oMathParaPr>
-                    <m:oMath xmlns:m="http://schemas.openxmlformats.org/officeDocument/2006/math">
-                      <m:sSub>
-                        <m:sSubPr>
-                          <m:ctrlPr>
-                            <a:rPr lang="en-US" sz="2000" b="0" i="1" smtClean="0">
-                              <a:solidFill>
-                                <a:srgbClr val="3AE657"/>
-                              </a:solidFill>
-                              <a:latin typeface="Cambria Math" panose="02040503050406030204" pitchFamily="18" charset="0"/>
-                            </a:rPr>
-                          </m:ctrlPr>
-                        </m:sSubPr>
-                        <m:e>
-                          <m:r>
-                            <a:rPr lang="en-US" sz="2000" b="0" i="1" smtClean="0">
-                              <a:solidFill>
-                                <a:srgbClr val="3AE657"/>
-                              </a:solidFill>
-                              <a:latin typeface="Cambria Math" panose="02040503050406030204" pitchFamily="18" charset="0"/>
-                            </a:rPr>
-                            <m:t>−</m:t>
-                          </m:r>
-                          <m:r>
-                            <a:rPr lang="en-US" sz="2000" i="1" smtClean="0">
-                              <a:solidFill>
-                                <a:srgbClr val="3AE657"/>
-                              </a:solidFill>
-                              <a:latin typeface="Cambria Math" panose="02040503050406030204" pitchFamily="18" charset="0"/>
-                            </a:rPr>
-                            <m:t>𝑡</m:t>
-                          </m:r>
-                        </m:e>
-                        <m:sub>
-                          <m:r>
-                            <a:rPr lang="en-US" sz="2000" b="0" i="1" smtClean="0">
-                              <a:solidFill>
-                                <a:srgbClr val="3AE657"/>
-                              </a:solidFill>
-                              <a:latin typeface="Cambria Math" panose="02040503050406030204" pitchFamily="18" charset="0"/>
-                            </a:rPr>
-                            <m:t>𝐶</m:t>
-                          </m:r>
-                        </m:sub>
-                      </m:sSub>
-                    </m:oMath>
-                  </m:oMathPara>
-                </a14:m>
-                <a:endParaRPr lang="sv-SE" dirty="0"/>
-              </a:p>
-            </p:txBody>
-          </p:sp>
-        </mc:Choice>
-        <mc:Fallback xmlns="">
-          <p:sp>
-            <p:nvSpPr>
-              <p:cNvPr id="44" name="TextBox 43"/>
-              <p:cNvSpPr txBox="1">
-                <a:spLocks noRot="1" noChangeAspect="1" noMove="1" noResize="1" noEditPoints="1" noAdjustHandles="1" noChangeArrowheads="1" noChangeShapeType="1" noTextEdit="1"/>
-              </p:cNvSpPr>
-              <p:nvPr/>
-            </p:nvSpPr>
-            <p:spPr>
-              <a:xfrm>
-                <a:off x="-1435691" y="15112516"/>
-                <a:ext cx="533928" cy="400110"/>
-              </a:xfrm>
-              <a:prstGeom prst="rect">
-                <a:avLst/>
-              </a:prstGeom>
-              <a:blipFill>
-                <a:blip r:embed="rId3"/>
-                <a:stretch>
-                  <a:fillRect r="-4545"/>
-                </a:stretch>
-              </a:blipFill>
-            </p:spPr>
-            <p:txBody>
-              <a:bodyPr/>
-              <a:lstStyle/>
-              <a:p>
-                <a:r>
-                  <a:rPr lang="sv-SE">
-                    <a:noFill/>
-                  </a:rPr>
-                  <a:t> </a:t>
-                </a:r>
-              </a:p>
-            </p:txBody>
-          </p:sp>
-        </mc:Fallback>
-      </mc:AlternateContent>
-      <p:sp>
-        <p:nvSpPr>
-          <p:cNvPr id="58" name="TextBox 57"/>
-          <p:cNvSpPr txBox="1"/>
-          <p:nvPr/>
-        </p:nvSpPr>
-        <p:spPr>
-          <a:xfrm>
-            <a:off x="3769335" y="4766289"/>
-            <a:ext cx="545691" cy="461665"/>
-          </a:xfrm>
-          <a:prstGeom prst="rect">
-            <a:avLst/>
-          </a:prstGeom>
-          <a:noFill/>
-        </p:spPr>
-        <p:txBody>
-          <a:bodyPr wrap="square" rtlCol="0">
-            <a:spAutoFit/>
-          </a:bodyPr>
-          <a:lstStyle/>
-          <a:p>
-            <a:r>
-              <a:rPr lang="en-US" sz="2400" dirty="0" smtClean="0"/>
-              <a:t>(a)</a:t>
-            </a:r>
-            <a:endParaRPr lang="sv-SE" sz="2400" dirty="0"/>
-          </a:p>
-        </p:txBody>
-      </p:sp>
-      <p:sp>
-        <p:nvSpPr>
-          <p:cNvPr id="59" name="TextBox 58"/>
-          <p:cNvSpPr txBox="1"/>
-          <p:nvPr/>
-        </p:nvSpPr>
-        <p:spPr>
-          <a:xfrm>
-            <a:off x="9103335" y="4797174"/>
-            <a:ext cx="545691" cy="461665"/>
-          </a:xfrm>
-          <a:prstGeom prst="rect">
-            <a:avLst/>
-          </a:prstGeom>
-          <a:noFill/>
-        </p:spPr>
-        <p:txBody>
-          <a:bodyPr wrap="square" rtlCol="0">
-            <a:spAutoFit/>
-          </a:bodyPr>
-          <a:lstStyle/>
-          <a:p>
-            <a:r>
-              <a:rPr lang="en-US" sz="2400" dirty="0" smtClean="0"/>
-              <a:t>(b)</a:t>
-            </a:r>
-            <a:endParaRPr lang="sv-SE" sz="2400" dirty="0"/>
-          </a:p>
-        </p:txBody>
-      </p:sp>
       <p:pic>
         <p:nvPicPr>
-          <p:cNvPr id="6" name="Picture 5"/>
+          <p:cNvPr id="9" name="Picture 8"/>
+          <p:cNvPicPr>
+            <a:picLocks noChangeAspect="1"/>
+          </p:cNvPicPr>
+          <p:nvPr/>
+        </p:nvPicPr>
+        <p:blipFill>
+          <a:blip r:embed="rId3"/>
+          <a:stretch>
+            <a:fillRect/>
+          </a:stretch>
+        </p:blipFill>
+        <p:spPr>
+          <a:xfrm>
+            <a:off x="978309" y="-408213"/>
+            <a:ext cx="5334000" cy="4000500"/>
+          </a:xfrm>
+          <a:prstGeom prst="rect">
+            <a:avLst/>
+          </a:prstGeom>
+        </p:spPr>
+      </p:pic>
+      <p:pic>
+        <p:nvPicPr>
+          <p:cNvPr id="47" name="Picture 46"/>
           <p:cNvPicPr>
             <a:picLocks noChangeAspect="1"/>
           </p:cNvPicPr>
@@ -13194,7 +13207,7 @@
         </p:blipFill>
         <p:spPr>
           <a:xfrm>
-            <a:off x="1102335" y="796674"/>
+            <a:off x="6072960" y="-404710"/>
             <a:ext cx="5334000" cy="4000500"/>
           </a:xfrm>
           <a:prstGeom prst="rect">
@@ -13204,7 +13217,7 @@
       </p:pic>
       <p:pic>
         <p:nvPicPr>
-          <p:cNvPr id="7" name="Picture 6"/>
+          <p:cNvPr id="5" name="Picture 4"/>
           <p:cNvPicPr>
             <a:picLocks noChangeAspect="1"/>
           </p:cNvPicPr>
@@ -13218,7 +13231,375 @@
         </p:blipFill>
         <p:spPr>
           <a:xfrm>
-            <a:off x="6436335" y="816386"/>
+            <a:off x="6072960" y="-4578428"/>
+            <a:ext cx="5334000" cy="4000500"/>
+          </a:xfrm>
+          <a:prstGeom prst="rect">
+            <a:avLst/>
+          </a:prstGeom>
+        </p:spPr>
+      </p:pic>
+      <p:pic>
+        <p:nvPicPr>
+          <p:cNvPr id="6" name="Picture 5"/>
+          <p:cNvPicPr>
+            <a:picLocks noChangeAspect="1"/>
+          </p:cNvPicPr>
+          <p:nvPr/>
+        </p:nvPicPr>
+        <p:blipFill>
+          <a:blip r:embed="rId6"/>
+          <a:stretch>
+            <a:fillRect/>
+          </a:stretch>
+        </p:blipFill>
+        <p:spPr>
+          <a:xfrm>
+            <a:off x="978309" y="-4537264"/>
+            <a:ext cx="5334000" cy="4000500"/>
+          </a:xfrm>
+          <a:prstGeom prst="rect">
+            <a:avLst/>
+          </a:prstGeom>
+        </p:spPr>
+      </p:pic>
+      <p:sp>
+        <p:nvSpPr>
+          <p:cNvPr id="45" name="TextBox 44"/>
+          <p:cNvSpPr txBox="1"/>
+          <p:nvPr/>
+        </p:nvSpPr>
+        <p:spPr>
+          <a:xfrm>
+            <a:off x="3645309" y="-616278"/>
+            <a:ext cx="545691" cy="461665"/>
+          </a:xfrm>
+          <a:prstGeom prst="rect">
+            <a:avLst/>
+          </a:prstGeom>
+          <a:noFill/>
+        </p:spPr>
+        <p:txBody>
+          <a:bodyPr wrap="square" rtlCol="0">
+            <a:spAutoFit/>
+          </a:bodyPr>
+          <a:lstStyle/>
+          <a:p>
+            <a:r>
+              <a:rPr lang="en-US" sz="2400" dirty="0" smtClean="0"/>
+              <a:t>(a)</a:t>
+            </a:r>
+            <a:endParaRPr lang="sv-SE" sz="2400" dirty="0"/>
+          </a:p>
+        </p:txBody>
+      </p:sp>
+      <p:sp>
+        <p:nvSpPr>
+          <p:cNvPr id="49" name="TextBox 48"/>
+          <p:cNvSpPr txBox="1"/>
+          <p:nvPr/>
+        </p:nvSpPr>
+        <p:spPr>
+          <a:xfrm>
+            <a:off x="3769389" y="3598229"/>
+            <a:ext cx="545691" cy="461665"/>
+          </a:xfrm>
+          <a:prstGeom prst="rect">
+            <a:avLst/>
+          </a:prstGeom>
+          <a:noFill/>
+        </p:spPr>
+        <p:txBody>
+          <a:bodyPr wrap="square" rtlCol="0">
+            <a:spAutoFit/>
+          </a:bodyPr>
+          <a:lstStyle/>
+          <a:p>
+            <a:r>
+              <a:rPr lang="en-US" sz="2400" dirty="0" smtClean="0"/>
+              <a:t>(c)</a:t>
+            </a:r>
+            <a:endParaRPr lang="sv-SE" sz="2400" dirty="0"/>
+          </a:p>
+        </p:txBody>
+      </p:sp>
+      <p:sp>
+        <p:nvSpPr>
+          <p:cNvPr id="50" name="TextBox 49"/>
+          <p:cNvSpPr txBox="1"/>
+          <p:nvPr/>
+        </p:nvSpPr>
+        <p:spPr>
+          <a:xfrm>
+            <a:off x="8700091" y="-591421"/>
+            <a:ext cx="545691" cy="461665"/>
+          </a:xfrm>
+          <a:prstGeom prst="rect">
+            <a:avLst/>
+          </a:prstGeom>
+          <a:noFill/>
+        </p:spPr>
+        <p:txBody>
+          <a:bodyPr wrap="square" rtlCol="0">
+            <a:spAutoFit/>
+          </a:bodyPr>
+          <a:lstStyle/>
+          <a:p>
+            <a:r>
+              <a:rPr lang="en-US" sz="2400" dirty="0" smtClean="0"/>
+              <a:t>(b)</a:t>
+            </a:r>
+            <a:endParaRPr lang="sv-SE" sz="2400" dirty="0"/>
+          </a:p>
+        </p:txBody>
+      </p:sp>
+      <p:sp>
+        <p:nvSpPr>
+          <p:cNvPr id="51" name="TextBox 50"/>
+          <p:cNvSpPr txBox="1"/>
+          <p:nvPr/>
+        </p:nvSpPr>
+        <p:spPr>
+          <a:xfrm>
+            <a:off x="8739960" y="3603849"/>
+            <a:ext cx="545691" cy="461665"/>
+          </a:xfrm>
+          <a:prstGeom prst="rect">
+            <a:avLst/>
+          </a:prstGeom>
+          <a:noFill/>
+        </p:spPr>
+        <p:txBody>
+          <a:bodyPr wrap="square" rtlCol="0">
+            <a:spAutoFit/>
+          </a:bodyPr>
+          <a:lstStyle/>
+          <a:p>
+            <a:r>
+              <a:rPr lang="en-US" sz="2400" dirty="0" smtClean="0"/>
+              <a:t>(d)</a:t>
+            </a:r>
+            <a:endParaRPr lang="sv-SE" sz="2400" dirty="0"/>
+          </a:p>
+        </p:txBody>
+      </p:sp>
+      <p:sp>
+        <p:nvSpPr>
+          <p:cNvPr id="52" name="TextBox 51"/>
+          <p:cNvSpPr txBox="1"/>
+          <p:nvPr/>
+        </p:nvSpPr>
+        <p:spPr>
+          <a:xfrm>
+            <a:off x="8908408" y="7732257"/>
+            <a:ext cx="545691" cy="461665"/>
+          </a:xfrm>
+          <a:prstGeom prst="rect">
+            <a:avLst/>
+          </a:prstGeom>
+          <a:noFill/>
+        </p:spPr>
+        <p:txBody>
+          <a:bodyPr wrap="square" rtlCol="0">
+            <a:spAutoFit/>
+          </a:bodyPr>
+          <a:lstStyle/>
+          <a:p>
+            <a:r>
+              <a:rPr lang="en-US" sz="2400" dirty="0" smtClean="0"/>
+              <a:t>(f)</a:t>
+            </a:r>
+            <a:endParaRPr lang="sv-SE" sz="2400" dirty="0"/>
+          </a:p>
+        </p:txBody>
+      </p:sp>
+      <p:sp>
+        <p:nvSpPr>
+          <p:cNvPr id="53" name="TextBox 52"/>
+          <p:cNvSpPr txBox="1"/>
+          <p:nvPr/>
+        </p:nvSpPr>
+        <p:spPr>
+          <a:xfrm>
+            <a:off x="3851503" y="7730120"/>
+            <a:ext cx="545691" cy="461665"/>
+          </a:xfrm>
+          <a:prstGeom prst="rect">
+            <a:avLst/>
+          </a:prstGeom>
+          <a:noFill/>
+        </p:spPr>
+        <p:txBody>
+          <a:bodyPr wrap="square" rtlCol="0">
+            <a:spAutoFit/>
+          </a:bodyPr>
+          <a:lstStyle/>
+          <a:p>
+            <a:r>
+              <a:rPr lang="en-US" sz="2400" dirty="0" smtClean="0"/>
+              <a:t>(e)</a:t>
+            </a:r>
+            <a:endParaRPr lang="sv-SE" sz="2400" dirty="0"/>
+          </a:p>
+        </p:txBody>
+      </p:sp>
+      <p:pic>
+        <p:nvPicPr>
+          <p:cNvPr id="21" name="Picture 20"/>
+          <p:cNvPicPr>
+            <a:picLocks noChangeAspect="1"/>
+          </p:cNvPicPr>
+          <p:nvPr/>
+        </p:nvPicPr>
+        <p:blipFill>
+          <a:blip r:embed="rId7"/>
+          <a:stretch>
+            <a:fillRect/>
+          </a:stretch>
+        </p:blipFill>
+        <p:spPr>
+          <a:xfrm>
+            <a:off x="1223436" y="8023884"/>
+            <a:ext cx="5334000" cy="4000500"/>
+          </a:xfrm>
+          <a:prstGeom prst="rect">
+            <a:avLst/>
+          </a:prstGeom>
+        </p:spPr>
+      </p:pic>
+      <p:pic>
+        <p:nvPicPr>
+          <p:cNvPr id="22" name="Picture 21"/>
+          <p:cNvPicPr>
+            <a:picLocks noChangeAspect="1"/>
+          </p:cNvPicPr>
+          <p:nvPr/>
+        </p:nvPicPr>
+        <p:blipFill>
+          <a:blip r:embed="rId8"/>
+          <a:stretch>
+            <a:fillRect/>
+          </a:stretch>
+        </p:blipFill>
+        <p:spPr>
+          <a:xfrm>
+            <a:off x="6312309" y="8023884"/>
+            <a:ext cx="5334000" cy="4000500"/>
+          </a:xfrm>
+          <a:prstGeom prst="rect">
+            <a:avLst/>
+          </a:prstGeom>
+        </p:spPr>
+      </p:pic>
+      <p:sp>
+        <p:nvSpPr>
+          <p:cNvPr id="23" name="TextBox 22"/>
+          <p:cNvSpPr txBox="1"/>
+          <p:nvPr/>
+        </p:nvSpPr>
+        <p:spPr>
+          <a:xfrm>
+            <a:off x="8908407" y="11966769"/>
+            <a:ext cx="545691" cy="461665"/>
+          </a:xfrm>
+          <a:prstGeom prst="rect">
+            <a:avLst/>
+          </a:prstGeom>
+          <a:noFill/>
+        </p:spPr>
+        <p:txBody>
+          <a:bodyPr wrap="square" rtlCol="0">
+            <a:spAutoFit/>
+          </a:bodyPr>
+          <a:lstStyle/>
+          <a:p>
+            <a:r>
+              <a:rPr lang="en-US" sz="2400" dirty="0" smtClean="0"/>
+              <a:t>(</a:t>
+            </a:r>
+            <a:r>
+              <a:rPr lang="en-US" sz="2400" dirty="0"/>
+              <a:t>h</a:t>
+            </a:r>
+            <a:r>
+              <a:rPr lang="en-US" sz="2400" dirty="0" smtClean="0"/>
+              <a:t>)</a:t>
+            </a:r>
+            <a:endParaRPr lang="sv-SE" sz="2400" dirty="0"/>
+          </a:p>
+        </p:txBody>
+      </p:sp>
+      <p:sp>
+        <p:nvSpPr>
+          <p:cNvPr id="24" name="TextBox 23"/>
+          <p:cNvSpPr txBox="1"/>
+          <p:nvPr/>
+        </p:nvSpPr>
+        <p:spPr>
+          <a:xfrm>
+            <a:off x="3851503" y="12024384"/>
+            <a:ext cx="545691" cy="461665"/>
+          </a:xfrm>
+          <a:prstGeom prst="rect">
+            <a:avLst/>
+          </a:prstGeom>
+          <a:noFill/>
+        </p:spPr>
+        <p:txBody>
+          <a:bodyPr wrap="square" rtlCol="0">
+            <a:spAutoFit/>
+          </a:bodyPr>
+          <a:lstStyle/>
+          <a:p>
+            <a:r>
+              <a:rPr lang="en-US" sz="2400" dirty="0" smtClean="0"/>
+              <a:t>(g)</a:t>
+            </a:r>
+            <a:endParaRPr lang="sv-SE" sz="2400" dirty="0"/>
+          </a:p>
+        </p:txBody>
+      </p:sp>
+      <p:pic>
+        <p:nvPicPr>
+          <p:cNvPr id="7" name="Picture 6"/>
+          <p:cNvPicPr>
+            <a:picLocks noChangeAspect="1"/>
+          </p:cNvPicPr>
+          <p:nvPr/>
+        </p:nvPicPr>
+        <p:blipFill>
+          <a:blip r:embed="rId9"/>
+          <a:stretch>
+            <a:fillRect/>
+          </a:stretch>
+        </p:blipFill>
+        <p:spPr>
+          <a:xfrm>
+            <a:off x="6033091" y="3803435"/>
+            <a:ext cx="5334000" cy="4000500"/>
+          </a:xfrm>
+          <a:prstGeom prst="rect">
+            <a:avLst/>
+          </a:prstGeom>
+        </p:spPr>
+      </p:pic>
+      <p:pic>
+        <p:nvPicPr>
+          <p:cNvPr id="8" name="Picture 7"/>
+          <p:cNvPicPr>
+            <a:picLocks noChangeAspect="1"/>
+          </p:cNvPicPr>
+          <p:nvPr/>
+        </p:nvPicPr>
+        <p:blipFill>
+          <a:blip r:embed="rId10"/>
+          <a:stretch>
+            <a:fillRect/>
+          </a:stretch>
+        </p:blipFill>
+        <p:spPr>
+          <a:xfrm>
+            <a:off x="978309" y="3809377"/>
             <a:ext cx="5334000" cy="4000500"/>
           </a:xfrm>
           <a:prstGeom prst="rect">
@@ -13229,7 +13610,7 @@
     </p:spTree>
     <p:extLst>
       <p:ext uri="{BB962C8B-B14F-4D97-AF65-F5344CB8AC3E}">
-        <p14:creationId xmlns:p14="http://schemas.microsoft.com/office/powerpoint/2010/main" val="3488593451"/>
+        <p14:creationId xmlns:p14="http://schemas.microsoft.com/office/powerpoint/2010/main" val="861517970"/>
       </p:ext>
     </p:extLst>
   </p:cSld>
@@ -13385,7 +13766,7 @@
         </p:nvSpPr>
         <p:spPr>
           <a:xfrm>
-            <a:off x="3448396" y="2572614"/>
+            <a:off x="3769335" y="4766289"/>
             <a:ext cx="545691" cy="461665"/>
           </a:xfrm>
           <a:prstGeom prst="rect">
@@ -13415,7 +13796,7 @@
         </p:nvSpPr>
         <p:spPr>
           <a:xfrm>
-            <a:off x="8684455" y="2552902"/>
+            <a:off x="9103335" y="4797174"/>
             <a:ext cx="545691" cy="461665"/>
           </a:xfrm>
           <a:prstGeom prst="rect">
@@ -13437,69 +13818,9 @@
           </a:p>
         </p:txBody>
       </p:sp>
-      <p:sp>
-        <p:nvSpPr>
-          <p:cNvPr id="60" name="TextBox 59"/>
-          <p:cNvSpPr txBox="1"/>
-          <p:nvPr/>
-        </p:nvSpPr>
-        <p:spPr>
-          <a:xfrm>
-            <a:off x="3448395" y="6914505"/>
-            <a:ext cx="545691" cy="461665"/>
-          </a:xfrm>
-          <a:prstGeom prst="rect">
-            <a:avLst/>
-          </a:prstGeom>
-          <a:noFill/>
-        </p:spPr>
-        <p:txBody>
-          <a:bodyPr wrap="square" rtlCol="0">
-            <a:spAutoFit/>
-          </a:bodyPr>
-          <a:lstStyle/>
-          <a:p>
-            <a:r>
-              <a:rPr lang="en-US" sz="2400" dirty="0" smtClean="0"/>
-              <a:t>(c)</a:t>
-            </a:r>
-            <a:endParaRPr lang="sv-SE" sz="2400" dirty="0"/>
-          </a:p>
-        </p:txBody>
-      </p:sp>
-      <p:sp>
-        <p:nvSpPr>
-          <p:cNvPr id="62" name="TextBox 61"/>
-          <p:cNvSpPr txBox="1"/>
-          <p:nvPr/>
-        </p:nvSpPr>
-        <p:spPr>
-          <a:xfrm>
-            <a:off x="8684454" y="6945091"/>
-            <a:ext cx="545691" cy="461665"/>
-          </a:xfrm>
-          <a:prstGeom prst="rect">
-            <a:avLst/>
-          </a:prstGeom>
-          <a:noFill/>
-        </p:spPr>
-        <p:txBody>
-          <a:bodyPr wrap="square" rtlCol="0">
-            <a:spAutoFit/>
-          </a:bodyPr>
-          <a:lstStyle/>
-          <a:p>
-            <a:r>
-              <a:rPr lang="en-US" sz="2400" dirty="0" smtClean="0"/>
-              <a:t>(d)</a:t>
-            </a:r>
-            <a:endParaRPr lang="sv-SE" sz="2400" dirty="0"/>
-          </a:p>
-        </p:txBody>
-      </p:sp>
       <p:pic>
         <p:nvPicPr>
-          <p:cNvPr id="4" name="Picture 3"/>
+          <p:cNvPr id="6" name="Picture 5"/>
           <p:cNvPicPr>
             <a:picLocks noChangeAspect="1"/>
           </p:cNvPicPr>
@@ -13513,7 +13834,7 @@
         </p:blipFill>
         <p:spPr>
           <a:xfrm>
-            <a:off x="674849" y="-1467977"/>
+            <a:off x="1102335" y="796674"/>
             <a:ext cx="5334000" cy="4000500"/>
           </a:xfrm>
           <a:prstGeom prst="rect">
@@ -13537,55 +13858,7 @@
         </p:blipFill>
         <p:spPr>
           <a:xfrm>
-            <a:off x="6115397" y="-1397317"/>
-            <a:ext cx="5334000" cy="4000500"/>
-          </a:xfrm>
-          <a:prstGeom prst="rect">
-            <a:avLst/>
-          </a:prstGeom>
-        </p:spPr>
-      </p:pic>
-      <p:pic>
-        <p:nvPicPr>
-          <p:cNvPr id="8" name="Picture 7"/>
-          <p:cNvPicPr>
-            <a:picLocks noChangeAspect="1"/>
-          </p:cNvPicPr>
-          <p:nvPr/>
-        </p:nvPicPr>
-        <p:blipFill>
-          <a:blip r:embed="rId6"/>
-          <a:stretch>
-            <a:fillRect/>
-          </a:stretch>
-        </p:blipFill>
-        <p:spPr>
-          <a:xfrm>
-            <a:off x="611901" y="2803446"/>
-            <a:ext cx="5334000" cy="4000500"/>
-          </a:xfrm>
-          <a:prstGeom prst="rect">
-            <a:avLst/>
-          </a:prstGeom>
-        </p:spPr>
-      </p:pic>
-      <p:pic>
-        <p:nvPicPr>
-          <p:cNvPr id="10" name="Picture 9"/>
-          <p:cNvPicPr>
-            <a:picLocks noChangeAspect="1"/>
-          </p:cNvPicPr>
-          <p:nvPr/>
-        </p:nvPicPr>
-        <p:blipFill>
-          <a:blip r:embed="rId7"/>
-          <a:stretch>
-            <a:fillRect/>
-          </a:stretch>
-        </p:blipFill>
-        <p:spPr>
-          <a:xfrm>
-            <a:off x="6115397" y="2803446"/>
+            <a:off x="6436335" y="816386"/>
             <a:ext cx="5334000" cy="4000500"/>
           </a:xfrm>
           <a:prstGeom prst="rect">
@@ -13596,7 +13869,7 @@
     </p:spTree>
     <p:extLst>
       <p:ext uri="{BB962C8B-B14F-4D97-AF65-F5344CB8AC3E}">
-        <p14:creationId xmlns:p14="http://schemas.microsoft.com/office/powerpoint/2010/main" val="1109817906"/>
+        <p14:creationId xmlns:p14="http://schemas.microsoft.com/office/powerpoint/2010/main" val="3488593451"/>
       </p:ext>
     </p:extLst>
   </p:cSld>
@@ -13623,64 +13896,137 @@
           <a:chExt cx="0" cy="0"/>
         </a:xfrm>
       </p:grpSpPr>
-      <p:pic>
-        <p:nvPicPr>
-          <p:cNvPr id="2" name="Picture 1"/>
-          <p:cNvPicPr>
-            <a:picLocks noChangeAspect="1"/>
-          </p:cNvPicPr>
-          <p:nvPr/>
-        </p:nvPicPr>
-        <p:blipFill>
-          <a:blip r:embed="rId2"/>
-          <a:stretch>
-            <a:fillRect/>
-          </a:stretch>
-        </p:blipFill>
-        <p:spPr>
-          <a:xfrm>
-            <a:off x="1584959" y="554990"/>
-            <a:ext cx="4055533" cy="3041650"/>
-          </a:xfrm>
-          <a:prstGeom prst="rect">
-            <a:avLst/>
-          </a:prstGeom>
-        </p:spPr>
-      </p:pic>
-      <p:pic>
-        <p:nvPicPr>
-          <p:cNvPr id="3" name="Picture 2"/>
-          <p:cNvPicPr>
-            <a:picLocks noChangeAspect="1"/>
-          </p:cNvPicPr>
-          <p:nvPr/>
-        </p:nvPicPr>
-        <p:blipFill>
-          <a:blip r:embed="rId3"/>
-          <a:stretch>
-            <a:fillRect/>
-          </a:stretch>
-        </p:blipFill>
-        <p:spPr>
-          <a:xfrm>
-            <a:off x="6375399" y="554990"/>
-            <a:ext cx="4055533" cy="3041650"/>
-          </a:xfrm>
-          <a:prstGeom prst="rect">
-            <a:avLst/>
-          </a:prstGeom>
-        </p:spPr>
-      </p:pic>
+      <mc:AlternateContent xmlns:mc="http://schemas.openxmlformats.org/markup-compatibility/2006" xmlns:a14="http://schemas.microsoft.com/office/drawing/2010/main">
+        <mc:Choice Requires="a14">
+          <p:sp>
+            <p:nvSpPr>
+              <p:cNvPr id="44" name="TextBox 43"/>
+              <p:cNvSpPr txBox="1"/>
+              <p:nvPr/>
+            </p:nvSpPr>
+            <p:spPr>
+              <a:xfrm>
+                <a:off x="-1435691" y="15112516"/>
+                <a:ext cx="533928" cy="400110"/>
+              </a:xfrm>
+              <a:prstGeom prst="rect">
+                <a:avLst/>
+              </a:prstGeom>
+              <a:noFill/>
+            </p:spPr>
+            <p:txBody>
+              <a:bodyPr wrap="square" rtlCol="0">
+                <a:spAutoFit/>
+              </a:bodyPr>
+              <a:lstStyle/>
+              <a:p>
+                <a:pPr/>
+                <a14:m>
+                  <m:oMathPara xmlns:m="http://schemas.openxmlformats.org/officeDocument/2006/math">
+                    <m:oMathParaPr>
+                      <m:jc m:val="centerGroup"/>
+                    </m:oMathParaPr>
+                    <m:oMath xmlns:m="http://schemas.openxmlformats.org/officeDocument/2006/math">
+                      <m:sSub>
+                        <m:sSubPr>
+                          <m:ctrlPr>
+                            <a:rPr lang="en-US" sz="2000" b="0" i="1" smtClean="0">
+                              <a:solidFill>
+                                <a:srgbClr val="3AE657"/>
+                              </a:solidFill>
+                              <a:latin typeface="Cambria Math" panose="02040503050406030204" pitchFamily="18" charset="0"/>
+                            </a:rPr>
+                          </m:ctrlPr>
+                        </m:sSubPr>
+                        <m:e>
+                          <m:r>
+                            <a:rPr lang="en-US" sz="2000" b="0" i="1" smtClean="0">
+                              <a:solidFill>
+                                <a:srgbClr val="3AE657"/>
+                              </a:solidFill>
+                              <a:latin typeface="Cambria Math" panose="02040503050406030204" pitchFamily="18" charset="0"/>
+                            </a:rPr>
+                            <m:t>−</m:t>
+                          </m:r>
+                          <m:r>
+                            <a:rPr lang="en-US" sz="2000" i="1" smtClean="0">
+                              <a:solidFill>
+                                <a:srgbClr val="3AE657"/>
+                              </a:solidFill>
+                              <a:latin typeface="Cambria Math" panose="02040503050406030204" pitchFamily="18" charset="0"/>
+                            </a:rPr>
+                            <m:t>𝑡</m:t>
+                          </m:r>
+                        </m:e>
+                        <m:sub>
+                          <m:r>
+                            <a:rPr lang="en-US" sz="2000" b="0" i="1" smtClean="0">
+                              <a:solidFill>
+                                <a:srgbClr val="3AE657"/>
+                              </a:solidFill>
+                              <a:latin typeface="Cambria Math" panose="02040503050406030204" pitchFamily="18" charset="0"/>
+                            </a:rPr>
+                            <m:t>𝐶</m:t>
+                          </m:r>
+                        </m:sub>
+                      </m:sSub>
+                    </m:oMath>
+                  </m:oMathPara>
+                </a14:m>
+                <a:endParaRPr lang="sv-SE" dirty="0"/>
+              </a:p>
+            </p:txBody>
+          </p:sp>
+        </mc:Choice>
+        <mc:Fallback xmlns="">
+          <p:sp>
+            <p:nvSpPr>
+              <p:cNvPr id="44" name="TextBox 43"/>
+              <p:cNvSpPr txBox="1">
+                <a:spLocks noRot="1" noChangeAspect="1" noMove="1" noResize="1" noEditPoints="1" noAdjustHandles="1" noChangeArrowheads="1" noChangeShapeType="1" noTextEdit="1"/>
+              </p:cNvSpPr>
+              <p:nvPr/>
+            </p:nvSpPr>
+            <p:spPr>
+              <a:xfrm>
+                <a:off x="-1435691" y="15112516"/>
+                <a:ext cx="533928" cy="400110"/>
+              </a:xfrm>
+              <a:prstGeom prst="rect">
+                <a:avLst/>
+              </a:prstGeom>
+              <a:blipFill>
+                <a:blip r:embed="rId3"/>
+                <a:stretch>
+                  <a:fillRect r="-4545"/>
+                </a:stretch>
+              </a:blipFill>
+            </p:spPr>
+            <p:txBody>
+              <a:bodyPr/>
+              <a:lstStyle/>
+              <a:p>
+                <a:r>
+                  <a:rPr lang="sv-SE">
+                    <a:noFill/>
+                  </a:rPr>
+                  <a:t> </a:t>
+                </a:r>
+              </a:p>
+            </p:txBody>
+          </p:sp>
+        </mc:Fallback>
+      </mc:AlternateContent>
       <p:sp>
         <p:nvSpPr>
-          <p:cNvPr id="4" name="TextBox 3"/>
+          <p:cNvPr id="58" name="TextBox 57"/>
           <p:cNvSpPr txBox="1"/>
           <p:nvPr/>
         </p:nvSpPr>
         <p:spPr>
           <a:xfrm>
-            <a:off x="4683760" y="93325"/>
-            <a:ext cx="3180080" cy="461665"/>
+            <a:off x="3448396" y="2572614"/>
+            <a:ext cx="545691" cy="461665"/>
           </a:xfrm>
           <a:prstGeom prst="rect">
             <a:avLst/>
@@ -13694,29 +14040,106 @@
           <a:lstStyle/>
           <a:p>
             <a:r>
-              <a:rPr lang="sv-SE" sz="2400" b="1" dirty="0" err="1" smtClean="0">
-                <a:latin typeface="Times New Roman" panose="02020603050405020304" pitchFamily="18" charset="0"/>
-                <a:cs typeface="Times New Roman" panose="02020603050405020304" pitchFamily="18" charset="0"/>
-              </a:rPr>
-              <a:t>Single</a:t>
-            </a:r>
-            <a:r>
-              <a:rPr lang="sv-SE" sz="2400" b="1" dirty="0" smtClean="0">
-                <a:latin typeface="Times New Roman" panose="02020603050405020304" pitchFamily="18" charset="0"/>
-                <a:cs typeface="Times New Roman" panose="02020603050405020304" pitchFamily="18" charset="0"/>
-              </a:rPr>
-              <a:t> Carrier Signal </a:t>
-            </a:r>
-            <a:endParaRPr lang="sv-SE" sz="2400" b="1" dirty="0">
-              <a:latin typeface="Times New Roman" panose="02020603050405020304" pitchFamily="18" charset="0"/>
-              <a:cs typeface="Times New Roman" panose="02020603050405020304" pitchFamily="18" charset="0"/>
-            </a:endParaRPr>
+              <a:rPr lang="en-US" sz="2400" dirty="0" smtClean="0"/>
+              <a:t>(a)</a:t>
+            </a:r>
+            <a:endParaRPr lang="sv-SE" sz="2400" dirty="0"/>
+          </a:p>
+        </p:txBody>
+      </p:sp>
+      <p:sp>
+        <p:nvSpPr>
+          <p:cNvPr id="59" name="TextBox 58"/>
+          <p:cNvSpPr txBox="1"/>
+          <p:nvPr/>
+        </p:nvSpPr>
+        <p:spPr>
+          <a:xfrm>
+            <a:off x="8684455" y="2552902"/>
+            <a:ext cx="545691" cy="461665"/>
+          </a:xfrm>
+          <a:prstGeom prst="rect">
+            <a:avLst/>
+          </a:prstGeom>
+          <a:noFill/>
+        </p:spPr>
+        <p:txBody>
+          <a:bodyPr wrap="square" rtlCol="0">
+            <a:spAutoFit/>
+          </a:bodyPr>
+          <a:lstStyle/>
+          <a:p>
+            <a:r>
+              <a:rPr lang="en-US" sz="2400" dirty="0" smtClean="0"/>
+              <a:t>(b)</a:t>
+            </a:r>
+            <a:endParaRPr lang="sv-SE" sz="2400" dirty="0"/>
+          </a:p>
+        </p:txBody>
+      </p:sp>
+      <p:sp>
+        <p:nvSpPr>
+          <p:cNvPr id="60" name="TextBox 59"/>
+          <p:cNvSpPr txBox="1"/>
+          <p:nvPr/>
+        </p:nvSpPr>
+        <p:spPr>
+          <a:xfrm>
+            <a:off x="3448395" y="6914505"/>
+            <a:ext cx="545691" cy="461665"/>
+          </a:xfrm>
+          <a:prstGeom prst="rect">
+            <a:avLst/>
+          </a:prstGeom>
+          <a:noFill/>
+        </p:spPr>
+        <p:txBody>
+          <a:bodyPr wrap="square" rtlCol="0">
+            <a:spAutoFit/>
+          </a:bodyPr>
+          <a:lstStyle/>
+          <a:p>
+            <a:r>
+              <a:rPr lang="en-US" sz="2400" dirty="0" smtClean="0"/>
+              <a:t>(c)</a:t>
+            </a:r>
+            <a:endParaRPr lang="sv-SE" sz="2400" dirty="0"/>
+          </a:p>
+        </p:txBody>
+      </p:sp>
+      <p:sp>
+        <p:nvSpPr>
+          <p:cNvPr id="62" name="TextBox 61"/>
+          <p:cNvSpPr txBox="1"/>
+          <p:nvPr/>
+        </p:nvSpPr>
+        <p:spPr>
+          <a:xfrm>
+            <a:off x="8684454" y="6945091"/>
+            <a:ext cx="545691" cy="461665"/>
+          </a:xfrm>
+          <a:prstGeom prst="rect">
+            <a:avLst/>
+          </a:prstGeom>
+          <a:noFill/>
+        </p:spPr>
+        <p:txBody>
+          <a:bodyPr wrap="square" rtlCol="0">
+            <a:spAutoFit/>
+          </a:bodyPr>
+          <a:lstStyle/>
+          <a:p>
+            <a:r>
+              <a:rPr lang="en-US" sz="2400" dirty="0" smtClean="0"/>
+              <a:t>(d)</a:t>
+            </a:r>
+            <a:endParaRPr lang="sv-SE" sz="2400" dirty="0"/>
           </a:p>
         </p:txBody>
       </p:sp>
       <p:pic>
         <p:nvPicPr>
-          <p:cNvPr id="6" name="Picture 5"/>
+          <p:cNvPr id="4" name="Picture 3"/>
           <p:cNvPicPr>
             <a:picLocks noChangeAspect="1"/>
           </p:cNvPicPr>
@@ -13730,8 +14153,32 @@
         </p:blipFill>
         <p:spPr>
           <a:xfrm>
-            <a:off x="1584959" y="3926225"/>
-            <a:ext cx="4071593" cy="3053695"/>
+            <a:off x="674849" y="-1467977"/>
+            <a:ext cx="5334000" cy="4000500"/>
+          </a:xfrm>
+          <a:prstGeom prst="rect">
+            <a:avLst/>
+          </a:prstGeom>
+        </p:spPr>
+      </p:pic>
+      <p:pic>
+        <p:nvPicPr>
+          <p:cNvPr id="7" name="Picture 6"/>
+          <p:cNvPicPr>
+            <a:picLocks noChangeAspect="1"/>
+          </p:cNvPicPr>
+          <p:nvPr/>
+        </p:nvPicPr>
+        <p:blipFill>
+          <a:blip r:embed="rId5"/>
+          <a:stretch>
+            <a:fillRect/>
+          </a:stretch>
+        </p:blipFill>
+        <p:spPr>
+          <a:xfrm>
+            <a:off x="6115397" y="-1397317"/>
+            <a:ext cx="5334000" cy="4000500"/>
           </a:xfrm>
           <a:prstGeom prst="rect">
             <a:avLst/>
@@ -13747,61 +14194,49 @@
           <p:nvPr/>
         </p:nvPicPr>
         <p:blipFill>
-          <a:blip r:embed="rId5"/>
+          <a:blip r:embed="rId6"/>
           <a:stretch>
             <a:fillRect/>
           </a:stretch>
         </p:blipFill>
         <p:spPr>
           <a:xfrm>
-            <a:off x="6375399" y="3926225"/>
-            <a:ext cx="4055533" cy="3041650"/>
+            <a:off x="611901" y="2803446"/>
+            <a:ext cx="5334000" cy="4000500"/>
           </a:xfrm>
           <a:prstGeom prst="rect">
             <a:avLst/>
           </a:prstGeom>
         </p:spPr>
       </p:pic>
-      <p:sp>
-        <p:nvSpPr>
-          <p:cNvPr id="9" name="TextBox 8"/>
-          <p:cNvSpPr txBox="1"/>
-          <p:nvPr/>
-        </p:nvSpPr>
-        <p:spPr>
-          <a:xfrm>
-            <a:off x="3357878" y="3540760"/>
-            <a:ext cx="7073054" cy="461665"/>
+      <p:pic>
+        <p:nvPicPr>
+          <p:cNvPr id="10" name="Picture 9"/>
+          <p:cNvPicPr>
+            <a:picLocks noChangeAspect="1"/>
+          </p:cNvPicPr>
+          <p:nvPr/>
+        </p:nvPicPr>
+        <p:blipFill>
+          <a:blip r:embed="rId7"/>
+          <a:stretch>
+            <a:fillRect/>
+          </a:stretch>
+        </p:blipFill>
+        <p:spPr>
+          <a:xfrm>
+            <a:off x="6115397" y="2803446"/>
+            <a:ext cx="5334000" cy="4000500"/>
           </a:xfrm>
           <a:prstGeom prst="rect">
             <a:avLst/>
           </a:prstGeom>
-          <a:noFill/>
-        </p:spPr>
-        <p:txBody>
-          <a:bodyPr wrap="square" rtlCol="0">
-            <a:spAutoFit/>
-          </a:bodyPr>
-          <a:lstStyle/>
-          <a:p>
-            <a:r>
-              <a:rPr lang="sv-SE" sz="2400" b="1" dirty="0" smtClean="0">
-                <a:latin typeface="Times New Roman" panose="02020603050405020304" pitchFamily="18" charset="0"/>
-                <a:cs typeface="Times New Roman" panose="02020603050405020304" pitchFamily="18" charset="0"/>
-              </a:rPr>
-              <a:t>Multi-Carrier Signals CPS- 0-120-240</a:t>
-            </a:r>
-            <a:endParaRPr lang="sv-SE" sz="2400" b="1" dirty="0">
-              <a:latin typeface="Times New Roman" panose="02020603050405020304" pitchFamily="18" charset="0"/>
-              <a:cs typeface="Times New Roman" panose="02020603050405020304" pitchFamily="18" charset="0"/>
-            </a:endParaRPr>
-          </a:p>
-        </p:txBody>
-      </p:sp>
+        </p:spPr>
+      </p:pic>
     </p:spTree>
     <p:extLst>
       <p:ext uri="{BB962C8B-B14F-4D97-AF65-F5344CB8AC3E}">
-        <p14:creationId xmlns:p14="http://schemas.microsoft.com/office/powerpoint/2010/main" val="918334070"/>
+        <p14:creationId xmlns:p14="http://schemas.microsoft.com/office/powerpoint/2010/main" val="1109817906"/>
       </p:ext>
     </p:extLst>
   </p:cSld>
@@ -14712,64 +15147,137 @@
           <a:chExt cx="0" cy="0"/>
         </a:xfrm>
       </p:grpSpPr>
-      <p:pic>
-        <p:nvPicPr>
-          <p:cNvPr id="5" name="Picture 4"/>
-          <p:cNvPicPr>
-            <a:picLocks noChangeAspect="1"/>
-          </p:cNvPicPr>
-          <p:nvPr/>
-        </p:nvPicPr>
-        <p:blipFill>
-          <a:blip r:embed="rId3"/>
-          <a:stretch>
-            <a:fillRect/>
-          </a:stretch>
-        </p:blipFill>
-        <p:spPr>
-          <a:xfrm>
-            <a:off x="1488439" y="3708400"/>
-            <a:ext cx="4199467" cy="3149600"/>
-          </a:xfrm>
-          <a:prstGeom prst="rect">
-            <a:avLst/>
-          </a:prstGeom>
-        </p:spPr>
-      </p:pic>
-      <p:pic>
-        <p:nvPicPr>
-          <p:cNvPr id="7" name="Picture 6"/>
-          <p:cNvPicPr>
-            <a:picLocks noChangeAspect="1"/>
-          </p:cNvPicPr>
-          <p:nvPr/>
-        </p:nvPicPr>
-        <p:blipFill>
-          <a:blip r:embed="rId4"/>
-          <a:stretch>
-            <a:fillRect/>
-          </a:stretch>
-        </p:blipFill>
-        <p:spPr>
-          <a:xfrm>
-            <a:off x="6436358" y="3825875"/>
-            <a:ext cx="4042833" cy="3032125"/>
-          </a:xfrm>
-          <a:prstGeom prst="rect">
-            <a:avLst/>
-          </a:prstGeom>
-        </p:spPr>
-      </p:pic>
+      <mc:AlternateContent xmlns:mc="http://schemas.openxmlformats.org/markup-compatibility/2006" xmlns:a14="http://schemas.microsoft.com/office/drawing/2010/main">
+        <mc:Choice Requires="a14">
+          <p:sp>
+            <p:nvSpPr>
+              <p:cNvPr id="44" name="TextBox 43"/>
+              <p:cNvSpPr txBox="1"/>
+              <p:nvPr/>
+            </p:nvSpPr>
+            <p:spPr>
+              <a:xfrm>
+                <a:off x="-1435691" y="15112516"/>
+                <a:ext cx="533928" cy="400110"/>
+              </a:xfrm>
+              <a:prstGeom prst="rect">
+                <a:avLst/>
+              </a:prstGeom>
+              <a:noFill/>
+            </p:spPr>
+            <p:txBody>
+              <a:bodyPr wrap="square" rtlCol="0">
+                <a:spAutoFit/>
+              </a:bodyPr>
+              <a:lstStyle/>
+              <a:p>
+                <a:pPr/>
+                <a14:m>
+                  <m:oMathPara xmlns:m="http://schemas.openxmlformats.org/officeDocument/2006/math">
+                    <m:oMathParaPr>
+                      <m:jc m:val="centerGroup"/>
+                    </m:oMathParaPr>
+                    <m:oMath xmlns:m="http://schemas.openxmlformats.org/officeDocument/2006/math">
+                      <m:sSub>
+                        <m:sSubPr>
+                          <m:ctrlPr>
+                            <a:rPr lang="en-US" sz="2000" b="0" i="1" smtClean="0">
+                              <a:solidFill>
+                                <a:srgbClr val="3AE657"/>
+                              </a:solidFill>
+                              <a:latin typeface="Cambria Math" panose="02040503050406030204" pitchFamily="18" charset="0"/>
+                            </a:rPr>
+                          </m:ctrlPr>
+                        </m:sSubPr>
+                        <m:e>
+                          <m:r>
+                            <a:rPr lang="en-US" sz="2000" b="0" i="1" smtClean="0">
+                              <a:solidFill>
+                                <a:srgbClr val="3AE657"/>
+                              </a:solidFill>
+                              <a:latin typeface="Cambria Math" panose="02040503050406030204" pitchFamily="18" charset="0"/>
+                            </a:rPr>
+                            <m:t>−</m:t>
+                          </m:r>
+                          <m:r>
+                            <a:rPr lang="en-US" sz="2000" i="1" smtClean="0">
+                              <a:solidFill>
+                                <a:srgbClr val="3AE657"/>
+                              </a:solidFill>
+                              <a:latin typeface="Cambria Math" panose="02040503050406030204" pitchFamily="18" charset="0"/>
+                            </a:rPr>
+                            <m:t>𝑡</m:t>
+                          </m:r>
+                        </m:e>
+                        <m:sub>
+                          <m:r>
+                            <a:rPr lang="en-US" sz="2000" b="0" i="1" smtClean="0">
+                              <a:solidFill>
+                                <a:srgbClr val="3AE657"/>
+                              </a:solidFill>
+                              <a:latin typeface="Cambria Math" panose="02040503050406030204" pitchFamily="18" charset="0"/>
+                            </a:rPr>
+                            <m:t>𝐶</m:t>
+                          </m:r>
+                        </m:sub>
+                      </m:sSub>
+                    </m:oMath>
+                  </m:oMathPara>
+                </a14:m>
+                <a:endParaRPr lang="sv-SE" dirty="0"/>
+              </a:p>
+            </p:txBody>
+          </p:sp>
+        </mc:Choice>
+        <mc:Fallback xmlns="">
+          <p:sp>
+            <p:nvSpPr>
+              <p:cNvPr id="44" name="TextBox 43"/>
+              <p:cNvSpPr txBox="1">
+                <a:spLocks noRot="1" noChangeAspect="1" noMove="1" noResize="1" noEditPoints="1" noAdjustHandles="1" noChangeArrowheads="1" noChangeShapeType="1" noTextEdit="1"/>
+              </p:cNvSpPr>
+              <p:nvPr/>
+            </p:nvSpPr>
+            <p:spPr>
+              <a:xfrm>
+                <a:off x="-1435691" y="15112516"/>
+                <a:ext cx="533928" cy="400110"/>
+              </a:xfrm>
+              <a:prstGeom prst="rect">
+                <a:avLst/>
+              </a:prstGeom>
+              <a:blipFill>
+                <a:blip r:embed="rId3"/>
+                <a:stretch>
+                  <a:fillRect r="-4545"/>
+                </a:stretch>
+              </a:blipFill>
+            </p:spPr>
+            <p:txBody>
+              <a:bodyPr/>
+              <a:lstStyle/>
+              <a:p>
+                <a:r>
+                  <a:rPr lang="sv-SE">
+                    <a:noFill/>
+                  </a:rPr>
+                  <a:t> </a:t>
+                </a:r>
+              </a:p>
+            </p:txBody>
+          </p:sp>
+        </mc:Fallback>
+      </mc:AlternateContent>
       <p:sp>
         <p:nvSpPr>
-          <p:cNvPr id="6" name="TextBox 5"/>
+          <p:cNvPr id="58" name="TextBox 57"/>
           <p:cNvSpPr txBox="1"/>
           <p:nvPr/>
         </p:nvSpPr>
         <p:spPr>
           <a:xfrm>
-            <a:off x="721360" y="116840"/>
-            <a:ext cx="10881360" cy="461665"/>
+            <a:off x="3448396" y="2572614"/>
+            <a:ext cx="545691" cy="461665"/>
           </a:xfrm>
           <a:prstGeom prst="rect">
             <a:avLst/>
@@ -14783,44 +15291,100 @@
           <a:lstStyle/>
           <a:p>
             <a:r>
-              <a:rPr lang="sv-SE" sz="2400" b="1" dirty="0" smtClean="0">
-                <a:latin typeface="Times New Roman" panose="02020603050405020304" pitchFamily="18" charset="0"/>
-                <a:cs typeface="Times New Roman" panose="02020603050405020304" pitchFamily="18" charset="0"/>
-              </a:rPr>
-              <a:t>Multi-Carrier Signals (</a:t>
-            </a:r>
-            <a:r>
-              <a:rPr lang="sv-SE" sz="2400" b="1" dirty="0" err="1" smtClean="0">
-                <a:latin typeface="Times New Roman" panose="02020603050405020304" pitchFamily="18" charset="0"/>
-                <a:cs typeface="Times New Roman" panose="02020603050405020304" pitchFamily="18" charset="0"/>
-              </a:rPr>
-              <a:t>Variable</a:t>
-            </a:r>
-            <a:r>
-              <a:rPr lang="sv-SE" sz="2400" b="1" dirty="0" smtClean="0">
-                <a:latin typeface="Times New Roman" panose="02020603050405020304" pitchFamily="18" charset="0"/>
-                <a:cs typeface="Times New Roman" panose="02020603050405020304" pitchFamily="18" charset="0"/>
-              </a:rPr>
-              <a:t> CPS- Fundamental Component </a:t>
-            </a:r>
-            <a:r>
-              <a:rPr lang="sv-SE" sz="2400" b="1" dirty="0" err="1" smtClean="0">
-                <a:latin typeface="Times New Roman" panose="02020603050405020304" pitchFamily="18" charset="0"/>
-                <a:cs typeface="Times New Roman" panose="02020603050405020304" pitchFamily="18" charset="0"/>
-              </a:rPr>
-              <a:t>Reduction</a:t>
-            </a:r>
-            <a:r>
-              <a:rPr lang="sv-SE" sz="2400" b="1" dirty="0" smtClean="0">
-                <a:latin typeface="Times New Roman" panose="02020603050405020304" pitchFamily="18" charset="0"/>
-                <a:cs typeface="Times New Roman" panose="02020603050405020304" pitchFamily="18" charset="0"/>
-              </a:rPr>
-              <a:t>)</a:t>
-            </a:r>
-            <a:endParaRPr lang="sv-SE" sz="2400" b="1" dirty="0">
-              <a:latin typeface="Times New Roman" panose="02020603050405020304" pitchFamily="18" charset="0"/>
-              <a:cs typeface="Times New Roman" panose="02020603050405020304" pitchFamily="18" charset="0"/>
-            </a:endParaRPr>
+              <a:rPr lang="en-US" sz="2400" dirty="0" smtClean="0"/>
+              <a:t>(a)</a:t>
+            </a:r>
+            <a:endParaRPr lang="sv-SE" sz="2400" dirty="0"/>
+          </a:p>
+        </p:txBody>
+      </p:sp>
+      <p:sp>
+        <p:nvSpPr>
+          <p:cNvPr id="59" name="TextBox 58"/>
+          <p:cNvSpPr txBox="1"/>
+          <p:nvPr/>
+        </p:nvSpPr>
+        <p:spPr>
+          <a:xfrm>
+            <a:off x="8684455" y="2552902"/>
+            <a:ext cx="545691" cy="461665"/>
+          </a:xfrm>
+          <a:prstGeom prst="rect">
+            <a:avLst/>
+          </a:prstGeom>
+          <a:noFill/>
+        </p:spPr>
+        <p:txBody>
+          <a:bodyPr wrap="square" rtlCol="0">
+            <a:spAutoFit/>
+          </a:bodyPr>
+          <a:lstStyle/>
+          <a:p>
+            <a:r>
+              <a:rPr lang="en-US" sz="2400" dirty="0" smtClean="0"/>
+              <a:t>(b)</a:t>
+            </a:r>
+            <a:endParaRPr lang="sv-SE" sz="2400" dirty="0"/>
+          </a:p>
+        </p:txBody>
+      </p:sp>
+      <p:sp>
+        <p:nvSpPr>
+          <p:cNvPr id="60" name="TextBox 59"/>
+          <p:cNvSpPr txBox="1"/>
+          <p:nvPr/>
+        </p:nvSpPr>
+        <p:spPr>
+          <a:xfrm>
+            <a:off x="3448395" y="6914505"/>
+            <a:ext cx="545691" cy="461665"/>
+          </a:xfrm>
+          <a:prstGeom prst="rect">
+            <a:avLst/>
+          </a:prstGeom>
+          <a:noFill/>
+        </p:spPr>
+        <p:txBody>
+          <a:bodyPr wrap="square" rtlCol="0">
+            <a:spAutoFit/>
+          </a:bodyPr>
+          <a:lstStyle/>
+          <a:p>
+            <a:r>
+              <a:rPr lang="en-US" sz="2400" dirty="0" smtClean="0"/>
+              <a:t>(c)</a:t>
+            </a:r>
+            <a:endParaRPr lang="sv-SE" sz="2400" dirty="0"/>
+          </a:p>
+        </p:txBody>
+      </p:sp>
+      <p:sp>
+        <p:nvSpPr>
+          <p:cNvPr id="62" name="TextBox 61"/>
+          <p:cNvSpPr txBox="1"/>
+          <p:nvPr/>
+        </p:nvSpPr>
+        <p:spPr>
+          <a:xfrm>
+            <a:off x="8684454" y="6914504"/>
+            <a:ext cx="545691" cy="461665"/>
+          </a:xfrm>
+          <a:prstGeom prst="rect">
+            <a:avLst/>
+          </a:prstGeom>
+          <a:noFill/>
+        </p:spPr>
+        <p:txBody>
+          <a:bodyPr wrap="square" rtlCol="0">
+            <a:spAutoFit/>
+          </a:bodyPr>
+          <a:lstStyle/>
+          <a:p>
+            <a:r>
+              <a:rPr lang="en-US" sz="2400" dirty="0" smtClean="0"/>
+              <a:t>(d)</a:t>
+            </a:r>
+            <a:endParaRPr lang="sv-SE" sz="2400" dirty="0"/>
           </a:p>
         </p:txBody>
       </p:sp>
@@ -14833,6 +15397,30 @@
           <p:nvPr/>
         </p:nvPicPr>
         <p:blipFill>
+          <a:blip r:embed="rId4"/>
+          <a:stretch>
+            <a:fillRect/>
+          </a:stretch>
+        </p:blipFill>
+        <p:spPr>
+          <a:xfrm>
+            <a:off x="674849" y="-1467977"/>
+            <a:ext cx="5334000" cy="4000500"/>
+          </a:xfrm>
+          <a:prstGeom prst="rect">
+            <a:avLst/>
+          </a:prstGeom>
+        </p:spPr>
+      </p:pic>
+      <p:pic>
+        <p:nvPicPr>
+          <p:cNvPr id="7" name="Picture 6"/>
+          <p:cNvPicPr>
+            <a:picLocks noChangeAspect="1"/>
+          </p:cNvPicPr>
+          <p:nvPr/>
+        </p:nvPicPr>
+        <p:blipFill>
           <a:blip r:embed="rId5"/>
           <a:stretch>
             <a:fillRect/>
@@ -14840,8 +15428,8 @@
         </p:blipFill>
         <p:spPr>
           <a:xfrm>
-            <a:off x="1594272" y="447040"/>
-            <a:ext cx="3987800" cy="2990850"/>
+            <a:off x="6115397" y="-1397317"/>
+            <a:ext cx="5334000" cy="4000500"/>
           </a:xfrm>
           <a:prstGeom prst="rect">
             <a:avLst/>
@@ -14850,7 +15438,7 @@
       </p:pic>
       <p:pic>
         <p:nvPicPr>
-          <p:cNvPr id="8" name="Picture 7"/>
+          <p:cNvPr id="10" name="Picture 9"/>
           <p:cNvPicPr>
             <a:picLocks noChangeAspect="1"/>
           </p:cNvPicPr>
@@ -14864,110 +15452,42 @@
         </p:blipFill>
         <p:spPr>
           <a:xfrm>
-            <a:off x="6436358" y="447040"/>
-            <a:ext cx="3987800" cy="2990850"/>
+            <a:off x="6115397" y="2803446"/>
+            <a:ext cx="5334000" cy="4000500"/>
           </a:xfrm>
           <a:prstGeom prst="rect">
             <a:avLst/>
           </a:prstGeom>
         </p:spPr>
       </p:pic>
-      <p:sp>
-        <p:nvSpPr>
-          <p:cNvPr id="9" name="TextBox 8"/>
-          <p:cNvSpPr txBox="1"/>
-          <p:nvPr/>
-        </p:nvSpPr>
-        <p:spPr>
-          <a:xfrm>
-            <a:off x="721360" y="3342313"/>
-            <a:ext cx="10881360" cy="461665"/>
+      <p:pic>
+        <p:nvPicPr>
+          <p:cNvPr id="3" name="Picture 2"/>
+          <p:cNvPicPr>
+            <a:picLocks noChangeAspect="1"/>
+          </p:cNvPicPr>
+          <p:nvPr/>
+        </p:nvPicPr>
+        <p:blipFill>
+          <a:blip r:embed="rId7"/>
+          <a:stretch>
+            <a:fillRect/>
+          </a:stretch>
+        </p:blipFill>
+        <p:spPr>
+          <a:xfrm>
+            <a:off x="674849" y="2723264"/>
+            <a:ext cx="5334000" cy="4000500"/>
           </a:xfrm>
           <a:prstGeom prst="rect">
             <a:avLst/>
           </a:prstGeom>
-          <a:noFill/>
-        </p:spPr>
-        <p:txBody>
-          <a:bodyPr wrap="square" rtlCol="0">
-            <a:spAutoFit/>
-          </a:bodyPr>
-          <a:lstStyle/>
-          <a:p>
-            <a:r>
-              <a:rPr lang="sv-SE" sz="2400" b="1" dirty="0" smtClean="0">
-                <a:latin typeface="Times New Roman" panose="02020603050405020304" pitchFamily="18" charset="0"/>
-                <a:cs typeface="Times New Roman" panose="02020603050405020304" pitchFamily="18" charset="0"/>
-              </a:rPr>
-              <a:t>Multi-Carrier Signals (DC </a:t>
-            </a:r>
-            <a:r>
-              <a:rPr lang="sv-SE" sz="2400" b="1" dirty="0" err="1" smtClean="0">
-                <a:latin typeface="Times New Roman" panose="02020603050405020304" pitchFamily="18" charset="0"/>
-                <a:cs typeface="Times New Roman" panose="02020603050405020304" pitchFamily="18" charset="0"/>
-              </a:rPr>
-              <a:t>injected</a:t>
-            </a:r>
-            <a:r>
-              <a:rPr lang="sv-SE" sz="2400" b="1" dirty="0" smtClean="0">
-                <a:latin typeface="Times New Roman" panose="02020603050405020304" pitchFamily="18" charset="0"/>
-                <a:cs typeface="Times New Roman" panose="02020603050405020304" pitchFamily="18" charset="0"/>
-              </a:rPr>
-              <a:t>- </a:t>
-            </a:r>
-            <a:r>
-              <a:rPr lang="sv-SE" sz="2400" b="1" dirty="0" err="1" smtClean="0">
-                <a:latin typeface="Times New Roman" panose="02020603050405020304" pitchFamily="18" charset="0"/>
-                <a:cs typeface="Times New Roman" panose="02020603050405020304" pitchFamily="18" charset="0"/>
-              </a:rPr>
-              <a:t>Variable</a:t>
-            </a:r>
-            <a:r>
-              <a:rPr lang="sv-SE" sz="2400" b="1" dirty="0" smtClean="0">
-                <a:latin typeface="Times New Roman" panose="02020603050405020304" pitchFamily="18" charset="0"/>
-                <a:cs typeface="Times New Roman" panose="02020603050405020304" pitchFamily="18" charset="0"/>
-              </a:rPr>
-              <a:t> CPS- Total </a:t>
-            </a:r>
-            <a:r>
-              <a:rPr lang="sv-SE" sz="2400" b="1" dirty="0" err="1" smtClean="0">
-                <a:latin typeface="Times New Roman" panose="02020603050405020304" pitchFamily="18" charset="0"/>
-                <a:cs typeface="Times New Roman" panose="02020603050405020304" pitchFamily="18" charset="0"/>
-              </a:rPr>
-              <a:t>Harmonic</a:t>
-            </a:r>
-            <a:r>
-              <a:rPr lang="sv-SE" sz="2400" b="1" dirty="0" smtClean="0">
-                <a:latin typeface="Times New Roman" panose="02020603050405020304" pitchFamily="18" charset="0"/>
-                <a:cs typeface="Times New Roman" panose="02020603050405020304" pitchFamily="18" charset="0"/>
-              </a:rPr>
-              <a:t> </a:t>
-            </a:r>
-            <a:r>
-              <a:rPr lang="sv-SE" sz="2400" b="1" dirty="0" err="1" smtClean="0">
-                <a:latin typeface="Times New Roman" panose="02020603050405020304" pitchFamily="18" charset="0"/>
-                <a:cs typeface="Times New Roman" panose="02020603050405020304" pitchFamily="18" charset="0"/>
-              </a:rPr>
-              <a:t>Reduction</a:t>
-            </a:r>
-            <a:r>
-              <a:rPr lang="sv-SE" sz="2400" b="1" dirty="0" smtClean="0">
-                <a:latin typeface="Times New Roman" panose="02020603050405020304" pitchFamily="18" charset="0"/>
-                <a:cs typeface="Times New Roman" panose="02020603050405020304" pitchFamily="18" charset="0"/>
-              </a:rPr>
-              <a:t>)</a:t>
-            </a:r>
-            <a:endParaRPr lang="sv-SE" sz="2400" b="1" dirty="0">
-              <a:latin typeface="Times New Roman" panose="02020603050405020304" pitchFamily="18" charset="0"/>
-              <a:cs typeface="Times New Roman" panose="02020603050405020304" pitchFamily="18" charset="0"/>
-            </a:endParaRPr>
-          </a:p>
-        </p:txBody>
-      </p:sp>
+        </p:spPr>
+      </p:pic>
     </p:spTree>
     <p:extLst>
       <p:ext uri="{BB962C8B-B14F-4D97-AF65-F5344CB8AC3E}">
-        <p14:creationId xmlns:p14="http://schemas.microsoft.com/office/powerpoint/2010/main" val="456135894"/>
+        <p14:creationId xmlns:p14="http://schemas.microsoft.com/office/powerpoint/2010/main" val="3766389758"/>
       </p:ext>
     </p:extLst>
   </p:cSld>
@@ -14994,47 +15514,9 @@
           <a:chExt cx="0" cy="0"/>
         </a:xfrm>
       </p:grpSpPr>
-      <p:sp>
-        <p:nvSpPr>
-          <p:cNvPr id="5" name="TextBox 4"/>
-          <p:cNvSpPr txBox="1"/>
-          <p:nvPr/>
-        </p:nvSpPr>
-        <p:spPr>
-          <a:xfrm>
-            <a:off x="4683760" y="0"/>
-            <a:ext cx="3281680" cy="707886"/>
-          </a:xfrm>
-          <a:prstGeom prst="rect">
-            <a:avLst/>
-          </a:prstGeom>
-          <a:noFill/>
-        </p:spPr>
-        <p:txBody>
-          <a:bodyPr wrap="square" rtlCol="0">
-            <a:spAutoFit/>
-          </a:bodyPr>
-          <a:lstStyle/>
-          <a:p>
-            <a:r>
-              <a:rPr lang="en-US" sz="4000" dirty="0" smtClean="0">
-                <a:solidFill>
-                  <a:srgbClr val="C00000"/>
-                </a:solidFill>
-              </a:rPr>
-              <a:t>Non-Idealities</a:t>
-            </a:r>
-            <a:endParaRPr lang="sv-SE" sz="4000" dirty="0">
-              <a:solidFill>
-                <a:srgbClr val="C00000"/>
-              </a:solidFill>
-            </a:endParaRPr>
-          </a:p>
-        </p:txBody>
-      </p:sp>
       <p:pic>
         <p:nvPicPr>
-          <p:cNvPr id="9" name="Picture 8"/>
+          <p:cNvPr id="2" name="Picture 1"/>
           <p:cNvPicPr>
             <a:picLocks noChangeAspect="1"/>
           </p:cNvPicPr>
@@ -15048,8 +15530,8 @@
         </p:blipFill>
         <p:spPr>
           <a:xfrm>
-            <a:off x="6343649" y="786922"/>
-            <a:ext cx="5547997" cy="4160998"/>
+            <a:off x="1584959" y="554990"/>
+            <a:ext cx="4055533" cy="3041650"/>
           </a:xfrm>
           <a:prstGeom prst="rect">
             <a:avLst/>
@@ -15058,7 +15540,7 @@
       </p:pic>
       <p:pic>
         <p:nvPicPr>
-          <p:cNvPr id="10" name="Picture 9"/>
+          <p:cNvPr id="3" name="Picture 2"/>
           <p:cNvPicPr>
             <a:picLocks noChangeAspect="1"/>
           </p:cNvPicPr>
@@ -15072,18 +15554,145 @@
         </p:blipFill>
         <p:spPr>
           <a:xfrm>
-            <a:off x="274320" y="786922"/>
-            <a:ext cx="5832476" cy="4374357"/>
+            <a:off x="6375399" y="554990"/>
+            <a:ext cx="4055533" cy="3041650"/>
           </a:xfrm>
           <a:prstGeom prst="rect">
             <a:avLst/>
           </a:prstGeom>
         </p:spPr>
       </p:pic>
+      <p:sp>
+        <p:nvSpPr>
+          <p:cNvPr id="4" name="TextBox 3"/>
+          <p:cNvSpPr txBox="1"/>
+          <p:nvPr/>
+        </p:nvSpPr>
+        <p:spPr>
+          <a:xfrm>
+            <a:off x="4683760" y="93325"/>
+            <a:ext cx="3180080" cy="461665"/>
+          </a:xfrm>
+          <a:prstGeom prst="rect">
+            <a:avLst/>
+          </a:prstGeom>
+          <a:noFill/>
+        </p:spPr>
+        <p:txBody>
+          <a:bodyPr wrap="square" rtlCol="0">
+            <a:spAutoFit/>
+          </a:bodyPr>
+          <a:lstStyle/>
+          <a:p>
+            <a:r>
+              <a:rPr lang="sv-SE" sz="2400" b="1" dirty="0" err="1" smtClean="0">
+                <a:latin typeface="Times New Roman" panose="02020603050405020304" pitchFamily="18" charset="0"/>
+                <a:cs typeface="Times New Roman" panose="02020603050405020304" pitchFamily="18" charset="0"/>
+              </a:rPr>
+              <a:t>Single</a:t>
+            </a:r>
+            <a:r>
+              <a:rPr lang="sv-SE" sz="2400" b="1" dirty="0" smtClean="0">
+                <a:latin typeface="Times New Roman" panose="02020603050405020304" pitchFamily="18" charset="0"/>
+                <a:cs typeface="Times New Roman" panose="02020603050405020304" pitchFamily="18" charset="0"/>
+              </a:rPr>
+              <a:t> Carrier Signal </a:t>
+            </a:r>
+            <a:endParaRPr lang="sv-SE" sz="2400" b="1" dirty="0">
+              <a:latin typeface="Times New Roman" panose="02020603050405020304" pitchFamily="18" charset="0"/>
+              <a:cs typeface="Times New Roman" panose="02020603050405020304" pitchFamily="18" charset="0"/>
+            </a:endParaRPr>
+          </a:p>
+        </p:txBody>
+      </p:sp>
+      <p:pic>
+        <p:nvPicPr>
+          <p:cNvPr id="6" name="Picture 5"/>
+          <p:cNvPicPr>
+            <a:picLocks noChangeAspect="1"/>
+          </p:cNvPicPr>
+          <p:nvPr/>
+        </p:nvPicPr>
+        <p:blipFill>
+          <a:blip r:embed="rId4"/>
+          <a:stretch>
+            <a:fillRect/>
+          </a:stretch>
+        </p:blipFill>
+        <p:spPr>
+          <a:xfrm>
+            <a:off x="1584959" y="3926225"/>
+            <a:ext cx="4071593" cy="3053695"/>
+          </a:xfrm>
+          <a:prstGeom prst="rect">
+            <a:avLst/>
+          </a:prstGeom>
+        </p:spPr>
+      </p:pic>
+      <p:pic>
+        <p:nvPicPr>
+          <p:cNvPr id="8" name="Picture 7"/>
+          <p:cNvPicPr>
+            <a:picLocks noChangeAspect="1"/>
+          </p:cNvPicPr>
+          <p:nvPr/>
+        </p:nvPicPr>
+        <p:blipFill>
+          <a:blip r:embed="rId5"/>
+          <a:stretch>
+            <a:fillRect/>
+          </a:stretch>
+        </p:blipFill>
+        <p:spPr>
+          <a:xfrm>
+            <a:off x="6375399" y="3926225"/>
+            <a:ext cx="4055533" cy="3041650"/>
+          </a:xfrm>
+          <a:prstGeom prst="rect">
+            <a:avLst/>
+          </a:prstGeom>
+        </p:spPr>
+      </p:pic>
+      <p:sp>
+        <p:nvSpPr>
+          <p:cNvPr id="9" name="TextBox 8"/>
+          <p:cNvSpPr txBox="1"/>
+          <p:nvPr/>
+        </p:nvSpPr>
+        <p:spPr>
+          <a:xfrm>
+            <a:off x="3357878" y="3540760"/>
+            <a:ext cx="7073054" cy="461665"/>
+          </a:xfrm>
+          <a:prstGeom prst="rect">
+            <a:avLst/>
+          </a:prstGeom>
+          <a:noFill/>
+        </p:spPr>
+        <p:txBody>
+          <a:bodyPr wrap="square" rtlCol="0">
+            <a:spAutoFit/>
+          </a:bodyPr>
+          <a:lstStyle/>
+          <a:p>
+            <a:r>
+              <a:rPr lang="sv-SE" sz="2400" b="1" dirty="0" smtClean="0">
+                <a:latin typeface="Times New Roman" panose="02020603050405020304" pitchFamily="18" charset="0"/>
+                <a:cs typeface="Times New Roman" panose="02020603050405020304" pitchFamily="18" charset="0"/>
+              </a:rPr>
+              <a:t>Multi-Carrier Signals CPS- 0-120-240</a:t>
+            </a:r>
+            <a:endParaRPr lang="sv-SE" sz="2400" b="1" dirty="0">
+              <a:latin typeface="Times New Roman" panose="02020603050405020304" pitchFamily="18" charset="0"/>
+              <a:cs typeface="Times New Roman" panose="02020603050405020304" pitchFamily="18" charset="0"/>
+            </a:endParaRPr>
+          </a:p>
+        </p:txBody>
+      </p:sp>
     </p:spTree>
     <p:extLst>
       <p:ext uri="{BB962C8B-B14F-4D97-AF65-F5344CB8AC3E}">
-        <p14:creationId xmlns:p14="http://schemas.microsoft.com/office/powerpoint/2010/main" val="102751297"/>
+        <p14:creationId xmlns:p14="http://schemas.microsoft.com/office/powerpoint/2010/main" val="918334070"/>
       </p:ext>
     </p:extLst>
   </p:cSld>
@@ -15110,16 +15719,64 @@
           <a:chExt cx="0" cy="0"/>
         </a:xfrm>
       </p:grpSpPr>
+      <p:pic>
+        <p:nvPicPr>
+          <p:cNvPr id="5" name="Picture 4"/>
+          <p:cNvPicPr>
+            <a:picLocks noChangeAspect="1"/>
+          </p:cNvPicPr>
+          <p:nvPr/>
+        </p:nvPicPr>
+        <p:blipFill>
+          <a:blip r:embed="rId3"/>
+          <a:stretch>
+            <a:fillRect/>
+          </a:stretch>
+        </p:blipFill>
+        <p:spPr>
+          <a:xfrm>
+            <a:off x="1488439" y="3708400"/>
+            <a:ext cx="4199467" cy="3149600"/>
+          </a:xfrm>
+          <a:prstGeom prst="rect">
+            <a:avLst/>
+          </a:prstGeom>
+        </p:spPr>
+      </p:pic>
+      <p:pic>
+        <p:nvPicPr>
+          <p:cNvPr id="7" name="Picture 6"/>
+          <p:cNvPicPr>
+            <a:picLocks noChangeAspect="1"/>
+          </p:cNvPicPr>
+          <p:nvPr/>
+        </p:nvPicPr>
+        <p:blipFill>
+          <a:blip r:embed="rId4"/>
+          <a:stretch>
+            <a:fillRect/>
+          </a:stretch>
+        </p:blipFill>
+        <p:spPr>
+          <a:xfrm>
+            <a:off x="6436358" y="3825875"/>
+            <a:ext cx="4042833" cy="3032125"/>
+          </a:xfrm>
+          <a:prstGeom prst="rect">
+            <a:avLst/>
+          </a:prstGeom>
+        </p:spPr>
+      </p:pic>
       <p:sp>
         <p:nvSpPr>
-          <p:cNvPr id="5" name="TextBox 4"/>
+          <p:cNvPr id="6" name="TextBox 5"/>
           <p:cNvSpPr txBox="1"/>
           <p:nvPr/>
         </p:nvSpPr>
         <p:spPr>
           <a:xfrm>
-            <a:off x="4653280" y="213360"/>
-            <a:ext cx="2621280" cy="707886"/>
+            <a:off x="721360" y="116840"/>
+            <a:ext cx="10881360" cy="461665"/>
           </a:xfrm>
           <a:prstGeom prst="rect">
             <a:avLst/>
@@ -15133,31 +15790,105 @@
           <a:lstStyle/>
           <a:p>
             <a:r>
-              <a:rPr lang="en-US" sz="4000" dirty="0" smtClean="0">
-                <a:solidFill>
-                  <a:srgbClr val="C00000"/>
-                </a:solidFill>
+              <a:rPr lang="sv-SE" sz="2400" b="1" dirty="0" smtClean="0">
+                <a:latin typeface="Times New Roman" panose="02020603050405020304" pitchFamily="18" charset="0"/>
+                <a:cs typeface="Times New Roman" panose="02020603050405020304" pitchFamily="18" charset="0"/>
               </a:rPr>
-              <a:t>Drawbacks</a:t>
-            </a:r>
-            <a:endParaRPr lang="sv-SE" sz="4000" dirty="0">
-              <a:solidFill>
-                <a:srgbClr val="C00000"/>
-              </a:solidFill>
+              <a:t>Multi-Carrier Signals (</a:t>
+            </a:r>
+            <a:r>
+              <a:rPr lang="sv-SE" sz="2400" b="1" dirty="0" err="1" smtClean="0">
+                <a:latin typeface="Times New Roman" panose="02020603050405020304" pitchFamily="18" charset="0"/>
+                <a:cs typeface="Times New Roman" panose="02020603050405020304" pitchFamily="18" charset="0"/>
+              </a:rPr>
+              <a:t>Variable</a:t>
+            </a:r>
+            <a:r>
+              <a:rPr lang="sv-SE" sz="2400" b="1" dirty="0" smtClean="0">
+                <a:latin typeface="Times New Roman" panose="02020603050405020304" pitchFamily="18" charset="0"/>
+                <a:cs typeface="Times New Roman" panose="02020603050405020304" pitchFamily="18" charset="0"/>
+              </a:rPr>
+              <a:t> CPS- Fundamental Component </a:t>
+            </a:r>
+            <a:r>
+              <a:rPr lang="sv-SE" sz="2400" b="1" dirty="0" err="1" smtClean="0">
+                <a:latin typeface="Times New Roman" panose="02020603050405020304" pitchFamily="18" charset="0"/>
+                <a:cs typeface="Times New Roman" panose="02020603050405020304" pitchFamily="18" charset="0"/>
+              </a:rPr>
+              <a:t>Reduction</a:t>
+            </a:r>
+            <a:r>
+              <a:rPr lang="sv-SE" sz="2400" b="1" dirty="0" smtClean="0">
+                <a:latin typeface="Times New Roman" panose="02020603050405020304" pitchFamily="18" charset="0"/>
+                <a:cs typeface="Times New Roman" panose="02020603050405020304" pitchFamily="18" charset="0"/>
+              </a:rPr>
+              <a:t>)</a:t>
+            </a:r>
+            <a:endParaRPr lang="sv-SE" sz="2400" b="1" dirty="0">
+              <a:latin typeface="Times New Roman" panose="02020603050405020304" pitchFamily="18" charset="0"/>
+              <a:cs typeface="Times New Roman" panose="02020603050405020304" pitchFamily="18" charset="0"/>
             </a:endParaRPr>
           </a:p>
         </p:txBody>
       </p:sp>
+      <p:pic>
+        <p:nvPicPr>
+          <p:cNvPr id="4" name="Picture 3"/>
+          <p:cNvPicPr>
+            <a:picLocks noChangeAspect="1"/>
+          </p:cNvPicPr>
+          <p:nvPr/>
+        </p:nvPicPr>
+        <p:blipFill>
+          <a:blip r:embed="rId5"/>
+          <a:stretch>
+            <a:fillRect/>
+          </a:stretch>
+        </p:blipFill>
+        <p:spPr>
+          <a:xfrm>
+            <a:off x="1594272" y="447040"/>
+            <a:ext cx="3987800" cy="2990850"/>
+          </a:xfrm>
+          <a:prstGeom prst="rect">
+            <a:avLst/>
+          </a:prstGeom>
+        </p:spPr>
+      </p:pic>
+      <p:pic>
+        <p:nvPicPr>
+          <p:cNvPr id="8" name="Picture 7"/>
+          <p:cNvPicPr>
+            <a:picLocks noChangeAspect="1"/>
+          </p:cNvPicPr>
+          <p:nvPr/>
+        </p:nvPicPr>
+        <p:blipFill>
+          <a:blip r:embed="rId6"/>
+          <a:stretch>
+            <a:fillRect/>
+          </a:stretch>
+        </p:blipFill>
+        <p:spPr>
+          <a:xfrm>
+            <a:off x="6436358" y="447040"/>
+            <a:ext cx="3987800" cy="2990850"/>
+          </a:xfrm>
+          <a:prstGeom prst="rect">
+            <a:avLst/>
+          </a:prstGeom>
+        </p:spPr>
+      </p:pic>
       <p:sp>
         <p:nvSpPr>
-          <p:cNvPr id="6" name="TextBox 5"/>
+          <p:cNvPr id="9" name="TextBox 8"/>
           <p:cNvSpPr txBox="1"/>
           <p:nvPr/>
         </p:nvSpPr>
         <p:spPr>
           <a:xfrm>
-            <a:off x="856621" y="921246"/>
-            <a:ext cx="10556240" cy="1477328"/>
+            <a:off x="721360" y="3342313"/>
+            <a:ext cx="10881360" cy="461665"/>
           </a:xfrm>
           <a:prstGeom prst="rect">
             <a:avLst/>
@@ -15170,231 +15901,70 @@
           </a:bodyPr>
           <a:lstStyle/>
           <a:p>
-            <a:pPr marL="285750" indent="-285750">
-              <a:buFont typeface="Arial" panose="020B0604020202020204" pitchFamily="34" charset="0"/>
-              <a:buChar char="•"/>
-            </a:pPr>
-            <a:r>
-              <a:rPr lang="en-US" dirty="0" smtClean="0">
+            <a:r>
+              <a:rPr lang="sv-SE" sz="2400" b="1" dirty="0" smtClean="0">
                 <a:latin typeface="Times New Roman" panose="02020603050405020304" pitchFamily="18" charset="0"/>
                 <a:cs typeface="Times New Roman" panose="02020603050405020304" pitchFamily="18" charset="0"/>
               </a:rPr>
-              <a:t>The maximum modulation is limited to 2/3 due to DC injection.</a:t>
-            </a:r>
-          </a:p>
-          <a:p>
-            <a:pPr marL="285750" indent="-285750">
-              <a:buFont typeface="Arial" panose="020B0604020202020204" pitchFamily="34" charset="0"/>
-              <a:buChar char="•"/>
-            </a:pPr>
-            <a:endParaRPr lang="en-US" dirty="0">
-              <a:latin typeface="Times New Roman" panose="02020603050405020304" pitchFamily="18" charset="0"/>
-              <a:cs typeface="Times New Roman" panose="02020603050405020304" pitchFamily="18" charset="0"/>
-            </a:endParaRPr>
-          </a:p>
-          <a:p>
-            <a:pPr marL="285750" indent="-285750">
-              <a:buFont typeface="Arial" panose="020B0604020202020204" pitchFamily="34" charset="0"/>
-              <a:buChar char="•"/>
-            </a:pPr>
-            <a:r>
-              <a:rPr lang="en-US" dirty="0" smtClean="0">
+              <a:t>Multi-Carrier Signals (DC </a:t>
+            </a:r>
+            <a:r>
+              <a:rPr lang="sv-SE" sz="2400" b="1" dirty="0" err="1" smtClean="0">
                 <a:latin typeface="Times New Roman" panose="02020603050405020304" pitchFamily="18" charset="0"/>
                 <a:cs typeface="Times New Roman" panose="02020603050405020304" pitchFamily="18" charset="0"/>
               </a:rPr>
-              <a:t>Implementation is difficult due to delay time of practical components and other </a:t>
-            </a:r>
-            <a:r>
-              <a:rPr lang="en-US" dirty="0" err="1" smtClean="0">
+              <a:t>injected</a:t>
+            </a:r>
+            <a:r>
+              <a:rPr lang="sv-SE" sz="2400" b="1" dirty="0" smtClean="0">
                 <a:latin typeface="Times New Roman" panose="02020603050405020304" pitchFamily="18" charset="0"/>
                 <a:cs typeface="Times New Roman" panose="02020603050405020304" pitchFamily="18" charset="0"/>
               </a:rPr>
-              <a:t>nonidealities</a:t>
-            </a:r>
-            <a:r>
-              <a:rPr lang="en-US" dirty="0" smtClean="0">
+              <a:t>- </a:t>
+            </a:r>
+            <a:r>
+              <a:rPr lang="sv-SE" sz="2400" b="1" dirty="0" err="1" smtClean="0">
                 <a:latin typeface="Times New Roman" panose="02020603050405020304" pitchFamily="18" charset="0"/>
                 <a:cs typeface="Times New Roman" panose="02020603050405020304" pitchFamily="18" charset="0"/>
               </a:rPr>
-              <a:t>.</a:t>
-            </a:r>
-          </a:p>
-          <a:p>
-            <a:endParaRPr lang="en-US" dirty="0">
-              <a:latin typeface="Times New Roman" panose="02020603050405020304" pitchFamily="18" charset="0"/>
-              <a:cs typeface="Times New Roman" panose="02020603050405020304" pitchFamily="18" charset="0"/>
-            </a:endParaRPr>
-          </a:p>
-          <a:p>
-            <a:pPr marL="285750" indent="-285750">
-              <a:buFont typeface="Arial" panose="020B0604020202020204" pitchFamily="34" charset="0"/>
-              <a:buChar char="•"/>
-            </a:pPr>
-            <a:endParaRPr lang="en-US" dirty="0" smtClean="0">
-              <a:latin typeface="Times New Roman" panose="02020603050405020304" pitchFamily="18" charset="0"/>
-              <a:cs typeface="Times New Roman" panose="02020603050405020304" pitchFamily="18" charset="0"/>
-            </a:endParaRPr>
-          </a:p>
-        </p:txBody>
-      </p:sp>
-      <p:sp>
-        <p:nvSpPr>
-          <p:cNvPr id="7" name="TextBox 6"/>
-          <p:cNvSpPr txBox="1"/>
-          <p:nvPr/>
-        </p:nvSpPr>
-        <p:spPr>
-          <a:xfrm>
-            <a:off x="3416941" y="2153245"/>
-            <a:ext cx="5435600" cy="707886"/>
-          </a:xfrm>
-          <a:prstGeom prst="rect">
-            <a:avLst/>
-          </a:prstGeom>
-          <a:noFill/>
-        </p:spPr>
-        <p:txBody>
-          <a:bodyPr wrap="square" rtlCol="0">
-            <a:spAutoFit/>
-          </a:bodyPr>
-          <a:lstStyle/>
-          <a:p>
-            <a:r>
-              <a:rPr lang="en-US" sz="4000" dirty="0" smtClean="0">
-                <a:solidFill>
-                  <a:srgbClr val="C00000"/>
-                </a:solidFill>
-              </a:rPr>
-              <a:t>Further Investigation</a:t>
-            </a:r>
-            <a:endParaRPr lang="sv-SE" sz="4000" dirty="0">
-              <a:solidFill>
-                <a:srgbClr val="C00000"/>
-              </a:solidFill>
-            </a:endParaRPr>
-          </a:p>
-        </p:txBody>
-      </p:sp>
-      <p:sp>
-        <p:nvSpPr>
-          <p:cNvPr id="12" name="TextBox 11"/>
-          <p:cNvSpPr txBox="1"/>
-          <p:nvPr/>
-        </p:nvSpPr>
-        <p:spPr>
-          <a:xfrm>
-            <a:off x="958221" y="3197086"/>
-            <a:ext cx="10556240" cy="2031325"/>
-          </a:xfrm>
-          <a:prstGeom prst="rect">
-            <a:avLst/>
-          </a:prstGeom>
-          <a:noFill/>
-        </p:spPr>
-        <p:txBody>
-          <a:bodyPr wrap="square" rtlCol="0">
-            <a:spAutoFit/>
-          </a:bodyPr>
-          <a:lstStyle/>
-          <a:p>
-            <a:pPr marL="285750" indent="-285750">
-              <a:buFont typeface="Arial" panose="020B0604020202020204" pitchFamily="34" charset="0"/>
-              <a:buChar char="•"/>
-            </a:pPr>
-            <a:r>
-              <a:rPr lang="en-US" dirty="0" smtClean="0">
+              <a:t>Variable</a:t>
+            </a:r>
+            <a:r>
+              <a:rPr lang="sv-SE" sz="2400" b="1" dirty="0" smtClean="0">
                 <a:latin typeface="Times New Roman" panose="02020603050405020304" pitchFamily="18" charset="0"/>
                 <a:cs typeface="Times New Roman" panose="02020603050405020304" pitchFamily="18" charset="0"/>
               </a:rPr>
-              <a:t>SVPWM or third harmonic injection to increase DC-link utilization.</a:t>
-            </a:r>
-          </a:p>
-          <a:p>
-            <a:pPr marL="285750" indent="-285750">
-              <a:buFont typeface="Arial" panose="020B0604020202020204" pitchFamily="34" charset="0"/>
-              <a:buChar char="•"/>
-            </a:pPr>
-            <a:endParaRPr lang="en-US" dirty="0">
-              <a:latin typeface="Times New Roman" panose="02020603050405020304" pitchFamily="18" charset="0"/>
-              <a:cs typeface="Times New Roman" panose="02020603050405020304" pitchFamily="18" charset="0"/>
-            </a:endParaRPr>
-          </a:p>
-          <a:p>
-            <a:pPr marL="285750" indent="-285750">
-              <a:buFont typeface="Arial" panose="020B0604020202020204" pitchFamily="34" charset="0"/>
-              <a:buChar char="•"/>
-            </a:pPr>
-            <a:r>
-              <a:rPr lang="en-US" dirty="0" smtClean="0">
+              <a:t> CPS- Total </a:t>
+            </a:r>
+            <a:r>
+              <a:rPr lang="sv-SE" sz="2400" b="1" dirty="0" err="1" smtClean="0">
                 <a:latin typeface="Times New Roman" panose="02020603050405020304" pitchFamily="18" charset="0"/>
                 <a:cs typeface="Times New Roman" panose="02020603050405020304" pitchFamily="18" charset="0"/>
               </a:rPr>
-              <a:t>Constant dv/</a:t>
-            </a:r>
-            <a:r>
-              <a:rPr lang="en-US" dirty="0" err="1" smtClean="0">
+              <a:t>Harmonic</a:t>
+            </a:r>
+            <a:r>
+              <a:rPr lang="sv-SE" sz="2400" b="1" dirty="0" smtClean="0">
                 <a:latin typeface="Times New Roman" panose="02020603050405020304" pitchFamily="18" charset="0"/>
                 <a:cs typeface="Times New Roman" panose="02020603050405020304" pitchFamily="18" charset="0"/>
               </a:rPr>
-              <a:t>dt</a:t>
-            </a:r>
-            <a:r>
-              <a:rPr lang="en-US" dirty="0" smtClean="0">
+              <a:t> </a:t>
+            </a:r>
+            <a:r>
+              <a:rPr lang="sv-SE" sz="2400" b="1" dirty="0" err="1" smtClean="0">
                 <a:latin typeface="Times New Roman" panose="02020603050405020304" pitchFamily="18" charset="0"/>
                 <a:cs typeface="Times New Roman" panose="02020603050405020304" pitchFamily="18" charset="0"/>
               </a:rPr>
-              <a:t> for both turn-on and turn-off transition. (Variable gate resistance)</a:t>
-            </a:r>
-          </a:p>
-          <a:p>
-            <a:pPr marL="285750" indent="-285750">
-              <a:buFont typeface="Arial" panose="020B0604020202020204" pitchFamily="34" charset="0"/>
-              <a:buChar char="•"/>
-            </a:pPr>
-            <a:endParaRPr lang="en-US" dirty="0">
-              <a:latin typeface="Times New Roman" panose="02020603050405020304" pitchFamily="18" charset="0"/>
-              <a:cs typeface="Times New Roman" panose="02020603050405020304" pitchFamily="18" charset="0"/>
-            </a:endParaRPr>
-          </a:p>
-          <a:p>
-            <a:pPr marL="285750" indent="-285750">
-              <a:buFont typeface="Arial" panose="020B0604020202020204" pitchFamily="34" charset="0"/>
-              <a:buChar char="•"/>
-            </a:pPr>
-            <a:r>
-              <a:rPr lang="en-US" dirty="0" smtClean="0">
+              <a:t>Reduction</a:t>
+            </a:r>
+            <a:r>
+              <a:rPr lang="sv-SE" sz="2400" b="1" dirty="0" smtClean="0">
                 <a:latin typeface="Times New Roman" panose="02020603050405020304" pitchFamily="18" charset="0"/>
                 <a:cs typeface="Times New Roman" panose="02020603050405020304" pitchFamily="18" charset="0"/>
               </a:rPr>
-              <a:t>Enhanced mathematical model including dead time, different dv/</a:t>
-            </a:r>
-            <a:r>
-              <a:rPr lang="en-US" dirty="0" err="1" smtClean="0">
-                <a:latin typeface="Times New Roman" panose="02020603050405020304" pitchFamily="18" charset="0"/>
-                <a:cs typeface="Times New Roman" panose="02020603050405020304" pitchFamily="18" charset="0"/>
-              </a:rPr>
-              <a:t>dt</a:t>
-            </a:r>
-            <a:r>
-              <a:rPr lang="en-US" dirty="0" smtClean="0">
-                <a:latin typeface="Times New Roman" panose="02020603050405020304" pitchFamily="18" charset="0"/>
-                <a:cs typeface="Times New Roman" panose="02020603050405020304" pitchFamily="18" charset="0"/>
-              </a:rPr>
-              <a:t> effect (different loading).</a:t>
-            </a:r>
-          </a:p>
-          <a:p>
-            <a:endParaRPr lang="en-US" dirty="0">
-              <a:latin typeface="Times New Roman" panose="02020603050405020304" pitchFamily="18" charset="0"/>
-              <a:cs typeface="Times New Roman" panose="02020603050405020304" pitchFamily="18" charset="0"/>
-            </a:endParaRPr>
-          </a:p>
-          <a:p>
-            <a:pPr marL="285750" indent="-285750">
-              <a:buFont typeface="Arial" panose="020B0604020202020204" pitchFamily="34" charset="0"/>
-              <a:buChar char="•"/>
-            </a:pPr>
-            <a:endParaRPr lang="en-US" dirty="0" smtClean="0">
+              <a:t>)</a:t>
+            </a:r>
+            <a:endParaRPr lang="sv-SE" sz="2400" b="1" dirty="0">
               <a:latin typeface="Times New Roman" panose="02020603050405020304" pitchFamily="18" charset="0"/>
               <a:cs typeface="Times New Roman" panose="02020603050405020304" pitchFamily="18" charset="0"/>
             </a:endParaRPr>
@@ -15404,7 +15974,7 @@
     </p:spTree>
     <p:extLst>
       <p:ext uri="{BB962C8B-B14F-4D97-AF65-F5344CB8AC3E}">
-        <p14:creationId xmlns:p14="http://schemas.microsoft.com/office/powerpoint/2010/main" val="3992381661"/>
+        <p14:creationId xmlns:p14="http://schemas.microsoft.com/office/powerpoint/2010/main" val="456135894"/>
       </p:ext>
     </p:extLst>
   </p:cSld>
@@ -15433,6 +16003,443 @@
       </p:grpSpPr>
       <p:sp>
         <p:nvSpPr>
+          <p:cNvPr id="5" name="TextBox 4"/>
+          <p:cNvSpPr txBox="1"/>
+          <p:nvPr/>
+        </p:nvSpPr>
+        <p:spPr>
+          <a:xfrm>
+            <a:off x="4683760" y="0"/>
+            <a:ext cx="3281680" cy="707886"/>
+          </a:xfrm>
+          <a:prstGeom prst="rect">
+            <a:avLst/>
+          </a:prstGeom>
+          <a:noFill/>
+        </p:spPr>
+        <p:txBody>
+          <a:bodyPr wrap="square" rtlCol="0">
+            <a:spAutoFit/>
+          </a:bodyPr>
+          <a:lstStyle/>
+          <a:p>
+            <a:r>
+              <a:rPr lang="en-US" sz="4000" dirty="0" smtClean="0">
+                <a:solidFill>
+                  <a:srgbClr val="C00000"/>
+                </a:solidFill>
+              </a:rPr>
+              <a:t>Non-Idealities</a:t>
+            </a:r>
+            <a:endParaRPr lang="sv-SE" sz="4000" dirty="0">
+              <a:solidFill>
+                <a:srgbClr val="C00000"/>
+              </a:solidFill>
+            </a:endParaRPr>
+          </a:p>
+        </p:txBody>
+      </p:sp>
+      <p:pic>
+        <p:nvPicPr>
+          <p:cNvPr id="9" name="Picture 8"/>
+          <p:cNvPicPr>
+            <a:picLocks noChangeAspect="1"/>
+          </p:cNvPicPr>
+          <p:nvPr/>
+        </p:nvPicPr>
+        <p:blipFill>
+          <a:blip r:embed="rId2"/>
+          <a:stretch>
+            <a:fillRect/>
+          </a:stretch>
+        </p:blipFill>
+        <p:spPr>
+          <a:xfrm>
+            <a:off x="6343649" y="786922"/>
+            <a:ext cx="5547997" cy="4160998"/>
+          </a:xfrm>
+          <a:prstGeom prst="rect">
+            <a:avLst/>
+          </a:prstGeom>
+        </p:spPr>
+      </p:pic>
+      <p:pic>
+        <p:nvPicPr>
+          <p:cNvPr id="10" name="Picture 9"/>
+          <p:cNvPicPr>
+            <a:picLocks noChangeAspect="1"/>
+          </p:cNvPicPr>
+          <p:nvPr/>
+        </p:nvPicPr>
+        <p:blipFill>
+          <a:blip r:embed="rId3"/>
+          <a:stretch>
+            <a:fillRect/>
+          </a:stretch>
+        </p:blipFill>
+        <p:spPr>
+          <a:xfrm>
+            <a:off x="274320" y="786922"/>
+            <a:ext cx="5832476" cy="4374357"/>
+          </a:xfrm>
+          <a:prstGeom prst="rect">
+            <a:avLst/>
+          </a:prstGeom>
+        </p:spPr>
+      </p:pic>
+    </p:spTree>
+    <p:extLst>
+      <p:ext uri="{BB962C8B-B14F-4D97-AF65-F5344CB8AC3E}">
+        <p14:creationId xmlns:p14="http://schemas.microsoft.com/office/powerpoint/2010/main" val="102751297"/>
+      </p:ext>
+    </p:extLst>
+  </p:cSld>
+  <p:clrMapOvr>
+    <a:masterClrMapping/>
+  </p:clrMapOvr>
+</p:sld>
+</file>
+
+<file path=ppt/slides/slide24.xml><?xml version="1.0" encoding="utf-8"?>
+<p:sld xmlns:a="http://schemas.openxmlformats.org/drawingml/2006/main" xmlns:r="http://schemas.openxmlformats.org/officeDocument/2006/relationships" xmlns:p="http://schemas.openxmlformats.org/presentationml/2006/main">
+  <p:cSld>
+    <p:spTree>
+      <p:nvGrpSpPr>
+        <p:cNvPr id="1" name=""/>
+        <p:cNvGrpSpPr/>
+        <p:nvPr/>
+      </p:nvGrpSpPr>
+      <p:grpSpPr>
+        <a:xfrm>
+          <a:off x="0" y="0"/>
+          <a:ext cx="0" cy="0"/>
+          <a:chOff x="0" y="0"/>
+          <a:chExt cx="0" cy="0"/>
+        </a:xfrm>
+      </p:grpSpPr>
+      <p:sp>
+        <p:nvSpPr>
+          <p:cNvPr id="5" name="TextBox 4"/>
+          <p:cNvSpPr txBox="1"/>
+          <p:nvPr/>
+        </p:nvSpPr>
+        <p:spPr>
+          <a:xfrm>
+            <a:off x="4653280" y="213360"/>
+            <a:ext cx="2621280" cy="707886"/>
+          </a:xfrm>
+          <a:prstGeom prst="rect">
+            <a:avLst/>
+          </a:prstGeom>
+          <a:noFill/>
+        </p:spPr>
+        <p:txBody>
+          <a:bodyPr wrap="square" rtlCol="0">
+            <a:spAutoFit/>
+          </a:bodyPr>
+          <a:lstStyle/>
+          <a:p>
+            <a:r>
+              <a:rPr lang="en-US" sz="4000" dirty="0" smtClean="0">
+                <a:solidFill>
+                  <a:srgbClr val="C00000"/>
+                </a:solidFill>
+              </a:rPr>
+              <a:t>Drawbacks</a:t>
+            </a:r>
+            <a:endParaRPr lang="sv-SE" sz="4000" dirty="0">
+              <a:solidFill>
+                <a:srgbClr val="C00000"/>
+              </a:solidFill>
+            </a:endParaRPr>
+          </a:p>
+        </p:txBody>
+      </p:sp>
+      <p:sp>
+        <p:nvSpPr>
+          <p:cNvPr id="6" name="TextBox 5"/>
+          <p:cNvSpPr txBox="1"/>
+          <p:nvPr/>
+        </p:nvSpPr>
+        <p:spPr>
+          <a:xfrm>
+            <a:off x="856621" y="921246"/>
+            <a:ext cx="10556240" cy="1477328"/>
+          </a:xfrm>
+          <a:prstGeom prst="rect">
+            <a:avLst/>
+          </a:prstGeom>
+          <a:noFill/>
+        </p:spPr>
+        <p:txBody>
+          <a:bodyPr wrap="square" rtlCol="0">
+            <a:spAutoFit/>
+          </a:bodyPr>
+          <a:lstStyle/>
+          <a:p>
+            <a:pPr marL="285750" indent="-285750">
+              <a:buFont typeface="Arial" panose="020B0604020202020204" pitchFamily="34" charset="0"/>
+              <a:buChar char="•"/>
+            </a:pPr>
+            <a:r>
+              <a:rPr lang="en-US" dirty="0" smtClean="0">
+                <a:latin typeface="Times New Roman" panose="02020603050405020304" pitchFamily="18" charset="0"/>
+                <a:cs typeface="Times New Roman" panose="02020603050405020304" pitchFamily="18" charset="0"/>
+              </a:rPr>
+              <a:t>The maximum modulation is limited to 2/3 due to DC injection.</a:t>
+            </a:r>
+          </a:p>
+          <a:p>
+            <a:pPr marL="285750" indent="-285750">
+              <a:buFont typeface="Arial" panose="020B0604020202020204" pitchFamily="34" charset="0"/>
+              <a:buChar char="•"/>
+            </a:pPr>
+            <a:endParaRPr lang="en-US" dirty="0">
+              <a:latin typeface="Times New Roman" panose="02020603050405020304" pitchFamily="18" charset="0"/>
+              <a:cs typeface="Times New Roman" panose="02020603050405020304" pitchFamily="18" charset="0"/>
+            </a:endParaRPr>
+          </a:p>
+          <a:p>
+            <a:pPr marL="285750" indent="-285750">
+              <a:buFont typeface="Arial" panose="020B0604020202020204" pitchFamily="34" charset="0"/>
+              <a:buChar char="•"/>
+            </a:pPr>
+            <a:r>
+              <a:rPr lang="en-US" dirty="0" smtClean="0">
+                <a:latin typeface="Times New Roman" panose="02020603050405020304" pitchFamily="18" charset="0"/>
+                <a:cs typeface="Times New Roman" panose="02020603050405020304" pitchFamily="18" charset="0"/>
+              </a:rPr>
+              <a:t>Implementation is difficult due to delay time of practical components and other </a:t>
+            </a:r>
+            <a:r>
+              <a:rPr lang="en-US" dirty="0" err="1" smtClean="0">
+                <a:latin typeface="Times New Roman" panose="02020603050405020304" pitchFamily="18" charset="0"/>
+                <a:cs typeface="Times New Roman" panose="02020603050405020304" pitchFamily="18" charset="0"/>
+              </a:rPr>
+              <a:t>nonidealities</a:t>
+            </a:r>
+            <a:r>
+              <a:rPr lang="en-US" dirty="0" smtClean="0">
+                <a:latin typeface="Times New Roman" panose="02020603050405020304" pitchFamily="18" charset="0"/>
+                <a:cs typeface="Times New Roman" panose="02020603050405020304" pitchFamily="18" charset="0"/>
+              </a:rPr>
+              <a:t>.</a:t>
+            </a:r>
+          </a:p>
+          <a:p>
+            <a:endParaRPr lang="en-US" dirty="0">
+              <a:latin typeface="Times New Roman" panose="02020603050405020304" pitchFamily="18" charset="0"/>
+              <a:cs typeface="Times New Roman" panose="02020603050405020304" pitchFamily="18" charset="0"/>
+            </a:endParaRPr>
+          </a:p>
+          <a:p>
+            <a:pPr marL="285750" indent="-285750">
+              <a:buFont typeface="Arial" panose="020B0604020202020204" pitchFamily="34" charset="0"/>
+              <a:buChar char="•"/>
+            </a:pPr>
+            <a:endParaRPr lang="en-US" dirty="0" smtClean="0">
+              <a:latin typeface="Times New Roman" panose="02020603050405020304" pitchFamily="18" charset="0"/>
+              <a:cs typeface="Times New Roman" panose="02020603050405020304" pitchFamily="18" charset="0"/>
+            </a:endParaRPr>
+          </a:p>
+        </p:txBody>
+      </p:sp>
+      <p:sp>
+        <p:nvSpPr>
+          <p:cNvPr id="7" name="TextBox 6"/>
+          <p:cNvSpPr txBox="1"/>
+          <p:nvPr/>
+        </p:nvSpPr>
+        <p:spPr>
+          <a:xfrm>
+            <a:off x="3416941" y="2153245"/>
+            <a:ext cx="5435600" cy="707886"/>
+          </a:xfrm>
+          <a:prstGeom prst="rect">
+            <a:avLst/>
+          </a:prstGeom>
+          <a:noFill/>
+        </p:spPr>
+        <p:txBody>
+          <a:bodyPr wrap="square" rtlCol="0">
+            <a:spAutoFit/>
+          </a:bodyPr>
+          <a:lstStyle/>
+          <a:p>
+            <a:r>
+              <a:rPr lang="en-US" sz="4000" dirty="0" smtClean="0">
+                <a:solidFill>
+                  <a:srgbClr val="C00000"/>
+                </a:solidFill>
+              </a:rPr>
+              <a:t>Further Investigation</a:t>
+            </a:r>
+            <a:endParaRPr lang="sv-SE" sz="4000" dirty="0">
+              <a:solidFill>
+                <a:srgbClr val="C00000"/>
+              </a:solidFill>
+            </a:endParaRPr>
+          </a:p>
+        </p:txBody>
+      </p:sp>
+      <p:sp>
+        <p:nvSpPr>
+          <p:cNvPr id="12" name="TextBox 11"/>
+          <p:cNvSpPr txBox="1"/>
+          <p:nvPr/>
+        </p:nvSpPr>
+        <p:spPr>
+          <a:xfrm>
+            <a:off x="958221" y="3197086"/>
+            <a:ext cx="10556240" cy="2031325"/>
+          </a:xfrm>
+          <a:prstGeom prst="rect">
+            <a:avLst/>
+          </a:prstGeom>
+          <a:noFill/>
+        </p:spPr>
+        <p:txBody>
+          <a:bodyPr wrap="square" rtlCol="0">
+            <a:spAutoFit/>
+          </a:bodyPr>
+          <a:lstStyle/>
+          <a:p>
+            <a:pPr marL="285750" indent="-285750">
+              <a:buFont typeface="Arial" panose="020B0604020202020204" pitchFamily="34" charset="0"/>
+              <a:buChar char="•"/>
+            </a:pPr>
+            <a:r>
+              <a:rPr lang="en-US" dirty="0" smtClean="0">
+                <a:latin typeface="Times New Roman" panose="02020603050405020304" pitchFamily="18" charset="0"/>
+                <a:cs typeface="Times New Roman" panose="02020603050405020304" pitchFamily="18" charset="0"/>
+              </a:rPr>
+              <a:t>SVPWM or third harmonic injection to increase DC-link utilization.</a:t>
+            </a:r>
+          </a:p>
+          <a:p>
+            <a:pPr marL="285750" indent="-285750">
+              <a:buFont typeface="Arial" panose="020B0604020202020204" pitchFamily="34" charset="0"/>
+              <a:buChar char="•"/>
+            </a:pPr>
+            <a:endParaRPr lang="en-US" dirty="0">
+              <a:latin typeface="Times New Roman" panose="02020603050405020304" pitchFamily="18" charset="0"/>
+              <a:cs typeface="Times New Roman" panose="02020603050405020304" pitchFamily="18" charset="0"/>
+            </a:endParaRPr>
+          </a:p>
+          <a:p>
+            <a:pPr marL="285750" indent="-285750">
+              <a:buFont typeface="Arial" panose="020B0604020202020204" pitchFamily="34" charset="0"/>
+              <a:buChar char="•"/>
+            </a:pPr>
+            <a:r>
+              <a:rPr lang="en-US" dirty="0" smtClean="0">
+                <a:latin typeface="Times New Roman" panose="02020603050405020304" pitchFamily="18" charset="0"/>
+                <a:cs typeface="Times New Roman" panose="02020603050405020304" pitchFamily="18" charset="0"/>
+              </a:rPr>
+              <a:t>Constant dv/</a:t>
+            </a:r>
+            <a:r>
+              <a:rPr lang="en-US" dirty="0" err="1" smtClean="0">
+                <a:latin typeface="Times New Roman" panose="02020603050405020304" pitchFamily="18" charset="0"/>
+                <a:cs typeface="Times New Roman" panose="02020603050405020304" pitchFamily="18" charset="0"/>
+              </a:rPr>
+              <a:t>dt</a:t>
+            </a:r>
+            <a:r>
+              <a:rPr lang="en-US" dirty="0" smtClean="0">
+                <a:latin typeface="Times New Roman" panose="02020603050405020304" pitchFamily="18" charset="0"/>
+                <a:cs typeface="Times New Roman" panose="02020603050405020304" pitchFamily="18" charset="0"/>
+              </a:rPr>
+              <a:t> for both turn-on and turn-off transition. (Variable gate resistance)</a:t>
+            </a:r>
+          </a:p>
+          <a:p>
+            <a:pPr marL="285750" indent="-285750">
+              <a:buFont typeface="Arial" panose="020B0604020202020204" pitchFamily="34" charset="0"/>
+              <a:buChar char="•"/>
+            </a:pPr>
+            <a:endParaRPr lang="en-US" dirty="0">
+              <a:latin typeface="Times New Roman" panose="02020603050405020304" pitchFamily="18" charset="0"/>
+              <a:cs typeface="Times New Roman" panose="02020603050405020304" pitchFamily="18" charset="0"/>
+            </a:endParaRPr>
+          </a:p>
+          <a:p>
+            <a:pPr marL="285750" indent="-285750">
+              <a:buFont typeface="Arial" panose="020B0604020202020204" pitchFamily="34" charset="0"/>
+              <a:buChar char="•"/>
+            </a:pPr>
+            <a:r>
+              <a:rPr lang="en-US" dirty="0" smtClean="0">
+                <a:latin typeface="Times New Roman" panose="02020603050405020304" pitchFamily="18" charset="0"/>
+                <a:cs typeface="Times New Roman" panose="02020603050405020304" pitchFamily="18" charset="0"/>
+              </a:rPr>
+              <a:t>Enhanced mathematical model including dead time, different dv/</a:t>
+            </a:r>
+            <a:r>
+              <a:rPr lang="en-US" dirty="0" err="1" smtClean="0">
+                <a:latin typeface="Times New Roman" panose="02020603050405020304" pitchFamily="18" charset="0"/>
+                <a:cs typeface="Times New Roman" panose="02020603050405020304" pitchFamily="18" charset="0"/>
+              </a:rPr>
+              <a:t>dt</a:t>
+            </a:r>
+            <a:r>
+              <a:rPr lang="en-US" dirty="0" smtClean="0">
+                <a:latin typeface="Times New Roman" panose="02020603050405020304" pitchFamily="18" charset="0"/>
+                <a:cs typeface="Times New Roman" panose="02020603050405020304" pitchFamily="18" charset="0"/>
+              </a:rPr>
+              <a:t> effect (different loading).</a:t>
+            </a:r>
+          </a:p>
+          <a:p>
+            <a:endParaRPr lang="en-US" dirty="0">
+              <a:latin typeface="Times New Roman" panose="02020603050405020304" pitchFamily="18" charset="0"/>
+              <a:cs typeface="Times New Roman" panose="02020603050405020304" pitchFamily="18" charset="0"/>
+            </a:endParaRPr>
+          </a:p>
+          <a:p>
+            <a:pPr marL="285750" indent="-285750">
+              <a:buFont typeface="Arial" panose="020B0604020202020204" pitchFamily="34" charset="0"/>
+              <a:buChar char="•"/>
+            </a:pPr>
+            <a:endParaRPr lang="en-US" dirty="0" smtClean="0">
+              <a:latin typeface="Times New Roman" panose="02020603050405020304" pitchFamily="18" charset="0"/>
+              <a:cs typeface="Times New Roman" panose="02020603050405020304" pitchFamily="18" charset="0"/>
+            </a:endParaRPr>
+          </a:p>
+        </p:txBody>
+      </p:sp>
+    </p:spTree>
+    <p:extLst>
+      <p:ext uri="{BB962C8B-B14F-4D97-AF65-F5344CB8AC3E}">
+        <p14:creationId xmlns:p14="http://schemas.microsoft.com/office/powerpoint/2010/main" val="3992381661"/>
+      </p:ext>
+    </p:extLst>
+  </p:cSld>
+  <p:clrMapOvr>
+    <a:masterClrMapping/>
+  </p:clrMapOvr>
+</p:sld>
+</file>
+
+<file path=ppt/slides/slide25.xml><?xml version="1.0" encoding="utf-8"?>
+<p:sld xmlns:a="http://schemas.openxmlformats.org/drawingml/2006/main" xmlns:r="http://schemas.openxmlformats.org/officeDocument/2006/relationships" xmlns:p="http://schemas.openxmlformats.org/presentationml/2006/main">
+  <p:cSld>
+    <p:spTree>
+      <p:nvGrpSpPr>
+        <p:cNvPr id="1" name=""/>
+        <p:cNvGrpSpPr/>
+        <p:nvPr/>
+      </p:nvGrpSpPr>
+      <p:grpSpPr>
+        <a:xfrm>
+          <a:off x="0" y="0"/>
+          <a:ext cx="0" cy="0"/>
+          <a:chOff x="0" y="0"/>
+          <a:chExt cx="0" cy="0"/>
+        </a:xfrm>
+      </p:grpSpPr>
+      <p:sp>
+        <p:nvSpPr>
           <p:cNvPr id="5" name="Rounded Rectangle 4"/>
           <p:cNvSpPr/>
           <p:nvPr/>
@@ -15770,8 +16777,8 @@
           </a:fontRef>
         </p:style>
       </p:cxnSp>
-      <mc:AlternateContent xmlns:mc="http://schemas.openxmlformats.org/markup-compatibility/2006">
-        <mc:Choice xmlns:a14="http://schemas.microsoft.com/office/drawing/2010/main" Requires="a14">
+      <mc:AlternateContent xmlns:mc="http://schemas.openxmlformats.org/markup-compatibility/2006" xmlns:a14="http://schemas.microsoft.com/office/drawing/2010/main">
+        <mc:Choice Requires="a14">
           <p:sp>
             <p:nvSpPr>
               <p:cNvPr id="15" name="TextBox 14"/>
@@ -15794,6 +16801,7 @@
               </a:bodyPr>
               <a:lstStyle/>
               <a:p>
+                <a:pPr/>
                 <a14:m>
                   <m:oMathPara xmlns:m="http://schemas.openxmlformats.org/officeDocument/2006/math">
                     <m:oMathParaPr>
@@ -15833,7 +16841,7 @@
             </p:txBody>
           </p:sp>
         </mc:Choice>
-        <mc:Fallback>
+        <mc:Fallback xmlns="">
           <p:sp>
             <p:nvSpPr>
               <p:cNvPr id="15" name="TextBox 14"/>
@@ -16150,7 +17158,7 @@
 </p:sld>
 </file>
 
-<file path=ppt/slides/slide24.xml><?xml version="1.0" encoding="utf-8"?>
+<file path=ppt/slides/slide26.xml><?xml version="1.0" encoding="utf-8"?>
 <p:sld xmlns:a="http://schemas.openxmlformats.org/drawingml/2006/main" xmlns:r="http://schemas.openxmlformats.org/officeDocument/2006/relationships" xmlns:p="http://schemas.openxmlformats.org/presentationml/2006/main">
   <p:cSld>
     <p:spTree>
@@ -16469,7 +17477,7 @@
 </p:sld>
 </file>
 
-<file path=ppt/slides/slide25.xml><?xml version="1.0" encoding="utf-8"?>
+<file path=ppt/slides/slide27.xml><?xml version="1.0" encoding="utf-8"?>
 <p:sld xmlns:a="http://schemas.openxmlformats.org/drawingml/2006/main" xmlns:r="http://schemas.openxmlformats.org/officeDocument/2006/relationships" xmlns:p="http://schemas.openxmlformats.org/presentationml/2006/main">
   <p:cSld>
     <p:spTree>
@@ -16799,7 +17807,7 @@
 </p:sld>
 </file>
 
-<file path=ppt/slides/slide26.xml><?xml version="1.0" encoding="utf-8"?>
+<file path=ppt/slides/slide28.xml><?xml version="1.0" encoding="utf-8"?>
 <p:sld xmlns:a="http://schemas.openxmlformats.org/drawingml/2006/main" xmlns:r="http://schemas.openxmlformats.org/officeDocument/2006/relationships" xmlns:p="http://schemas.openxmlformats.org/presentationml/2006/main">
   <p:cSld>
     <p:spTree>
@@ -24087,8 +25095,8 @@
           </a:fontRef>
         </p:style>
       </p:cxnSp>
-      <mc:AlternateContent xmlns:mc="http://schemas.openxmlformats.org/markup-compatibility/2006">
-        <mc:Choice xmlns:a14="http://schemas.microsoft.com/office/drawing/2010/main" Requires="a14">
+      <mc:AlternateContent xmlns:mc="http://schemas.openxmlformats.org/markup-compatibility/2006" xmlns:a14="http://schemas.microsoft.com/office/drawing/2010/main">
+        <mc:Choice Requires="a14">
           <p:sp>
             <p:nvSpPr>
               <p:cNvPr id="45" name="TextBox 44"/>
@@ -24176,7 +25184,7 @@
             </p:txBody>
           </p:sp>
         </mc:Choice>
-        <mc:Fallback>
+        <mc:Fallback xmlns="">
           <p:sp>
             <p:nvSpPr>
               <p:cNvPr id="45" name="TextBox 44"/>
@@ -24215,8 +25223,8 @@
           </p:sp>
         </mc:Fallback>
       </mc:AlternateContent>
-      <mc:AlternateContent xmlns:mc="http://schemas.openxmlformats.org/markup-compatibility/2006">
-        <mc:Choice xmlns:a14="http://schemas.microsoft.com/office/drawing/2010/main" Requires="a14">
+      <mc:AlternateContent xmlns:mc="http://schemas.openxmlformats.org/markup-compatibility/2006" xmlns:a14="http://schemas.microsoft.com/office/drawing/2010/main">
+        <mc:Choice Requires="a14">
           <p:sp>
             <p:nvSpPr>
               <p:cNvPr id="48" name="TextBox 47"/>
@@ -24304,7 +25312,7 @@
             </p:txBody>
           </p:sp>
         </mc:Choice>
-        <mc:Fallback>
+        <mc:Fallback xmlns="">
           <p:sp>
             <p:nvSpPr>
               <p:cNvPr id="48" name="TextBox 47"/>
@@ -24343,8 +25351,8 @@
           </p:sp>
         </mc:Fallback>
       </mc:AlternateContent>
-      <mc:AlternateContent xmlns:mc="http://schemas.openxmlformats.org/markup-compatibility/2006">
-        <mc:Choice xmlns:a14="http://schemas.microsoft.com/office/drawing/2010/main" Requires="a14">
+      <mc:AlternateContent xmlns:mc="http://schemas.openxmlformats.org/markup-compatibility/2006" xmlns:a14="http://schemas.microsoft.com/office/drawing/2010/main">
+        <mc:Choice Requires="a14">
           <p:sp>
             <p:nvSpPr>
               <p:cNvPr id="49" name="TextBox 48"/>
@@ -24432,7 +25440,7 @@
             </p:txBody>
           </p:sp>
         </mc:Choice>
-        <mc:Fallback>
+        <mc:Fallback xmlns="">
           <p:sp>
             <p:nvSpPr>
               <p:cNvPr id="49" name="TextBox 48"/>
@@ -24837,8 +25845,8 @@
           </a:fontRef>
         </p:style>
       </p:cxnSp>
-      <mc:AlternateContent xmlns:mc="http://schemas.openxmlformats.org/markup-compatibility/2006">
-        <mc:Choice xmlns:a14="http://schemas.microsoft.com/office/drawing/2010/main" Requires="a14">
+      <mc:AlternateContent xmlns:mc="http://schemas.openxmlformats.org/markup-compatibility/2006" xmlns:a14="http://schemas.microsoft.com/office/drawing/2010/main">
+        <mc:Choice Requires="a14">
           <p:sp>
             <p:nvSpPr>
               <p:cNvPr id="33" name="TextBox 32"/>
@@ -24926,7 +25934,7 @@
             </p:txBody>
           </p:sp>
         </mc:Choice>
-        <mc:Fallback>
+        <mc:Fallback xmlns="">
           <p:sp>
             <p:nvSpPr>
               <p:cNvPr id="33" name="TextBox 32"/>
@@ -24965,8 +25973,8 @@
           </p:sp>
         </mc:Fallback>
       </mc:AlternateContent>
-      <mc:AlternateContent xmlns:mc="http://schemas.openxmlformats.org/markup-compatibility/2006">
-        <mc:Choice xmlns:a14="http://schemas.microsoft.com/office/drawing/2010/main" Requires="a14">
+      <mc:AlternateContent xmlns:mc="http://schemas.openxmlformats.org/markup-compatibility/2006" xmlns:a14="http://schemas.microsoft.com/office/drawing/2010/main">
+        <mc:Choice Requires="a14">
           <p:sp>
             <p:nvSpPr>
               <p:cNvPr id="36" name="TextBox 35"/>
@@ -25054,7 +26062,7 @@
             </p:txBody>
           </p:sp>
         </mc:Choice>
-        <mc:Fallback>
+        <mc:Fallback xmlns="">
           <p:sp>
             <p:nvSpPr>
               <p:cNvPr id="36" name="TextBox 35"/>
@@ -25161,8 +26169,8 @@
           </a:fontRef>
         </p:style>
       </p:cxnSp>
-      <mc:AlternateContent xmlns:mc="http://schemas.openxmlformats.org/markup-compatibility/2006">
-        <mc:Choice xmlns:a14="http://schemas.microsoft.com/office/drawing/2010/main" Requires="a14">
+      <mc:AlternateContent xmlns:mc="http://schemas.openxmlformats.org/markup-compatibility/2006" xmlns:a14="http://schemas.microsoft.com/office/drawing/2010/main">
+        <mc:Choice Requires="a14">
           <p:sp>
             <p:nvSpPr>
               <p:cNvPr id="42" name="TextBox 41"/>
@@ -25250,7 +26258,7 @@
             </p:txBody>
           </p:sp>
         </mc:Choice>
-        <mc:Fallback>
+        <mc:Fallback xmlns="">
           <p:sp>
             <p:nvSpPr>
               <p:cNvPr id="42" name="TextBox 41"/>
@@ -25546,8 +26554,8 @@
           </a:fontRef>
         </p:style>
       </p:cxnSp>
-      <mc:AlternateContent xmlns:mc="http://schemas.openxmlformats.org/markup-compatibility/2006">
-        <mc:Choice xmlns:a14="http://schemas.microsoft.com/office/drawing/2010/main" Requires="a14">
+      <mc:AlternateContent xmlns:mc="http://schemas.openxmlformats.org/markup-compatibility/2006" xmlns:a14="http://schemas.microsoft.com/office/drawing/2010/main">
+        <mc:Choice Requires="a14">
           <p:sp>
             <p:nvSpPr>
               <p:cNvPr id="97" name="TextBox 96"/>
@@ -25628,7 +26636,7 @@
             </p:txBody>
           </p:sp>
         </mc:Choice>
-        <mc:Fallback>
+        <mc:Fallback xmlns="">
           <p:sp>
             <p:nvSpPr>
               <p:cNvPr id="97" name="TextBox 96"/>
@@ -25667,8 +26675,8 @@
           </p:sp>
         </mc:Fallback>
       </mc:AlternateContent>
-      <mc:AlternateContent xmlns:mc="http://schemas.openxmlformats.org/markup-compatibility/2006">
-        <mc:Choice xmlns:a14="http://schemas.microsoft.com/office/drawing/2010/main" Requires="a14">
+      <mc:AlternateContent xmlns:mc="http://schemas.openxmlformats.org/markup-compatibility/2006" xmlns:a14="http://schemas.microsoft.com/office/drawing/2010/main">
+        <mc:Choice Requires="a14">
           <p:sp>
             <p:nvSpPr>
               <p:cNvPr id="99" name="TextBox 98"/>
@@ -25749,7 +26757,7 @@
             </p:txBody>
           </p:sp>
         </mc:Choice>
-        <mc:Fallback>
+        <mc:Fallback xmlns="">
           <p:sp>
             <p:nvSpPr>
               <p:cNvPr id="99" name="TextBox 98"/>
@@ -25788,8 +26796,8 @@
           </p:sp>
         </mc:Fallback>
       </mc:AlternateContent>
-      <mc:AlternateContent xmlns:mc="http://schemas.openxmlformats.org/markup-compatibility/2006">
-        <mc:Choice xmlns:a14="http://schemas.microsoft.com/office/drawing/2010/main" Requires="a14">
+      <mc:AlternateContent xmlns:mc="http://schemas.openxmlformats.org/markup-compatibility/2006" xmlns:a14="http://schemas.microsoft.com/office/drawing/2010/main">
+        <mc:Choice Requires="a14">
           <p:sp>
             <p:nvSpPr>
               <p:cNvPr id="100" name="TextBox 99"/>
@@ -25870,7 +26878,7 @@
             </p:txBody>
           </p:sp>
         </mc:Choice>
-        <mc:Fallback>
+        <mc:Fallback xmlns="">
           <p:sp>
             <p:nvSpPr>
               <p:cNvPr id="100" name="TextBox 99"/>
